--- a/presentation/VERIFACT-Lite-TTU.pptx
+++ b/presentation/VERIFACT-Lite-TTU.pptx
@@ -125,7 +125,7 @@
   <p:extLst>
     <p:ext uri="{521415D9-36F7-43E2-AB2F-B90AF26B5E84}">
       <p14:sectionLst xmlns:p14="http://schemas.microsoft.com/office/powerpoint/2010/main">
-        <p14:section name="Talk" id="{4e5fb88f-4677-3b0a-7740-59439003136b}">
+        <p14:section name="Talk" id="{a71b4084-bc1c-c36a-676d-1ab0264dad6c}">
           <p14:sldIdLst>
             <p14:sldId id="256"/>
             <p14:sldId id="257"/>
@@ -144,7 +144,7 @@
             <p14:sldId id="270"/>
           </p14:sldIdLst>
         </p14:section>
-        <p14:section name="Appendix" id="{991f364b-0046-4d05-777f-c73915b41d9a}">
+        <p14:section name="Appendix" id="{e3824fcf-c566-2718-5d4d-63e6a1177ef3}">
           <p14:sldIdLst>
             <p14:sldId id="271"/>
             <p14:sldId id="272"/>
@@ -1253,7 +1253,7 @@
           <a:p>
             <a:r>
               <a:rPr lang="en-US" dirty="0"/>
-              <a:t>[1:00] Point at the Agreement column, not the numbers. The claim is that the mechanism behaves as described; the claim is explicitly not that the numbers match.</a:t>
+              <a:t>[0:55] Point at the Agreement column, not the numbers. The claim is that the mechanism behaves as described; the claim is explicitly not that the numbers match.</a:t>
             </a:r>
             <a:endParaRPr lang="en-US" dirty="0"/>
           </a:p>
@@ -1429,7 +1429,7 @@
           <a:p>
             <a:r>
               <a:rPr lang="en-US" dirty="0"/>
-              <a:t>[0:05] Leave this up for the questions. If asked to summarise, read point 3 — it is the finding that generalises beyond this paper.</a:t>
+              <a:t>[0:40] Close on points 3 and 4. Point 3 is the finding that generalises beyond this paper. Point 4 is where we corrected ourselves between versions of this talk, which is the honest thing to show. Leave the slide up for the questions.</a:t>
             </a:r>
             <a:endParaRPr lang="en-US" dirty="0"/>
           </a:p>
@@ -1869,7 +1869,7 @@
           <a:p>
             <a:r>
               <a:rPr lang="en-US" dirty="0"/>
-              <a:t>[1:20] This example is the whole paper. Verifying the stripped claim gives a meaningless verdict, because it is not what the answer said. Read the two fact lists side by side, then point at the three numbers: measured on human annotation, not anecdote.</a:t>
+              <a:t>[1:15] This example is the whole paper. Verifying the stripped claim gives a meaningless verdict, because it is not what the answer said. Read the two fact lists side by side, then point at the three numbers: measured on human annotation, not anecdote.</a:t>
             </a:r>
             <a:endParaRPr lang="en-US" dirty="0"/>
           </a:p>
@@ -1957,7 +1957,7 @@
           <a:p>
             <a:r>
               <a:rPr lang="en-US" dirty="0"/>
-              <a:t>[0:50] Three sentences on what the framework is, then the bottom strip: this is what the paper claims. Say explicitly that the bottom row is the paper's, not ours — the rest of the talk is about which of these behaviours survive on free hardware.</a:t>
+              <a:t>[0:45] Three sentences on what the framework is, then the bottom strip: this is what the paper claims. Say explicitly that the bottom row is the paper's, not ours — the rest of the talk is about which of these behaviours survive on free hardware.</a:t>
             </a:r>
             <a:endParaRPr lang="en-US" dirty="0"/>
           </a:p>
@@ -2133,7 +2133,7 @@
           <a:p>
             <a:r>
               <a:rPr lang="en-US" dirty="0"/>
-              <a:t>[1:00] Do not read the table. Say: every paid or large component has a free local stand-in, and the detection logic itself is unchanged. Then the bottom strip — twelve questions written to contain conditions, comparisons and event order, and an answer key written by hand before any run.</a:t>
+              <a:t>[0:55] Do not read the table. Say: every paid or large component has a free local stand-in, and the detection logic itself is unchanged. Then the bottom strip — twelve questions written to contain conditions, comparisons and event order, and an answer key written by hand before any run.</a:t>
             </a:r>
             <a:endParaRPr lang="en-US" dirty="0"/>
           </a:p>
@@ -2221,7 +2221,7 @@
           <a:p>
             <a:r>
               <a:rPr lang="en-US" dirty="0"/>
-              <a:t>[0:55] The key methodological point: the answer is generated once, so baseline and VERIFACT-Lite differ only in whether refinement runs. Read the recall definition out loud — it explains why recall never moves between variants.</a:t>
+              <a:t>[0:50] The key methodological point: the answer is generated once, so baseline and VERIFACT-Lite differ only in whether refinement runs. Read the recall definition out loud — it explains why recall never moves between variants.</a:t>
             </a:r>
             <a:endParaRPr lang="en-US" dirty="0"/>
           </a:p>
@@ -2397,7 +2397,7 @@
           <a:p>
             <a:r>
               <a:rPr lang="en-US" dirty="0"/>
-              <a:t>[0:50] Walk the table once, then read the three card headings only. Each half of the contribution moves its own metric, and the two compose.</a:t>
+              <a:t>[0:45] Walk the table once, then read the three card headings only. Each half of the contribution moves its own metric, and the two compose.</a:t>
             </a:r>
             <a:endParaRPr lang="en-US" dirty="0"/>
           </a:p>
@@ -16859,14 +16859,14 @@
       </p:grpSpPr>
       <p:sp>
         <p:nvSpPr>
-          <p:cNvPr id="2" name="ty"/>
+          <p:cNvPr id="2" name="eyebrow"/>
           <p:cNvSpPr txBox="1"/>
           <p:nvPr/>
         </p:nvSpPr>
         <p:spPr>
           <a:xfrm>
-            <a:off x="685800" y="1371600"/>
-            <a:ext cx="10789920" cy="1097280"/>
+            <a:off x="548640" y="128016"/>
+            <a:ext cx="11064240" cy="256032"/>
           </a:xfrm>
           <a:prstGeom prst="rect">
             <a:avLst/>
@@ -16882,29 +16882,134 @@
               <a:buNone/>
             </a:pPr>
             <a:r>
-              <a:rPr lang="en-US" sz="5400" b="1" dirty="0">
+              <a:rPr lang="en-US" sz="1100" b="1" spc="200" kern="0" dirty="0">
+                <a:solidFill>
+                  <a:srgbClr val="E90802"/>
+                </a:solidFill>
+                <a:latin typeface="Arial" pitchFamily="34" charset="0"/>
+                <a:ea typeface="Arial" pitchFamily="34" charset="-122"/>
+                <a:cs typeface="Arial" pitchFamily="34" charset="-120"/>
+              </a:rPr>
+              <a:t>TAKEAWAYS</a:t>
+            </a:r>
+            <a:endParaRPr lang="en-US" sz="1100" dirty="0"/>
+          </a:p>
+        </p:txBody>
+      </p:sp>
+      <p:sp>
+        <p:nvSpPr>
+          <p:cNvPr id="3" name="title"/>
+          <p:cNvSpPr txBox="1"/>
+          <p:nvPr/>
+        </p:nvSpPr>
+        <p:spPr>
+          <a:xfrm>
+            <a:off x="548640" y="420624"/>
+            <a:ext cx="11064240" cy="658368"/>
+          </a:xfrm>
+          <a:prstGeom prst="rect">
+            <a:avLst/>
+          </a:prstGeom>
+          <a:noFill/>
+          <a:ln/>
+        </p:spPr>
+        <p:txBody>
+          <a:bodyPr wrap="square" lIns="0" tIns="0" rIns="0" bIns="0" rtlCol="0" anchor="ctr"/>
+          <a:lstStyle/>
+          <a:p>
+            <a:pPr indent="0" marL="0">
+              <a:buNone/>
+            </a:pPr>
+            <a:r>
+              <a:rPr lang="en-US" sz="3000" b="1" dirty="0">
                 <a:solidFill>
                   <a:srgbClr val="FFFFFF"/>
                 </a:solidFill>
               </a:rPr>
-              <a:t>THANK YOU</a:t>
+              <a:t>Four things this reimplementation establishes</a:t>
             </a:r>
-            <a:endParaRPr lang="en-US" sz="5400" dirty="0"/>
+            <a:endParaRPr lang="en-US" sz="3000" dirty="0"/>
           </a:p>
         </p:txBody>
       </p:sp>
       <p:sp>
         <p:nvSpPr>
-          <p:cNvPr id="3" name="ty-rule"/>
+          <p:cNvPr id="4" name="subtitle"/>
+          <p:cNvSpPr txBox="1"/>
+          <p:nvPr/>
+        </p:nvSpPr>
+        <p:spPr>
+          <a:xfrm>
+            <a:off x="548640" y="1042416"/>
+            <a:ext cx="11064240" cy="292608"/>
+          </a:xfrm>
+          <a:prstGeom prst="rect">
+            <a:avLst/>
+          </a:prstGeom>
+          <a:noFill/>
+          <a:ln/>
+        </p:spPr>
+        <p:txBody>
+          <a:bodyPr wrap="square" lIns="0" tIns="0" rIns="0" bIns="0" rtlCol="0" anchor="ctr"/>
+          <a:lstStyle/>
+          <a:p>
+            <a:pPr indent="0" marL="0">
+              <a:buNone/>
+            </a:pPr>
+            <a:r>
+              <a:rPr lang="en-US" sz="1500" dirty="0">
+                <a:solidFill>
+                  <a:srgbClr val="EDEDED"/>
+                </a:solidFill>
+                <a:latin typeface="Arial" pitchFamily="34" charset="0"/>
+                <a:ea typeface="Arial" pitchFamily="34" charset="-122"/>
+                <a:cs typeface="Arial" pitchFamily="34" charset="-120"/>
+              </a:rPr>
+              <a:t>Measured by the repository, on 12 questions and three model configurations</a:t>
+            </a:r>
+            <a:endParaRPr lang="en-US" sz="1500" dirty="0"/>
+          </a:p>
+        </p:txBody>
+      </p:sp>
+      <p:sp>
+        <p:nvSpPr>
+          <p:cNvPr id="5" name="tk1"/>
           <p:cNvSpPr/>
           <p:nvPr/>
         </p:nvSpPr>
         <p:spPr>
           <a:xfrm>
-            <a:off x="713232" y="2560320"/>
-            <a:ext cx="2011680" cy="73152"/>
-          </a:xfrm>
-          <a:prstGeom prst="rect">
+            <a:off x="548640" y="1481328"/>
+            <a:ext cx="11064240" cy="969264"/>
+          </a:xfrm>
+          <a:prstGeom prst="roundRect">
+            <a:avLst>
+              <a:gd name="adj" fmla="val 5660"/>
+            </a:avLst>
+          </a:prstGeom>
+          <a:solidFill>
+            <a:srgbClr val="333333"/>
+          </a:solidFill>
+          <a:ln w="12700">
+            <a:solidFill>
+              <a:srgbClr val="333333"/>
+            </a:solidFill>
+            <a:prstDash val="solid"/>
+          </a:ln>
+        </p:spPr>
+      </p:sp>
+      <p:sp>
+        <p:nvSpPr>
+          <p:cNvPr id="6" name="tk-b1"/>
+          <p:cNvSpPr/>
+          <p:nvPr/>
+        </p:nvSpPr>
+        <p:spPr>
+          <a:xfrm>
+            <a:off x="777240" y="1737360"/>
+            <a:ext cx="457200" cy="457200"/>
+          </a:xfrm>
+          <a:prstGeom prst="ellipse">
             <a:avLst/>
           </a:prstGeom>
           <a:solidFill>
@@ -16920,14 +17025,119 @@
       </p:sp>
       <p:sp>
         <p:nvSpPr>
-          <p:cNvPr id="4" name="ty-b1"/>
+          <p:cNvPr id="7" name="tk-n1"/>
+          <p:cNvSpPr txBox="1"/>
+          <p:nvPr/>
+        </p:nvSpPr>
+        <p:spPr>
+          <a:xfrm>
+            <a:off x="777240" y="1737360"/>
+            <a:ext cx="457200" cy="457200"/>
+          </a:xfrm>
+          <a:prstGeom prst="rect">
+            <a:avLst/>
+          </a:prstGeom>
+          <a:noFill/>
+          <a:ln/>
+        </p:spPr>
+        <p:txBody>
+          <a:bodyPr wrap="square" lIns="0" tIns="0" rIns="0" bIns="0" rtlCol="0" anchor="ctr"/>
+          <a:lstStyle/>
+          <a:p>
+            <a:pPr algn="ctr" indent="0" marL="0">
+              <a:buNone/>
+            </a:pPr>
+            <a:r>
+              <a:rPr lang="en-US" sz="1600" b="1" dirty="0">
+                <a:solidFill>
+                  <a:srgbClr val="FFFFFF"/>
+                </a:solidFill>
+              </a:rPr>
+              <a:t>1</a:t>
+            </a:r>
+            <a:endParaRPr lang="en-US" sz="1600" dirty="0"/>
+          </a:p>
+        </p:txBody>
+      </p:sp>
+      <p:sp>
+        <p:nvSpPr>
+          <p:cNvPr id="8" name="tk-t1"/>
+          <p:cNvSpPr txBox="1"/>
+          <p:nvPr/>
+        </p:nvSpPr>
+        <p:spPr>
+          <a:xfrm>
+            <a:off x="1417320" y="1572768"/>
+            <a:ext cx="9966960" cy="786384"/>
+          </a:xfrm>
+          <a:prstGeom prst="rect">
+            <a:avLst/>
+          </a:prstGeom>
+          <a:noFill/>
+          <a:ln/>
+        </p:spPr>
+        <p:txBody>
+          <a:bodyPr wrap="square" lIns="0" tIns="0" rIns="0" bIns="0" rtlCol="0" anchor="ctr"/>
+          <a:lstStyle/>
+          <a:p>
+            <a:pPr indent="0" marL="0">
+              <a:lnSpc>
+                <a:spcPct val="115000"/>
+              </a:lnSpc>
+              <a:buNone/>
+            </a:pPr>
+            <a:r>
+              <a:rPr lang="en-US" sz="1300" dirty="0">
+                <a:solidFill>
+                  <a:srgbClr val="EDEDED"/>
+                </a:solidFill>
+                <a:latin typeface="Arial" pitchFamily="34" charset="0"/>
+                <a:ea typeface="Arial" pitchFamily="34" charset="-122"/>
+                <a:cs typeface="Arial" pitchFamily="34" charset="-120"/>
+              </a:rPr>
+              <a:t>The whole VeriFact pipeline runs on a 4 GB consumer GPU with quantized 3B models, free Wikipedia evidence and no API key — and scales to 7–8B on a free T4.</a:t>
+            </a:r>
+            <a:endParaRPr lang="en-US" sz="1300" dirty="0"/>
+          </a:p>
+        </p:txBody>
+      </p:sp>
+      <p:sp>
+        <p:nvSpPr>
+          <p:cNvPr id="9" name="tk2"/>
           <p:cNvSpPr/>
           <p:nvPr/>
         </p:nvSpPr>
         <p:spPr>
           <a:xfrm>
-            <a:off x="713232" y="3145536"/>
-            <a:ext cx="402336" cy="402336"/>
+            <a:off x="548640" y="2596896"/>
+            <a:ext cx="11064240" cy="969264"/>
+          </a:xfrm>
+          <a:prstGeom prst="roundRect">
+            <a:avLst>
+              <a:gd name="adj" fmla="val 5660"/>
+            </a:avLst>
+          </a:prstGeom>
+          <a:solidFill>
+            <a:srgbClr val="333333"/>
+          </a:solidFill>
+          <a:ln w="12700">
+            <a:solidFill>
+              <a:srgbClr val="333333"/>
+            </a:solidFill>
+            <a:prstDash val="solid"/>
+          </a:ln>
+        </p:spPr>
+      </p:sp>
+      <p:sp>
+        <p:nvSpPr>
+          <p:cNvPr id="10" name="tk-b2"/>
+          <p:cNvSpPr/>
+          <p:nvPr/>
+        </p:nvSpPr>
+        <p:spPr>
+          <a:xfrm>
+            <a:off x="777240" y="2852928"/>
+            <a:ext cx="457200" cy="457200"/>
           </a:xfrm>
           <a:prstGeom prst="ellipse">
             <a:avLst/>
@@ -16945,14 +17155,14 @@
       </p:sp>
       <p:sp>
         <p:nvSpPr>
-          <p:cNvPr id="5" name="ty-n1"/>
+          <p:cNvPr id="11" name="tk-n2"/>
           <p:cNvSpPr txBox="1"/>
           <p:nvPr/>
         </p:nvSpPr>
         <p:spPr>
           <a:xfrm>
-            <a:off x="713232" y="3145536"/>
-            <a:ext cx="402336" cy="402336"/>
+            <a:off x="777240" y="2852928"/>
+            <a:ext cx="457200" cy="457200"/>
           </a:xfrm>
           <a:prstGeom prst="rect">
             <a:avLst/>
@@ -16968,27 +17178,27 @@
               <a:buNone/>
             </a:pPr>
             <a:r>
-              <a:rPr lang="en-US" sz="1500" b="1" dirty="0">
+              <a:rPr lang="en-US" sz="1600" b="1" dirty="0">
                 <a:solidFill>
                   <a:srgbClr val="FFFFFF"/>
                 </a:solidFill>
               </a:rPr>
-              <a:t>1</a:t>
+              <a:t>2</a:t>
             </a:r>
-            <a:endParaRPr lang="en-US" sz="1500" dirty="0"/>
+            <a:endParaRPr lang="en-US" sz="1600" dirty="0"/>
           </a:p>
         </p:txBody>
       </p:sp>
       <p:sp>
         <p:nvSpPr>
-          <p:cNvPr id="6" name="ty-t1"/>
+          <p:cNvPr id="12" name="tk-t2"/>
           <p:cNvSpPr txBox="1"/>
           <p:nvPr/>
         </p:nvSpPr>
         <p:spPr>
           <a:xfrm>
-            <a:off x="1325880" y="3063240"/>
-            <a:ext cx="10149840" cy="566928"/>
+            <a:off x="1417320" y="2688336"/>
+            <a:ext cx="9966960" cy="786384"/>
           </a:xfrm>
           <a:prstGeom prst="rect">
             <a:avLst/>
@@ -17007,7 +17217,7 @@
               <a:buNone/>
             </a:pPr>
             <a:r>
-              <a:rPr lang="en-US" sz="1400" dirty="0">
+              <a:rPr lang="en-US" sz="1300" dirty="0">
                 <a:solidFill>
                   <a:srgbClr val="EDEDED"/>
                 </a:solidFill>
@@ -17015,22 +17225,49 @@
                 <a:ea typeface="Arial" pitchFamily="34" charset="-122"/>
                 <a:cs typeface="Arial" pitchFamily="34" charset="-120"/>
               </a:rPr>
-              <a:t>The whole pipeline runs on a 4 GB consumer GPU and a free T4 — no API key, $0 total cost.</a:t>
+              <a:t>Refinement changed the verdict on 39–46% of refined facts across three model configurations, against 24.9% in the paper. The phenomenon is robust to model size.</a:t>
             </a:r>
-            <a:endParaRPr lang="en-US" sz="1400" dirty="0"/>
+            <a:endParaRPr lang="en-US" sz="1300" dirty="0"/>
           </a:p>
         </p:txBody>
       </p:sp>
       <p:sp>
         <p:nvSpPr>
-          <p:cNvPr id="7" name="ty-b2"/>
+          <p:cNvPr id="13" name="tk3"/>
           <p:cNvSpPr/>
           <p:nvPr/>
         </p:nvSpPr>
         <p:spPr>
           <a:xfrm>
-            <a:off x="713232" y="3913632"/>
-            <a:ext cx="402336" cy="402336"/>
+            <a:off x="548640" y="3712464"/>
+            <a:ext cx="11064240" cy="969264"/>
+          </a:xfrm>
+          <a:prstGeom prst="roundRect">
+            <a:avLst>
+              <a:gd name="adj" fmla="val 5660"/>
+            </a:avLst>
+          </a:prstGeom>
+          <a:solidFill>
+            <a:srgbClr val="333333"/>
+          </a:solidFill>
+          <a:ln w="12700">
+            <a:solidFill>
+              <a:srgbClr val="333333"/>
+            </a:solidFill>
+            <a:prstDash val="solid"/>
+          </a:ln>
+        </p:spPr>
+      </p:sp>
+      <p:sp>
+        <p:nvSpPr>
+          <p:cNvPr id="14" name="tk-b3"/>
+          <p:cNvSpPr/>
+          <p:nvPr/>
+        </p:nvSpPr>
+        <p:spPr>
+          <a:xfrm>
+            <a:off x="777240" y="3968496"/>
+            <a:ext cx="457200" cy="457200"/>
           </a:xfrm>
           <a:prstGeom prst="ellipse">
             <a:avLst/>
@@ -17048,14 +17285,14 @@
       </p:sp>
       <p:sp>
         <p:nvSpPr>
-          <p:cNvPr id="8" name="ty-n2"/>
+          <p:cNvPr id="15" name="tk-n3"/>
           <p:cNvSpPr txBox="1"/>
           <p:nvPr/>
         </p:nvSpPr>
         <p:spPr>
           <a:xfrm>
-            <a:off x="713232" y="3913632"/>
-            <a:ext cx="402336" cy="402336"/>
+            <a:off x="777240" y="3968496"/>
+            <a:ext cx="457200" cy="457200"/>
           </a:xfrm>
           <a:prstGeom prst="rect">
             <a:avLst/>
@@ -17071,27 +17308,27 @@
               <a:buNone/>
             </a:pPr>
             <a:r>
-              <a:rPr lang="en-US" sz="1500" b="1" dirty="0">
+              <a:rPr lang="en-US" sz="1600" b="1" dirty="0">
                 <a:solidFill>
                   <a:srgbClr val="FFFFFF"/>
                 </a:solidFill>
               </a:rPr>
-              <a:t>2</a:t>
+              <a:t>3</a:t>
             </a:r>
-            <a:endParaRPr lang="en-US" sz="1500" dirty="0"/>
+            <a:endParaRPr lang="en-US" sz="1600" dirty="0"/>
           </a:p>
         </p:txBody>
       </p:sp>
       <p:sp>
         <p:nvSpPr>
-          <p:cNvPr id="9" name="ty-t2"/>
+          <p:cNvPr id="16" name="tk-t3"/>
           <p:cNvSpPr txBox="1"/>
           <p:nvPr/>
         </p:nvSpPr>
         <p:spPr>
           <a:xfrm>
-            <a:off x="1325880" y="3831336"/>
-            <a:ext cx="10149840" cy="566928"/>
+            <a:off x="1417320" y="3803904"/>
+            <a:ext cx="9966960" cy="786384"/>
           </a:xfrm>
           <a:prstGeom prst="rect">
             <a:avLst/>
@@ -17110,7 +17347,7 @@
               <a:buNone/>
             </a:pPr>
             <a:r>
-              <a:rPr lang="en-US" sz="1400" dirty="0">
+              <a:rPr lang="en-US" sz="1300" dirty="0">
                 <a:solidFill>
                   <a:srgbClr val="EDEDED"/>
                 </a:solidFill>
@@ -17118,22 +17355,49 @@
                 <a:ea typeface="Arial" pitchFamily="34" charset="-122"/>
                 <a:cs typeface="Arial" pitchFamily="34" charset="-120"/>
               </a:rPr>
-              <a:t>Refinement changed the verdict on 39–46% of refined facts in every configuration, against 24.9% in the paper.</a:t>
+              <a:t>These metrics measure the judge as much as the system: identical facts score 0.105 incomplete at 3B and 0.438 at 7B; identical answers score 0.41 recall at 3B and 0.28 at 7B.</a:t>
             </a:r>
-            <a:endParaRPr lang="en-US" sz="1400" dirty="0"/>
+            <a:endParaRPr lang="en-US" sz="1300" dirty="0"/>
           </a:p>
         </p:txBody>
       </p:sp>
       <p:sp>
         <p:nvSpPr>
-          <p:cNvPr id="10" name="ty-b3"/>
+          <p:cNvPr id="17" name="tk4"/>
           <p:cNvSpPr/>
           <p:nvPr/>
         </p:nvSpPr>
         <p:spPr>
           <a:xfrm>
-            <a:off x="713232" y="4681728"/>
-            <a:ext cx="402336" cy="402336"/>
+            <a:off x="548640" y="4828032"/>
+            <a:ext cx="11064240" cy="969264"/>
+          </a:xfrm>
+          <a:prstGeom prst="roundRect">
+            <a:avLst>
+              <a:gd name="adj" fmla="val 5660"/>
+            </a:avLst>
+          </a:prstGeom>
+          <a:solidFill>
+            <a:srgbClr val="333333"/>
+          </a:solidFill>
+          <a:ln w="19050">
+            <a:solidFill>
+              <a:srgbClr val="E90802"/>
+            </a:solidFill>
+            <a:prstDash val="solid"/>
+          </a:ln>
+        </p:spPr>
+      </p:sp>
+      <p:sp>
+        <p:nvSpPr>
+          <p:cNvPr id="18" name="tk-b4"/>
+          <p:cNvSpPr/>
+          <p:nvPr/>
+        </p:nvSpPr>
+        <p:spPr>
+          <a:xfrm>
+            <a:off x="777240" y="5084064"/>
+            <a:ext cx="457200" cy="457200"/>
           </a:xfrm>
           <a:prstGeom prst="ellipse">
             <a:avLst/>
@@ -17151,14 +17415,14 @@
       </p:sp>
       <p:sp>
         <p:nvSpPr>
-          <p:cNvPr id="11" name="ty-n3"/>
+          <p:cNvPr id="19" name="tk-n4"/>
           <p:cNvSpPr txBox="1"/>
           <p:nvPr/>
         </p:nvSpPr>
         <p:spPr>
           <a:xfrm>
-            <a:off x="713232" y="4681728"/>
-            <a:ext cx="402336" cy="402336"/>
+            <a:off x="777240" y="5084064"/>
+            <a:ext cx="457200" cy="457200"/>
           </a:xfrm>
           <a:prstGeom prst="rect">
             <a:avLst/>
@@ -17174,27 +17438,27 @@
               <a:buNone/>
             </a:pPr>
             <a:r>
-              <a:rPr lang="en-US" sz="1500" b="1" dirty="0">
+              <a:rPr lang="en-US" sz="1600" b="1" dirty="0">
                 <a:solidFill>
                   <a:srgbClr val="FFFFFF"/>
                 </a:solidFill>
               </a:rPr>
-              <a:t>3</a:t>
+              <a:t>4</a:t>
             </a:r>
-            <a:endParaRPr lang="en-US" sz="1500" dirty="0"/>
+            <a:endParaRPr lang="en-US" sz="1600" dirty="0"/>
           </a:p>
         </p:txBody>
       </p:sp>
       <p:sp>
         <p:nvSpPr>
-          <p:cNvPr id="12" name="ty-t3"/>
+          <p:cNvPr id="20" name="tk-t4"/>
           <p:cNvSpPr txBox="1"/>
           <p:nvPr/>
         </p:nvSpPr>
         <p:spPr>
           <a:xfrm>
-            <a:off x="1325880" y="4599432"/>
-            <a:ext cx="10149840" cy="566928"/>
+            <a:off x="1417320" y="4919472"/>
+            <a:ext cx="9966960" cy="786384"/>
           </a:xfrm>
           <a:prstGeom prst="rect">
             <a:avLst/>
@@ -17213,7 +17477,7 @@
               <a:buNone/>
             </a:pPr>
             <a:r>
-              <a:rPr lang="en-US" sz="1400" dirty="0">
+              <a:rPr lang="en-US" sz="1300" dirty="0">
                 <a:solidFill>
                   <a:srgbClr val="EDEDED"/>
                 </a:solidFill>
@@ -17221,15 +17485,15 @@
                 <a:ea typeface="Arial" pitchFamily="34" charset="-122"/>
                 <a:cs typeface="Arial" pitchFamily="34" charset="-120"/>
               </a:rPr>
-              <a:t>These metrics measure the judge as much as the system: the same facts score 0.105 incomplete at 3B and 0.438 at 7B.</a:t>
+              <a:t>Majority vote beat the paper's union rule on precision in every configuration — but the large incomplete-rate advantage we first reported was a 3B artifact, and we say so.</a:t>
             </a:r>
-            <a:endParaRPr lang="en-US" sz="1400" dirty="0"/>
+            <a:endParaRPr lang="en-US" sz="1300" dirty="0"/>
           </a:p>
         </p:txBody>
       </p:sp>
       <p:sp>
         <p:nvSpPr>
-          <p:cNvPr id="13" name="note"/>
+          <p:cNvPr id="21" name="note"/>
           <p:cNvSpPr txBox="1"/>
           <p:nvPr/>
         </p:nvSpPr>

--- a/presentation/VERIFACT-Lite-TTU.pptx
+++ b/presentation/VERIFACT-Lite-TTU.pptx
@@ -21,12 +21,9 @@
     <p:sldId id="269" r:id="rId15"/>
     <p:sldId id="270" r:id="rId16"/>
     <p:sldId id="271" r:id="rId17"/>
-    <p:sldId id="272" r:id="rId18"/>
-    <p:sldId id="273" r:id="rId19"/>
-    <p:sldId id="274" r:id="rId20"/>
   </p:sldIdLst>
   <p:notesMasterIdLst>
-    <p:notesMasterId r:id="rId21"/>
+    <p:notesMasterId r:id="rId18"/>
   </p:notesMasterIdLst>
   <p:sldSz cx="12192000" cy="6858000"/>
   <p:notesSz cx="6858000" cy="12192000"/>
@@ -125,7 +122,7 @@
   <p:extLst>
     <p:ext uri="{521415D9-36F7-43E2-AB2F-B90AF26B5E84}">
       <p14:sectionLst xmlns:p14="http://schemas.microsoft.com/office/powerpoint/2010/main">
-        <p14:section name="Talk" id="{04b6b7c8-648c-08b8-e980-49519a0d1d51}">
+        <p14:section name="Talk" id="{812554c9-9b4e-7407-0140-df5e1e4590fc}">
           <p14:sldIdLst>
             <p14:sldId id="256"/>
             <p14:sldId id="257"/>
@@ -144,12 +141,9 @@
             <p14:sldId id="270"/>
           </p14:sldIdLst>
         </p14:section>
-        <p14:section name="Appendix" id="{e6a5150b-742e-ea1b-3814-6437140a1a06}">
+        <p14:section name="Backup" id="{638b93d3-0bd5-2e97-008c-7cf1980f3fd9}">
           <p14:sldIdLst>
             <p14:sldId id="271"/>
-            <p14:sldId id="272"/>
-            <p14:sldId id="273"/>
-            <p14:sldId id="274"/>
           </p14:sldIdLst>
         </p14:section>
       </p14:sectionLst>
@@ -1517,7 +1511,7 @@
           <a:p>
             <a:r>
               <a:rPr lang="en-US" dirty="0"/>
-              <a:t>Appendix. Use if asked how missing relations are found.</a:t>
+              <a:t>Backup. Not part of the 15 minutes.</a:t>
             </a:r>
             <a:endParaRPr lang="en-US" dirty="0"/>
           </a:p>
@@ -1541,270 +1535,6 @@
             <a:fld id="{F7021451-1387-4CA6-816F-3879F97B5CBC}" type="slidenum">
               <a:rPr lang="en-US"/>
               <a:t>16</a:t>
-            </a:fld>
-            <a:endParaRPr lang="en-US"/>
-          </a:p>
-        </p:txBody>
-      </p:sp>
-    </p:spTree>
-    <p:extLst>
-      <p:ext uri="{BB962C8B-B14F-4D97-AF65-F5344CB8AC3E}">
-        <p14:creationId xmlns:p14="http://schemas.microsoft.com/office/powerpoint/2010/main" val="1024086991"/>
-      </p:ext>
-    </p:extLst>
-  </p:cSld>
-  <p:clrMapOvr>
-    <a:masterClrMapping/>
-  </p:clrMapOvr>
-</p:notes>
-</file>
-
-<file path=ppt/notesSlides/notesSlide17.xml><?xml version="1.0" encoding="utf-8"?>
-<p:notes xmlns:a="http://schemas.openxmlformats.org/drawingml/2006/main" xmlns:r="http://schemas.openxmlformats.org/officeDocument/2006/relationships" xmlns:p="http://schemas.openxmlformats.org/presentationml/2006/main">
-  <p:cSld>
-    <p:spTree>
-      <p:nvGrpSpPr>
-        <p:cNvPr id="1" name=""/>
-        <p:cNvGrpSpPr/>
-        <p:nvPr/>
-      </p:nvGrpSpPr>
-      <p:grpSpPr>
-        <a:xfrm>
-          <a:off x="0" y="0"/>
-          <a:ext cx="0" cy="0"/>
-          <a:chOff x="0" y="0"/>
-          <a:chExt cx="0" cy="0"/>
-        </a:xfrm>
-      </p:grpSpPr>
-      <p:sp>
-        <p:nvSpPr>
-          <p:cNvPr id="2" name="Slide Image Placeholder 1"/>
-          <p:cNvSpPr>
-            <a:spLocks noGrp="1" noRot="1" noChangeAspect="1"/>
-          </p:cNvSpPr>
-          <p:nvPr>
-            <p:ph type="sldImg"/>
-          </p:nvPr>
-        </p:nvSpPr>
-        <p:spPr/>
-      </p:sp>
-      <p:sp>
-        <p:nvSpPr>
-          <p:cNvPr id="3" name="Notes Placeholder 2"/>
-          <p:cNvSpPr>
-            <a:spLocks noGrp="1"/>
-          </p:cNvSpPr>
-          <p:nvPr>
-            <p:ph type="body" idx="1"/>
-          </p:nvPr>
-        </p:nvSpPr>
-        <p:spPr/>
-        <p:txBody>
-          <a:bodyPr/>
-          <a:lstStyle/>
-          <a:p>
-            <a:r>
-              <a:rPr lang="en-US" dirty="0"/>
-              <a:t>Appendix. Use if asked what the refiner actually writes, or why a stronger model was the first thing tested.</a:t>
-            </a:r>
-            <a:endParaRPr lang="en-US" dirty="0"/>
-          </a:p>
-        </p:txBody>
-      </p:sp>
-      <p:sp>
-        <p:nvSpPr>
-          <p:cNvPr id="4" name="Slide Number Placeholder 3"/>
-          <p:cNvSpPr>
-            <a:spLocks noGrp="1"/>
-          </p:cNvSpPr>
-          <p:nvPr>
-            <p:ph type="sldNum" sz="quarter" idx="10"/>
-          </p:nvPr>
-        </p:nvSpPr>
-        <p:spPr/>
-        <p:txBody>
-          <a:bodyPr/>
-          <a:lstStyle/>
-          <a:p>
-            <a:fld id="{F7021451-1387-4CA6-816F-3879F97B5CBC}" type="slidenum">
-              <a:rPr lang="en-US"/>
-              <a:t>17</a:t>
-            </a:fld>
-            <a:endParaRPr lang="en-US"/>
-          </a:p>
-        </p:txBody>
-      </p:sp>
-    </p:spTree>
-    <p:extLst>
-      <p:ext uri="{BB962C8B-B14F-4D97-AF65-F5344CB8AC3E}">
-        <p14:creationId xmlns:p14="http://schemas.microsoft.com/office/powerpoint/2010/main" val="1024086991"/>
-      </p:ext>
-    </p:extLst>
-  </p:cSld>
-  <p:clrMapOvr>
-    <a:masterClrMapping/>
-  </p:clrMapOvr>
-</p:notes>
-</file>
-
-<file path=ppt/notesSlides/notesSlide18.xml><?xml version="1.0" encoding="utf-8"?>
-<p:notes xmlns:a="http://schemas.openxmlformats.org/drawingml/2006/main" xmlns:r="http://schemas.openxmlformats.org/officeDocument/2006/relationships" xmlns:p="http://schemas.openxmlformats.org/presentationml/2006/main">
-  <p:cSld>
-    <p:spTree>
-      <p:nvGrpSpPr>
-        <p:cNvPr id="1" name=""/>
-        <p:cNvGrpSpPr/>
-        <p:nvPr/>
-      </p:nvGrpSpPr>
-      <p:grpSpPr>
-        <a:xfrm>
-          <a:off x="0" y="0"/>
-          <a:ext cx="0" cy="0"/>
-          <a:chOff x="0" y="0"/>
-          <a:chExt cx="0" cy="0"/>
-        </a:xfrm>
-      </p:grpSpPr>
-      <p:sp>
-        <p:nvSpPr>
-          <p:cNvPr id="2" name="Slide Image Placeholder 1"/>
-          <p:cNvSpPr>
-            <a:spLocks noGrp="1" noRot="1" noChangeAspect="1"/>
-          </p:cNvSpPr>
-          <p:nvPr>
-            <p:ph type="sldImg"/>
-          </p:nvPr>
-        </p:nvSpPr>
-        <p:spPr/>
-      </p:sp>
-      <p:sp>
-        <p:nvSpPr>
-          <p:cNvPr id="3" name="Notes Placeholder 2"/>
-          <p:cNvSpPr>
-            <a:spLocks noGrp="1"/>
-          </p:cNvSpPr>
-          <p:nvPr>
-            <p:ph type="body" idx="1"/>
-          </p:nvPr>
-        </p:nvSpPr>
-        <p:spPr/>
-        <p:txBody>
-          <a:bodyPr/>
-          <a:lstStyle/>
-          <a:p>
-            <a:r>
-              <a:rPr lang="en-US" dirty="0"/>
-              <a:t>Appendix. Use if asked what else you would do.</a:t>
-            </a:r>
-            <a:endParaRPr lang="en-US" dirty="0"/>
-          </a:p>
-        </p:txBody>
-      </p:sp>
-      <p:sp>
-        <p:nvSpPr>
-          <p:cNvPr id="4" name="Slide Number Placeholder 3"/>
-          <p:cNvSpPr>
-            <a:spLocks noGrp="1"/>
-          </p:cNvSpPr>
-          <p:nvPr>
-            <p:ph type="sldNum" sz="quarter" idx="10"/>
-          </p:nvPr>
-        </p:nvSpPr>
-        <p:spPr/>
-        <p:txBody>
-          <a:bodyPr/>
-          <a:lstStyle/>
-          <a:p>
-            <a:fld id="{F7021451-1387-4CA6-816F-3879F97B5CBC}" type="slidenum">
-              <a:rPr lang="en-US"/>
-              <a:t>18</a:t>
-            </a:fld>
-            <a:endParaRPr lang="en-US"/>
-          </a:p>
-        </p:txBody>
-      </p:sp>
-    </p:spTree>
-    <p:extLst>
-      <p:ext uri="{BB962C8B-B14F-4D97-AF65-F5344CB8AC3E}">
-        <p14:creationId xmlns:p14="http://schemas.microsoft.com/office/powerpoint/2010/main" val="1024086991"/>
-      </p:ext>
-    </p:extLst>
-  </p:cSld>
-  <p:clrMapOvr>
-    <a:masterClrMapping/>
-  </p:clrMapOvr>
-</p:notes>
-</file>
-
-<file path=ppt/notesSlides/notesSlide19.xml><?xml version="1.0" encoding="utf-8"?>
-<p:notes xmlns:a="http://schemas.openxmlformats.org/drawingml/2006/main" xmlns:r="http://schemas.openxmlformats.org/officeDocument/2006/relationships" xmlns:p="http://schemas.openxmlformats.org/presentationml/2006/main">
-  <p:cSld>
-    <p:spTree>
-      <p:nvGrpSpPr>
-        <p:cNvPr id="1" name=""/>
-        <p:cNvGrpSpPr/>
-        <p:nvPr/>
-      </p:nvGrpSpPr>
-      <p:grpSpPr>
-        <a:xfrm>
-          <a:off x="0" y="0"/>
-          <a:ext cx="0" cy="0"/>
-          <a:chOff x="0" y="0"/>
-          <a:chExt cx="0" cy="0"/>
-        </a:xfrm>
-      </p:grpSpPr>
-      <p:sp>
-        <p:nvSpPr>
-          <p:cNvPr id="2" name="Slide Image Placeholder 1"/>
-          <p:cNvSpPr>
-            <a:spLocks noGrp="1" noRot="1" noChangeAspect="1"/>
-          </p:cNvSpPr>
-          <p:nvPr>
-            <p:ph type="sldImg"/>
-          </p:nvPr>
-        </p:nvSpPr>
-        <p:spPr/>
-      </p:sp>
-      <p:sp>
-        <p:nvSpPr>
-          <p:cNvPr id="3" name="Notes Placeholder 2"/>
-          <p:cNvSpPr>
-            <a:spLocks noGrp="1"/>
-          </p:cNvSpPr>
-          <p:nvPr>
-            <p:ph type="body" idx="1"/>
-          </p:nvPr>
-        </p:nvSpPr>
-        <p:spPr/>
-        <p:txBody>
-          <a:bodyPr/>
-          <a:lstStyle/>
-          <a:p>
-            <a:r>
-              <a:rPr lang="en-US" dirty="0"/>
-              <a:t>Appendix. Use if asked about run B or about engineering problems.</a:t>
-            </a:r>
-            <a:endParaRPr lang="en-US" dirty="0"/>
-          </a:p>
-        </p:txBody>
-      </p:sp>
-      <p:sp>
-        <p:nvSpPr>
-          <p:cNvPr id="4" name="Slide Number Placeholder 3"/>
-          <p:cNvSpPr>
-            <a:spLocks noGrp="1"/>
-          </p:cNvSpPr>
-          <p:nvPr>
-            <p:ph type="sldNum" sz="quarter" idx="10"/>
-          </p:nvPr>
-        </p:nvSpPr>
-        <p:spPr/>
-        <p:txBody>
-          <a:bodyPr/>
-          <a:lstStyle/>
-          <a:p>
-            <a:fld id="{F7021451-1387-4CA6-816F-3879F97B5CBC}" type="slidenum">
-              <a:rPr lang="en-US"/>
-              <a:t>19</a:t>
             </a:fld>
             <a:endParaRPr lang="en-US"/>
           </a:p>
@@ -3148,14 +2878,53 @@
       </p:sp>
       <p:sp>
         <p:nvSpPr>
-          <p:cNvPr id="6" name="cover-by"/>
+          <p:cNvPr id="6" name="cover-by-label"/>
           <p:cNvSpPr txBox="1"/>
           <p:nvPr/>
         </p:nvSpPr>
         <p:spPr>
           <a:xfrm>
-            <a:off x="548640" y="4023360"/>
-            <a:ext cx="10241280" cy="292608"/>
+            <a:off x="548640" y="4041648"/>
+            <a:ext cx="10241280" cy="237744"/>
+          </a:xfrm>
+          <a:prstGeom prst="rect">
+            <a:avLst/>
+          </a:prstGeom>
+          <a:noFill/>
+          <a:ln/>
+        </p:spPr>
+        <p:txBody>
+          <a:bodyPr wrap="square" lIns="0" tIns="0" rIns="0" bIns="0" rtlCol="0" anchor="ctr"/>
+          <a:lstStyle/>
+          <a:p>
+            <a:pPr indent="0" marL="0">
+              <a:buNone/>
+            </a:pPr>
+            <a:r>
+              <a:rPr lang="en-US" sz="1000" b="1" spc="200" kern="0" dirty="0">
+                <a:solidFill>
+                  <a:srgbClr val="767676"/>
+                </a:solidFill>
+                <a:latin typeface="Arial" pitchFamily="34" charset="0"/>
+                <a:ea typeface="Arial" pitchFamily="34" charset="-122"/>
+                <a:cs typeface="Arial" pitchFamily="34" charset="-120"/>
+              </a:rPr>
+              <a:t>By</a:t>
+            </a:r>
+            <a:endParaRPr lang="en-US" sz="1000" dirty="0"/>
+          </a:p>
+        </p:txBody>
+      </p:sp>
+      <p:sp>
+        <p:nvSpPr>
+          <p:cNvPr id="7" name="cover-by"/>
+          <p:cNvSpPr txBox="1"/>
+          <p:nvPr/>
+        </p:nvSpPr>
+        <p:spPr>
+          <a:xfrm>
+            <a:off x="548640" y="4297680"/>
+            <a:ext cx="10607040" cy="292608"/>
           </a:xfrm>
           <a:prstGeom prst="rect">
             <a:avLst/>
@@ -3179,7 +2948,7 @@
                 <a:ea typeface="Arial" pitchFamily="34" charset="-122"/>
                 <a:cs typeface="Arial" pitchFamily="34" charset="-120"/>
               </a:rPr>
-              <a:t>Madhav Krishna</a:t>
+              <a:t>Madhav Krishna Arumulla  ·  Sanskar Jadhav  ·  Sri Charan Komati Reddy  ·  Gourav Verma  ·  Trinath Reddy Vundela</a:t>
             </a:r>
             <a:endParaRPr lang="en-US" sz="1300" dirty="0"/>
           </a:p>
@@ -3187,13 +2956,13 @@
       </p:sp>
       <p:sp>
         <p:nvSpPr>
-          <p:cNvPr id="7" name="chip0"/>
+          <p:cNvPr id="8" name="chip0"/>
           <p:cNvSpPr/>
           <p:nvPr/>
         </p:nvSpPr>
         <p:spPr>
           <a:xfrm>
-            <a:off x="548640" y="4754880"/>
+            <a:off x="548640" y="4892040"/>
             <a:ext cx="2631643" cy="365760"/>
           </a:xfrm>
           <a:prstGeom prst="roundRect">
@@ -3214,13 +2983,13 @@
       </p:sp>
       <p:sp>
         <p:nvSpPr>
-          <p:cNvPr id="8" name="chip-t0"/>
+          <p:cNvPr id="9" name="chip-t0"/>
           <p:cNvSpPr txBox="1"/>
           <p:nvPr/>
         </p:nvSpPr>
         <p:spPr>
           <a:xfrm>
-            <a:off x="548640" y="4754880"/>
+            <a:off x="548640" y="4892040"/>
             <a:ext cx="2631643" cy="365760"/>
           </a:xfrm>
           <a:prstGeom prst="rect">
@@ -3253,13 +3022,13 @@
       </p:sp>
       <p:sp>
         <p:nvSpPr>
-          <p:cNvPr id="9" name="chip1"/>
+          <p:cNvPr id="10" name="chip1"/>
           <p:cNvSpPr/>
           <p:nvPr/>
         </p:nvSpPr>
         <p:spPr>
           <a:xfrm>
-            <a:off x="3381451" y="4754880"/>
+            <a:off x="3381451" y="4892040"/>
             <a:ext cx="2546604" cy="365760"/>
           </a:xfrm>
           <a:prstGeom prst="roundRect">
@@ -3280,13 +3049,13 @@
       </p:sp>
       <p:sp>
         <p:nvSpPr>
-          <p:cNvPr id="10" name="chip-t1"/>
+          <p:cNvPr id="11" name="chip-t1"/>
           <p:cNvSpPr txBox="1"/>
           <p:nvPr/>
         </p:nvSpPr>
         <p:spPr>
           <a:xfrm>
-            <a:off x="3381451" y="4754880"/>
+            <a:off x="3381451" y="4892040"/>
             <a:ext cx="2546604" cy="365760"/>
           </a:xfrm>
           <a:prstGeom prst="rect">
@@ -3319,13 +3088,13 @@
       </p:sp>
       <p:sp>
         <p:nvSpPr>
-          <p:cNvPr id="11" name="chip2"/>
+          <p:cNvPr id="12" name="chip2"/>
           <p:cNvSpPr/>
           <p:nvPr/>
         </p:nvSpPr>
         <p:spPr>
           <a:xfrm>
-            <a:off x="6129223" y="4754880"/>
+            <a:off x="6129223" y="4892040"/>
             <a:ext cx="1951330" cy="365760"/>
           </a:xfrm>
           <a:prstGeom prst="roundRect">
@@ -3346,13 +3115,13 @@
       </p:sp>
       <p:sp>
         <p:nvSpPr>
-          <p:cNvPr id="12" name="chip-t2"/>
+          <p:cNvPr id="13" name="chip-t2"/>
           <p:cNvSpPr txBox="1"/>
           <p:nvPr/>
         </p:nvSpPr>
         <p:spPr>
           <a:xfrm>
-            <a:off x="6129223" y="4754880"/>
+            <a:off x="6129223" y="4892040"/>
             <a:ext cx="1951330" cy="365760"/>
           </a:xfrm>
           <a:prstGeom prst="rect">
@@ -3385,13 +3154,13 @@
       </p:sp>
       <p:sp>
         <p:nvSpPr>
-          <p:cNvPr id="13" name="chip3"/>
+          <p:cNvPr id="14" name="chip3"/>
           <p:cNvSpPr/>
           <p:nvPr/>
         </p:nvSpPr>
         <p:spPr>
           <a:xfrm>
-            <a:off x="8281721" y="4754880"/>
+            <a:off x="8281721" y="4892040"/>
             <a:ext cx="3141878" cy="365760"/>
           </a:xfrm>
           <a:prstGeom prst="roundRect">
@@ -3412,13 +3181,13 @@
       </p:sp>
       <p:sp>
         <p:nvSpPr>
-          <p:cNvPr id="14" name="chip-t3"/>
+          <p:cNvPr id="15" name="chip-t3"/>
           <p:cNvSpPr txBox="1"/>
           <p:nvPr/>
         </p:nvSpPr>
         <p:spPr>
           <a:xfrm>
-            <a:off x="8281721" y="4754880"/>
+            <a:off x="8281721" y="4892040"/>
             <a:ext cx="3141878" cy="365760"/>
           </a:xfrm>
           <a:prstGeom prst="rect">
@@ -3451,7 +3220,7 @@
       </p:sp>
       <p:sp>
         <p:nvSpPr>
-          <p:cNvPr id="15" name="cover-foot"/>
+          <p:cNvPr id="16" name="cover-foot"/>
           <p:cNvSpPr txBox="1"/>
           <p:nvPr/>
         </p:nvSpPr>
@@ -17664,7 +17433,7 @@
                 <a:ea typeface="Arial" pitchFamily="34" charset="-122"/>
                 <a:cs typeface="Arial" pitchFamily="34" charset="-120"/>
               </a:rPr>
-              <a:t>APPENDIX — NOT PRESENTED</a:t>
+              <a:t>BACKUP — NOT PRESENTED</a:t>
             </a:r>
             <a:endParaRPr lang="en-US" sz="1000" dirty="0"/>
           </a:p>
@@ -17700,7 +17469,7 @@
                   <a:srgbClr val="1A1A1A"/>
                 </a:solidFill>
               </a:rPr>
-              <a:t>Step 2B: word mapping, the paper's Algorithm 1</a:t>
+              <a:t>Detail behind the four most likely questions</a:t>
             </a:r>
             <a:endParaRPr lang="en-US" sz="2700" dirty="0"/>
           </a:p>
@@ -17739,7 +17508,7 @@
                 <a:ea typeface="Arial" pitchFamily="34" charset="-122"/>
                 <a:cs typeface="Arial" pitchFamily="34" charset="-120"/>
               </a:rPr>
-              <a:t>How an uncovered span becomes a missing-relation candidate</a:t>
+              <a:t>Word mapping, the uncontrolled run, what the refiner writes, and the engineering hazards</a:t>
             </a:r>
             <a:endParaRPr lang="en-US" sz="1350" dirty="0"/>
           </a:p>
@@ -17772,134 +17541,24 @@
       </p:sp>
       <p:sp>
         <p:nvSpPr>
-          <p:cNvPr id="6" name="algo"/>
-          <p:cNvSpPr txBox="1"/>
-          <p:nvPr/>
-        </p:nvSpPr>
-        <p:spPr>
-          <a:xfrm>
-            <a:off x="548640" y="1600200"/>
-            <a:ext cx="5394960" cy="1463040"/>
-          </a:xfrm>
-          <a:prstGeom prst="rect">
-            <a:avLst/>
-          </a:prstGeom>
-          <a:noFill/>
-          <a:ln/>
-        </p:spPr>
-        <p:txBody>
-          <a:bodyPr wrap="square" lIns="0" tIns="0" rIns="0" bIns="0" rtlCol="0" anchor="ctr"/>
-          <a:lstStyle/>
-          <a:p>
-            <a:pPr marL="342900" indent="-342900">
-              <a:spcAft>
-                <a:spcPts val="600"/>
-              </a:spcAft>
-              <a:buSzPct val="100000"/>
-              <a:buFont typeface="+mj-lt"/>
-              <a:buAutoNum type="arabicPeriod" startAt="1"/>
-            </a:pPr>
-            <a:r>
-              <a:rPr lang="en-US" sz="1350" dirty="0">
-                <a:solidFill>
-                  <a:srgbClr val="444444"/>
-                </a:solidFill>
-                <a:latin typeface="Arial" pitchFamily="34" charset="0"/>
-                <a:ea typeface="Arial" pitchFamily="34" charset="-122"/>
-                <a:cs typeface="Arial" pitchFamily="34" charset="-120"/>
-              </a:rPr>
-              <a:t>For each fact, take its longest common substring with the response.</a:t>
-            </a:r>
-            <a:endParaRPr lang="en-US" sz="1350" dirty="0"/>
-          </a:p>
-          <a:p>
-            <a:pPr marL="342900" indent="-342900">
-              <a:spcAft>
-                <a:spcPts val="600"/>
-              </a:spcAft>
-              <a:buSzPct val="100000"/>
-              <a:buFont typeface="+mj-lt"/>
-              <a:buAutoNum type="arabicPeriod" startAt="1"/>
-            </a:pPr>
-            <a:r>
-              <a:rPr lang="en-US" sz="1350" dirty="0">
-                <a:solidFill>
-                  <a:srgbClr val="444444"/>
-                </a:solidFill>
-                <a:latin typeface="Arial" pitchFamily="34" charset="0"/>
-                <a:ea typeface="Arial" pitchFamily="34" charset="-122"/>
-                <a:cs typeface="Arial" pitchFamily="34" charset="-120"/>
-              </a:rPr>
-              <a:t>Mark those response characters as covered.</a:t>
-            </a:r>
-            <a:endParaRPr lang="en-US" sz="1350" dirty="0"/>
-          </a:p>
-          <a:p>
-            <a:pPr marL="342900" indent="-342900">
-              <a:spcAft>
-                <a:spcPts val="600"/>
-              </a:spcAft>
-              <a:buSzPct val="100000"/>
-              <a:buFont typeface="+mj-lt"/>
-              <a:buAutoNum type="arabicPeriod" startAt="1"/>
-            </a:pPr>
-            <a:r>
-              <a:rPr lang="en-US" sz="1350" dirty="0">
-                <a:solidFill>
-                  <a:srgbClr val="444444"/>
-                </a:solidFill>
-                <a:latin typeface="Arial" pitchFamily="34" charset="0"/>
-                <a:ea typeface="Arial" pitchFamily="34" charset="-122"/>
-                <a:cs typeface="Arial" pitchFamily="34" charset="-120"/>
-              </a:rPr>
-              <a:t>Collect the contiguous runs that stayed uncovered.</a:t>
-            </a:r>
-            <a:endParaRPr lang="en-US" sz="1350" dirty="0"/>
-          </a:p>
-          <a:p>
-            <a:pPr marL="342900" indent="-342900">
-              <a:spcAft>
-                <a:spcPts val="600"/>
-              </a:spcAft>
-              <a:buSzPct val="100000"/>
-              <a:buFont typeface="+mj-lt"/>
-              <a:buAutoNum type="arabicPeriod" startAt="1"/>
-            </a:pPr>
-            <a:r>
-              <a:rPr lang="en-US" sz="1350" dirty="0">
-                <a:solidFill>
-                  <a:srgbClr val="444444"/>
-                </a:solidFill>
-                <a:latin typeface="Arial" pitchFamily="34" charset="0"/>
-                <a:ea typeface="Arial" pitchFamily="34" charset="-122"/>
-                <a:cs typeface="Arial" pitchFamily="34" charset="-120"/>
-              </a:rPr>
-              <a:t>Send those spans to the judges as missing-relation candidates.</a:t>
-            </a:r>
-            <a:endParaRPr lang="en-US" sz="1350" dirty="0"/>
-          </a:p>
-        </p:txBody>
-      </p:sp>
-      <p:sp>
-        <p:nvSpPr>
-          <p:cNvPr id="7" name="impl"/>
+          <p:cNvPr id="6" name="bk-wm"/>
           <p:cNvSpPr/>
           <p:nvPr/>
         </p:nvSpPr>
         <p:spPr>
           <a:xfrm>
-            <a:off x="548640" y="3200400"/>
-            <a:ext cx="5394960" cy="1554480"/>
+            <a:off x="548640" y="1600200"/>
+            <a:ext cx="5394960" cy="2103120"/>
           </a:xfrm>
           <a:prstGeom prst="rect">
             <a:avLst/>
           </a:prstGeom>
           <a:solidFill>
-            <a:srgbClr val="F4F4F4"/>
+            <a:srgbClr val="FFFFFF"/>
           </a:solidFill>
           <a:ln w="9525">
             <a:solidFill>
-              <a:srgbClr val="F4F4F4"/>
+              <a:srgbClr val="DCDCDC"/>
             </a:solidFill>
             <a:prstDash val="solid"/>
           </a:ln>
@@ -17907,13 +17566,13 @@
       </p:sp>
       <p:sp>
         <p:nvSpPr>
-          <p:cNvPr id="8" name="impl-h"/>
+          <p:cNvPr id="7" name="bk-wm-h"/>
           <p:cNvSpPr txBox="1"/>
           <p:nvPr/>
         </p:nvSpPr>
         <p:spPr>
           <a:xfrm>
-            <a:off x="804672" y="3401568"/>
+            <a:off x="804672" y="1801368"/>
             <a:ext cx="4882896" cy="292608"/>
           </a:xfrm>
           <a:prstGeom prst="rect">
@@ -17930,27 +17589,27 @@
               <a:buNone/>
             </a:pPr>
             <a:r>
-              <a:rPr lang="en-US" sz="1450" b="1" dirty="0">
+              <a:rPr lang="en-US" sz="1350" b="1" dirty="0">
                 <a:solidFill>
                   <a:srgbClr val="1A1A1A"/>
                 </a:solidFill>
               </a:rPr>
-              <a:t>Implementation</a:t>
+              <a:t>How missing relations are found — Algorithm 1</a:t>
             </a:r>
-            <a:endParaRPr lang="en-US" sz="1450" dirty="0"/>
+            <a:endParaRPr lang="en-US" sz="1350" dirty="0"/>
           </a:p>
         </p:txBody>
       </p:sp>
       <p:sp>
         <p:nvSpPr>
-          <p:cNvPr id="9" name="impl-b"/>
+          <p:cNvPr id="8" name="bk-wm-b"/>
           <p:cNvSpPr txBox="1"/>
           <p:nvPr/>
         </p:nvSpPr>
         <p:spPr>
           <a:xfrm>
-            <a:off x="804672" y="3803904"/>
-            <a:ext cx="4882896" cy="786384"/>
+            <a:off x="804672" y="2203704"/>
+            <a:ext cx="4882896" cy="1335024"/>
           </a:xfrm>
           <a:prstGeom prst="rect">
             <a:avLst/>
@@ -17969,7 +17628,7 @@
               <a:buNone/>
             </a:pPr>
             <a:r>
-              <a:rPr lang="en-US" sz="1200" dirty="0">
+              <a:rPr lang="en-US" sz="1050" dirty="0">
                 <a:solidFill>
                   <a:srgbClr val="444444"/>
                 </a:solidFill>
@@ -17977,22 +17636,42 @@
                 <a:ea typeface="Arial" pitchFamily="34" charset="-122"/>
                 <a:cs typeface="Arial" pitchFamily="34" charset="-120"/>
               </a:rPr>
-              <a:t>Normalization for case, whitespace and line breaks is index-preserving — one character in, one character out — so span offsets still point into the original answer.</a:t>
+              <a:t>Take each fact's longest common substring with the response, mark those characters covered, collect the runs that stayed uncovered, and send them to the judges. Normalization is index-preserving, so offsets still point into the original answer.</a:t>
             </a:r>
-            <a:endParaRPr lang="en-US" sz="1200" dirty="0"/>
+            <a:endParaRPr lang="en-US" sz="1050" dirty="0"/>
+          </a:p>
+          <a:p>
+            <a:pPr indent="0" marL="0">
+              <a:lnSpc>
+                <a:spcPct val="125000"/>
+              </a:lnSpc>
+              <a:buNone/>
+            </a:pPr>
+            <a:r>
+              <a:rPr lang="en-US" sz="1050" dirty="0">
+                <a:solidFill>
+                  <a:srgbClr val="444444"/>
+                </a:solidFill>
+                <a:latin typeface="Arial" pitchFamily="34" charset="0"/>
+                <a:ea typeface="Arial" pitchFamily="34" charset="-122"/>
+                <a:cs typeface="Arial" pitchFamily="34" charset="-120"/>
+              </a:rPr>
+              <a:t>Coverage 0.55–0.59.  73 candidate spans.  A fact is added only when the span expresses a temporal or contingency relation AND no single existing fact already captures it.</a:t>
+            </a:r>
+            <a:endParaRPr lang="en-US" sz="1050" dirty="0"/>
           </a:p>
         </p:txBody>
       </p:sp>
       <p:sp>
         <p:nvSpPr>
-          <p:cNvPr id="10" name="cov-box"/>
+          <p:cNvPr id="9" name="bk-b"/>
           <p:cNvSpPr/>
           <p:nvPr/>
         </p:nvSpPr>
         <p:spPr>
           <a:xfrm>
             <a:off x="6217920" y="1600200"/>
-            <a:ext cx="5394960" cy="1463040"/>
+            <a:ext cx="5394960" cy="2103120"/>
           </a:xfrm>
           <a:prstGeom prst="rect">
             <a:avLst/>
@@ -18010,90 +17689,14 @@
       </p:sp>
       <p:sp>
         <p:nvSpPr>
-          <p:cNvPr id="11" name="cov-text"/>
+          <p:cNvPr id="10" name="bk-b-h"/>
           <p:cNvSpPr txBox="1"/>
           <p:nvPr/>
         </p:nvSpPr>
         <p:spPr>
           <a:xfrm>
-            <a:off x="6473952" y="1783080"/>
-            <a:ext cx="4882896" cy="822960"/>
-          </a:xfrm>
-          <a:prstGeom prst="rect">
-            <a:avLst/>
-          </a:prstGeom>
-          <a:noFill/>
-          <a:ln/>
-        </p:spPr>
-        <p:txBody>
-          <a:bodyPr wrap="square" lIns="0" tIns="0" rIns="0" bIns="0" rtlCol="0" anchor="ctr"/>
-          <a:lstStyle/>
-          <a:p>
-            <a:pPr indent="0" marL="0">
-              <a:lnSpc>
-                <a:spcPct val="120000"/>
-              </a:lnSpc>
-              <a:buNone/>
-            </a:pPr>
-            <a:r>
-              <a:rPr lang="en-US" sz="1250" dirty="0">
-                <a:solidFill>
-                  <a:srgbClr val="767676"/>
-                </a:solidFill>
-                <a:latin typeface="Arial" pitchFamily="34" charset="0"/>
-                <a:ea typeface="Arial" pitchFamily="34" charset="-122"/>
-                <a:cs typeface="Arial" pitchFamily="34" charset="-120"/>
-              </a:rPr>
-              <a:t>If the demand for gold as jewelry were to disappear, </a:t>
-            </a:r>
-            <a:pPr indent="0" marL="0">
-              <a:lnSpc>
-                <a:spcPct val="120000"/>
-              </a:lnSpc>
-              <a:buNone/>
-            </a:pPr>
-            <a:r>
-              <a:rPr lang="en-US" sz="1250" b="1" dirty="0">
-                <a:solidFill>
-                  <a:srgbClr val="E90802"/>
-                </a:solidFill>
-                <a:latin typeface="Arial" pitchFamily="34" charset="0"/>
-                <a:ea typeface="Arial" pitchFamily="34" charset="-122"/>
-                <a:cs typeface="Arial" pitchFamily="34" charset="-120"/>
-              </a:rPr>
-              <a:t>making it more competitive with other materials like </a:t>
-            </a:r>
-            <a:pPr indent="0" marL="0">
-              <a:lnSpc>
-                <a:spcPct val="120000"/>
-              </a:lnSpc>
-              <a:buNone/>
-            </a:pPr>
-            <a:r>
-              <a:rPr lang="en-US" sz="1250" dirty="0">
-                <a:solidFill>
-                  <a:srgbClr val="767676"/>
-                </a:solidFill>
-                <a:latin typeface="Arial" pitchFamily="34" charset="0"/>
-                <a:ea typeface="Arial" pitchFamily="34" charset="-122"/>
-                <a:cs typeface="Arial" pitchFamily="34" charset="-120"/>
-              </a:rPr>
-              <a:t>copper and silver.</a:t>
-            </a:r>
-            <a:endParaRPr lang="en-US" sz="1250" dirty="0"/>
-          </a:p>
-        </p:txBody>
-      </p:sp>
-      <p:sp>
-        <p:nvSpPr>
-          <p:cNvPr id="12" name="cov-key"/>
-          <p:cNvSpPr txBox="1"/>
-          <p:nvPr/>
-        </p:nvSpPr>
-        <p:spPr>
-          <a:xfrm>
-            <a:off x="6473952" y="2642616"/>
-            <a:ext cx="4882896" cy="237744"/>
+            <a:off x="6473952" y="1801368"/>
+            <a:ext cx="4882896" cy="292608"/>
           </a:xfrm>
           <a:prstGeom prst="rect">
             <a:avLst/>
@@ -18109,91 +17712,27 @@
               <a:buNone/>
             </a:pPr>
             <a:r>
-              <a:rPr lang="en-US" sz="1000" dirty="0">
-                <a:solidFill>
-                  <a:srgbClr val="767676"/>
-                </a:solidFill>
-                <a:latin typeface="Arial" pitchFamily="34" charset="0"/>
-                <a:ea typeface="Arial" pitchFamily="34" charset="-122"/>
-                <a:cs typeface="Arial" pitchFamily="34" charset="-120"/>
-              </a:rPr>
-              <a:t>grey = matched by some fact   ·   scarlet = uncovered span</a:t>
-            </a:r>
-            <a:endParaRPr lang="en-US" sz="1000" dirty="0"/>
-          </a:p>
-        </p:txBody>
-      </p:sp>
-      <p:sp>
-        <p:nvSpPr>
-          <p:cNvPr id="13" name="twoq"/>
-          <p:cNvSpPr/>
-          <p:nvPr/>
-        </p:nvSpPr>
-        <p:spPr>
-          <a:xfrm>
-            <a:off x="6217920" y="3200400"/>
-            <a:ext cx="5394960" cy="1554480"/>
-          </a:xfrm>
-          <a:prstGeom prst="rect">
-            <a:avLst/>
-          </a:prstGeom>
-          <a:solidFill>
-            <a:srgbClr val="FFFFFF"/>
-          </a:solidFill>
-          <a:ln w="9525">
-            <a:solidFill>
-              <a:srgbClr val="DCDCDC"/>
-            </a:solidFill>
-            <a:prstDash val="solid"/>
-          </a:ln>
-        </p:spPr>
-      </p:sp>
-      <p:sp>
-        <p:nvSpPr>
-          <p:cNvPr id="14" name="twoq-h"/>
-          <p:cNvSpPr txBox="1"/>
-          <p:nvPr/>
-        </p:nvSpPr>
-        <p:spPr>
-          <a:xfrm>
-            <a:off x="6473952" y="3401568"/>
-            <a:ext cx="4882896" cy="292608"/>
-          </a:xfrm>
-          <a:prstGeom prst="rect">
-            <a:avLst/>
-          </a:prstGeom>
-          <a:noFill/>
-          <a:ln/>
-        </p:spPr>
-        <p:txBody>
-          <a:bodyPr wrap="square" lIns="0" tIns="0" rIns="0" bIns="0" rtlCol="0" anchor="ctr"/>
-          <a:lstStyle/>
-          <a:p>
-            <a:pPr indent="0" marL="0">
-              <a:buNone/>
-            </a:pPr>
-            <a:r>
-              <a:rPr lang="en-US" sz="1450" b="1" dirty="0">
+              <a:rPr lang="en-US" sz="1350" b="1" dirty="0">
                 <a:solidFill>
                   <a:srgbClr val="1A1A1A"/>
                 </a:solidFill>
               </a:rPr>
-              <a:t>Then two judge questions</a:t>
+              <a:t>Run B — the whole pipeline at 7B, extractor included</a:t>
             </a:r>
-            <a:endParaRPr lang="en-US" sz="1450" dirty="0"/>
+            <a:endParaRPr lang="en-US" sz="1350" dirty="0"/>
           </a:p>
         </p:txBody>
       </p:sp>
       <p:sp>
         <p:nvSpPr>
-          <p:cNvPr id="15" name="twoq-b"/>
+          <p:cNvPr id="11" name="bk-b-b"/>
           <p:cNvSpPr txBox="1"/>
           <p:nvPr/>
         </p:nvSpPr>
         <p:spPr>
           <a:xfrm>
-            <a:off x="6473952" y="3803904"/>
-            <a:ext cx="4882896" cy="786384"/>
+            <a:off x="6473952" y="2203704"/>
+            <a:ext cx="4882896" cy="1335024"/>
           </a:xfrm>
           <a:prstGeom prst="rect">
             <a:avLst/>
@@ -18212,7 +17751,7 @@
               <a:buNone/>
             </a:pPr>
             <a:r>
-              <a:rPr lang="en-US" sz="1200" dirty="0">
+              <a:rPr lang="en-US" sz="1050" dirty="0">
                 <a:solidFill>
                   <a:srgbClr val="444444"/>
                 </a:solidFill>
@@ -18220,9 +17759,9 @@
                 <a:ea typeface="Arial" pitchFamily="34" charset="-122"/>
                 <a:cs typeface="Arial" pitchFamily="34" charset="-120"/>
               </a:rPr>
-              <a:t>1. Does the span express a temporal or contingency relation?</a:t>
+              <a:t>Baseline 15.92 facts per answer against 21.50, incomplete rate 0.319, precision 0.5050. Refinement then costs −0.025 precision, against −0.118 in run A.</a:t>
             </a:r>
-            <a:endParaRPr lang="en-US" sz="1200" dirty="0"/>
+            <a:endParaRPr lang="en-US" sz="1050" dirty="0"/>
           </a:p>
           <a:p>
             <a:pPr indent="0" marL="0">
@@ -18232,7 +17771,7 @@
               <a:buNone/>
             </a:pPr>
             <a:r>
-              <a:rPr lang="en-US" sz="1200" dirty="0">
+              <a:rPr lang="en-US" sz="1050" dirty="0">
                 <a:solidFill>
                   <a:srgbClr val="444444"/>
                 </a:solidFill>
@@ -18240,149 +17779,27 @@
                 <a:ea typeface="Arial" pitchFamily="34" charset="-122"/>
                 <a:cs typeface="Arial" pitchFamily="34" charset="-120"/>
               </a:rPr>
-              <a:t>2. Does any single existing fact already capture it?</a:t>
+              <a:t>A stronger extractor writes fewer, coarser, self-contained facts, so there is less to repair — the trade the paper notes for VERIFY (18.5 facts per response against VeriFact's 32.3).</a:t>
             </a:r>
-            <a:endParaRPr lang="en-US" sz="1200" dirty="0"/>
+            <a:endParaRPr lang="en-US" sz="1050" dirty="0"/>
           </a:p>
-        </p:txBody>
-      </p:sp>
-      <p:sp>
-        <p:nvSpPr>
-          <p:cNvPr id="16" name="wm0-rule"/>
-          <p:cNvSpPr/>
-          <p:nvPr/>
-        </p:nvSpPr>
-        <p:spPr>
-          <a:xfrm>
-            <a:off x="548640" y="4937760"/>
-            <a:ext cx="3505200" cy="25603"/>
-          </a:xfrm>
-          <a:prstGeom prst="rect">
-            <a:avLst/>
-          </a:prstGeom>
-          <a:solidFill>
-            <a:srgbClr val="DCDCDC"/>
-          </a:solidFill>
-          <a:ln w="3175">
-            <a:solidFill>
-              <a:srgbClr val="DCDCDC"/>
-            </a:solidFill>
-            <a:prstDash val="solid"/>
-          </a:ln>
-        </p:spPr>
-      </p:sp>
-      <p:sp>
-        <p:nvSpPr>
-          <p:cNvPr id="17" name="wm0-l"/>
-          <p:cNvSpPr txBox="1"/>
-          <p:nvPr/>
-        </p:nvSpPr>
-        <p:spPr>
-          <a:xfrm>
-            <a:off x="548640" y="5084064"/>
-            <a:ext cx="3505200" cy="219456"/>
-          </a:xfrm>
-          <a:prstGeom prst="rect">
-            <a:avLst/>
-          </a:prstGeom>
-          <a:noFill/>
-          <a:ln/>
-        </p:spPr>
-        <p:txBody>
-          <a:bodyPr wrap="square" lIns="0" tIns="0" rIns="0" bIns="0" rtlCol="0" anchor="ctr"/>
-          <a:lstStyle/>
-          <a:p>
-            <a:pPr indent="0" marL="0">
-              <a:buNone/>
-            </a:pPr>
-            <a:r>
-              <a:rPr lang="en-US" sz="950" b="1" spc="100" kern="0" dirty="0">
-                <a:solidFill>
-                  <a:srgbClr val="767676"/>
-                </a:solidFill>
-                <a:latin typeface="Arial" pitchFamily="34" charset="0"/>
-                <a:ea typeface="Arial" pitchFamily="34" charset="-122"/>
-                <a:cs typeface="Arial" pitchFamily="34" charset="-120"/>
-              </a:rPr>
-              <a:t>CHARACTER COVERAGE</a:t>
-            </a:r>
-            <a:endParaRPr lang="en-US" sz="950" dirty="0"/>
-          </a:p>
-        </p:txBody>
-      </p:sp>
-      <p:sp>
-        <p:nvSpPr>
-          <p:cNvPr id="18" name="wm0-v"/>
-          <p:cNvSpPr txBox="1"/>
-          <p:nvPr/>
-        </p:nvSpPr>
-        <p:spPr>
-          <a:xfrm>
-            <a:off x="548640" y="5321808"/>
-            <a:ext cx="3505200" cy="457200"/>
-          </a:xfrm>
-          <a:prstGeom prst="rect">
-            <a:avLst/>
-          </a:prstGeom>
-          <a:noFill/>
-          <a:ln/>
-        </p:spPr>
-        <p:txBody>
-          <a:bodyPr wrap="square" lIns="0" tIns="0" rIns="0" bIns="0" rtlCol="0" anchor="ctr"/>
-          <a:lstStyle/>
-          <a:p>
-            <a:pPr indent="0" marL="0">
-              <a:buNone/>
-            </a:pPr>
-            <a:r>
-              <a:rPr lang="en-US" sz="2200" b="1" dirty="0">
-                <a:solidFill>
-                  <a:srgbClr val="1A1A1A"/>
-                </a:solidFill>
-              </a:rPr>
-              <a:t>0.55–0.59</a:t>
-            </a:r>
-            <a:endParaRPr lang="en-US" sz="2200" dirty="0"/>
-          </a:p>
-        </p:txBody>
-      </p:sp>
-      <p:sp>
-        <p:nvSpPr>
-          <p:cNvPr id="19" name="wm0-f"/>
-          <p:cNvSpPr txBox="1"/>
-          <p:nvPr/>
-        </p:nvSpPr>
-        <p:spPr>
-          <a:xfrm>
-            <a:off x="548640" y="5806440"/>
-            <a:ext cx="3505200" cy="420624"/>
-          </a:xfrm>
-          <a:prstGeom prst="rect">
-            <a:avLst/>
-          </a:prstGeom>
-          <a:noFill/>
-          <a:ln/>
-        </p:spPr>
-        <p:txBody>
-          <a:bodyPr wrap="square" lIns="0" tIns="0" rIns="0" bIns="0" rtlCol="0" anchor="ctr"/>
-          <a:lstStyle/>
           <a:p>
             <a:pPr indent="0" marL="0">
               <a:lnSpc>
-                <a:spcPct val="110000"/>
+                <a:spcPct val="125000"/>
               </a:lnSpc>
               <a:buNone/>
             </a:pPr>
             <a:r>
               <a:rPr lang="en-US" sz="1050" dirty="0">
                 <a:solidFill>
-                  <a:srgbClr val="767676"/>
+                  <a:srgbClr val="444444"/>
                 </a:solidFill>
                 <a:latin typeface="Arial" pitchFamily="34" charset="0"/>
                 <a:ea typeface="Arial" pitchFamily="34" charset="-122"/>
                 <a:cs typeface="Arial" pitchFamily="34" charset="-120"/>
               </a:rPr>
-              <a:t>of the response matched</a:t>
+              <a:t>B changed four things at once, so it reads only against its own baseline.</a:t>
             </a:r>
             <a:endParaRPr lang="en-US" sz="1050" dirty="0"/>
           </a:p>
@@ -18390,24 +17807,24 @@
       </p:sp>
       <p:sp>
         <p:nvSpPr>
-          <p:cNvPr id="20" name="wm1-rule"/>
+          <p:cNvPr id="12" name="bk-q"/>
           <p:cNvSpPr/>
           <p:nvPr/>
         </p:nvSpPr>
         <p:spPr>
           <a:xfrm>
-            <a:off x="4328160" y="4937760"/>
-            <a:ext cx="3505200" cy="25603"/>
+            <a:off x="548640" y="3886200"/>
+            <a:ext cx="5394960" cy="2103120"/>
           </a:xfrm>
           <a:prstGeom prst="rect">
             <a:avLst/>
           </a:prstGeom>
           <a:solidFill>
-            <a:srgbClr val="DCDCDC"/>
+            <a:srgbClr val="F4F4F4"/>
           </a:solidFill>
-          <a:ln w="3175">
+          <a:ln w="9525">
             <a:solidFill>
-              <a:srgbClr val="DCDCDC"/>
+              <a:srgbClr val="F4F4F4"/>
             </a:solidFill>
             <a:prstDash val="solid"/>
           </a:ln>
@@ -18415,131 +17832,14 @@
       </p:sp>
       <p:sp>
         <p:nvSpPr>
-          <p:cNvPr id="21" name="wm1-l"/>
-          <p:cNvSpPr txBox="1"/>
-          <p:nvPr/>
-        </p:nvSpPr>
-        <p:spPr>
-          <a:xfrm>
-            <a:off x="4328160" y="5084064"/>
-            <a:ext cx="3505200" cy="219456"/>
-          </a:xfrm>
-          <a:prstGeom prst="rect">
-            <a:avLst/>
-          </a:prstGeom>
-          <a:noFill/>
-          <a:ln/>
-        </p:spPr>
-        <p:txBody>
-          <a:bodyPr wrap="square" lIns="0" tIns="0" rIns="0" bIns="0" rtlCol="0" anchor="ctr"/>
-          <a:lstStyle/>
-          <a:p>
-            <a:pPr indent="0" marL="0">
-              <a:buNone/>
-            </a:pPr>
-            <a:r>
-              <a:rPr lang="en-US" sz="950" b="1" spc="100" kern="0" dirty="0">
-                <a:solidFill>
-                  <a:srgbClr val="767676"/>
-                </a:solidFill>
-                <a:latin typeface="Arial" pitchFamily="34" charset="0"/>
-                <a:ea typeface="Arial" pitchFamily="34" charset="-122"/>
-                <a:cs typeface="Arial" pitchFamily="34" charset="-120"/>
-              </a:rPr>
-              <a:t>CANDIDATE SPANS FOUND</a:t>
-            </a:r>
-            <a:endParaRPr lang="en-US" sz="950" dirty="0"/>
-          </a:p>
-        </p:txBody>
-      </p:sp>
-      <p:sp>
-        <p:nvSpPr>
-          <p:cNvPr id="22" name="wm1-v"/>
-          <p:cNvSpPr txBox="1"/>
-          <p:nvPr/>
-        </p:nvSpPr>
-        <p:spPr>
-          <a:xfrm>
-            <a:off x="4328160" y="5321808"/>
-            <a:ext cx="3505200" cy="457200"/>
-          </a:xfrm>
-          <a:prstGeom prst="rect">
-            <a:avLst/>
-          </a:prstGeom>
-          <a:noFill/>
-          <a:ln/>
-        </p:spPr>
-        <p:txBody>
-          <a:bodyPr wrap="square" lIns="0" tIns="0" rIns="0" bIns="0" rtlCol="0" anchor="ctr"/>
-          <a:lstStyle/>
-          <a:p>
-            <a:pPr indent="0" marL="0">
-              <a:buNone/>
-            </a:pPr>
-            <a:r>
-              <a:rPr lang="en-US" sz="2200" b="1" dirty="0">
-                <a:solidFill>
-                  <a:srgbClr val="1A1A1A"/>
-                </a:solidFill>
-              </a:rPr>
-              <a:t>73</a:t>
-            </a:r>
-            <a:endParaRPr lang="en-US" sz="2200" dirty="0"/>
-          </a:p>
-        </p:txBody>
-      </p:sp>
-      <p:sp>
-        <p:nvSpPr>
-          <p:cNvPr id="23" name="wm1-f"/>
-          <p:cNvSpPr txBox="1"/>
-          <p:nvPr/>
-        </p:nvSpPr>
-        <p:spPr>
-          <a:xfrm>
-            <a:off x="4328160" y="5806440"/>
-            <a:ext cx="3505200" cy="420624"/>
-          </a:xfrm>
-          <a:prstGeom prst="rect">
-            <a:avLst/>
-          </a:prstGeom>
-          <a:noFill/>
-          <a:ln/>
-        </p:spPr>
-        <p:txBody>
-          <a:bodyPr wrap="square" lIns="0" tIns="0" rIns="0" bIns="0" rtlCol="0" anchor="ctr"/>
-          <a:lstStyle/>
-          <a:p>
-            <a:pPr indent="0" marL="0">
-              <a:lnSpc>
-                <a:spcPct val="110000"/>
-              </a:lnSpc>
-              <a:buNone/>
-            </a:pPr>
-            <a:r>
-              <a:rPr lang="en-US" sz="1050" dirty="0">
-                <a:solidFill>
-                  <a:srgbClr val="767676"/>
-                </a:solidFill>
-                <a:latin typeface="Arial" pitchFamily="34" charset="0"/>
-                <a:ea typeface="Arial" pitchFamily="34" charset="-122"/>
-                <a:cs typeface="Arial" pitchFamily="34" charset="-120"/>
-              </a:rPr>
-              <a:t>across 12 answers</a:t>
-            </a:r>
-            <a:endParaRPr lang="en-US" sz="1050" dirty="0"/>
-          </a:p>
-        </p:txBody>
-      </p:sp>
-      <p:sp>
-        <p:nvSpPr>
-          <p:cNvPr id="24" name="wm2-rule"/>
+          <p:cNvPr id="13" name="bk-q-edge"/>
           <p:cNvSpPr/>
           <p:nvPr/>
         </p:nvSpPr>
         <p:spPr>
           <a:xfrm>
-            <a:off x="8107680" y="4937760"/>
-            <a:ext cx="3505200" cy="25603"/>
+            <a:off x="548640" y="3886200"/>
+            <a:ext cx="29261" cy="2103120"/>
           </a:xfrm>
           <a:prstGeom prst="rect">
             <a:avLst/>
@@ -18557,14 +17857,14 @@
       </p:sp>
       <p:sp>
         <p:nvSpPr>
-          <p:cNvPr id="25" name="wm2-l"/>
+          <p:cNvPr id="14" name="bk-q-h"/>
           <p:cNvSpPr txBox="1"/>
           <p:nvPr/>
         </p:nvSpPr>
         <p:spPr>
           <a:xfrm>
-            <a:off x="8107680" y="5084064"/>
-            <a:ext cx="3505200" cy="219456"/>
+            <a:off x="804672" y="4087368"/>
+            <a:ext cx="4882896" cy="292608"/>
           </a:xfrm>
           <a:prstGeom prst="rect">
             <a:avLst/>
@@ -18580,30 +17880,134 @@
               <a:buNone/>
             </a:pPr>
             <a:r>
-              <a:rPr lang="en-US" sz="950" b="1" spc="100" kern="0" dirty="0">
+              <a:rPr lang="en-US" sz="1350" b="1" dirty="0">
                 <a:solidFill>
-                  <a:srgbClr val="767676"/>
+                  <a:srgbClr val="E90802"/>
+                </a:solidFill>
+              </a:rPr>
+              <a:t>What the 3B refiner actually writes</a:t>
+            </a:r>
+            <a:endParaRPr lang="en-US" sz="1350" dirty="0"/>
+          </a:p>
+        </p:txBody>
+      </p:sp>
+      <p:sp>
+        <p:nvSpPr>
+          <p:cNvPr id="15" name="bk-q-b"/>
+          <p:cNvSpPr txBox="1"/>
+          <p:nvPr/>
+        </p:nvSpPr>
+        <p:spPr>
+          <a:xfrm>
+            <a:off x="804672" y="4489704"/>
+            <a:ext cx="4882896" cy="1335024"/>
+          </a:xfrm>
+          <a:prstGeom prst="rect">
+            <a:avLst/>
+          </a:prstGeom>
+          <a:noFill/>
+          <a:ln/>
+        </p:spPr>
+        <p:txBody>
+          <a:bodyPr wrap="square" lIns="0" tIns="0" rIns="0" bIns="0" rtlCol="0" anchor="t"/>
+          <a:lstStyle/>
+          <a:p>
+            <a:pPr indent="0" marL="0">
+              <a:lnSpc>
+                <a:spcPct val="125000"/>
+              </a:lnSpc>
+              <a:buNone/>
+            </a:pPr>
+            <a:r>
+              <a:rPr lang="en-US" sz="1050" dirty="0">
+                <a:solidFill>
+                  <a:srgbClr val="444444"/>
                 </a:solidFill>
                 <a:latin typeface="Arial" pitchFamily="34" charset="0"/>
                 <a:ea typeface="Arial" pitchFamily="34" charset="-122"/>
                 <a:cs typeface="Arial" pitchFamily="34" charset="-120"/>
               </a:rPr>
-              <a:t>FACT ADDED ONLY WHEN</a:t>
+              <a:t>Works — Q10:  “These substances are in the atmosphere.” becomes “… since the Montreal Protocol was signed.”   UNDECIDED → SUPPORTED.</a:t>
             </a:r>
-            <a:endParaRPr lang="en-US" sz="950" dirty="0"/>
+            <a:endParaRPr lang="en-US" sz="1050" dirty="0"/>
+          </a:p>
+          <a:p>
+            <a:pPr indent="0" marL="0">
+              <a:lnSpc>
+                <a:spcPct val="125000"/>
+              </a:lnSpc>
+              <a:buNone/>
+            </a:pPr>
+            <a:r>
+              <a:rPr lang="en-US" sz="1050" dirty="0">
+                <a:solidFill>
+                  <a:srgbClr val="444444"/>
+                </a:solidFill>
+                <a:latin typeface="Arial" pitchFamily="34" charset="0"/>
+                <a:ea typeface="Arial" pitchFamily="34" charset="-122"/>
+                <a:cs typeface="Arial" pitchFamily="34" charset="-120"/>
+              </a:rPr>
+              <a:t>Fails — Q01:  “There was demand for gold as jewelry.” becomes “There was NO demand …”. The hypothetical from the question was pasted into a fact stating the opposite.</a:t>
+            </a:r>
+            <a:endParaRPr lang="en-US" sz="1050" dirty="0"/>
+          </a:p>
+          <a:p>
+            <a:pPr indent="0" marL="0">
+              <a:lnSpc>
+                <a:spcPct val="125000"/>
+              </a:lnSpc>
+              <a:buNone/>
+            </a:pPr>
+            <a:r>
+              <a:rPr lang="en-US" sz="1050" dirty="0">
+                <a:solidFill>
+                  <a:srgbClr val="444444"/>
+                </a:solidFill>
+                <a:latin typeface="Arial" pitchFamily="34" charset="0"/>
+                <a:ea typeface="Arial" pitchFamily="34" charset="-122"/>
+                <a:cs typeface="Arial" pitchFamily="34" charset="-120"/>
+              </a:rPr>
+              <a:t>Added relation — Q04:  “The experiment just before the explosion caused the reactor to exceed its design limits …”</a:t>
+            </a:r>
+            <a:endParaRPr lang="en-US" sz="1050" dirty="0"/>
           </a:p>
         </p:txBody>
       </p:sp>
       <p:sp>
         <p:nvSpPr>
-          <p:cNvPr id="26" name="wm2-v"/>
+          <p:cNvPr id="16" name="bk-haz"/>
+          <p:cNvSpPr/>
+          <p:nvPr/>
+        </p:nvSpPr>
+        <p:spPr>
+          <a:xfrm>
+            <a:off x="6217920" y="3886200"/>
+            <a:ext cx="5394960" cy="2103120"/>
+          </a:xfrm>
+          <a:prstGeom prst="rect">
+            <a:avLst/>
+          </a:prstGeom>
+          <a:solidFill>
+            <a:srgbClr val="FFFFFF"/>
+          </a:solidFill>
+          <a:ln w="9525">
+            <a:solidFill>
+              <a:srgbClr val="DCDCDC"/>
+            </a:solidFill>
+            <a:prstDash val="solid"/>
+          </a:ln>
+        </p:spPr>
+      </p:sp>
+      <p:sp>
+        <p:nvSpPr>
+          <p:cNvPr id="17" name="bk-haz-h"/>
           <p:cNvSpPr txBox="1"/>
           <p:nvPr/>
         </p:nvSpPr>
         <p:spPr>
           <a:xfrm>
-            <a:off x="8107680" y="5321808"/>
-            <a:ext cx="3505200" cy="457200"/>
+            <a:off x="6473952" y="4087368"/>
+            <a:ext cx="4882896" cy="292608"/>
           </a:xfrm>
           <a:prstGeom prst="rect">
             <a:avLst/>
@@ -18619,27 +18023,27 @@
               <a:buNone/>
             </a:pPr>
             <a:r>
-              <a:rPr lang="en-US" sz="1600" b="1" dirty="0">
+              <a:rPr lang="en-US" sz="1350" b="1" dirty="0">
                 <a:solidFill>
-                  <a:srgbClr val="E90802"/>
+                  <a:srgbClr val="1A1A1A"/>
                 </a:solidFill>
               </a:rPr>
-              <a:t>relation ∧ ¬covered</a:t>
+              <a:t>Engineering hazards behind these numbers</a:t>
             </a:r>
-            <a:endParaRPr lang="en-US" sz="1600" dirty="0"/>
+            <a:endParaRPr lang="en-US" sz="1350" dirty="0"/>
           </a:p>
         </p:txBody>
       </p:sp>
       <p:sp>
         <p:nvSpPr>
-          <p:cNvPr id="27" name="wm2-f"/>
+          <p:cNvPr id="18" name="bk-haz-b"/>
           <p:cNvSpPr txBox="1"/>
           <p:nvPr/>
         </p:nvSpPr>
         <p:spPr>
           <a:xfrm>
-            <a:off x="8107680" y="5806440"/>
-            <a:ext cx="3505200" cy="420624"/>
+            <a:off x="6473952" y="4489704"/>
+            <a:ext cx="4882896" cy="1335024"/>
           </a:xfrm>
           <a:prstGeom prst="rect">
             <a:avLst/>
@@ -18648,25 +18052,65 @@
           <a:ln/>
         </p:spPr>
         <p:txBody>
-          <a:bodyPr wrap="square" lIns="0" tIns="0" rIns="0" bIns="0" rtlCol="0" anchor="ctr"/>
+          <a:bodyPr wrap="square" lIns="0" tIns="0" rIns="0" bIns="0" rtlCol="0" anchor="t"/>
           <a:lstStyle/>
           <a:p>
             <a:pPr indent="0" marL="0">
               <a:lnSpc>
-                <a:spcPct val="110000"/>
+                <a:spcPct val="125000"/>
               </a:lnSpc>
               <a:buNone/>
             </a:pPr>
             <a:r>
               <a:rPr lang="en-US" sz="1050" dirty="0">
                 <a:solidFill>
-                  <a:srgbClr val="767676"/>
+                  <a:srgbClr val="444444"/>
                 </a:solidFill>
                 <a:latin typeface="Arial" pitchFamily="34" charset="0"/>
                 <a:ea typeface="Arial" pitchFamily="34" charset="-122"/>
                 <a:cs typeface="Arial" pitchFamily="34" charset="-120"/>
               </a:rPr>
-              <a:t>both judge questions pass</a:t>
+              <a:t>GPU:  two 3B Q4_K_M judges do not fit in 4 GB, so the pipeline drives one judge over the whole fact list, then releases its weights — otherwise every call pays a ~20 s model load.</a:t>
+            </a:r>
+            <a:endParaRPr lang="en-US" sz="1050" dirty="0"/>
+          </a:p>
+          <a:p>
+            <a:pPr indent="0" marL="0">
+              <a:lnSpc>
+                <a:spcPct val="125000"/>
+              </a:lnSpc>
+              <a:buNone/>
+            </a:pPr>
+            <a:r>
+              <a:rPr lang="en-US" sz="1050" dirty="0">
+                <a:solidFill>
+                  <a:srgbClr val="444444"/>
+                </a:solidFill>
+                <a:latin typeface="Arial" pitchFamily="34" charset="0"/>
+                <a:ea typeface="Arial" pitchFamily="34" charset="-122"/>
+                <a:cs typeface="Arial" pitchFamily="34" charset="-120"/>
+              </a:rPr>
+              <a:t>Retrieval:  Wikipedia rate-limits unauthenticated clients and failures are not cached, so without retries a 429 silently becomes “no evidence”. Fixed with retries and backoff.</a:t>
+            </a:r>
+            <a:endParaRPr lang="en-US" sz="1050" dirty="0"/>
+          </a:p>
+          <a:p>
+            <a:pPr indent="0" marL="0">
+              <a:lnSpc>
+                <a:spcPct val="125000"/>
+              </a:lnSpc>
+              <a:buNone/>
+            </a:pPr>
+            <a:r>
+              <a:rPr lang="en-US" sz="1050" dirty="0">
+                <a:solidFill>
+                  <a:srgbClr val="444444"/>
+                </a:solidFill>
+                <a:latin typeface="Arial" pitchFamily="34" charset="0"/>
+                <a:ea typeface="Arial" pitchFamily="34" charset="-122"/>
+                <a:cs typeface="Arial" pitchFamily="34" charset="-120"/>
+              </a:rPr>
+              <a:t>Replay:  every LLM call is cached under hash(model + prompt + parameters).</a:t>
             </a:r>
             <a:endParaRPr lang="en-US" sz="1050" dirty="0"/>
           </a:p>
@@ -18674,7 +18118,7 @@
       </p:sp>
       <p:sp>
         <p:nvSpPr>
-          <p:cNvPr id="28" name="note"/>
+          <p:cNvPr id="19" name="note"/>
           <p:cNvSpPr txBox="1"/>
           <p:nvPr/>
         </p:nvSpPr>
@@ -18705,7 +18149,7 @@
                 <a:ea typeface="Arial" pitchFamily="34" charset="-122"/>
                 <a:cs typeface="Arial" pitchFamily="34" charset="-120"/>
               </a:rPr>
-              <a:t>Kept lexical, as in the paper. A semantic variant is listed as future work rather than silently substituted.</a:t>
+              <a:t>Full write-up in README.md and colab/RESULTS.md. All three runs reproduce from one command with no GPU.</a:t>
             </a:r>
             <a:endParaRPr lang="en-US" sz="950" dirty="0"/>
           </a:p>
@@ -18751,2388 +18195,6 @@
             <a:fld id="{F7021451-1387-4CA6-816F-3879F97B5CBC}" type="slidenum">
               <a:rPr b="0" lang="en-US"/>
               <a:t>16</a:t>
-            </a:fld>
-            <a:endParaRPr lang="en-US"/>
-          </a:p>
-        </p:txBody>
-      </p:sp>
-    </p:spTree>
-  </p:cSld>
-  <p:clrMapOvr>
-    <a:masterClrMapping/>
-  </p:clrMapOvr>
-</p:sld>
-</file>
-
-<file path=ppt/slides/slide17.xml><?xml version="1.0" encoding="utf-8"?>
-<p:sld xmlns:a="http://schemas.openxmlformats.org/drawingml/2006/main" xmlns:r="http://schemas.openxmlformats.org/officeDocument/2006/relationships" xmlns:p="http://schemas.openxmlformats.org/presentationml/2006/main">
-  <p:cSld name="Slide 17">
-    <p:spTree>
-      <p:nvGrpSpPr>
-        <p:cNvPr id="1" name=""/>
-        <p:cNvGrpSpPr/>
-        <p:nvPr/>
-      </p:nvGrpSpPr>
-      <p:grpSpPr>
-        <a:xfrm>
-          <a:off x="0" y="0"/>
-          <a:ext cx="0" cy="0"/>
-          <a:chOff x="0" y="0"/>
-          <a:chExt cx="0" cy="0"/>
-        </a:xfrm>
-      </p:grpSpPr>
-      <p:sp>
-        <p:nvSpPr>
-          <p:cNvPr id="2" name="eyebrow"/>
-          <p:cNvSpPr txBox="1"/>
-          <p:nvPr/>
-        </p:nvSpPr>
-        <p:spPr>
-          <a:xfrm>
-            <a:off x="548640" y="347472"/>
-            <a:ext cx="11064240" cy="237744"/>
-          </a:xfrm>
-          <a:prstGeom prst="rect">
-            <a:avLst/>
-          </a:prstGeom>
-          <a:noFill/>
-          <a:ln/>
-        </p:spPr>
-        <p:txBody>
-          <a:bodyPr wrap="square" lIns="0" tIns="0" rIns="0" bIns="0" rtlCol="0" anchor="ctr"/>
-          <a:lstStyle/>
-          <a:p>
-            <a:pPr indent="0" marL="0">
-              <a:buNone/>
-            </a:pPr>
-            <a:r>
-              <a:rPr lang="en-US" sz="1000" b="1" spc="200" kern="0" dirty="0">
-                <a:solidFill>
-                  <a:srgbClr val="E90802"/>
-                </a:solidFill>
-                <a:latin typeface="Arial" pitchFamily="34" charset="0"/>
-                <a:ea typeface="Arial" pitchFamily="34" charset="-122"/>
-                <a:cs typeface="Arial" pitchFamily="34" charset="-120"/>
-              </a:rPr>
-              <a:t>APPENDIX — NOT PRESENTED</a:t>
-            </a:r>
-            <a:endParaRPr lang="en-US" sz="1000" dirty="0"/>
-          </a:p>
-        </p:txBody>
-      </p:sp>
-      <p:sp>
-        <p:nvSpPr>
-          <p:cNvPr id="3" name="title"/>
-          <p:cNvSpPr txBox="1"/>
-          <p:nvPr/>
-        </p:nvSpPr>
-        <p:spPr>
-          <a:xfrm>
-            <a:off x="548640" y="621792"/>
-            <a:ext cx="11064240" cy="548640"/>
-          </a:xfrm>
-          <a:prstGeom prst="rect">
-            <a:avLst/>
-          </a:prstGeom>
-          <a:noFill/>
-          <a:ln/>
-        </p:spPr>
-        <p:txBody>
-          <a:bodyPr wrap="square" lIns="0" tIns="0" rIns="0" bIns="0" rtlCol="0" anchor="ctr"/>
-          <a:lstStyle/>
-          <a:p>
-            <a:pPr indent="0" marL="0">
-              <a:buNone/>
-            </a:pPr>
-            <a:r>
-              <a:rPr lang="en-US" sz="2700" b="1" dirty="0">
-                <a:solidFill>
-                  <a:srgbClr val="1A1A1A"/>
-                </a:solidFill>
-              </a:rPr>
-              <a:t>What a 3B refiner actually produces</a:t>
-            </a:r>
-            <a:endParaRPr lang="en-US" sz="2700" dirty="0"/>
-          </a:p>
-        </p:txBody>
-      </p:sp>
-      <p:sp>
-        <p:nvSpPr>
-          <p:cNvPr id="4" name="subtitle"/>
-          <p:cNvSpPr txBox="1"/>
-          <p:nvPr/>
-        </p:nvSpPr>
-        <p:spPr>
-          <a:xfrm>
-            <a:off x="548640" y="1188720"/>
-            <a:ext cx="11064240" cy="256032"/>
-          </a:xfrm>
-          <a:prstGeom prst="rect">
-            <a:avLst/>
-          </a:prstGeom>
-          <a:noFill/>
-          <a:ln/>
-        </p:spPr>
-        <p:txBody>
-          <a:bodyPr wrap="square" lIns="0" tIns="0" rIns="0" bIns="0" rtlCol="0" anchor="ctr"/>
-          <a:lstStyle/>
-          <a:p>
-            <a:pPr indent="0" marL="0">
-              <a:buNone/>
-            </a:pPr>
-            <a:r>
-              <a:rPr lang="en-US" sz="1350" dirty="0">
-                <a:solidFill>
-                  <a:srgbClr val="767676"/>
-                </a:solidFill>
-                <a:latin typeface="Arial" pitchFamily="34" charset="0"/>
-                <a:ea typeface="Arial" pitchFamily="34" charset="-122"/>
-                <a:cs typeface="Arial" pitchFamily="34" charset="-120"/>
-              </a:rPr>
-              <a:t>One case that works, one that does not, and one added relation</a:t>
-            </a:r>
-            <a:endParaRPr lang="en-US" sz="1350" dirty="0"/>
-          </a:p>
-        </p:txBody>
-      </p:sp>
-      <p:sp>
-        <p:nvSpPr>
-          <p:cNvPr id="5" name="head-rule"/>
-          <p:cNvSpPr/>
-          <p:nvPr/>
-        </p:nvSpPr>
-        <p:spPr>
-          <a:xfrm>
-            <a:off x="548640" y="1499616"/>
-            <a:ext cx="11064240" cy="10973"/>
-          </a:xfrm>
-          <a:prstGeom prst="rect">
-            <a:avLst/>
-          </a:prstGeom>
-          <a:solidFill>
-            <a:srgbClr val="DCDCDC"/>
-          </a:solidFill>
-          <a:ln w="3175">
-            <a:solidFill>
-              <a:srgbClr val="DCDCDC"/>
-            </a:solidFill>
-            <a:prstDash val="solid"/>
-          </a:ln>
-        </p:spPr>
-      </p:sp>
-      <p:sp>
-        <p:nvSpPr>
-          <p:cNvPr id="6" name="good"/>
-          <p:cNvSpPr/>
-          <p:nvPr/>
-        </p:nvSpPr>
-        <p:spPr>
-          <a:xfrm>
-            <a:off x="548640" y="1600200"/>
-            <a:ext cx="5394960" cy="2834640"/>
-          </a:xfrm>
-          <a:prstGeom prst="rect">
-            <a:avLst/>
-          </a:prstGeom>
-          <a:solidFill>
-            <a:srgbClr val="FFFFFF"/>
-          </a:solidFill>
-          <a:ln w="9525">
-            <a:solidFill>
-              <a:srgbClr val="DCDCDC"/>
-            </a:solidFill>
-            <a:prstDash val="solid"/>
-          </a:ln>
-        </p:spPr>
-      </p:sp>
-      <p:sp>
-        <p:nvSpPr>
-          <p:cNvPr id="7" name="good-edge"/>
-          <p:cNvSpPr/>
-          <p:nvPr/>
-        </p:nvSpPr>
-        <p:spPr>
-          <a:xfrm>
-            <a:off x="548640" y="1600200"/>
-            <a:ext cx="29261" cy="2834640"/>
-          </a:xfrm>
-          <a:prstGeom prst="rect">
-            <a:avLst/>
-          </a:prstGeom>
-          <a:solidFill>
-            <a:srgbClr val="E90802"/>
-          </a:solidFill>
-          <a:ln w="3175">
-            <a:solidFill>
-              <a:srgbClr val="E90802"/>
-            </a:solidFill>
-            <a:prstDash val="solid"/>
-          </a:ln>
-        </p:spPr>
-      </p:sp>
-      <p:sp>
-        <p:nvSpPr>
-          <p:cNvPr id="8" name="good-h"/>
-          <p:cNvSpPr txBox="1"/>
-          <p:nvPr/>
-        </p:nvSpPr>
-        <p:spPr>
-          <a:xfrm>
-            <a:off x="804672" y="1801368"/>
-            <a:ext cx="4882896" cy="292608"/>
-          </a:xfrm>
-          <a:prstGeom prst="rect">
-            <a:avLst/>
-          </a:prstGeom>
-          <a:noFill/>
-          <a:ln/>
-        </p:spPr>
-        <p:txBody>
-          <a:bodyPr wrap="square" lIns="0" tIns="0" rIns="0" bIns="0" rtlCol="0" anchor="ctr"/>
-          <a:lstStyle/>
-          <a:p>
-            <a:pPr indent="0" marL="0">
-              <a:buNone/>
-            </a:pPr>
-            <a:r>
-              <a:rPr lang="en-US" sz="1450" b="1" dirty="0">
-                <a:solidFill>
-                  <a:srgbClr val="E90802"/>
-                </a:solidFill>
-              </a:rPr>
-              <a:t>Works — Q10, ozone layer</a:t>
-            </a:r>
-            <a:endParaRPr lang="en-US" sz="1450" dirty="0"/>
-          </a:p>
-        </p:txBody>
-      </p:sp>
-      <p:sp>
-        <p:nvSpPr>
-          <p:cNvPr id="9" name="good-t"/>
-          <p:cNvSpPr txBox="1"/>
-          <p:nvPr/>
-        </p:nvSpPr>
-        <p:spPr>
-          <a:xfrm>
-            <a:off x="804672" y="2103120"/>
-            <a:ext cx="4882896" cy="2240280"/>
-          </a:xfrm>
-          <a:prstGeom prst="rect">
-            <a:avLst/>
-          </a:prstGeom>
-          <a:noFill/>
-          <a:ln/>
-        </p:spPr>
-        <p:txBody>
-          <a:bodyPr wrap="square" lIns="0" tIns="0" rIns="0" bIns="0" rtlCol="0" anchor="ctr"/>
-          <a:lstStyle/>
-          <a:p>
-            <a:pPr indent="0" marL="0">
-              <a:lnSpc>
-                <a:spcPct val="115000"/>
-              </a:lnSpc>
-              <a:buNone/>
-            </a:pPr>
-            <a:r>
-              <a:rPr lang="en-US" sz="1050" dirty="0">
-                <a:solidFill>
-                  <a:srgbClr val="767676"/>
-                </a:solidFill>
-                <a:latin typeface="Arial" pitchFamily="34" charset="0"/>
-                <a:ea typeface="Arial" pitchFamily="34" charset="-122"/>
-                <a:cs typeface="Arial" pitchFamily="34" charset="-120"/>
-              </a:rPr>
-              <a:t>omitted_condition_or_source</a:t>
-            </a:r>
-            <a:endParaRPr lang="en-US" sz="1150" dirty="0"/>
-          </a:p>
-          <a:p>
-            <a:pPr indent="0" marL="0">
-              <a:lnSpc>
-                <a:spcPct val="115000"/>
-              </a:lnSpc>
-              <a:buNone/>
-            </a:pPr>
-            <a:r>
-              <a:rPr lang="en-US" sz="1150" dirty="0">
-                <a:solidFill>
-                  <a:srgbClr val="444444"/>
-                </a:solidFill>
-                <a:latin typeface="Arial" pitchFamily="34" charset="0"/>
-                <a:ea typeface="Arial" pitchFamily="34" charset="-122"/>
-                <a:cs typeface="Arial" pitchFamily="34" charset="-120"/>
-              </a:rPr>
-              <a:t>before   “These substances are in the atmosphere.”</a:t>
-            </a:r>
-            <a:endParaRPr lang="en-US" sz="1150" dirty="0"/>
-          </a:p>
-          <a:p>
-            <a:pPr indent="0" marL="0">
-              <a:lnSpc>
-                <a:spcPct val="115000"/>
-              </a:lnSpc>
-              <a:buNone/>
-            </a:pPr>
-            <a:r>
-              <a:rPr lang="en-US" sz="1150" dirty="0">
-                <a:solidFill>
-                  <a:srgbClr val="444444"/>
-                </a:solidFill>
-                <a:latin typeface="Arial" pitchFamily="34" charset="0"/>
-                <a:ea typeface="Arial" pitchFamily="34" charset="-122"/>
-                <a:cs typeface="Arial" pitchFamily="34" charset="-120"/>
-              </a:rPr>
-              <a:t>after     “The substances are in the atmosphere since the Montreal Protocol was signed.”</a:t>
-            </a:r>
-            <a:endParaRPr lang="en-US" sz="1150" dirty="0"/>
-          </a:p>
-          <a:p>
-            <a:pPr indent="0" marL="0">
-              <a:lnSpc>
-                <a:spcPct val="115000"/>
-              </a:lnSpc>
-              <a:buNone/>
-            </a:pPr>
-            <a:r>
-              <a:rPr lang="en-US" sz="1150" b="1" dirty="0">
-                <a:solidFill>
-                  <a:srgbClr val="E90802"/>
-                </a:solidFill>
-                <a:latin typeface="Arial" pitchFamily="34" charset="0"/>
-                <a:ea typeface="Arial" pitchFamily="34" charset="-122"/>
-                <a:cs typeface="Arial" pitchFamily="34" charset="-120"/>
-              </a:rPr>
-              <a:t>UNDECIDED → SUPPORTED</a:t>
-            </a:r>
-            <a:endParaRPr lang="en-US" sz="1150" dirty="0"/>
-          </a:p>
-          <a:p>
-            <a:pPr indent="0" marL="0">
-              <a:lnSpc>
-                <a:spcPct val="115000"/>
-              </a:lnSpc>
-              <a:buNone/>
-            </a:pPr>
-            <a:r>
-              <a:rPr lang="en-US" sz="600" dirty="0">
-                <a:solidFill>
-                  <a:srgbClr val="444444"/>
-                </a:solidFill>
-                <a:latin typeface="Arial" pitchFamily="34" charset="0"/>
-                <a:ea typeface="Arial" pitchFamily="34" charset="-122"/>
-                <a:cs typeface="Arial" pitchFamily="34" charset="-120"/>
-              </a:rPr>
-              <a:t> </a:t>
-            </a:r>
-            <a:endParaRPr lang="en-US" sz="1150" dirty="0"/>
-          </a:p>
-          <a:p>
-            <a:pPr indent="0" marL="0">
-              <a:lnSpc>
-                <a:spcPct val="115000"/>
-              </a:lnSpc>
-              <a:buNone/>
-            </a:pPr>
-            <a:r>
-              <a:rPr lang="en-US" sz="1050" dirty="0">
-                <a:solidFill>
-                  <a:srgbClr val="767676"/>
-                </a:solidFill>
-                <a:latin typeface="Arial" pitchFamily="34" charset="0"/>
-                <a:ea typeface="Arial" pitchFamily="34" charset="-122"/>
-                <a:cs typeface="Arial" pitchFamily="34" charset="-120"/>
-              </a:rPr>
-              <a:t>missing_comparison</a:t>
-            </a:r>
-            <a:endParaRPr lang="en-US" sz="1150" dirty="0"/>
-          </a:p>
-          <a:p>
-            <a:pPr indent="0" marL="0">
-              <a:lnSpc>
-                <a:spcPct val="115000"/>
-              </a:lnSpc>
-              <a:buNone/>
-            </a:pPr>
-            <a:r>
-              <a:rPr lang="en-US" sz="1150" dirty="0">
-                <a:solidFill>
-                  <a:srgbClr val="444444"/>
-                </a:solidFill>
-                <a:latin typeface="Arial" pitchFamily="34" charset="0"/>
-                <a:ea typeface="Arial" pitchFamily="34" charset="-122"/>
-                <a:cs typeface="Arial" pitchFamily="34" charset="-120"/>
-              </a:rPr>
-              <a:t>before   “The decrease is in the concentration of substances.”</a:t>
-            </a:r>
-            <a:endParaRPr lang="en-US" sz="1150" dirty="0"/>
-          </a:p>
-          <a:p>
-            <a:pPr indent="0" marL="0">
-              <a:lnSpc>
-                <a:spcPct val="115000"/>
-              </a:lnSpc>
-              <a:buNone/>
-            </a:pPr>
-            <a:r>
-              <a:rPr lang="en-US" sz="1150" dirty="0">
-                <a:solidFill>
-                  <a:srgbClr val="444444"/>
-                </a:solidFill>
-                <a:latin typeface="Arial" pitchFamily="34" charset="0"/>
-                <a:ea typeface="Arial" pitchFamily="34" charset="-122"/>
-                <a:cs typeface="Arial" pitchFamily="34" charset="-120"/>
-              </a:rPr>
-              <a:t>after     “… compared to before the Montreal Protocol.”</a:t>
-            </a:r>
-            <a:endParaRPr lang="en-US" sz="1150" dirty="0"/>
-          </a:p>
-          <a:p>
-            <a:pPr indent="0" marL="0">
-              <a:lnSpc>
-                <a:spcPct val="115000"/>
-              </a:lnSpc>
-              <a:buNone/>
-            </a:pPr>
-            <a:r>
-              <a:rPr lang="en-US" sz="1150" b="1" dirty="0">
-                <a:solidFill>
-                  <a:srgbClr val="E90802"/>
-                </a:solidFill>
-                <a:latin typeface="Arial" pitchFamily="34" charset="0"/>
-                <a:ea typeface="Arial" pitchFamily="34" charset="-122"/>
-                <a:cs typeface="Arial" pitchFamily="34" charset="-120"/>
-              </a:rPr>
-              <a:t>UNDECIDED → SUPPORTED</a:t>
-            </a:r>
-            <a:endParaRPr lang="en-US" sz="1150" dirty="0"/>
-          </a:p>
-        </p:txBody>
-      </p:sp>
-      <p:sp>
-        <p:nvSpPr>
-          <p:cNvPr id="10" name="bad"/>
-          <p:cNvSpPr/>
-          <p:nvPr/>
-        </p:nvSpPr>
-        <p:spPr>
-          <a:xfrm>
-            <a:off x="6217920" y="1600200"/>
-            <a:ext cx="5394960" cy="2834640"/>
-          </a:xfrm>
-          <a:prstGeom prst="rect">
-            <a:avLst/>
-          </a:prstGeom>
-          <a:solidFill>
-            <a:srgbClr val="FFFFFF"/>
-          </a:solidFill>
-          <a:ln w="9525">
-            <a:solidFill>
-              <a:srgbClr val="DCDCDC"/>
-            </a:solidFill>
-            <a:prstDash val="solid"/>
-          </a:ln>
-        </p:spPr>
-      </p:sp>
-      <p:sp>
-        <p:nvSpPr>
-          <p:cNvPr id="11" name="bad-h"/>
-          <p:cNvSpPr txBox="1"/>
-          <p:nvPr/>
-        </p:nvSpPr>
-        <p:spPr>
-          <a:xfrm>
-            <a:off x="6473952" y="1801368"/>
-            <a:ext cx="4882896" cy="292608"/>
-          </a:xfrm>
-          <a:prstGeom prst="rect">
-            <a:avLst/>
-          </a:prstGeom>
-          <a:noFill/>
-          <a:ln/>
-        </p:spPr>
-        <p:txBody>
-          <a:bodyPr wrap="square" lIns="0" tIns="0" rIns="0" bIns="0" rtlCol="0" anchor="ctr"/>
-          <a:lstStyle/>
-          <a:p>
-            <a:pPr indent="0" marL="0">
-              <a:buNone/>
-            </a:pPr>
-            <a:r>
-              <a:rPr lang="en-US" sz="1450" b="1" dirty="0">
-                <a:solidFill>
-                  <a:srgbClr val="1A1A1A"/>
-                </a:solidFill>
-              </a:rPr>
-              <a:t>Fails — Q01, the paper's own example</a:t>
-            </a:r>
-            <a:endParaRPr lang="en-US" sz="1450" dirty="0"/>
-          </a:p>
-        </p:txBody>
-      </p:sp>
-      <p:sp>
-        <p:nvSpPr>
-          <p:cNvPr id="12" name="bad-t"/>
-          <p:cNvSpPr txBox="1"/>
-          <p:nvPr/>
-        </p:nvSpPr>
-        <p:spPr>
-          <a:xfrm>
-            <a:off x="6473952" y="2103120"/>
-            <a:ext cx="4882896" cy="2240280"/>
-          </a:xfrm>
-          <a:prstGeom prst="rect">
-            <a:avLst/>
-          </a:prstGeom>
-          <a:noFill/>
-          <a:ln/>
-        </p:spPr>
-        <p:txBody>
-          <a:bodyPr wrap="square" lIns="0" tIns="0" rIns="0" bIns="0" rtlCol="0" anchor="ctr"/>
-          <a:lstStyle/>
-          <a:p>
-            <a:pPr indent="0" marL="0">
-              <a:lnSpc>
-                <a:spcPct val="115000"/>
-              </a:lnSpc>
-              <a:buNone/>
-            </a:pPr>
-            <a:r>
-              <a:rPr lang="en-US" sz="1050" dirty="0">
-                <a:solidFill>
-                  <a:srgbClr val="767676"/>
-                </a:solidFill>
-                <a:latin typeface="Arial" pitchFamily="34" charset="0"/>
-                <a:ea typeface="Arial" pitchFamily="34" charset="-122"/>
-                <a:cs typeface="Arial" pitchFamily="34" charset="-120"/>
-              </a:rPr>
-              <a:t>the refiner flipped the meaning</a:t>
-            </a:r>
-            <a:endParaRPr lang="en-US" sz="1150" dirty="0"/>
-          </a:p>
-          <a:p>
-            <a:pPr indent="0" marL="0">
-              <a:lnSpc>
-                <a:spcPct val="115000"/>
-              </a:lnSpc>
-              <a:buNone/>
-            </a:pPr>
-            <a:r>
-              <a:rPr lang="en-US" sz="1150" dirty="0">
-                <a:solidFill>
-                  <a:srgbClr val="444444"/>
-                </a:solidFill>
-                <a:latin typeface="Arial" pitchFamily="34" charset="0"/>
-                <a:ea typeface="Arial" pitchFamily="34" charset="-122"/>
-                <a:cs typeface="Arial" pitchFamily="34" charset="-120"/>
-              </a:rPr>
-              <a:t>before   “There was demand for gold as jewelry.”</a:t>
-            </a:r>
-            <a:endParaRPr lang="en-US" sz="1150" dirty="0"/>
-          </a:p>
-          <a:p>
-            <a:pPr indent="0" marL="0">
-              <a:lnSpc>
-                <a:spcPct val="115000"/>
-              </a:lnSpc>
-              <a:buNone/>
-            </a:pPr>
-            <a:r>
-              <a:rPr lang="en-US" sz="1150" dirty="0">
-                <a:solidFill>
-                  <a:srgbClr val="444444"/>
-                </a:solidFill>
-                <a:latin typeface="Arial" pitchFamily="34" charset="0"/>
-                <a:ea typeface="Arial" pitchFamily="34" charset="-122"/>
-                <a:cs typeface="Arial" pitchFamily="34" charset="-120"/>
-              </a:rPr>
-              <a:t>after     “There was no demand for gold as jewelry.”</a:t>
-            </a:r>
-            <a:endParaRPr lang="en-US" sz="1150" dirty="0"/>
-          </a:p>
-          <a:p>
-            <a:pPr indent="0" marL="0">
-              <a:lnSpc>
-                <a:spcPct val="115000"/>
-              </a:lnSpc>
-              <a:buNone/>
-            </a:pPr>
-            <a:r>
-              <a:rPr lang="en-US" sz="1150" dirty="0">
-                <a:solidFill>
-                  <a:srgbClr val="E90802"/>
-                </a:solidFill>
-                <a:latin typeface="Arial" pitchFamily="34" charset="0"/>
-                <a:ea typeface="Arial" pitchFamily="34" charset="-122"/>
-                <a:cs typeface="Arial" pitchFamily="34" charset="-120"/>
-              </a:rPr>
-              <a:t>The hypothetical from the question was pasted into a fact stating the opposite.</a:t>
-            </a:r>
-            <a:endParaRPr lang="en-US" sz="1150" dirty="0"/>
-          </a:p>
-          <a:p>
-            <a:pPr indent="0" marL="0">
-              <a:lnSpc>
-                <a:spcPct val="115000"/>
-              </a:lnSpc>
-              <a:buNone/>
-            </a:pPr>
-            <a:r>
-              <a:rPr lang="en-US" sz="600" dirty="0">
-                <a:solidFill>
-                  <a:srgbClr val="444444"/>
-                </a:solidFill>
-                <a:latin typeface="Arial" pitchFamily="34" charset="0"/>
-                <a:ea typeface="Arial" pitchFamily="34" charset="-122"/>
-                <a:cs typeface="Arial" pitchFamily="34" charset="-120"/>
-              </a:rPr>
-              <a:t> </a:t>
-            </a:r>
-            <a:endParaRPr lang="en-US" sz="1150" dirty="0"/>
-          </a:p>
-          <a:p>
-            <a:pPr indent="0" marL="0">
-              <a:lnSpc>
-                <a:spcPct val="115000"/>
-              </a:lnSpc>
-              <a:buNone/>
-            </a:pPr>
-            <a:r>
-              <a:rPr lang="en-US" sz="1050" dirty="0">
-                <a:solidFill>
-                  <a:srgbClr val="767676"/>
-                </a:solidFill>
-                <a:latin typeface="Arial" pitchFamily="34" charset="0"/>
-                <a:ea typeface="Arial" pitchFamily="34" charset="-122"/>
-                <a:cs typeface="Arial" pitchFamily="34" charset="-120"/>
-              </a:rPr>
-              <a:t>condition attached to the wrong claim</a:t>
-            </a:r>
-            <a:endParaRPr lang="en-US" sz="1150" dirty="0"/>
-          </a:p>
-          <a:p>
-            <a:pPr indent="0" marL="0">
-              <a:lnSpc>
-                <a:spcPct val="115000"/>
-              </a:lnSpc>
-              <a:buNone/>
-            </a:pPr>
-            <a:r>
-              <a:rPr lang="en-US" sz="1150" dirty="0">
-                <a:solidFill>
-                  <a:srgbClr val="444444"/>
-                </a:solidFill>
-                <a:latin typeface="Arial" pitchFamily="34" charset="0"/>
-                <a:ea typeface="Arial" pitchFamily="34" charset="-122"/>
-                <a:cs typeface="Arial" pitchFamily="34" charset="-120"/>
-              </a:rPr>
-              <a:t>“Gold has unique properties of malleability if there was no demand for gold as jewelry.”</a:t>
-            </a:r>
-            <a:endParaRPr lang="en-US" sz="1150" dirty="0"/>
-          </a:p>
-          <a:p>
-            <a:pPr indent="0" marL="0">
-              <a:lnSpc>
-                <a:spcPct val="115000"/>
-              </a:lnSpc>
-              <a:buNone/>
-            </a:pPr>
-            <a:r>
-              <a:rPr lang="en-US" sz="1150" b="1" dirty="0">
-                <a:solidFill>
-                  <a:srgbClr val="E90802"/>
-                </a:solidFill>
-                <a:latin typeface="Arial" pitchFamily="34" charset="0"/>
-                <a:ea typeface="Arial" pitchFamily="34" charset="-122"/>
-                <a:cs typeface="Arial" pitchFamily="34" charset="-120"/>
-              </a:rPr>
-              <a:t>SUPPORTED → UNDECIDED</a:t>
-            </a:r>
-            <a:endParaRPr lang="en-US" sz="1150" dirty="0"/>
-          </a:p>
-        </p:txBody>
-      </p:sp>
-      <p:sp>
-        <p:nvSpPr>
-          <p:cNvPr id="13" name="added"/>
-          <p:cNvSpPr/>
-          <p:nvPr/>
-        </p:nvSpPr>
-        <p:spPr>
-          <a:xfrm>
-            <a:off x="548640" y="4617720"/>
-            <a:ext cx="11064240" cy="1143000"/>
-          </a:xfrm>
-          <a:prstGeom prst="rect">
-            <a:avLst/>
-          </a:prstGeom>
-          <a:solidFill>
-            <a:srgbClr val="F4F4F4"/>
-          </a:solidFill>
-          <a:ln w="9525">
-            <a:solidFill>
-              <a:srgbClr val="F4F4F4"/>
-            </a:solidFill>
-            <a:prstDash val="solid"/>
-          </a:ln>
-        </p:spPr>
-      </p:sp>
-      <p:sp>
-        <p:nvSpPr>
-          <p:cNvPr id="14" name="added-h"/>
-          <p:cNvSpPr txBox="1"/>
-          <p:nvPr/>
-        </p:nvSpPr>
-        <p:spPr>
-          <a:xfrm>
-            <a:off x="804672" y="4818888"/>
-            <a:ext cx="10552176" cy="292608"/>
-          </a:xfrm>
-          <a:prstGeom prst="rect">
-            <a:avLst/>
-          </a:prstGeom>
-          <a:noFill/>
-          <a:ln/>
-        </p:spPr>
-        <p:txBody>
-          <a:bodyPr wrap="square" lIns="0" tIns="0" rIns="0" bIns="0" rtlCol="0" anchor="ctr"/>
-          <a:lstStyle/>
-          <a:p>
-            <a:pPr indent="0" marL="0">
-              <a:buNone/>
-            </a:pPr>
-            <a:r>
-              <a:rPr lang="en-US" sz="1300" b="1" dirty="0">
-                <a:solidFill>
-                  <a:srgbClr val="1A1A1A"/>
-                </a:solidFill>
-              </a:rPr>
-              <a:t>Added relational fact — Q04, Chernobyl, temporal</a:t>
-            </a:r>
-            <a:endParaRPr lang="en-US" sz="1300" dirty="0"/>
-          </a:p>
-        </p:txBody>
-      </p:sp>
-      <p:sp>
-        <p:nvSpPr>
-          <p:cNvPr id="15" name="added-b"/>
-          <p:cNvSpPr txBox="1"/>
-          <p:nvPr/>
-        </p:nvSpPr>
-        <p:spPr>
-          <a:xfrm>
-            <a:off x="804672" y="5221224"/>
-            <a:ext cx="10552176" cy="374904"/>
-          </a:xfrm>
-          <a:prstGeom prst="rect">
-            <a:avLst/>
-          </a:prstGeom>
-          <a:noFill/>
-          <a:ln/>
-        </p:spPr>
-        <p:txBody>
-          <a:bodyPr wrap="square" lIns="0" tIns="0" rIns="0" bIns="0" rtlCol="0" anchor="t"/>
-          <a:lstStyle/>
-          <a:p>
-            <a:pPr indent="0" marL="0">
-              <a:lnSpc>
-                <a:spcPct val="125000"/>
-              </a:lnSpc>
-              <a:buNone/>
-            </a:pPr>
-            <a:r>
-              <a:rPr lang="en-US" sz="1200" dirty="0">
-                <a:solidFill>
-                  <a:srgbClr val="444444"/>
-                </a:solidFill>
-                <a:latin typeface="Arial" pitchFamily="34" charset="0"/>
-                <a:ea typeface="Arial" pitchFamily="34" charset="-122"/>
-                <a:cs typeface="Arial" pitchFamily="34" charset="-120"/>
-              </a:rPr>
-              <a:t>“The experiment just before the explosion caused the reactor to exceed its design limits, resulting in the explosion of hydrogen gas in the pressure vessel.”  The span that produced it was never covered by any extracted fact.</a:t>
-            </a:r>
-            <a:endParaRPr lang="en-US" sz="1200" dirty="0"/>
-          </a:p>
-        </p:txBody>
-      </p:sp>
-      <p:sp>
-        <p:nvSpPr>
-          <p:cNvPr id="16" name="note"/>
-          <p:cNvSpPr txBox="1"/>
-          <p:nvPr/>
-        </p:nvSpPr>
-        <p:spPr>
-          <a:xfrm>
-            <a:off x="548640" y="6291072"/>
-            <a:ext cx="10607040" cy="274320"/>
-          </a:xfrm>
-          <a:prstGeom prst="rect">
-            <a:avLst/>
-          </a:prstGeom>
-          <a:noFill/>
-          <a:ln/>
-        </p:spPr>
-        <p:txBody>
-          <a:bodyPr wrap="square" lIns="0" tIns="0" rIns="0" bIns="0" rtlCol="0" anchor="ctr"/>
-          <a:lstStyle/>
-          <a:p>
-            <a:pPr indent="0" marL="0">
-              <a:buNone/>
-            </a:pPr>
-            <a:r>
-              <a:rPr lang="en-US" sz="950" dirty="0">
-                <a:solidFill>
-                  <a:srgbClr val="767676"/>
-                </a:solidFill>
-                <a:latin typeface="Arial" pitchFamily="34" charset="0"/>
-                <a:ea typeface="Arial" pitchFamily="34" charset="-122"/>
-                <a:cs typeface="Arial" pitchFamily="34" charset="-120"/>
-              </a:rPr>
-              <a:t>6 examples auto-selected into outputs/examples/presentation_examples.json, ranked by label changes and error type.</a:t>
-            </a:r>
-            <a:endParaRPr lang="en-US" sz="950" dirty="0"/>
-          </a:p>
-        </p:txBody>
-      </p:sp>
-      <p:sp>
-        <p:nvSpPr>
-          <p:cNvPr id="25" name="Slide Number Placeholder 0"/>
-          <p:cNvSpPr>
-            <a:spLocks noGrp="1"/>
-          </p:cNvSpPr>
-          <p:nvPr>
-            <p:ph type="sldNum" sz="quarter" idx="4294967295"/>
-          </p:nvPr>
-        </p:nvSpPr>
-        <p:spPr>
-          <a:xfrm>
-            <a:off x="11338560" y="6327648"/>
-            <a:ext cx="365760" cy="256032"/>
-          </a:xfrm>
-          <a:prstGeom prst="rect">
-            <a:avLst/>
-          </a:prstGeom>
-          <a:extLst>
-            <a:ext uri="{C572A759-6A51-4108-AA02-DFA0A04FC94B}">
-              <ma14:wrappingTextBoxFlag xmlns:ma14="http://schemas.microsoft.com/office/mac/drawingml/2011/main" val="0"/>
-            </a:ext>
-          </a:extLst>
-        </p:spPr>
-        <p:txBody>
-          <a:bodyPr/>
-          <a:lstStyle>
-            <a:lvl1pPr>
-              <a:defRPr sz="900">
-                <a:solidFill>
-                  <a:srgbClr val="767676"/>
-                </a:solidFill>
-              </a:defRPr>
-            </a:lvl1pPr>
-          </a:lstStyle>
-          <a:p>
-            <a:pPr algn="r"/>
-            <a:fld id="{F7021451-1387-4CA6-816F-3879F97B5CBC}" type="slidenum">
-              <a:rPr b="0" lang="en-US"/>
-              <a:t>17</a:t>
-            </a:fld>
-            <a:endParaRPr lang="en-US"/>
-          </a:p>
-        </p:txBody>
-      </p:sp>
-    </p:spTree>
-  </p:cSld>
-  <p:clrMapOvr>
-    <a:masterClrMapping/>
-  </p:clrMapOvr>
-</p:sld>
-</file>
-
-<file path=ppt/slides/slide18.xml><?xml version="1.0" encoding="utf-8"?>
-<p:sld xmlns:a="http://schemas.openxmlformats.org/drawingml/2006/main" xmlns:r="http://schemas.openxmlformats.org/officeDocument/2006/relationships" xmlns:p="http://schemas.openxmlformats.org/presentationml/2006/main">
-  <p:cSld name="Slide 18">
-    <p:spTree>
-      <p:nvGrpSpPr>
-        <p:cNvPr id="1" name=""/>
-        <p:cNvGrpSpPr/>
-        <p:nvPr/>
-      </p:nvGrpSpPr>
-      <p:grpSpPr>
-        <a:xfrm>
-          <a:off x="0" y="0"/>
-          <a:ext cx="0" cy="0"/>
-          <a:chOff x="0" y="0"/>
-          <a:chExt cx="0" cy="0"/>
-        </a:xfrm>
-      </p:grpSpPr>
-      <p:sp>
-        <p:nvSpPr>
-          <p:cNvPr id="2" name="eyebrow"/>
-          <p:cNvSpPr txBox="1"/>
-          <p:nvPr/>
-        </p:nvSpPr>
-        <p:spPr>
-          <a:xfrm>
-            <a:off x="548640" y="347472"/>
-            <a:ext cx="11064240" cy="237744"/>
-          </a:xfrm>
-          <a:prstGeom prst="rect">
-            <a:avLst/>
-          </a:prstGeom>
-          <a:noFill/>
-          <a:ln/>
-        </p:spPr>
-        <p:txBody>
-          <a:bodyPr wrap="square" lIns="0" tIns="0" rIns="0" bIns="0" rtlCol="0" anchor="ctr"/>
-          <a:lstStyle/>
-          <a:p>
-            <a:pPr indent="0" marL="0">
-              <a:buNone/>
-            </a:pPr>
-            <a:r>
-              <a:rPr lang="en-US" sz="1000" b="1" spc="200" kern="0" dirty="0">
-                <a:solidFill>
-                  <a:srgbClr val="E90802"/>
-                </a:solidFill>
-                <a:latin typeface="Arial" pitchFamily="34" charset="0"/>
-                <a:ea typeface="Arial" pitchFamily="34" charset="-122"/>
-                <a:cs typeface="Arial" pitchFamily="34" charset="-120"/>
-              </a:rPr>
-              <a:t>APPENDIX — NOT PRESENTED</a:t>
-            </a:r>
-            <a:endParaRPr lang="en-US" sz="1000" dirty="0"/>
-          </a:p>
-        </p:txBody>
-      </p:sp>
-      <p:sp>
-        <p:nvSpPr>
-          <p:cNvPr id="3" name="title"/>
-          <p:cNvSpPr txBox="1"/>
-          <p:nvPr/>
-        </p:nvSpPr>
-        <p:spPr>
-          <a:xfrm>
-            <a:off x="548640" y="621792"/>
-            <a:ext cx="11064240" cy="548640"/>
-          </a:xfrm>
-          <a:prstGeom prst="rect">
-            <a:avLst/>
-          </a:prstGeom>
-          <a:noFill/>
-          <a:ln/>
-        </p:spPr>
-        <p:txBody>
-          <a:bodyPr wrap="square" lIns="0" tIns="0" rIns="0" bIns="0" rtlCol="0" anchor="ctr"/>
-          <a:lstStyle/>
-          <a:p>
-            <a:pPr indent="0" marL="0">
-              <a:buNone/>
-            </a:pPr>
-            <a:r>
-              <a:rPr lang="en-US" sz="2700" b="1" dirty="0">
-                <a:solidFill>
-                  <a:srgbClr val="1A1A1A"/>
-                </a:solidFill>
-              </a:rPr>
-              <a:t>Full ranked list of proposed improvements</a:t>
-            </a:r>
-            <a:endParaRPr lang="en-US" sz="2700" dirty="0"/>
-          </a:p>
-        </p:txBody>
-      </p:sp>
-      <p:sp>
-        <p:nvSpPr>
-          <p:cNvPr id="4" name="subtitle"/>
-          <p:cNvSpPr txBox="1"/>
-          <p:nvPr/>
-        </p:nvSpPr>
-        <p:spPr>
-          <a:xfrm>
-            <a:off x="548640" y="1188720"/>
-            <a:ext cx="11064240" cy="256032"/>
-          </a:xfrm>
-          <a:prstGeom prst="rect">
-            <a:avLst/>
-          </a:prstGeom>
-          <a:noFill/>
-          <a:ln/>
-        </p:spPr>
-        <p:txBody>
-          <a:bodyPr wrap="square" lIns="0" tIns="0" rIns="0" bIns="0" rtlCol="0" anchor="ctr"/>
-          <a:lstStyle/>
-          <a:p>
-            <a:pPr indent="0" marL="0">
-              <a:buNone/>
-            </a:pPr>
-            <a:r>
-              <a:rPr lang="en-US" sz="1350" dirty="0">
-                <a:solidFill>
-                  <a:srgbClr val="767676"/>
-                </a:solidFill>
-                <a:latin typeface="Arial" pitchFamily="34" charset="0"/>
-                <a:ea typeface="Arial" pitchFamily="34" charset="-122"/>
-                <a:cs typeface="Arial" pitchFamily="34" charset="-120"/>
-              </a:rPr>
-              <a:t>The first two items are measured; the rest are proposals</a:t>
-            </a:r>
-            <a:endParaRPr lang="en-US" sz="1350" dirty="0"/>
-          </a:p>
-        </p:txBody>
-      </p:sp>
-      <p:sp>
-        <p:nvSpPr>
-          <p:cNvPr id="5" name="head-rule"/>
-          <p:cNvSpPr/>
-          <p:nvPr/>
-        </p:nvSpPr>
-        <p:spPr>
-          <a:xfrm>
-            <a:off x="548640" y="1499616"/>
-            <a:ext cx="11064240" cy="10973"/>
-          </a:xfrm>
-          <a:prstGeom prst="rect">
-            <a:avLst/>
-          </a:prstGeom>
-          <a:solidFill>
-            <a:srgbClr val="DCDCDC"/>
-          </a:solidFill>
-          <a:ln w="3175">
-            <a:solidFill>
-              <a:srgbClr val="DCDCDC"/>
-            </a:solidFill>
-            <a:prstDash val="solid"/>
-          </a:ln>
-        </p:spPr>
-      </p:sp>
-      <p:sp>
-        <p:nvSpPr>
-          <p:cNvPr id="6" name="a-meas"/>
-          <p:cNvSpPr/>
-          <p:nvPr/>
-        </p:nvSpPr>
-        <p:spPr>
-          <a:xfrm>
-            <a:off x="548640" y="1600200"/>
-            <a:ext cx="5394960" cy="4160520"/>
-          </a:xfrm>
-          <a:prstGeom prst="rect">
-            <a:avLst/>
-          </a:prstGeom>
-          <a:solidFill>
-            <a:srgbClr val="FFFFFF"/>
-          </a:solidFill>
-          <a:ln w="9525">
-            <a:solidFill>
-              <a:srgbClr val="DCDCDC"/>
-            </a:solidFill>
-            <a:prstDash val="solid"/>
-          </a:ln>
-        </p:spPr>
-      </p:sp>
-      <p:sp>
-        <p:nvSpPr>
-          <p:cNvPr id="7" name="a-meas-edge"/>
-          <p:cNvSpPr/>
-          <p:nvPr/>
-        </p:nvSpPr>
-        <p:spPr>
-          <a:xfrm>
-            <a:off x="548640" y="1600200"/>
-            <a:ext cx="29261" cy="4160520"/>
-          </a:xfrm>
-          <a:prstGeom prst="rect">
-            <a:avLst/>
-          </a:prstGeom>
-          <a:solidFill>
-            <a:srgbClr val="E90802"/>
-          </a:solidFill>
-          <a:ln w="3175">
-            <a:solidFill>
-              <a:srgbClr val="E90802"/>
-            </a:solidFill>
-            <a:prstDash val="solid"/>
-          </a:ln>
-        </p:spPr>
-      </p:sp>
-      <p:sp>
-        <p:nvSpPr>
-          <p:cNvPr id="8" name="a-meas-h"/>
-          <p:cNvSpPr txBox="1"/>
-          <p:nvPr/>
-        </p:nvSpPr>
-        <p:spPr>
-          <a:xfrm>
-            <a:off x="804672" y="1801368"/>
-            <a:ext cx="4882896" cy="292608"/>
-          </a:xfrm>
-          <a:prstGeom prst="rect">
-            <a:avLst/>
-          </a:prstGeom>
-          <a:noFill/>
-          <a:ln/>
-        </p:spPr>
-        <p:txBody>
-          <a:bodyPr wrap="square" lIns="0" tIns="0" rIns="0" bIns="0" rtlCol="0" anchor="ctr"/>
-          <a:lstStyle/>
-          <a:p>
-            <a:pPr indent="0" marL="0">
-              <a:buNone/>
-            </a:pPr>
-            <a:r>
-              <a:rPr lang="en-US" sz="1450" b="1" dirty="0">
-                <a:solidFill>
-                  <a:srgbClr val="E90802"/>
-                </a:solidFill>
-              </a:rPr>
-              <a:t>Measurement quality</a:t>
-            </a:r>
-            <a:endParaRPr lang="en-US" sz="1450" dirty="0"/>
-          </a:p>
-        </p:txBody>
-      </p:sp>
-      <p:sp>
-        <p:nvSpPr>
-          <p:cNvPr id="9" name="a-meas-l"/>
-          <p:cNvSpPr txBox="1"/>
-          <p:nvPr/>
-        </p:nvSpPr>
-        <p:spPr>
-          <a:xfrm>
-            <a:off x="804672" y="2148840"/>
-            <a:ext cx="4882896" cy="3474720"/>
-          </a:xfrm>
-          <a:prstGeom prst="rect">
-            <a:avLst/>
-          </a:prstGeom>
-          <a:noFill/>
-          <a:ln/>
-        </p:spPr>
-        <p:txBody>
-          <a:bodyPr wrap="square" lIns="0" tIns="0" rIns="0" bIns="0" rtlCol="0" anchor="ctr"/>
-          <a:lstStyle/>
-          <a:p>
-            <a:pPr marL="342900" indent="-342900">
-              <a:spcAft>
-                <a:spcPts val="800"/>
-              </a:spcAft>
-              <a:buSzPct val="100000"/>
-              <a:buChar char="•"/>
-            </a:pPr>
-            <a:r>
-              <a:rPr lang="en-US" sz="1250" dirty="0">
-                <a:solidFill>
-                  <a:srgbClr val="444444"/>
-                </a:solidFill>
-                <a:latin typeface="Arial" pitchFamily="34" charset="0"/>
-                <a:ea typeface="Arial" pitchFamily="34" charset="-122"/>
-                <a:cs typeface="Arial" pitchFamily="34" charset="-120"/>
-              </a:rPr>
-              <a:t>Stronger local judge — tested, 7–8B on a T4</a:t>
-            </a:r>
-            <a:endParaRPr lang="en-US" sz="1250" dirty="0"/>
-          </a:p>
-          <a:p>
-            <a:pPr marL="342900" indent="-342900">
-              <a:spcAft>
-                <a:spcPts val="800"/>
-              </a:spcAft>
-              <a:buSzPct val="100000"/>
-              <a:buChar char="•"/>
-            </a:pPr>
-            <a:r>
-              <a:rPr lang="en-US" sz="1250" dirty="0">
-                <a:solidFill>
-                  <a:srgbClr val="444444"/>
-                </a:solidFill>
-                <a:latin typeface="Arial" pitchFamily="34" charset="0"/>
-                <a:ea typeface="Arial" pitchFamily="34" charset="-122"/>
-                <a:cs typeface="Arial" pitchFamily="34" charset="-120"/>
-              </a:rPr>
-              <a:t>Majority vote over union — tested, higher precision</a:t>
-            </a:r>
-            <a:endParaRPr lang="en-US" sz="1250" dirty="0"/>
-          </a:p>
-          <a:p>
-            <a:pPr marL="342900" indent="-342900">
-              <a:spcAft>
-                <a:spcPts val="800"/>
-              </a:spcAft>
-              <a:buSzPct val="100000"/>
-              <a:buChar char="•"/>
-            </a:pPr>
-            <a:r>
-              <a:rPr lang="en-US" sz="1250" dirty="0">
-                <a:solidFill>
-                  <a:srgbClr val="444444"/>
-                </a:solidFill>
-                <a:latin typeface="Arial" pitchFamily="34" charset="0"/>
-                <a:ea typeface="Arial" pitchFamily="34" charset="-122"/>
-                <a:cs typeface="Arial" pitchFamily="34" charset="-120"/>
-              </a:rPr>
-              <a:t>Third judge plus self-consistency</a:t>
-            </a:r>
-            <a:endParaRPr lang="en-US" sz="1250" dirty="0"/>
-          </a:p>
-          <a:p>
-            <a:pPr marL="342900" indent="-342900">
-              <a:spcAft>
-                <a:spcPts val="800"/>
-              </a:spcAft>
-              <a:buSzPct val="100000"/>
-              <a:buChar char="•"/>
-            </a:pPr>
-            <a:r>
-              <a:rPr lang="en-US" sz="1250" dirty="0">
-                <a:solidFill>
-                  <a:srgbClr val="444444"/>
-                </a:solidFill>
-                <a:latin typeface="Arial" pitchFamily="34" charset="0"/>
-                <a:ea typeface="Arial" pitchFamily="34" charset="-122"/>
-                <a:cs typeface="Arial" pitchFamily="34" charset="-120"/>
-              </a:rPr>
-              <a:t>Verification ensemble — LLM verdict plus an NLI model</a:t>
-            </a:r>
-            <a:endParaRPr lang="en-US" sz="1250" dirty="0"/>
-          </a:p>
-          <a:p>
-            <a:pPr marL="342900" indent="-342900">
-              <a:spcAft>
-                <a:spcPts val="800"/>
-              </a:spcAft>
-              <a:buSzPct val="100000"/>
-              <a:buChar char="•"/>
-            </a:pPr>
-            <a:r>
-              <a:rPr lang="en-US" sz="1250" dirty="0">
-                <a:solidFill>
-                  <a:srgbClr val="444444"/>
-                </a:solidFill>
-                <a:latin typeface="Arial" pitchFamily="34" charset="0"/>
-                <a:ea typeface="Arial" pitchFamily="34" charset="-122"/>
-                <a:cs typeface="Arial" pitchFamily="34" charset="-120"/>
-              </a:rPr>
-              <a:t>Evidence-aware verification — name the span, then judge</a:t>
-            </a:r>
-            <a:endParaRPr lang="en-US" sz="1250" dirty="0"/>
-          </a:p>
-          <a:p>
-            <a:pPr marL="342900" indent="-342900">
-              <a:spcAft>
-                <a:spcPts val="800"/>
-              </a:spcAft>
-              <a:buSzPct val="100000"/>
-              <a:buChar char="•"/>
-            </a:pPr>
-            <a:r>
-              <a:rPr lang="en-US" sz="1250" dirty="0">
-                <a:solidFill>
-                  <a:srgbClr val="444444"/>
-                </a:solidFill>
-                <a:latin typeface="Arial" pitchFamily="34" charset="0"/>
-                <a:ea typeface="Arial" pitchFamily="34" charset="-122"/>
-                <a:cs typeface="Arial" pitchFamily="34" charset="-120"/>
-              </a:rPr>
-              <a:t>One fixed entailment model for recall across all runs</a:t>
-            </a:r>
-            <a:endParaRPr lang="en-US" sz="1250" dirty="0"/>
-          </a:p>
-          <a:p>
-            <a:pPr marL="342900" indent="-342900">
-              <a:spcAft>
-                <a:spcPts val="800"/>
-              </a:spcAft>
-              <a:buSzPct val="100000"/>
-              <a:buChar char="•"/>
-            </a:pPr>
-            <a:r>
-              <a:rPr lang="en-US" sz="1250" dirty="0">
-                <a:solidFill>
-                  <a:srgbClr val="444444"/>
-                </a:solidFill>
-                <a:latin typeface="Arial" pitchFamily="34" charset="0"/>
-                <a:ea typeface="Arial" pitchFamily="34" charset="-122"/>
-                <a:cs typeface="Arial" pitchFamily="34" charset="-120"/>
-              </a:rPr>
-              <a:t>Better reference sets — several answers, human verification</a:t>
-            </a:r>
-            <a:endParaRPr lang="en-US" sz="1250" dirty="0"/>
-          </a:p>
-          <a:p>
-            <a:pPr marL="342900" indent="-342900">
-              <a:spcAft>
-                <a:spcPts val="800"/>
-              </a:spcAft>
-              <a:buSzPct val="100000"/>
-              <a:buChar char="•"/>
-            </a:pPr>
-            <a:r>
-              <a:rPr lang="en-US" sz="1250" dirty="0">
-                <a:solidFill>
-                  <a:srgbClr val="444444"/>
-                </a:solidFill>
-                <a:latin typeface="Arial" pitchFamily="34" charset="0"/>
-                <a:ea typeface="Arial" pitchFamily="34" charset="-122"/>
-                <a:cs typeface="Arial" pitchFamily="34" charset="-120"/>
-              </a:rPr>
-              <a:t>Calibration of the three label thresholds</a:t>
-            </a:r>
-            <a:endParaRPr lang="en-US" sz="1250" dirty="0"/>
-          </a:p>
-        </p:txBody>
-      </p:sp>
-      <p:sp>
-        <p:nvSpPr>
-          <p:cNvPr id="10" name="a-econ"/>
-          <p:cNvSpPr/>
-          <p:nvPr/>
-        </p:nvSpPr>
-        <p:spPr>
-          <a:xfrm>
-            <a:off x="6217920" y="1600200"/>
-            <a:ext cx="5394960" cy="4160520"/>
-          </a:xfrm>
-          <a:prstGeom prst="rect">
-            <a:avLst/>
-          </a:prstGeom>
-          <a:solidFill>
-            <a:srgbClr val="FFFFFF"/>
-          </a:solidFill>
-          <a:ln w="9525">
-            <a:solidFill>
-              <a:srgbClr val="DCDCDC"/>
-            </a:solidFill>
-            <a:prstDash val="solid"/>
-          </a:ln>
-        </p:spPr>
-      </p:sp>
-      <p:sp>
-        <p:nvSpPr>
-          <p:cNvPr id="11" name="a-econ-h"/>
-          <p:cNvSpPr txBox="1"/>
-          <p:nvPr/>
-        </p:nvSpPr>
-        <p:spPr>
-          <a:xfrm>
-            <a:off x="6473952" y="1801368"/>
-            <a:ext cx="4882896" cy="292608"/>
-          </a:xfrm>
-          <a:prstGeom prst="rect">
-            <a:avLst/>
-          </a:prstGeom>
-          <a:noFill/>
-          <a:ln/>
-        </p:spPr>
-        <p:txBody>
-          <a:bodyPr wrap="square" lIns="0" tIns="0" rIns="0" bIns="0" rtlCol="0" anchor="ctr"/>
-          <a:lstStyle/>
-          <a:p>
-            <a:pPr indent="0" marL="0">
-              <a:buNone/>
-            </a:pPr>
-            <a:r>
-              <a:rPr lang="en-US" sz="1450" b="1" dirty="0">
-                <a:solidFill>
-                  <a:srgbClr val="1A1A1A"/>
-                </a:solidFill>
-              </a:rPr>
-              <a:t>Retrieval, cost and coverage</a:t>
-            </a:r>
-            <a:endParaRPr lang="en-US" sz="1450" dirty="0"/>
-          </a:p>
-        </p:txBody>
-      </p:sp>
-      <p:sp>
-        <p:nvSpPr>
-          <p:cNvPr id="12" name="a-econ-l"/>
-          <p:cNvSpPr txBox="1"/>
-          <p:nvPr/>
-        </p:nvSpPr>
-        <p:spPr>
-          <a:xfrm>
-            <a:off x="6473952" y="2148840"/>
-            <a:ext cx="4882896" cy="3474720"/>
-          </a:xfrm>
-          <a:prstGeom prst="rect">
-            <a:avLst/>
-          </a:prstGeom>
-          <a:noFill/>
-          <a:ln/>
-        </p:spPr>
-        <p:txBody>
-          <a:bodyPr wrap="square" lIns="0" tIns="0" rIns="0" bIns="0" rtlCol="0" anchor="ctr"/>
-          <a:lstStyle/>
-          <a:p>
-            <a:pPr marL="342900" indent="-342900">
-              <a:spcAft>
-                <a:spcPts val="800"/>
-              </a:spcAft>
-              <a:buSzPct val="100000"/>
-              <a:buChar char="•"/>
-            </a:pPr>
-            <a:r>
-              <a:rPr lang="en-US" sz="1250" dirty="0">
-                <a:solidFill>
-                  <a:srgbClr val="444444"/>
-                </a:solidFill>
-                <a:latin typeface="Arial" pitchFamily="34" charset="0"/>
-                <a:ea typeface="Arial" pitchFamily="34" charset="-122"/>
-                <a:cs typeface="Arial" pitchFamily="34" charset="-120"/>
-              </a:rPr>
-              <a:t>Query expansion, dense embeddings, cross-encoder reranking</a:t>
-            </a:r>
-            <a:endParaRPr lang="en-US" sz="1250" dirty="0"/>
-          </a:p>
-          <a:p>
-            <a:pPr marL="342900" indent="-342900">
-              <a:spcAft>
-                <a:spcPts val="800"/>
-              </a:spcAft>
-              <a:buSzPct val="100000"/>
-              <a:buChar char="•"/>
-            </a:pPr>
-            <a:r>
-              <a:rPr lang="en-US" sz="1250" dirty="0">
-                <a:solidFill>
-                  <a:srgbClr val="444444"/>
-                </a:solidFill>
-                <a:latin typeface="Arial" pitchFamily="34" charset="0"/>
-                <a:ea typeface="Arial" pitchFamily="34" charset="-122"/>
-                <a:cs typeface="Arial" pitchFamily="34" charset="-120"/>
-              </a:rPr>
-              <a:t>Iterative refinement, maximum two passes</a:t>
-            </a:r>
-            <a:endParaRPr lang="en-US" sz="1250" dirty="0"/>
-          </a:p>
-          <a:p>
-            <a:pPr marL="342900" indent="-342900">
-              <a:spcAft>
-                <a:spcPts val="800"/>
-              </a:spcAft>
-              <a:buSzPct val="100000"/>
-              <a:buChar char="•"/>
-            </a:pPr>
-            <a:r>
-              <a:rPr lang="en-US" sz="1250" dirty="0">
-                <a:solidFill>
-                  <a:srgbClr val="444444"/>
-                </a:solidFill>
-                <a:latin typeface="Arial" pitchFamily="34" charset="0"/>
-                <a:ea typeface="Arial" pitchFamily="34" charset="-122"/>
-                <a:cs typeface="Arial" pitchFamily="34" charset="-120"/>
-              </a:rPr>
-              <a:t>Hybrid rule + LLM relation detection (implemented, off)</a:t>
-            </a:r>
-            <a:endParaRPr lang="en-US" sz="1250" dirty="0"/>
-          </a:p>
-          <a:p>
-            <a:pPr marL="342900" indent="-342900">
-              <a:spcAft>
-                <a:spcPts val="800"/>
-              </a:spcAft>
-              <a:buSzPct val="100000"/>
-              <a:buChar char="•"/>
-            </a:pPr>
-            <a:r>
-              <a:rPr lang="en-US" sz="1250" dirty="0">
-                <a:solidFill>
-                  <a:srgbClr val="444444"/>
-                </a:solidFill>
-                <a:latin typeface="Arial" pitchFamily="34" charset="0"/>
-                <a:ea typeface="Arial" pitchFamily="34" charset="-122"/>
-                <a:cs typeface="Arial" pitchFamily="34" charset="-120"/>
-              </a:rPr>
-              <a:t>Adaptive evidence count, driven by uncertainty</a:t>
-            </a:r>
-            <a:endParaRPr lang="en-US" sz="1250" dirty="0"/>
-          </a:p>
-          <a:p>
-            <a:pPr marL="342900" indent="-342900">
-              <a:spcAft>
-                <a:spcPts val="800"/>
-              </a:spcAft>
-              <a:buSzPct val="100000"/>
-              <a:buChar char="•"/>
-            </a:pPr>
-            <a:r>
-              <a:rPr lang="en-US" sz="1250" dirty="0">
-                <a:solidFill>
-                  <a:srgbClr val="444444"/>
-                </a:solidFill>
-                <a:latin typeface="Arial" pitchFamily="34" charset="0"/>
-                <a:ea typeface="Arial" pitchFamily="34" charset="-122"/>
-                <a:cs typeface="Arial" pitchFamily="34" charset="-120"/>
-              </a:rPr>
-              <a:t>Knowledge-source diversification, routed by claim type</a:t>
-            </a:r>
-            <a:endParaRPr lang="en-US" sz="1250" dirty="0"/>
-          </a:p>
-          <a:p>
-            <a:pPr marL="342900" indent="-342900">
-              <a:spcAft>
-                <a:spcPts val="800"/>
-              </a:spcAft>
-              <a:buSzPct val="100000"/>
-              <a:buChar char="•"/>
-            </a:pPr>
-            <a:r>
-              <a:rPr lang="en-US" sz="1250" dirty="0">
-                <a:solidFill>
-                  <a:srgbClr val="444444"/>
-                </a:solidFill>
-                <a:latin typeface="Arial" pitchFamily="34" charset="0"/>
-                <a:ea typeface="Arial" pitchFamily="34" charset="-122"/>
-                <a:cs typeface="Arial" pitchFamily="34" charset="-120"/>
-              </a:rPr>
-              <a:t>Claim difficulty routing — small model, then large</a:t>
-            </a:r>
-            <a:endParaRPr lang="en-US" sz="1250" dirty="0"/>
-          </a:p>
-          <a:p>
-            <a:pPr marL="342900" indent="-342900">
-              <a:spcAft>
-                <a:spcPts val="800"/>
-              </a:spcAft>
-              <a:buSzPct val="100000"/>
-              <a:buChar char="•"/>
-            </a:pPr>
-            <a:r>
-              <a:rPr lang="en-US" sz="1250" dirty="0">
-                <a:solidFill>
-                  <a:srgbClr val="444444"/>
-                </a:solidFill>
-                <a:latin typeface="Arial" pitchFamily="34" charset="0"/>
-                <a:ea typeface="Arial" pitchFamily="34" charset="-122"/>
-                <a:cs typeface="Arial" pitchFamily="34" charset="-120"/>
-              </a:rPr>
-              <a:t>Fine-tuned detector; distillation from a large open teacher</a:t>
-            </a:r>
-            <a:endParaRPr lang="en-US" sz="1250" dirty="0"/>
-          </a:p>
-          <a:p>
-            <a:pPr marL="342900" indent="-342900">
-              <a:spcAft>
-                <a:spcPts val="800"/>
-              </a:spcAft>
-              <a:buSzPct val="100000"/>
-              <a:buChar char="•"/>
-            </a:pPr>
-            <a:r>
-              <a:rPr lang="en-US" sz="1250" dirty="0">
-                <a:solidFill>
-                  <a:srgbClr val="444444"/>
-                </a:solidFill>
-                <a:latin typeface="Arial" pitchFamily="34" charset="0"/>
-                <a:ea typeface="Arial" pitchFamily="34" charset="-122"/>
-                <a:cs typeface="Arial" pitchFamily="34" charset="-120"/>
-              </a:rPr>
-              <a:t>The remaining baselines: FactScore, FactCheck-GPT, VERIFY</a:t>
-            </a:r>
-            <a:endParaRPr lang="en-US" sz="1250" dirty="0"/>
-          </a:p>
-        </p:txBody>
-      </p:sp>
-      <p:sp>
-        <p:nvSpPr>
-          <p:cNvPr id="13" name="note"/>
-          <p:cNvSpPr txBox="1"/>
-          <p:nvPr/>
-        </p:nvSpPr>
-        <p:spPr>
-          <a:xfrm>
-            <a:off x="548640" y="6291072"/>
-            <a:ext cx="10607040" cy="274320"/>
-          </a:xfrm>
-          <a:prstGeom prst="rect">
-            <a:avLst/>
-          </a:prstGeom>
-          <a:noFill/>
-          <a:ln/>
-        </p:spPr>
-        <p:txBody>
-          <a:bodyPr wrap="square" lIns="0" tIns="0" rIns="0" bIns="0" rtlCol="0" anchor="ctr"/>
-          <a:lstStyle/>
-          <a:p>
-            <a:pPr indent="0" marL="0">
-              <a:buNone/>
-            </a:pPr>
-            <a:r>
-              <a:rPr lang="en-US" sz="950" dirty="0">
-                <a:solidFill>
-                  <a:srgbClr val="767676"/>
-                </a:solidFill>
-                <a:latin typeface="Arial" pitchFamily="34" charset="0"/>
-                <a:ea typeface="Arial" pitchFamily="34" charset="-122"/>
-                <a:cs typeface="Arial" pitchFamily="34" charset="-120"/>
-              </a:rPr>
-              <a:t>Each proposal names the metric it is expected to move. None of them is claimed as a result.</a:t>
-            </a:r>
-            <a:endParaRPr lang="en-US" sz="950" dirty="0"/>
-          </a:p>
-        </p:txBody>
-      </p:sp>
-      <p:sp>
-        <p:nvSpPr>
-          <p:cNvPr id="25" name="Slide Number Placeholder 0"/>
-          <p:cNvSpPr>
-            <a:spLocks noGrp="1"/>
-          </p:cNvSpPr>
-          <p:nvPr>
-            <p:ph type="sldNum" sz="quarter" idx="4294967295"/>
-          </p:nvPr>
-        </p:nvSpPr>
-        <p:spPr>
-          <a:xfrm>
-            <a:off x="11338560" y="6327648"/>
-            <a:ext cx="365760" cy="256032"/>
-          </a:xfrm>
-          <a:prstGeom prst="rect">
-            <a:avLst/>
-          </a:prstGeom>
-          <a:extLst>
-            <a:ext uri="{C572A759-6A51-4108-AA02-DFA0A04FC94B}">
-              <ma14:wrappingTextBoxFlag xmlns:ma14="http://schemas.microsoft.com/office/mac/drawingml/2011/main" val="0"/>
-            </a:ext>
-          </a:extLst>
-        </p:spPr>
-        <p:txBody>
-          <a:bodyPr/>
-          <a:lstStyle>
-            <a:lvl1pPr>
-              <a:defRPr sz="900">
-                <a:solidFill>
-                  <a:srgbClr val="767676"/>
-                </a:solidFill>
-              </a:defRPr>
-            </a:lvl1pPr>
-          </a:lstStyle>
-          <a:p>
-            <a:pPr algn="r"/>
-            <a:fld id="{F7021451-1387-4CA6-816F-3879F97B5CBC}" type="slidenum">
-              <a:rPr b="0" lang="en-US"/>
-              <a:t>18</a:t>
-            </a:fld>
-            <a:endParaRPr lang="en-US"/>
-          </a:p>
-        </p:txBody>
-      </p:sp>
-    </p:spTree>
-  </p:cSld>
-  <p:clrMapOvr>
-    <a:masterClrMapping/>
-  </p:clrMapOvr>
-</p:sld>
-</file>
-
-<file path=ppt/slides/slide19.xml><?xml version="1.0" encoding="utf-8"?>
-<p:sld xmlns:a="http://schemas.openxmlformats.org/drawingml/2006/main" xmlns:r="http://schemas.openxmlformats.org/officeDocument/2006/relationships" xmlns:p="http://schemas.openxmlformats.org/presentationml/2006/main">
-  <p:cSld name="Slide 19">
-    <p:spTree>
-      <p:nvGrpSpPr>
-        <p:cNvPr id="1" name=""/>
-        <p:cNvGrpSpPr/>
-        <p:nvPr/>
-      </p:nvGrpSpPr>
-      <p:grpSpPr>
-        <a:xfrm>
-          <a:off x="0" y="0"/>
-          <a:ext cx="0" cy="0"/>
-          <a:chOff x="0" y="0"/>
-          <a:chExt cx="0" cy="0"/>
-        </a:xfrm>
-      </p:grpSpPr>
-      <p:sp>
-        <p:nvSpPr>
-          <p:cNvPr id="2" name="eyebrow"/>
-          <p:cNvSpPr txBox="1"/>
-          <p:nvPr/>
-        </p:nvSpPr>
-        <p:spPr>
-          <a:xfrm>
-            <a:off x="548640" y="347472"/>
-            <a:ext cx="11064240" cy="237744"/>
-          </a:xfrm>
-          <a:prstGeom prst="rect">
-            <a:avLst/>
-          </a:prstGeom>
-          <a:noFill/>
-          <a:ln/>
-        </p:spPr>
-        <p:txBody>
-          <a:bodyPr wrap="square" lIns="0" tIns="0" rIns="0" bIns="0" rtlCol="0" anchor="ctr"/>
-          <a:lstStyle/>
-          <a:p>
-            <a:pPr indent="0" marL="0">
-              <a:buNone/>
-            </a:pPr>
-            <a:r>
-              <a:rPr lang="en-US" sz="1000" b="1" spc="200" kern="0" dirty="0">
-                <a:solidFill>
-                  <a:srgbClr val="E90802"/>
-                </a:solidFill>
-                <a:latin typeface="Arial" pitchFamily="34" charset="0"/>
-                <a:ea typeface="Arial" pitchFamily="34" charset="-122"/>
-                <a:cs typeface="Arial" pitchFamily="34" charset="-120"/>
-              </a:rPr>
-              <a:t>APPENDIX — NOT PRESENTED</a:t>
-            </a:r>
-            <a:endParaRPr lang="en-US" sz="1000" dirty="0"/>
-          </a:p>
-        </p:txBody>
-      </p:sp>
-      <p:sp>
-        <p:nvSpPr>
-          <p:cNvPr id="3" name="title"/>
-          <p:cNvSpPr txBox="1"/>
-          <p:nvPr/>
-        </p:nvSpPr>
-        <p:spPr>
-          <a:xfrm>
-            <a:off x="548640" y="621792"/>
-            <a:ext cx="11064240" cy="548640"/>
-          </a:xfrm>
-          <a:prstGeom prst="rect">
-            <a:avLst/>
-          </a:prstGeom>
-          <a:noFill/>
-          <a:ln/>
-        </p:spPr>
-        <p:txBody>
-          <a:bodyPr wrap="square" lIns="0" tIns="0" rIns="0" bIns="0" rtlCol="0" anchor="ctr"/>
-          <a:lstStyle/>
-          <a:p>
-            <a:pPr indent="0" marL="0">
-              <a:buNone/>
-            </a:pPr>
-            <a:r>
-              <a:rPr lang="en-US" sz="2700" b="1" dirty="0">
-                <a:solidFill>
-                  <a:srgbClr val="1A1A1A"/>
-                </a:solidFill>
-              </a:rPr>
-              <a:t>Run B, and known hazards</a:t>
-            </a:r>
-            <a:endParaRPr lang="en-US" sz="2700" dirty="0"/>
-          </a:p>
-        </p:txBody>
-      </p:sp>
-      <p:sp>
-        <p:nvSpPr>
-          <p:cNvPr id="4" name="subtitle"/>
-          <p:cNvSpPr txBox="1"/>
-          <p:nvPr/>
-        </p:nvSpPr>
-        <p:spPr>
-          <a:xfrm>
-            <a:off x="548640" y="1188720"/>
-            <a:ext cx="11064240" cy="256032"/>
-          </a:xfrm>
-          <a:prstGeom prst="rect">
-            <a:avLst/>
-          </a:prstGeom>
-          <a:noFill/>
-          <a:ln/>
-        </p:spPr>
-        <p:txBody>
-          <a:bodyPr wrap="square" lIns="0" tIns="0" rIns="0" bIns="0" rtlCol="0" anchor="ctr"/>
-          <a:lstStyle/>
-          <a:p>
-            <a:pPr indent="0" marL="0">
-              <a:buNone/>
-            </a:pPr>
-            <a:r>
-              <a:rPr lang="en-US" sz="1350" dirty="0">
-                <a:solidFill>
-                  <a:srgbClr val="767676"/>
-                </a:solidFill>
-                <a:latin typeface="Arial" pitchFamily="34" charset="0"/>
-                <a:ea typeface="Arial" pitchFamily="34" charset="-122"/>
-                <a:cs typeface="Arial" pitchFamily="34" charset="-120"/>
-              </a:rPr>
-              <a:t>The uncontrolled run, and the engineering problems behind these numbers</a:t>
-            </a:r>
-            <a:endParaRPr lang="en-US" sz="1350" dirty="0"/>
-          </a:p>
-        </p:txBody>
-      </p:sp>
-      <p:sp>
-        <p:nvSpPr>
-          <p:cNvPr id="5" name="head-rule"/>
-          <p:cNvSpPr/>
-          <p:nvPr/>
-        </p:nvSpPr>
-        <p:spPr>
-          <a:xfrm>
-            <a:off x="548640" y="1499616"/>
-            <a:ext cx="11064240" cy="10973"/>
-          </a:xfrm>
-          <a:prstGeom prst="rect">
-            <a:avLst/>
-          </a:prstGeom>
-          <a:solidFill>
-            <a:srgbClr val="DCDCDC"/>
-          </a:solidFill>
-          <a:ln w="3175">
-            <a:solidFill>
-              <a:srgbClr val="DCDCDC"/>
-            </a:solidFill>
-            <a:prstDash val="solid"/>
-          </a:ln>
-        </p:spPr>
-      </p:sp>
-      <p:sp>
-        <p:nvSpPr>
-          <p:cNvPr id="6" name="expb"/>
-          <p:cNvSpPr/>
-          <p:nvPr/>
-        </p:nvSpPr>
-        <p:spPr>
-          <a:xfrm>
-            <a:off x="548640" y="1600200"/>
-            <a:ext cx="11064240" cy="1783080"/>
-          </a:xfrm>
-          <a:prstGeom prst="rect">
-            <a:avLst/>
-          </a:prstGeom>
-          <a:solidFill>
-            <a:srgbClr val="F4F4F4"/>
-          </a:solidFill>
-          <a:ln w="9525">
-            <a:solidFill>
-              <a:srgbClr val="F4F4F4"/>
-            </a:solidFill>
-            <a:prstDash val="solid"/>
-          </a:ln>
-        </p:spPr>
-      </p:sp>
-      <p:sp>
-        <p:nvSpPr>
-          <p:cNvPr id="7" name="expb-edge"/>
-          <p:cNvSpPr/>
-          <p:nvPr/>
-        </p:nvSpPr>
-        <p:spPr>
-          <a:xfrm>
-            <a:off x="548640" y="1600200"/>
-            <a:ext cx="29261" cy="1783080"/>
-          </a:xfrm>
-          <a:prstGeom prst="rect">
-            <a:avLst/>
-          </a:prstGeom>
-          <a:solidFill>
-            <a:srgbClr val="E90802"/>
-          </a:solidFill>
-          <a:ln w="3175">
-            <a:solidFill>
-              <a:srgbClr val="E90802"/>
-            </a:solidFill>
-            <a:prstDash val="solid"/>
-          </a:ln>
-        </p:spPr>
-      </p:sp>
-      <p:sp>
-        <p:nvSpPr>
-          <p:cNvPr id="8" name="expb-h"/>
-          <p:cNvSpPr txBox="1"/>
-          <p:nvPr/>
-        </p:nvSpPr>
-        <p:spPr>
-          <a:xfrm>
-            <a:off x="804672" y="1801368"/>
-            <a:ext cx="10552176" cy="292608"/>
-          </a:xfrm>
-          <a:prstGeom prst="rect">
-            <a:avLst/>
-          </a:prstGeom>
-          <a:noFill/>
-          <a:ln/>
-        </p:spPr>
-        <p:txBody>
-          <a:bodyPr wrap="square" lIns="0" tIns="0" rIns="0" bIns="0" rtlCol="0" anchor="ctr"/>
-          <a:lstStyle/>
-          <a:p>
-            <a:pPr indent="0" marL="0">
-              <a:buNone/>
-            </a:pPr>
-            <a:r>
-              <a:rPr lang="en-US" sz="1350" b="1" dirty="0">
-                <a:solidFill>
-                  <a:srgbClr val="E90802"/>
-                </a:solidFill>
-              </a:rPr>
-              <a:t>Run B — the whole pipeline at 7B, including the extractor</a:t>
-            </a:r>
-            <a:endParaRPr lang="en-US" sz="1350" dirty="0"/>
-          </a:p>
-        </p:txBody>
-      </p:sp>
-      <p:sp>
-        <p:nvSpPr>
-          <p:cNvPr id="9" name="expb-b"/>
-          <p:cNvSpPr txBox="1"/>
-          <p:nvPr/>
-        </p:nvSpPr>
-        <p:spPr>
-          <a:xfrm>
-            <a:off x="804672" y="2203704"/>
-            <a:ext cx="10552176" cy="1014984"/>
-          </a:xfrm>
-          <a:prstGeom prst="rect">
-            <a:avLst/>
-          </a:prstGeom>
-          <a:noFill/>
-          <a:ln/>
-        </p:spPr>
-        <p:txBody>
-          <a:bodyPr wrap="square" lIns="0" tIns="0" rIns="0" bIns="0" rtlCol="0" anchor="t"/>
-          <a:lstStyle/>
-          <a:p>
-            <a:pPr indent="0" marL="0">
-              <a:lnSpc>
-                <a:spcPct val="125000"/>
-              </a:lnSpc>
-              <a:buNone/>
-            </a:pPr>
-            <a:r>
-              <a:rPr lang="en-US" sz="1150" dirty="0">
-                <a:solidFill>
-                  <a:srgbClr val="444444"/>
-                </a:solidFill>
-                <a:latin typeface="Arial" pitchFamily="34" charset="0"/>
-                <a:ea typeface="Arial" pitchFamily="34" charset="-122"/>
-                <a:cs typeface="Arial" pitchFamily="34" charset="-120"/>
-              </a:rPr>
-              <a:t>Baseline: 15.92 facts per answer against 21.50, incomplete rate 0.319, precision 0.5050. Refinement then costs far less precision (−0.025, against −0.118 in run A).</a:t>
-            </a:r>
-            <a:endParaRPr lang="en-US" sz="1150" dirty="0"/>
-          </a:p>
-          <a:p>
-            <a:pPr indent="0" marL="0">
-              <a:lnSpc>
-                <a:spcPct val="125000"/>
-              </a:lnSpc>
-              <a:buNone/>
-            </a:pPr>
-            <a:r>
-              <a:rPr lang="en-US" sz="1150" dirty="0">
-                <a:solidFill>
-                  <a:srgbClr val="444444"/>
-                </a:solidFill>
-                <a:latin typeface="Arial" pitchFamily="34" charset="0"/>
-                <a:ea typeface="Arial" pitchFamily="34" charset="-122"/>
-                <a:cs typeface="Arial" pitchFamily="34" charset="-120"/>
-              </a:rPr>
-              <a:t>A stronger extractor writes fewer, coarser, more self-contained facts, so there is less to repair — the same trade the paper notes for VERIFY (18.5 facts per response against VeriFact's 32.3).</a:t>
-            </a:r>
-            <a:endParaRPr lang="en-US" sz="1150" dirty="0"/>
-          </a:p>
-          <a:p>
-            <a:pPr indent="0" marL="0">
-              <a:lnSpc>
-                <a:spcPct val="125000"/>
-              </a:lnSpc>
-              <a:buNone/>
-            </a:pPr>
-            <a:r>
-              <a:rPr lang="en-US" sz="1150" dirty="0">
-                <a:solidFill>
-                  <a:srgbClr val="444444"/>
-                </a:solidFill>
-                <a:latin typeface="Arial" pitchFamily="34" charset="0"/>
-                <a:ea typeface="Arial" pitchFamily="34" charset="-122"/>
-                <a:cs typeface="Arial" pitchFamily="34" charset="-120"/>
-              </a:rPr>
-              <a:t>B changed the extractor, the judge, the verifier and the recall entailment model at once, so its columns read only against its own baseline.</a:t>
-            </a:r>
-            <a:endParaRPr lang="en-US" sz="1150" dirty="0"/>
-          </a:p>
-        </p:txBody>
-      </p:sp>
-      <p:sp>
-        <p:nvSpPr>
-          <p:cNvPr id="10" name="haz0"/>
-          <p:cNvSpPr/>
-          <p:nvPr/>
-        </p:nvSpPr>
-        <p:spPr>
-          <a:xfrm>
-            <a:off x="548640" y="3657600"/>
-            <a:ext cx="3505200" cy="2103120"/>
-          </a:xfrm>
-          <a:prstGeom prst="rect">
-            <a:avLst/>
-          </a:prstGeom>
-          <a:solidFill>
-            <a:srgbClr val="FFFFFF"/>
-          </a:solidFill>
-          <a:ln w="9525">
-            <a:solidFill>
-              <a:srgbClr val="DCDCDC"/>
-            </a:solidFill>
-            <a:prstDash val="solid"/>
-          </a:ln>
-        </p:spPr>
-      </p:sp>
-      <p:sp>
-        <p:nvSpPr>
-          <p:cNvPr id="11" name="haz0-h"/>
-          <p:cNvSpPr txBox="1"/>
-          <p:nvPr/>
-        </p:nvSpPr>
-        <p:spPr>
-          <a:xfrm>
-            <a:off x="804672" y="3858768"/>
-            <a:ext cx="2993136" cy="292608"/>
-          </a:xfrm>
-          <a:prstGeom prst="rect">
-            <a:avLst/>
-          </a:prstGeom>
-          <a:noFill/>
-          <a:ln/>
-        </p:spPr>
-        <p:txBody>
-          <a:bodyPr wrap="square" lIns="0" tIns="0" rIns="0" bIns="0" rtlCol="0" anchor="ctr"/>
-          <a:lstStyle/>
-          <a:p>
-            <a:pPr indent="0" marL="0">
-              <a:buNone/>
-            </a:pPr>
-            <a:r>
-              <a:rPr lang="en-US" sz="1300" b="1" dirty="0">
-                <a:solidFill>
-                  <a:srgbClr val="1A1A1A"/>
-                </a:solidFill>
-              </a:rPr>
-              <a:t>GPU hazard</a:t>
-            </a:r>
-            <a:endParaRPr lang="en-US" sz="1300" dirty="0"/>
-          </a:p>
-        </p:txBody>
-      </p:sp>
-      <p:sp>
-        <p:nvSpPr>
-          <p:cNvPr id="12" name="haz0-b"/>
-          <p:cNvSpPr txBox="1"/>
-          <p:nvPr/>
-        </p:nvSpPr>
-        <p:spPr>
-          <a:xfrm>
-            <a:off x="804672" y="4261104"/>
-            <a:ext cx="2993136" cy="1335024"/>
-          </a:xfrm>
-          <a:prstGeom prst="rect">
-            <a:avLst/>
-          </a:prstGeom>
-          <a:noFill/>
-          <a:ln/>
-        </p:spPr>
-        <p:txBody>
-          <a:bodyPr wrap="square" lIns="0" tIns="0" rIns="0" bIns="0" rtlCol="0" anchor="t"/>
-          <a:lstStyle/>
-          <a:p>
-            <a:pPr indent="0" marL="0">
-              <a:lnSpc>
-                <a:spcPct val="125000"/>
-              </a:lnSpc>
-              <a:buNone/>
-            </a:pPr>
-            <a:r>
-              <a:rPr lang="en-US" sz="1100" dirty="0">
-                <a:solidFill>
-                  <a:srgbClr val="444444"/>
-                </a:solidFill>
-                <a:latin typeface="Arial" pitchFamily="34" charset="0"/>
-                <a:ea typeface="Arial" pitchFamily="34" charset="-122"/>
-                <a:cs typeface="Arial" pitchFamily="34" charset="-120"/>
-              </a:rPr>
-              <a:t>Two 3B Q4_K_M judges do not fit in 4 GB. The pipeline drives one judge at a time over the whole fact list, then releases its weights — otherwise the backend waits for the resident model's keep-alive and every call pays a ~20 s model load.</a:t>
-            </a:r>
-            <a:endParaRPr lang="en-US" sz="1100" dirty="0"/>
-          </a:p>
-        </p:txBody>
-      </p:sp>
-      <p:sp>
-        <p:nvSpPr>
-          <p:cNvPr id="13" name="haz1"/>
-          <p:cNvSpPr/>
-          <p:nvPr/>
-        </p:nvSpPr>
-        <p:spPr>
-          <a:xfrm>
-            <a:off x="4328160" y="3657600"/>
-            <a:ext cx="3505200" cy="2103120"/>
-          </a:xfrm>
-          <a:prstGeom prst="rect">
-            <a:avLst/>
-          </a:prstGeom>
-          <a:solidFill>
-            <a:srgbClr val="FFFFFF"/>
-          </a:solidFill>
-          <a:ln w="9525">
-            <a:solidFill>
-              <a:srgbClr val="DCDCDC"/>
-            </a:solidFill>
-            <a:prstDash val="solid"/>
-          </a:ln>
-        </p:spPr>
-      </p:sp>
-      <p:sp>
-        <p:nvSpPr>
-          <p:cNvPr id="14" name="haz1-h"/>
-          <p:cNvSpPr txBox="1"/>
-          <p:nvPr/>
-        </p:nvSpPr>
-        <p:spPr>
-          <a:xfrm>
-            <a:off x="4584192" y="3858768"/>
-            <a:ext cx="2993136" cy="292608"/>
-          </a:xfrm>
-          <a:prstGeom prst="rect">
-            <a:avLst/>
-          </a:prstGeom>
-          <a:noFill/>
-          <a:ln/>
-        </p:spPr>
-        <p:txBody>
-          <a:bodyPr wrap="square" lIns="0" tIns="0" rIns="0" bIns="0" rtlCol="0" anchor="ctr"/>
-          <a:lstStyle/>
-          <a:p>
-            <a:pPr indent="0" marL="0">
-              <a:buNone/>
-            </a:pPr>
-            <a:r>
-              <a:rPr lang="en-US" sz="1300" b="1" dirty="0">
-                <a:solidFill>
-                  <a:srgbClr val="1A1A1A"/>
-                </a:solidFill>
-              </a:rPr>
-              <a:t>Retrieval hazard</a:t>
-            </a:r>
-            <a:endParaRPr lang="en-US" sz="1300" dirty="0"/>
-          </a:p>
-        </p:txBody>
-      </p:sp>
-      <p:sp>
-        <p:nvSpPr>
-          <p:cNvPr id="15" name="haz1-b"/>
-          <p:cNvSpPr txBox="1"/>
-          <p:nvPr/>
-        </p:nvSpPr>
-        <p:spPr>
-          <a:xfrm>
-            <a:off x="4584192" y="4261104"/>
-            <a:ext cx="2993136" cy="1335024"/>
-          </a:xfrm>
-          <a:prstGeom prst="rect">
-            <a:avLst/>
-          </a:prstGeom>
-          <a:noFill/>
-          <a:ln/>
-        </p:spPr>
-        <p:txBody>
-          <a:bodyPr wrap="square" lIns="0" tIns="0" rIns="0" bIns="0" rtlCol="0" anchor="t"/>
-          <a:lstStyle/>
-          <a:p>
-            <a:pPr indent="0" marL="0">
-              <a:lnSpc>
-                <a:spcPct val="125000"/>
-              </a:lnSpc>
-              <a:buNone/>
-            </a:pPr>
-            <a:r>
-              <a:rPr lang="en-US" sz="1100" dirty="0">
-                <a:solidFill>
-                  <a:srgbClr val="444444"/>
-                </a:solidFill>
-                <a:latin typeface="Arial" pitchFamily="34" charset="0"/>
-                <a:ea typeface="Arial" pitchFamily="34" charset="-122"/>
-                <a:cs typeface="Arial" pitchFamily="34" charset="-120"/>
-              </a:rPr>
-              <a:t>Wikipedia rate-limits unauthenticated clients. Failed requests are not cached, so without retries a 429 silently becomes “no evidence” and two runs of the same pipeline disagree. Fixed with retries, backoff and Retry-After.</a:t>
-            </a:r>
-            <a:endParaRPr lang="en-US" sz="1100" dirty="0"/>
-          </a:p>
-        </p:txBody>
-      </p:sp>
-      <p:sp>
-        <p:nvSpPr>
-          <p:cNvPr id="16" name="haz2"/>
-          <p:cNvSpPr/>
-          <p:nvPr/>
-        </p:nvSpPr>
-        <p:spPr>
-          <a:xfrm>
-            <a:off x="8107680" y="3657600"/>
-            <a:ext cx="3505200" cy="2103120"/>
-          </a:xfrm>
-          <a:prstGeom prst="rect">
-            <a:avLst/>
-          </a:prstGeom>
-          <a:solidFill>
-            <a:srgbClr val="FFFFFF"/>
-          </a:solidFill>
-          <a:ln w="9525">
-            <a:solidFill>
-              <a:srgbClr val="DCDCDC"/>
-            </a:solidFill>
-            <a:prstDash val="solid"/>
-          </a:ln>
-        </p:spPr>
-      </p:sp>
-      <p:sp>
-        <p:nvSpPr>
-          <p:cNvPr id="17" name="haz2-h"/>
-          <p:cNvSpPr txBox="1"/>
-          <p:nvPr/>
-        </p:nvSpPr>
-        <p:spPr>
-          <a:xfrm>
-            <a:off x="8363712" y="3858768"/>
-            <a:ext cx="2993136" cy="292608"/>
-          </a:xfrm>
-          <a:prstGeom prst="rect">
-            <a:avLst/>
-          </a:prstGeom>
-          <a:noFill/>
-          <a:ln/>
-        </p:spPr>
-        <p:txBody>
-          <a:bodyPr wrap="square" lIns="0" tIns="0" rIns="0" bIns="0" rtlCol="0" anchor="ctr"/>
-          <a:lstStyle/>
-          <a:p>
-            <a:pPr indent="0" marL="0">
-              <a:buNone/>
-            </a:pPr>
-            <a:r>
-              <a:rPr lang="en-US" sz="1300" b="1" dirty="0">
-                <a:solidFill>
-                  <a:srgbClr val="1A1A1A"/>
-                </a:solidFill>
-              </a:rPr>
-              <a:t>Reproducibility</a:t>
-            </a:r>
-            <a:endParaRPr lang="en-US" sz="1300" dirty="0"/>
-          </a:p>
-        </p:txBody>
-      </p:sp>
-      <p:sp>
-        <p:nvSpPr>
-          <p:cNvPr id="18" name="haz2-b"/>
-          <p:cNvSpPr txBox="1"/>
-          <p:nvPr/>
-        </p:nvSpPr>
-        <p:spPr>
-          <a:xfrm>
-            <a:off x="8363712" y="4261104"/>
-            <a:ext cx="2993136" cy="1335024"/>
-          </a:xfrm>
-          <a:prstGeom prst="rect">
-            <a:avLst/>
-          </a:prstGeom>
-          <a:noFill/>
-          <a:ln/>
-        </p:spPr>
-        <p:txBody>
-          <a:bodyPr wrap="square" lIns="0" tIns="0" rIns="0" bIns="0" rtlCol="0" anchor="t"/>
-          <a:lstStyle/>
-          <a:p>
-            <a:pPr indent="0" marL="0">
-              <a:lnSpc>
-                <a:spcPct val="125000"/>
-              </a:lnSpc>
-              <a:buNone/>
-            </a:pPr>
-            <a:r>
-              <a:rPr lang="en-US" sz="1100" dirty="0">
-                <a:solidFill>
-                  <a:srgbClr val="444444"/>
-                </a:solidFill>
-                <a:latin typeface="Arial" pitchFamily="34" charset="0"/>
-                <a:ea typeface="Arial" pitchFamily="34" charset="-122"/>
-                <a:cs typeface="Arial" pitchFamily="34" charset="-120"/>
-              </a:rPr>
-              <a:t>Every LLM call is cached under hash(model + prompt + parameters), every page on disk. Temperature-0 decoding is not bit-reproducible until the cache is warm; all three runs replay exactly from the shipped caches.</a:t>
-            </a:r>
-            <a:endParaRPr lang="en-US" sz="1100" dirty="0"/>
-          </a:p>
-        </p:txBody>
-      </p:sp>
-      <p:sp>
-        <p:nvSpPr>
-          <p:cNvPr id="19" name="note"/>
-          <p:cNvSpPr txBox="1"/>
-          <p:nvPr/>
-        </p:nvSpPr>
-        <p:spPr>
-          <a:xfrm>
-            <a:off x="548640" y="6291072"/>
-            <a:ext cx="10607040" cy="274320"/>
-          </a:xfrm>
-          <a:prstGeom prst="rect">
-            <a:avLst/>
-          </a:prstGeom>
-          <a:noFill/>
-          <a:ln/>
-        </p:spPr>
-        <p:txBody>
-          <a:bodyPr wrap="square" lIns="0" tIns="0" rIns="0" bIns="0" rtlCol="0" anchor="ctr"/>
-          <a:lstStyle/>
-          <a:p>
-            <a:pPr indent="0" marL="0">
-              <a:buNone/>
-            </a:pPr>
-            <a:r>
-              <a:rPr lang="en-US" sz="950" dirty="0">
-                <a:solidFill>
-                  <a:srgbClr val="767676"/>
-                </a:solidFill>
-                <a:latin typeface="Arial" pitchFamily="34" charset="0"/>
-                <a:ea typeface="Arial" pitchFamily="34" charset="-122"/>
-                <a:cs typeface="Arial" pitchFamily="34" charset="-120"/>
-              </a:rPr>
-              <a:t>Full write-up in colab/RESULTS.md; all three runs reproduce from one command with no GPU.</a:t>
-            </a:r>
-            <a:endParaRPr lang="en-US" sz="950" dirty="0"/>
-          </a:p>
-        </p:txBody>
-      </p:sp>
-      <p:sp>
-        <p:nvSpPr>
-          <p:cNvPr id="25" name="Slide Number Placeholder 0"/>
-          <p:cNvSpPr>
-            <a:spLocks noGrp="1"/>
-          </p:cNvSpPr>
-          <p:nvPr>
-            <p:ph type="sldNum" sz="quarter" idx="4294967295"/>
-          </p:nvPr>
-        </p:nvSpPr>
-        <p:spPr>
-          <a:xfrm>
-            <a:off x="11338560" y="6327648"/>
-            <a:ext cx="365760" cy="256032"/>
-          </a:xfrm>
-          <a:prstGeom prst="rect">
-            <a:avLst/>
-          </a:prstGeom>
-          <a:extLst>
-            <a:ext uri="{C572A759-6A51-4108-AA02-DFA0A04FC94B}">
-              <ma14:wrappingTextBoxFlag xmlns:ma14="http://schemas.microsoft.com/office/mac/drawingml/2011/main" val="0"/>
-            </a:ext>
-          </a:extLst>
-        </p:spPr>
-        <p:txBody>
-          <a:bodyPr/>
-          <a:lstStyle>
-            <a:lvl1pPr>
-              <a:defRPr sz="900">
-                <a:solidFill>
-                  <a:srgbClr val="767676"/>
-                </a:solidFill>
-              </a:defRPr>
-            </a:lvl1pPr>
-          </a:lstStyle>
-          <a:p>
-            <a:pPr algn="r"/>
-            <a:fld id="{F7021451-1387-4CA6-816F-3879F97B5CBC}" type="slidenum">
-              <a:rPr b="0" lang="en-US"/>
-              <a:t>19</a:t>
             </a:fld>
             <a:endParaRPr lang="en-US"/>
           </a:p>

--- a/presentation/VERIFACT-Lite-TTU.pptx
+++ b/presentation/VERIFACT-Lite-TTU.pptx
@@ -20,10 +20,9 @@
     <p:sldId id="268" r:id="rId14"/>
     <p:sldId id="269" r:id="rId15"/>
     <p:sldId id="270" r:id="rId16"/>
-    <p:sldId id="271" r:id="rId17"/>
   </p:sldIdLst>
   <p:notesMasterIdLst>
-    <p:notesMasterId r:id="rId18"/>
+    <p:notesMasterId r:id="rId17"/>
   </p:notesMasterIdLst>
   <p:sldSz cx="12192000" cy="6858000"/>
   <p:notesSz cx="6858000" cy="12192000"/>
@@ -122,7 +121,7 @@
   <p:extLst>
     <p:ext uri="{521415D9-36F7-43E2-AB2F-B90AF26B5E84}">
       <p14:sectionLst xmlns:p14="http://schemas.microsoft.com/office/powerpoint/2010/main">
-        <p14:section name="Talk" id="{812554c9-9b4e-7407-0140-df5e1e4590fc}">
+        <p14:section name="Talk" id="{3c82f99c-11c9-a1b4-4251-9486edae6c71}">
           <p14:sldIdLst>
             <p14:sldId id="256"/>
             <p14:sldId id="257"/>
@@ -139,11 +138,6 @@
             <p14:sldId id="268"/>
             <p14:sldId id="269"/>
             <p14:sldId id="270"/>
-          </p14:sldIdLst>
-        </p14:section>
-        <p14:section name="Backup" id="{638b93d3-0bd5-2e97-008c-7cf1980f3fd9}">
-          <p14:sldIdLst>
-            <p14:sldId id="271"/>
           </p14:sldIdLst>
         </p14:section>
       </p14:sectionLst>
@@ -1465,94 +1459,6 @@
 </p:notes>
 </file>
 
-<file path=ppt/notesSlides/notesSlide16.xml><?xml version="1.0" encoding="utf-8"?>
-<p:notes xmlns:a="http://schemas.openxmlformats.org/drawingml/2006/main" xmlns:r="http://schemas.openxmlformats.org/officeDocument/2006/relationships" xmlns:p="http://schemas.openxmlformats.org/presentationml/2006/main">
-  <p:cSld>
-    <p:spTree>
-      <p:nvGrpSpPr>
-        <p:cNvPr id="1" name=""/>
-        <p:cNvGrpSpPr/>
-        <p:nvPr/>
-      </p:nvGrpSpPr>
-      <p:grpSpPr>
-        <a:xfrm>
-          <a:off x="0" y="0"/>
-          <a:ext cx="0" cy="0"/>
-          <a:chOff x="0" y="0"/>
-          <a:chExt cx="0" cy="0"/>
-        </a:xfrm>
-      </p:grpSpPr>
-      <p:sp>
-        <p:nvSpPr>
-          <p:cNvPr id="2" name="Slide Image Placeholder 1"/>
-          <p:cNvSpPr>
-            <a:spLocks noGrp="1" noRot="1" noChangeAspect="1"/>
-          </p:cNvSpPr>
-          <p:nvPr>
-            <p:ph type="sldImg"/>
-          </p:nvPr>
-        </p:nvSpPr>
-        <p:spPr/>
-      </p:sp>
-      <p:sp>
-        <p:nvSpPr>
-          <p:cNvPr id="3" name="Notes Placeholder 2"/>
-          <p:cNvSpPr>
-            <a:spLocks noGrp="1"/>
-          </p:cNvSpPr>
-          <p:nvPr>
-            <p:ph type="body" idx="1"/>
-          </p:nvPr>
-        </p:nvSpPr>
-        <p:spPr/>
-        <p:txBody>
-          <a:bodyPr/>
-          <a:lstStyle/>
-          <a:p>
-            <a:r>
-              <a:rPr lang="en-US" dirty="0"/>
-              <a:t>Backup. Not part of the 15 minutes.</a:t>
-            </a:r>
-            <a:endParaRPr lang="en-US" dirty="0"/>
-          </a:p>
-        </p:txBody>
-      </p:sp>
-      <p:sp>
-        <p:nvSpPr>
-          <p:cNvPr id="4" name="Slide Number Placeholder 3"/>
-          <p:cNvSpPr>
-            <a:spLocks noGrp="1"/>
-          </p:cNvSpPr>
-          <p:nvPr>
-            <p:ph type="sldNum" sz="quarter" idx="10"/>
-          </p:nvPr>
-        </p:nvSpPr>
-        <p:spPr/>
-        <p:txBody>
-          <a:bodyPr/>
-          <a:lstStyle/>
-          <a:p>
-            <a:fld id="{F7021451-1387-4CA6-816F-3879F97B5CBC}" type="slidenum">
-              <a:rPr lang="en-US"/>
-              <a:t>16</a:t>
-            </a:fld>
-            <a:endParaRPr lang="en-US"/>
-          </a:p>
-        </p:txBody>
-      </p:sp>
-    </p:spTree>
-    <p:extLst>
-      <p:ext uri="{BB962C8B-B14F-4D97-AF65-F5344CB8AC3E}">
-        <p14:creationId xmlns:p14="http://schemas.microsoft.com/office/powerpoint/2010/main" val="1024086991"/>
-      </p:ext>
-    </p:extLst>
-  </p:cSld>
-  <p:clrMapOvr>
-    <a:masterClrMapping/>
-  </p:clrMapOvr>
-</p:notes>
-</file>
-
 <file path=ppt/notesSlides/notesSlide2.xml><?xml version="1.0" encoding="utf-8"?>
 <p:notes xmlns:a="http://schemas.openxmlformats.org/drawingml/2006/main" xmlns:r="http://schemas.openxmlformats.org/officeDocument/2006/relationships" xmlns:p="http://schemas.openxmlformats.org/presentationml/2006/main">
   <p:cSld>
@@ -17370,831 +17276,6 @@
             <a:fld id="{F7021451-1387-4CA6-816F-3879F97B5CBC}" type="slidenum">
               <a:rPr b="0" lang="en-US"/>
               <a:t>15</a:t>
-            </a:fld>
-            <a:endParaRPr lang="en-US"/>
-          </a:p>
-        </p:txBody>
-      </p:sp>
-    </p:spTree>
-  </p:cSld>
-  <p:clrMapOvr>
-    <a:masterClrMapping/>
-  </p:clrMapOvr>
-</p:sld>
-</file>
-
-<file path=ppt/slides/slide16.xml><?xml version="1.0" encoding="utf-8"?>
-<p:sld xmlns:a="http://schemas.openxmlformats.org/drawingml/2006/main" xmlns:r="http://schemas.openxmlformats.org/officeDocument/2006/relationships" xmlns:p="http://schemas.openxmlformats.org/presentationml/2006/main">
-  <p:cSld name="Slide 16">
-    <p:spTree>
-      <p:nvGrpSpPr>
-        <p:cNvPr id="1" name=""/>
-        <p:cNvGrpSpPr/>
-        <p:nvPr/>
-      </p:nvGrpSpPr>
-      <p:grpSpPr>
-        <a:xfrm>
-          <a:off x="0" y="0"/>
-          <a:ext cx="0" cy="0"/>
-          <a:chOff x="0" y="0"/>
-          <a:chExt cx="0" cy="0"/>
-        </a:xfrm>
-      </p:grpSpPr>
-      <p:sp>
-        <p:nvSpPr>
-          <p:cNvPr id="2" name="eyebrow"/>
-          <p:cNvSpPr txBox="1"/>
-          <p:nvPr/>
-        </p:nvSpPr>
-        <p:spPr>
-          <a:xfrm>
-            <a:off x="548640" y="347472"/>
-            <a:ext cx="11064240" cy="237744"/>
-          </a:xfrm>
-          <a:prstGeom prst="rect">
-            <a:avLst/>
-          </a:prstGeom>
-          <a:noFill/>
-          <a:ln/>
-        </p:spPr>
-        <p:txBody>
-          <a:bodyPr wrap="square" lIns="0" tIns="0" rIns="0" bIns="0" rtlCol="0" anchor="ctr"/>
-          <a:lstStyle/>
-          <a:p>
-            <a:pPr indent="0" marL="0">
-              <a:buNone/>
-            </a:pPr>
-            <a:r>
-              <a:rPr lang="en-US" sz="1000" b="1" spc="200" kern="0" dirty="0">
-                <a:solidFill>
-                  <a:srgbClr val="E90802"/>
-                </a:solidFill>
-                <a:latin typeface="Arial" pitchFamily="34" charset="0"/>
-                <a:ea typeface="Arial" pitchFamily="34" charset="-122"/>
-                <a:cs typeface="Arial" pitchFamily="34" charset="-120"/>
-              </a:rPr>
-              <a:t>BACKUP — NOT PRESENTED</a:t>
-            </a:r>
-            <a:endParaRPr lang="en-US" sz="1000" dirty="0"/>
-          </a:p>
-        </p:txBody>
-      </p:sp>
-      <p:sp>
-        <p:nvSpPr>
-          <p:cNvPr id="3" name="title"/>
-          <p:cNvSpPr txBox="1"/>
-          <p:nvPr/>
-        </p:nvSpPr>
-        <p:spPr>
-          <a:xfrm>
-            <a:off x="548640" y="621792"/>
-            <a:ext cx="11064240" cy="548640"/>
-          </a:xfrm>
-          <a:prstGeom prst="rect">
-            <a:avLst/>
-          </a:prstGeom>
-          <a:noFill/>
-          <a:ln/>
-        </p:spPr>
-        <p:txBody>
-          <a:bodyPr wrap="square" lIns="0" tIns="0" rIns="0" bIns="0" rtlCol="0" anchor="ctr"/>
-          <a:lstStyle/>
-          <a:p>
-            <a:pPr indent="0" marL="0">
-              <a:buNone/>
-            </a:pPr>
-            <a:r>
-              <a:rPr lang="en-US" sz="2700" b="1" dirty="0">
-                <a:solidFill>
-                  <a:srgbClr val="1A1A1A"/>
-                </a:solidFill>
-              </a:rPr>
-              <a:t>Detail behind the four most likely questions</a:t>
-            </a:r>
-            <a:endParaRPr lang="en-US" sz="2700" dirty="0"/>
-          </a:p>
-        </p:txBody>
-      </p:sp>
-      <p:sp>
-        <p:nvSpPr>
-          <p:cNvPr id="4" name="subtitle"/>
-          <p:cNvSpPr txBox="1"/>
-          <p:nvPr/>
-        </p:nvSpPr>
-        <p:spPr>
-          <a:xfrm>
-            <a:off x="548640" y="1188720"/>
-            <a:ext cx="11064240" cy="256032"/>
-          </a:xfrm>
-          <a:prstGeom prst="rect">
-            <a:avLst/>
-          </a:prstGeom>
-          <a:noFill/>
-          <a:ln/>
-        </p:spPr>
-        <p:txBody>
-          <a:bodyPr wrap="square" lIns="0" tIns="0" rIns="0" bIns="0" rtlCol="0" anchor="ctr"/>
-          <a:lstStyle/>
-          <a:p>
-            <a:pPr indent="0" marL="0">
-              <a:buNone/>
-            </a:pPr>
-            <a:r>
-              <a:rPr lang="en-US" sz="1350" dirty="0">
-                <a:solidFill>
-                  <a:srgbClr val="767676"/>
-                </a:solidFill>
-                <a:latin typeface="Arial" pitchFamily="34" charset="0"/>
-                <a:ea typeface="Arial" pitchFamily="34" charset="-122"/>
-                <a:cs typeface="Arial" pitchFamily="34" charset="-120"/>
-              </a:rPr>
-              <a:t>Word mapping, the uncontrolled run, what the refiner writes, and the engineering hazards</a:t>
-            </a:r>
-            <a:endParaRPr lang="en-US" sz="1350" dirty="0"/>
-          </a:p>
-        </p:txBody>
-      </p:sp>
-      <p:sp>
-        <p:nvSpPr>
-          <p:cNvPr id="5" name="head-rule"/>
-          <p:cNvSpPr/>
-          <p:nvPr/>
-        </p:nvSpPr>
-        <p:spPr>
-          <a:xfrm>
-            <a:off x="548640" y="1499616"/>
-            <a:ext cx="11064240" cy="10973"/>
-          </a:xfrm>
-          <a:prstGeom prst="rect">
-            <a:avLst/>
-          </a:prstGeom>
-          <a:solidFill>
-            <a:srgbClr val="DCDCDC"/>
-          </a:solidFill>
-          <a:ln w="3175">
-            <a:solidFill>
-              <a:srgbClr val="DCDCDC"/>
-            </a:solidFill>
-            <a:prstDash val="solid"/>
-          </a:ln>
-        </p:spPr>
-      </p:sp>
-      <p:sp>
-        <p:nvSpPr>
-          <p:cNvPr id="6" name="bk-wm"/>
-          <p:cNvSpPr/>
-          <p:nvPr/>
-        </p:nvSpPr>
-        <p:spPr>
-          <a:xfrm>
-            <a:off x="548640" y="1600200"/>
-            <a:ext cx="5394960" cy="2103120"/>
-          </a:xfrm>
-          <a:prstGeom prst="rect">
-            <a:avLst/>
-          </a:prstGeom>
-          <a:solidFill>
-            <a:srgbClr val="FFFFFF"/>
-          </a:solidFill>
-          <a:ln w="9525">
-            <a:solidFill>
-              <a:srgbClr val="DCDCDC"/>
-            </a:solidFill>
-            <a:prstDash val="solid"/>
-          </a:ln>
-        </p:spPr>
-      </p:sp>
-      <p:sp>
-        <p:nvSpPr>
-          <p:cNvPr id="7" name="bk-wm-h"/>
-          <p:cNvSpPr txBox="1"/>
-          <p:nvPr/>
-        </p:nvSpPr>
-        <p:spPr>
-          <a:xfrm>
-            <a:off x="804672" y="1801368"/>
-            <a:ext cx="4882896" cy="292608"/>
-          </a:xfrm>
-          <a:prstGeom prst="rect">
-            <a:avLst/>
-          </a:prstGeom>
-          <a:noFill/>
-          <a:ln/>
-        </p:spPr>
-        <p:txBody>
-          <a:bodyPr wrap="square" lIns="0" tIns="0" rIns="0" bIns="0" rtlCol="0" anchor="ctr"/>
-          <a:lstStyle/>
-          <a:p>
-            <a:pPr indent="0" marL="0">
-              <a:buNone/>
-            </a:pPr>
-            <a:r>
-              <a:rPr lang="en-US" sz="1350" b="1" dirty="0">
-                <a:solidFill>
-                  <a:srgbClr val="1A1A1A"/>
-                </a:solidFill>
-              </a:rPr>
-              <a:t>How missing relations are found — Algorithm 1</a:t>
-            </a:r>
-            <a:endParaRPr lang="en-US" sz="1350" dirty="0"/>
-          </a:p>
-        </p:txBody>
-      </p:sp>
-      <p:sp>
-        <p:nvSpPr>
-          <p:cNvPr id="8" name="bk-wm-b"/>
-          <p:cNvSpPr txBox="1"/>
-          <p:nvPr/>
-        </p:nvSpPr>
-        <p:spPr>
-          <a:xfrm>
-            <a:off x="804672" y="2203704"/>
-            <a:ext cx="4882896" cy="1335024"/>
-          </a:xfrm>
-          <a:prstGeom prst="rect">
-            <a:avLst/>
-          </a:prstGeom>
-          <a:noFill/>
-          <a:ln/>
-        </p:spPr>
-        <p:txBody>
-          <a:bodyPr wrap="square" lIns="0" tIns="0" rIns="0" bIns="0" rtlCol="0" anchor="t"/>
-          <a:lstStyle/>
-          <a:p>
-            <a:pPr indent="0" marL="0">
-              <a:lnSpc>
-                <a:spcPct val="125000"/>
-              </a:lnSpc>
-              <a:buNone/>
-            </a:pPr>
-            <a:r>
-              <a:rPr lang="en-US" sz="1050" dirty="0">
-                <a:solidFill>
-                  <a:srgbClr val="444444"/>
-                </a:solidFill>
-                <a:latin typeface="Arial" pitchFamily="34" charset="0"/>
-                <a:ea typeface="Arial" pitchFamily="34" charset="-122"/>
-                <a:cs typeface="Arial" pitchFamily="34" charset="-120"/>
-              </a:rPr>
-              <a:t>Take each fact's longest common substring with the response, mark those characters covered, collect the runs that stayed uncovered, and send them to the judges. Normalization is index-preserving, so offsets still point into the original answer.</a:t>
-            </a:r>
-            <a:endParaRPr lang="en-US" sz="1050" dirty="0"/>
-          </a:p>
-          <a:p>
-            <a:pPr indent="0" marL="0">
-              <a:lnSpc>
-                <a:spcPct val="125000"/>
-              </a:lnSpc>
-              <a:buNone/>
-            </a:pPr>
-            <a:r>
-              <a:rPr lang="en-US" sz="1050" dirty="0">
-                <a:solidFill>
-                  <a:srgbClr val="444444"/>
-                </a:solidFill>
-                <a:latin typeface="Arial" pitchFamily="34" charset="0"/>
-                <a:ea typeface="Arial" pitchFamily="34" charset="-122"/>
-                <a:cs typeface="Arial" pitchFamily="34" charset="-120"/>
-              </a:rPr>
-              <a:t>Coverage 0.55–0.59.  73 candidate spans.  A fact is added only when the span expresses a temporal or contingency relation AND no single existing fact already captures it.</a:t>
-            </a:r>
-            <a:endParaRPr lang="en-US" sz="1050" dirty="0"/>
-          </a:p>
-        </p:txBody>
-      </p:sp>
-      <p:sp>
-        <p:nvSpPr>
-          <p:cNvPr id="9" name="bk-b"/>
-          <p:cNvSpPr/>
-          <p:nvPr/>
-        </p:nvSpPr>
-        <p:spPr>
-          <a:xfrm>
-            <a:off x="6217920" y="1600200"/>
-            <a:ext cx="5394960" cy="2103120"/>
-          </a:xfrm>
-          <a:prstGeom prst="rect">
-            <a:avLst/>
-          </a:prstGeom>
-          <a:solidFill>
-            <a:srgbClr val="F4F4F4"/>
-          </a:solidFill>
-          <a:ln w="9525">
-            <a:solidFill>
-              <a:srgbClr val="F4F4F4"/>
-            </a:solidFill>
-            <a:prstDash val="solid"/>
-          </a:ln>
-        </p:spPr>
-      </p:sp>
-      <p:sp>
-        <p:nvSpPr>
-          <p:cNvPr id="10" name="bk-b-h"/>
-          <p:cNvSpPr txBox="1"/>
-          <p:nvPr/>
-        </p:nvSpPr>
-        <p:spPr>
-          <a:xfrm>
-            <a:off x="6473952" y="1801368"/>
-            <a:ext cx="4882896" cy="292608"/>
-          </a:xfrm>
-          <a:prstGeom prst="rect">
-            <a:avLst/>
-          </a:prstGeom>
-          <a:noFill/>
-          <a:ln/>
-        </p:spPr>
-        <p:txBody>
-          <a:bodyPr wrap="square" lIns="0" tIns="0" rIns="0" bIns="0" rtlCol="0" anchor="ctr"/>
-          <a:lstStyle/>
-          <a:p>
-            <a:pPr indent="0" marL="0">
-              <a:buNone/>
-            </a:pPr>
-            <a:r>
-              <a:rPr lang="en-US" sz="1350" b="1" dirty="0">
-                <a:solidFill>
-                  <a:srgbClr val="1A1A1A"/>
-                </a:solidFill>
-              </a:rPr>
-              <a:t>Run B — the whole pipeline at 7B, extractor included</a:t>
-            </a:r>
-            <a:endParaRPr lang="en-US" sz="1350" dirty="0"/>
-          </a:p>
-        </p:txBody>
-      </p:sp>
-      <p:sp>
-        <p:nvSpPr>
-          <p:cNvPr id="11" name="bk-b-b"/>
-          <p:cNvSpPr txBox="1"/>
-          <p:nvPr/>
-        </p:nvSpPr>
-        <p:spPr>
-          <a:xfrm>
-            <a:off x="6473952" y="2203704"/>
-            <a:ext cx="4882896" cy="1335024"/>
-          </a:xfrm>
-          <a:prstGeom prst="rect">
-            <a:avLst/>
-          </a:prstGeom>
-          <a:noFill/>
-          <a:ln/>
-        </p:spPr>
-        <p:txBody>
-          <a:bodyPr wrap="square" lIns="0" tIns="0" rIns="0" bIns="0" rtlCol="0" anchor="t"/>
-          <a:lstStyle/>
-          <a:p>
-            <a:pPr indent="0" marL="0">
-              <a:lnSpc>
-                <a:spcPct val="125000"/>
-              </a:lnSpc>
-              <a:buNone/>
-            </a:pPr>
-            <a:r>
-              <a:rPr lang="en-US" sz="1050" dirty="0">
-                <a:solidFill>
-                  <a:srgbClr val="444444"/>
-                </a:solidFill>
-                <a:latin typeface="Arial" pitchFamily="34" charset="0"/>
-                <a:ea typeface="Arial" pitchFamily="34" charset="-122"/>
-                <a:cs typeface="Arial" pitchFamily="34" charset="-120"/>
-              </a:rPr>
-              <a:t>Baseline 15.92 facts per answer against 21.50, incomplete rate 0.319, precision 0.5050. Refinement then costs −0.025 precision, against −0.118 in run A.</a:t>
-            </a:r>
-            <a:endParaRPr lang="en-US" sz="1050" dirty="0"/>
-          </a:p>
-          <a:p>
-            <a:pPr indent="0" marL="0">
-              <a:lnSpc>
-                <a:spcPct val="125000"/>
-              </a:lnSpc>
-              <a:buNone/>
-            </a:pPr>
-            <a:r>
-              <a:rPr lang="en-US" sz="1050" dirty="0">
-                <a:solidFill>
-                  <a:srgbClr val="444444"/>
-                </a:solidFill>
-                <a:latin typeface="Arial" pitchFamily="34" charset="0"/>
-                <a:ea typeface="Arial" pitchFamily="34" charset="-122"/>
-                <a:cs typeface="Arial" pitchFamily="34" charset="-120"/>
-              </a:rPr>
-              <a:t>A stronger extractor writes fewer, coarser, self-contained facts, so there is less to repair — the trade the paper notes for VERIFY (18.5 facts per response against VeriFact's 32.3).</a:t>
-            </a:r>
-            <a:endParaRPr lang="en-US" sz="1050" dirty="0"/>
-          </a:p>
-          <a:p>
-            <a:pPr indent="0" marL="0">
-              <a:lnSpc>
-                <a:spcPct val="125000"/>
-              </a:lnSpc>
-              <a:buNone/>
-            </a:pPr>
-            <a:r>
-              <a:rPr lang="en-US" sz="1050" dirty="0">
-                <a:solidFill>
-                  <a:srgbClr val="444444"/>
-                </a:solidFill>
-                <a:latin typeface="Arial" pitchFamily="34" charset="0"/>
-                <a:ea typeface="Arial" pitchFamily="34" charset="-122"/>
-                <a:cs typeface="Arial" pitchFamily="34" charset="-120"/>
-              </a:rPr>
-              <a:t>B changed four things at once, so it reads only against its own baseline.</a:t>
-            </a:r>
-            <a:endParaRPr lang="en-US" sz="1050" dirty="0"/>
-          </a:p>
-        </p:txBody>
-      </p:sp>
-      <p:sp>
-        <p:nvSpPr>
-          <p:cNvPr id="12" name="bk-q"/>
-          <p:cNvSpPr/>
-          <p:nvPr/>
-        </p:nvSpPr>
-        <p:spPr>
-          <a:xfrm>
-            <a:off x="548640" y="3886200"/>
-            <a:ext cx="5394960" cy="2103120"/>
-          </a:xfrm>
-          <a:prstGeom prst="rect">
-            <a:avLst/>
-          </a:prstGeom>
-          <a:solidFill>
-            <a:srgbClr val="F4F4F4"/>
-          </a:solidFill>
-          <a:ln w="9525">
-            <a:solidFill>
-              <a:srgbClr val="F4F4F4"/>
-            </a:solidFill>
-            <a:prstDash val="solid"/>
-          </a:ln>
-        </p:spPr>
-      </p:sp>
-      <p:sp>
-        <p:nvSpPr>
-          <p:cNvPr id="13" name="bk-q-edge"/>
-          <p:cNvSpPr/>
-          <p:nvPr/>
-        </p:nvSpPr>
-        <p:spPr>
-          <a:xfrm>
-            <a:off x="548640" y="3886200"/>
-            <a:ext cx="29261" cy="2103120"/>
-          </a:xfrm>
-          <a:prstGeom prst="rect">
-            <a:avLst/>
-          </a:prstGeom>
-          <a:solidFill>
-            <a:srgbClr val="E90802"/>
-          </a:solidFill>
-          <a:ln w="3175">
-            <a:solidFill>
-              <a:srgbClr val="E90802"/>
-            </a:solidFill>
-            <a:prstDash val="solid"/>
-          </a:ln>
-        </p:spPr>
-      </p:sp>
-      <p:sp>
-        <p:nvSpPr>
-          <p:cNvPr id="14" name="bk-q-h"/>
-          <p:cNvSpPr txBox="1"/>
-          <p:nvPr/>
-        </p:nvSpPr>
-        <p:spPr>
-          <a:xfrm>
-            <a:off x="804672" y="4087368"/>
-            <a:ext cx="4882896" cy="292608"/>
-          </a:xfrm>
-          <a:prstGeom prst="rect">
-            <a:avLst/>
-          </a:prstGeom>
-          <a:noFill/>
-          <a:ln/>
-        </p:spPr>
-        <p:txBody>
-          <a:bodyPr wrap="square" lIns="0" tIns="0" rIns="0" bIns="0" rtlCol="0" anchor="ctr"/>
-          <a:lstStyle/>
-          <a:p>
-            <a:pPr indent="0" marL="0">
-              <a:buNone/>
-            </a:pPr>
-            <a:r>
-              <a:rPr lang="en-US" sz="1350" b="1" dirty="0">
-                <a:solidFill>
-                  <a:srgbClr val="E90802"/>
-                </a:solidFill>
-              </a:rPr>
-              <a:t>What the 3B refiner actually writes</a:t>
-            </a:r>
-            <a:endParaRPr lang="en-US" sz="1350" dirty="0"/>
-          </a:p>
-        </p:txBody>
-      </p:sp>
-      <p:sp>
-        <p:nvSpPr>
-          <p:cNvPr id="15" name="bk-q-b"/>
-          <p:cNvSpPr txBox="1"/>
-          <p:nvPr/>
-        </p:nvSpPr>
-        <p:spPr>
-          <a:xfrm>
-            <a:off x="804672" y="4489704"/>
-            <a:ext cx="4882896" cy="1335024"/>
-          </a:xfrm>
-          <a:prstGeom prst="rect">
-            <a:avLst/>
-          </a:prstGeom>
-          <a:noFill/>
-          <a:ln/>
-        </p:spPr>
-        <p:txBody>
-          <a:bodyPr wrap="square" lIns="0" tIns="0" rIns="0" bIns="0" rtlCol="0" anchor="t"/>
-          <a:lstStyle/>
-          <a:p>
-            <a:pPr indent="0" marL="0">
-              <a:lnSpc>
-                <a:spcPct val="125000"/>
-              </a:lnSpc>
-              <a:buNone/>
-            </a:pPr>
-            <a:r>
-              <a:rPr lang="en-US" sz="1050" dirty="0">
-                <a:solidFill>
-                  <a:srgbClr val="444444"/>
-                </a:solidFill>
-                <a:latin typeface="Arial" pitchFamily="34" charset="0"/>
-                <a:ea typeface="Arial" pitchFamily="34" charset="-122"/>
-                <a:cs typeface="Arial" pitchFamily="34" charset="-120"/>
-              </a:rPr>
-              <a:t>Works — Q10:  “These substances are in the atmosphere.” becomes “… since the Montreal Protocol was signed.”   UNDECIDED → SUPPORTED.</a:t>
-            </a:r>
-            <a:endParaRPr lang="en-US" sz="1050" dirty="0"/>
-          </a:p>
-          <a:p>
-            <a:pPr indent="0" marL="0">
-              <a:lnSpc>
-                <a:spcPct val="125000"/>
-              </a:lnSpc>
-              <a:buNone/>
-            </a:pPr>
-            <a:r>
-              <a:rPr lang="en-US" sz="1050" dirty="0">
-                <a:solidFill>
-                  <a:srgbClr val="444444"/>
-                </a:solidFill>
-                <a:latin typeface="Arial" pitchFamily="34" charset="0"/>
-                <a:ea typeface="Arial" pitchFamily="34" charset="-122"/>
-                <a:cs typeface="Arial" pitchFamily="34" charset="-120"/>
-              </a:rPr>
-              <a:t>Fails — Q01:  “There was demand for gold as jewelry.” becomes “There was NO demand …”. The hypothetical from the question was pasted into a fact stating the opposite.</a:t>
-            </a:r>
-            <a:endParaRPr lang="en-US" sz="1050" dirty="0"/>
-          </a:p>
-          <a:p>
-            <a:pPr indent="0" marL="0">
-              <a:lnSpc>
-                <a:spcPct val="125000"/>
-              </a:lnSpc>
-              <a:buNone/>
-            </a:pPr>
-            <a:r>
-              <a:rPr lang="en-US" sz="1050" dirty="0">
-                <a:solidFill>
-                  <a:srgbClr val="444444"/>
-                </a:solidFill>
-                <a:latin typeface="Arial" pitchFamily="34" charset="0"/>
-                <a:ea typeface="Arial" pitchFamily="34" charset="-122"/>
-                <a:cs typeface="Arial" pitchFamily="34" charset="-120"/>
-              </a:rPr>
-              <a:t>Added relation — Q04:  “The experiment just before the explosion caused the reactor to exceed its design limits …”</a:t>
-            </a:r>
-            <a:endParaRPr lang="en-US" sz="1050" dirty="0"/>
-          </a:p>
-        </p:txBody>
-      </p:sp>
-      <p:sp>
-        <p:nvSpPr>
-          <p:cNvPr id="16" name="bk-haz"/>
-          <p:cNvSpPr/>
-          <p:nvPr/>
-        </p:nvSpPr>
-        <p:spPr>
-          <a:xfrm>
-            <a:off x="6217920" y="3886200"/>
-            <a:ext cx="5394960" cy="2103120"/>
-          </a:xfrm>
-          <a:prstGeom prst="rect">
-            <a:avLst/>
-          </a:prstGeom>
-          <a:solidFill>
-            <a:srgbClr val="FFFFFF"/>
-          </a:solidFill>
-          <a:ln w="9525">
-            <a:solidFill>
-              <a:srgbClr val="DCDCDC"/>
-            </a:solidFill>
-            <a:prstDash val="solid"/>
-          </a:ln>
-        </p:spPr>
-      </p:sp>
-      <p:sp>
-        <p:nvSpPr>
-          <p:cNvPr id="17" name="bk-haz-h"/>
-          <p:cNvSpPr txBox="1"/>
-          <p:nvPr/>
-        </p:nvSpPr>
-        <p:spPr>
-          <a:xfrm>
-            <a:off x="6473952" y="4087368"/>
-            <a:ext cx="4882896" cy="292608"/>
-          </a:xfrm>
-          <a:prstGeom prst="rect">
-            <a:avLst/>
-          </a:prstGeom>
-          <a:noFill/>
-          <a:ln/>
-        </p:spPr>
-        <p:txBody>
-          <a:bodyPr wrap="square" lIns="0" tIns="0" rIns="0" bIns="0" rtlCol="0" anchor="ctr"/>
-          <a:lstStyle/>
-          <a:p>
-            <a:pPr indent="0" marL="0">
-              <a:buNone/>
-            </a:pPr>
-            <a:r>
-              <a:rPr lang="en-US" sz="1350" b="1" dirty="0">
-                <a:solidFill>
-                  <a:srgbClr val="1A1A1A"/>
-                </a:solidFill>
-              </a:rPr>
-              <a:t>Engineering hazards behind these numbers</a:t>
-            </a:r>
-            <a:endParaRPr lang="en-US" sz="1350" dirty="0"/>
-          </a:p>
-        </p:txBody>
-      </p:sp>
-      <p:sp>
-        <p:nvSpPr>
-          <p:cNvPr id="18" name="bk-haz-b"/>
-          <p:cNvSpPr txBox="1"/>
-          <p:nvPr/>
-        </p:nvSpPr>
-        <p:spPr>
-          <a:xfrm>
-            <a:off x="6473952" y="4489704"/>
-            <a:ext cx="4882896" cy="1335024"/>
-          </a:xfrm>
-          <a:prstGeom prst="rect">
-            <a:avLst/>
-          </a:prstGeom>
-          <a:noFill/>
-          <a:ln/>
-        </p:spPr>
-        <p:txBody>
-          <a:bodyPr wrap="square" lIns="0" tIns="0" rIns="0" bIns="0" rtlCol="0" anchor="t"/>
-          <a:lstStyle/>
-          <a:p>
-            <a:pPr indent="0" marL="0">
-              <a:lnSpc>
-                <a:spcPct val="125000"/>
-              </a:lnSpc>
-              <a:buNone/>
-            </a:pPr>
-            <a:r>
-              <a:rPr lang="en-US" sz="1050" dirty="0">
-                <a:solidFill>
-                  <a:srgbClr val="444444"/>
-                </a:solidFill>
-                <a:latin typeface="Arial" pitchFamily="34" charset="0"/>
-                <a:ea typeface="Arial" pitchFamily="34" charset="-122"/>
-                <a:cs typeface="Arial" pitchFamily="34" charset="-120"/>
-              </a:rPr>
-              <a:t>GPU:  two 3B Q4_K_M judges do not fit in 4 GB, so the pipeline drives one judge over the whole fact list, then releases its weights — otherwise every call pays a ~20 s model load.</a:t>
-            </a:r>
-            <a:endParaRPr lang="en-US" sz="1050" dirty="0"/>
-          </a:p>
-          <a:p>
-            <a:pPr indent="0" marL="0">
-              <a:lnSpc>
-                <a:spcPct val="125000"/>
-              </a:lnSpc>
-              <a:buNone/>
-            </a:pPr>
-            <a:r>
-              <a:rPr lang="en-US" sz="1050" dirty="0">
-                <a:solidFill>
-                  <a:srgbClr val="444444"/>
-                </a:solidFill>
-                <a:latin typeface="Arial" pitchFamily="34" charset="0"/>
-                <a:ea typeface="Arial" pitchFamily="34" charset="-122"/>
-                <a:cs typeface="Arial" pitchFamily="34" charset="-120"/>
-              </a:rPr>
-              <a:t>Retrieval:  Wikipedia rate-limits unauthenticated clients and failures are not cached, so without retries a 429 silently becomes “no evidence”. Fixed with retries and backoff.</a:t>
-            </a:r>
-            <a:endParaRPr lang="en-US" sz="1050" dirty="0"/>
-          </a:p>
-          <a:p>
-            <a:pPr indent="0" marL="0">
-              <a:lnSpc>
-                <a:spcPct val="125000"/>
-              </a:lnSpc>
-              <a:buNone/>
-            </a:pPr>
-            <a:r>
-              <a:rPr lang="en-US" sz="1050" dirty="0">
-                <a:solidFill>
-                  <a:srgbClr val="444444"/>
-                </a:solidFill>
-                <a:latin typeface="Arial" pitchFamily="34" charset="0"/>
-                <a:ea typeface="Arial" pitchFamily="34" charset="-122"/>
-                <a:cs typeface="Arial" pitchFamily="34" charset="-120"/>
-              </a:rPr>
-              <a:t>Replay:  every LLM call is cached under hash(model + prompt + parameters).</a:t>
-            </a:r>
-            <a:endParaRPr lang="en-US" sz="1050" dirty="0"/>
-          </a:p>
-        </p:txBody>
-      </p:sp>
-      <p:sp>
-        <p:nvSpPr>
-          <p:cNvPr id="19" name="note"/>
-          <p:cNvSpPr txBox="1"/>
-          <p:nvPr/>
-        </p:nvSpPr>
-        <p:spPr>
-          <a:xfrm>
-            <a:off x="548640" y="6291072"/>
-            <a:ext cx="10607040" cy="274320"/>
-          </a:xfrm>
-          <a:prstGeom prst="rect">
-            <a:avLst/>
-          </a:prstGeom>
-          <a:noFill/>
-          <a:ln/>
-        </p:spPr>
-        <p:txBody>
-          <a:bodyPr wrap="square" lIns="0" tIns="0" rIns="0" bIns="0" rtlCol="0" anchor="ctr"/>
-          <a:lstStyle/>
-          <a:p>
-            <a:pPr indent="0" marL="0">
-              <a:buNone/>
-            </a:pPr>
-            <a:r>
-              <a:rPr lang="en-US" sz="950" dirty="0">
-                <a:solidFill>
-                  <a:srgbClr val="767676"/>
-                </a:solidFill>
-                <a:latin typeface="Arial" pitchFamily="34" charset="0"/>
-                <a:ea typeface="Arial" pitchFamily="34" charset="-122"/>
-                <a:cs typeface="Arial" pitchFamily="34" charset="-120"/>
-              </a:rPr>
-              <a:t>Full write-up in README.md and colab/RESULTS.md. All three runs reproduce from one command with no GPU.</a:t>
-            </a:r>
-            <a:endParaRPr lang="en-US" sz="950" dirty="0"/>
-          </a:p>
-        </p:txBody>
-      </p:sp>
-      <p:sp>
-        <p:nvSpPr>
-          <p:cNvPr id="25" name="Slide Number Placeholder 0"/>
-          <p:cNvSpPr>
-            <a:spLocks noGrp="1"/>
-          </p:cNvSpPr>
-          <p:nvPr>
-            <p:ph type="sldNum" sz="quarter" idx="4294967295"/>
-          </p:nvPr>
-        </p:nvSpPr>
-        <p:spPr>
-          <a:xfrm>
-            <a:off x="11338560" y="6327648"/>
-            <a:ext cx="365760" cy="256032"/>
-          </a:xfrm>
-          <a:prstGeom prst="rect">
-            <a:avLst/>
-          </a:prstGeom>
-          <a:extLst>
-            <a:ext uri="{C572A759-6A51-4108-AA02-DFA0A04FC94B}">
-              <ma14:wrappingTextBoxFlag xmlns:ma14="http://schemas.microsoft.com/office/mac/drawingml/2011/main" val="0"/>
-            </a:ext>
-          </a:extLst>
-        </p:spPr>
-        <p:txBody>
-          <a:bodyPr/>
-          <a:lstStyle>
-            <a:lvl1pPr>
-              <a:defRPr sz="900">
-                <a:solidFill>
-                  <a:srgbClr val="767676"/>
-                </a:solidFill>
-              </a:defRPr>
-            </a:lvl1pPr>
-          </a:lstStyle>
-          <a:p>
-            <a:pPr algn="r"/>
-            <a:fld id="{F7021451-1387-4CA6-816F-3879F97B5CBC}" type="slidenum">
-              <a:rPr b="0" lang="en-US"/>
-              <a:t>16</a:t>
             </a:fld>
             <a:endParaRPr lang="en-US"/>
           </a:p>

--- a/presentation/VERIFACT-Lite-TTU.pptx
+++ b/presentation/VERIFACT-Lite-TTU.pptx
@@ -4,6 +4,9 @@
   <p:sldMasterIdLst>
     <p:sldMasterId id="2147483648" r:id="rId1"/>
   </p:sldMasterIdLst>
+  <p:notesMasterIdLst>
+    <p:notesMasterId r:id="rId17"/>
+  </p:notesMasterIdLst>
   <p:sldIdLst>
     <p:sldId id="256" r:id="rId2"/>
     <p:sldId id="257" r:id="rId3"/>
@@ -21,9 +24,6 @@
     <p:sldId id="269" r:id="rId15"/>
     <p:sldId id="270" r:id="rId16"/>
   </p:sldIdLst>
-  <p:notesMasterIdLst>
-    <p:notesMasterId r:id="rId17"/>
-  </p:notesMasterIdLst>
   <p:sldSz cx="12192000" cy="6858000"/>
   <p:notesSz cx="6858000" cy="12192000"/>
   <p:defaultTextStyle>
@@ -121,7 +121,7 @@
   <p:extLst>
     <p:ext uri="{521415D9-36F7-43E2-AB2F-B90AF26B5E84}">
       <p14:sectionLst xmlns:p14="http://schemas.microsoft.com/office/powerpoint/2010/main">
-        <p14:section name="Talk" id="{3c82f99c-11c9-a1b4-4251-9486edae6c71}">
+        <p14:section name="Talk" id="{3C82F99C-11C9-A1B4-4251-9486EDAE6C71}">
           <p14:sldIdLst>
             <p14:sldId id="256"/>
             <p14:sldId id="257"/>
@@ -150,9 +150,11 @@
 </file>
 
 <file path=ppt/charts/chart1.xml><?xml version="1.0" encoding="utf-8"?>
-<c:chartSpace xmlns:c="http://schemas.openxmlformats.org/drawingml/2006/chart" xmlns:a="http://schemas.openxmlformats.org/drawingml/2006/main" xmlns:r="http://schemas.openxmlformats.org/officeDocument/2006/relationships">
+<c:chartSpace xmlns:c="http://schemas.openxmlformats.org/drawingml/2006/chart" xmlns:a="http://schemas.openxmlformats.org/drawingml/2006/main" xmlns:r="http://schemas.openxmlformats.org/officeDocument/2006/relationships" xmlns:c16r2="http://schemas.microsoft.com/office/drawing/2015/06/chart">
   <c:date1904 val="0"/>
+  <c:lang val="en-US"/>
   <c:roundedCorners val="1"/>
+  <c:style val="2"/>
   <c:chart>
     <c:autoTitleDeleted val="1"/>
     <c:plotArea>
@@ -184,18 +186,26 @@
           <c:invertIfNegative val="0"/>
           <c:dLbls>
             <c:numFmt formatCode="0.000" sourceLinked="0"/>
+            <c:spPr>
+              <a:noFill/>
+              <a:ln>
+                <a:noFill/>
+              </a:ln>
+              <a:effectLst/>
+            </c:spPr>
             <c:txPr>
               <a:bodyPr/>
               <a:lstStyle/>
               <a:p>
                 <a:pPr>
-                  <a:defRPr b="0" i="0" strike="noStrike" sz="1000" u="none">
+                  <a:defRPr sz="1000" b="0" i="0" u="none" strike="noStrike">
                     <a:solidFill>
                       <a:srgbClr val="444444"/>
                     </a:solidFill>
                     <a:latin typeface="+mn-lt"/>
                   </a:defRPr>
                 </a:pPr>
+                <a:endParaRPr lang="en-US"/>
               </a:p>
             </c:txPr>
             <c:showLegendKey val="0"/>
@@ -205,25 +215,28 @@
             <c:showPercent val="0"/>
             <c:showBubbleSize val="0"/>
             <c:showLeaderLines val="0"/>
+            <c:extLst>
+              <c:ext xmlns:c15="http://schemas.microsoft.com/office/drawing/2012/chart" uri="{CE6537A1-D6FC-4f65-9D91-7224C49458BB}">
+                <c15:showLeaderLines val="0"/>
+              </c:ext>
+            </c:extLst>
           </c:dLbls>
           <c:cat>
-            <c:multiLvlStrRef>
+            <c:strRef>
               <c:f>Sheet1!$A$2:$A$4</c:f>
-              <c:multiLvlStrCache>
+              <c:strCache>
                 <c:ptCount val="3"/>
-                <c:lvl>
-                  <c:pt idx="0">
-                    <c:v>Precision</c:v>
-                  </c:pt>
-                  <c:pt idx="1">
-                    <c:v>Recall</c:v>
-                  </c:pt>
-                  <c:pt idx="2">
-                    <c:v>F1</c:v>
-                  </c:pt>
-                </c:lvl>
-              </c:multiLvlStrCache>
-            </c:multiLvlStrRef>
+                <c:pt idx="0">
+                  <c:v>Precision</c:v>
+                </c:pt>
+                <c:pt idx="1">
+                  <c:v>Recall</c:v>
+                </c:pt>
+                <c:pt idx="2">
+                  <c:v>F1</c:v>
+                </c:pt>
+              </c:strCache>
+            </c:strRef>
           </c:cat>
           <c:val>
             <c:numRef>
@@ -235,7 +248,7 @@
                   <c:v>0.42</c:v>
                 </c:pt>
                 <c:pt idx="1">
-                  <c:v>0.4077</c:v>
+                  <c:v>0.40770000000000001</c:v>
                 </c:pt>
                 <c:pt idx="2">
                   <c:v>0.4138</c:v>
@@ -243,6 +256,11 @@
               </c:numCache>
             </c:numRef>
           </c:val>
+          <c:extLst>
+            <c:ext xmlns:c16="http://schemas.microsoft.com/office/drawing/2014/chart" uri="{C3380CC4-5D6E-409C-BE32-E72D297353CC}">
+              <c16:uniqueId val="{00000000-AE06-4537-B4FD-246AF77FE4A2}"/>
+            </c:ext>
+          </c:extLst>
         </c:ser>
         <c:ser>
           <c:idx val="1"/>
@@ -267,18 +285,26 @@
           <c:invertIfNegative val="0"/>
           <c:dLbls>
             <c:numFmt formatCode="0.000" sourceLinked="0"/>
+            <c:spPr>
+              <a:noFill/>
+              <a:ln>
+                <a:noFill/>
+              </a:ln>
+              <a:effectLst/>
+            </c:spPr>
             <c:txPr>
               <a:bodyPr/>
               <a:lstStyle/>
               <a:p>
                 <a:pPr>
-                  <a:defRPr b="0" i="0" strike="noStrike" sz="1000" u="none">
+                  <a:defRPr sz="1000" b="0" i="0" u="none" strike="noStrike">
                     <a:solidFill>
                       <a:srgbClr val="444444"/>
                     </a:solidFill>
                     <a:latin typeface="+mn-lt"/>
                   </a:defRPr>
                 </a:pPr>
+                <a:endParaRPr lang="en-US"/>
               </a:p>
             </c:txPr>
             <c:showLegendKey val="0"/>
@@ -288,25 +314,28 @@
             <c:showPercent val="0"/>
             <c:showBubbleSize val="0"/>
             <c:showLeaderLines val="0"/>
+            <c:extLst>
+              <c:ext xmlns:c15="http://schemas.microsoft.com/office/drawing/2012/chart" uri="{CE6537A1-D6FC-4f65-9D91-7224C49458BB}">
+                <c15:showLeaderLines val="0"/>
+              </c:ext>
+            </c:extLst>
           </c:dLbls>
           <c:cat>
-            <c:multiLvlStrRef>
+            <c:strRef>
               <c:f>Sheet1!$A$2:$A$4</c:f>
-              <c:multiLvlStrCache>
+              <c:strCache>
                 <c:ptCount val="3"/>
-                <c:lvl>
-                  <c:pt idx="0">
-                    <c:v>Precision</c:v>
-                  </c:pt>
-                  <c:pt idx="1">
-                    <c:v>Recall</c:v>
-                  </c:pt>
-                  <c:pt idx="2">
-                    <c:v>F1</c:v>
-                  </c:pt>
-                </c:lvl>
-              </c:multiLvlStrCache>
-            </c:multiLvlStrRef>
+                <c:pt idx="0">
+                  <c:v>Precision</c:v>
+                </c:pt>
+                <c:pt idx="1">
+                  <c:v>Recall</c:v>
+                </c:pt>
+                <c:pt idx="2">
+                  <c:v>F1</c:v>
+                </c:pt>
+              </c:strCache>
+            </c:strRef>
           </c:cat>
           <c:val>
             <c:numRef>
@@ -315,47 +344,34 @@
                 <c:formatCode>General</c:formatCode>
                 <c:ptCount val="3"/>
                 <c:pt idx="0">
-                  <c:v>0.3426</c:v>
+                  <c:v>0.34260000000000002</c:v>
                 </c:pt>
                 <c:pt idx="1">
-                  <c:v>0.4077</c:v>
+                  <c:v>0.40770000000000001</c:v>
                 </c:pt>
                 <c:pt idx="2">
-                  <c:v>0.3723</c:v>
+                  <c:v>0.37230000000000002</c:v>
                 </c:pt>
               </c:numCache>
             </c:numRef>
           </c:val>
+          <c:extLst>
+            <c:ext xmlns:c16="http://schemas.microsoft.com/office/drawing/2014/chart" uri="{C3380CC4-5D6E-409C-BE32-E72D297353CC}">
+              <c16:uniqueId val="{00000001-AE06-4537-B4FD-246AF77FE4A2}"/>
+            </c:ext>
+          </c:extLst>
         </c:ser>
         <c:dLbls>
-          <c:numFmt formatCode="0.000" sourceLinked="0"/>
-          <c:txPr>
-            <a:bodyPr/>
-            <a:lstStyle/>
-            <a:p>
-              <a:pPr>
-                <a:defRPr b="0" i="0" strike="noStrike" sz="1000" u="none">
-                  <a:solidFill>
-                    <a:srgbClr val="444444"/>
-                  </a:solidFill>
-                  <a:latin typeface="+mn-lt"/>
-                </a:defRPr>
-              </a:pPr>
-            </a:p>
-          </c:txPr>
           <c:showLegendKey val="0"/>
           <c:showVal val="1"/>
           <c:showCatName val="0"/>
           <c:showSerName val="0"/>
           <c:showPercent val="0"/>
           <c:showBubbleSize val="0"/>
-          <c:showLeaderLines val="0"/>
         </c:dLbls>
         <c:gapWidth val="60"/>
-        <c:overlap val="0"/>
         <c:axId val="2094734554"/>
         <c:axId val="2094734552"/>
-        <c:axId val="2094734556"/>
       </c:barChart>
       <c:catAx>
         <c:axId val="2094734554"/>
@@ -396,13 +412,14 @@
         <c:crosses val="autoZero"/>
         <c:auto val="1"/>
         <c:lblAlgn val="ctr"/>
+        <c:lblOffset val="100"/>
         <c:noMultiLvlLbl val="1"/>
       </c:catAx>
       <c:valAx>
         <c:axId val="2094734552"/>
         <c:scaling>
           <c:orientation val="minMax"/>
-          <c:max val="0.55"/>
+          <c:max val="0.55000000000000004"/>
           <c:min val="0"/>
         </c:scaling>
         <c:delete val="0"/>
@@ -480,6 +497,7 @@
     </c:legend>
     <c:plotVisOnly val="1"/>
     <c:dispBlanksAs val="span"/>
+    <c:showDLblsOverMax val="1"/>
   </c:chart>
   <c:spPr>
     <a:noFill/>
@@ -516,234 +534,10 @@
           <a:chExt cx="0" cy="0"/>
         </a:xfrm>
       </p:grpSpPr>
-      <p:sp>
-        <p:nvSpPr>
-          <p:cNvPr id="2" name="Header Placeholder 1"/>
-          <p:cNvSpPr>
-            <a:spLocks noGrp="1"/>
-          </p:cNvSpPr>
-          <p:nvPr>
-            <p:ph type="hdr" sz="quarter"/>
-          </p:nvPr>
-        </p:nvSpPr>
-        <p:spPr>
-          <a:xfrm>
-            <a:off x="0" y="0"/>
-            <a:ext cx="2971800" cy="458788"/>
-          </a:xfrm>
-          <a:prstGeom prst="rect">
-            <a:avLst/>
-          </a:prstGeom>
-        </p:spPr>
-        <p:txBody>
-          <a:bodyPr vert="horz" lIns="91440" tIns="45720" rIns="91440" bIns="45720" rtlCol="0"/>
-          <a:lstStyle>
-            <a:lvl1pPr algn="l">
-              <a:defRPr sz="1200"/>
-            </a:lvl1pPr>
-          </a:lstStyle>
-          <a:p>
-            <a:endParaRPr lang="en-US"/>
-          </a:p>
-        </p:txBody>
-      </p:sp>
-      <p:sp>
-        <p:nvSpPr>
-          <p:cNvPr id="3" name="Date Placeholder 2"/>
-          <p:cNvSpPr>
-            <a:spLocks noGrp="1"/>
-          </p:cNvSpPr>
-          <p:nvPr>
-            <p:ph type="dt" idx="1"/>
-          </p:nvPr>
-        </p:nvSpPr>
-        <p:spPr>
-          <a:xfrm>
-            <a:off x="3884613" y="0"/>
-            <a:ext cx="2971800" cy="458788"/>
-          </a:xfrm>
-          <a:prstGeom prst="rect">
-            <a:avLst/>
-          </a:prstGeom>
-        </p:spPr>
-        <p:txBody>
-          <a:bodyPr vert="horz" lIns="91440" tIns="45720" rIns="91440" bIns="45720" rtlCol="0"/>
-          <a:lstStyle>
-            <a:lvl1pPr algn="r">
-              <a:defRPr sz="1200"/>
-            </a:lvl1pPr>
-          </a:lstStyle>
-          <a:p>
-            <a:fld id="{5282F153-3F37-0F45-9E97-73ACFA13230C}" type="datetimeFigureOut">
-              <a:rPr lang="en-US"/>
-              <a:t>7/23/19</a:t>
-            </a:fld>
-            <a:endParaRPr lang="en-US"/>
-          </a:p>
-        </p:txBody>
-      </p:sp>
-      <p:sp>
-        <p:nvSpPr>
-          <p:cNvPr id="4" name="Slide Image Placeholder 3"/>
-          <p:cNvSpPr>
-            <a:spLocks noGrp="1" noRot="1" noChangeAspect="1"/>
-          </p:cNvSpPr>
-          <p:nvPr>
-            <p:ph type="sldImg" idx="2"/>
-          </p:nvPr>
-        </p:nvSpPr>
-        <p:spPr>
-          <a:xfrm>
-            <a:off x="685800" y="1143000"/>
-            <a:ext cx="5486400" cy="3086100"/>
-          </a:xfrm>
-          <a:prstGeom prst="rect">
-            <a:avLst/>
-          </a:prstGeom>
-          <a:noFill/>
-          <a:ln w="12700">
-            <a:solidFill>
-              <a:prstClr val="black"/>
-            </a:solidFill>
-          </a:ln>
-        </p:spPr>
-        <p:txBody>
-          <a:bodyPr vert="horz" lIns="91440" tIns="45720" rIns="91440" bIns="45720" rtlCol="0" anchor="ctr"/>
-          <a:lstStyle/>
-          <a:p>
-            <a:endParaRPr lang="en-US"/>
-          </a:p>
-        </p:txBody>
-      </p:sp>
-      <p:sp>
-        <p:nvSpPr>
-          <p:cNvPr id="5" name="Notes Placeholder 4"/>
-          <p:cNvSpPr>
-            <a:spLocks noGrp="1"/>
-          </p:cNvSpPr>
-          <p:nvPr>
-            <p:ph type="body" sz="quarter" idx="3"/>
-          </p:nvPr>
-        </p:nvSpPr>
-        <p:spPr>
-          <a:xfrm>
-            <a:off x="685800" y="4400550"/>
-            <a:ext cx="5486400" cy="3600450"/>
-          </a:xfrm>
-          <a:prstGeom prst="rect">
-            <a:avLst/>
-          </a:prstGeom>
-        </p:spPr>
-        <p:txBody>
-          <a:bodyPr vert="horz" lIns="91440" tIns="45720" rIns="91440" bIns="45720" rtlCol="0"/>
-          <a:lstStyle/>
-          <a:p>
-            <a:pPr lvl="0"/>
-            <a:r>
-              <a:rPr lang="en-US"/>
-              <a:t>Click to edit Master text styles</a:t>
-            </a:r>
-          </a:p>
-          <a:p>
-            <a:pPr lvl="1"/>
-            <a:r>
-              <a:rPr lang="en-US"/>
-              <a:t>Second level</a:t>
-            </a:r>
-          </a:p>
-          <a:p>
-            <a:pPr lvl="2"/>
-            <a:r>
-              <a:rPr lang="en-US"/>
-              <a:t>Third level</a:t>
-            </a:r>
-          </a:p>
-          <a:p>
-            <a:pPr lvl="3"/>
-            <a:r>
-              <a:rPr lang="en-US"/>
-              <a:t>Fourth level</a:t>
-            </a:r>
-          </a:p>
-          <a:p>
-            <a:pPr lvl="4"/>
-            <a:r>
-              <a:rPr lang="en-US"/>
-              <a:t>Fifth level</a:t>
-            </a:r>
-          </a:p>
-        </p:txBody>
-      </p:sp>
-      <p:sp>
-        <p:nvSpPr>
-          <p:cNvPr id="6" name="Footer Placeholder 5"/>
-          <p:cNvSpPr>
-            <a:spLocks noGrp="1"/>
-          </p:cNvSpPr>
-          <p:nvPr>
-            <p:ph type="ftr" sz="quarter" idx="4"/>
-          </p:nvPr>
-        </p:nvSpPr>
-        <p:spPr>
-          <a:xfrm>
-            <a:off x="0" y="8685213"/>
-            <a:ext cx="2971800" cy="458787"/>
-          </a:xfrm>
-          <a:prstGeom prst="rect">
-            <a:avLst/>
-          </a:prstGeom>
-        </p:spPr>
-        <p:txBody>
-          <a:bodyPr vert="horz" lIns="91440" tIns="45720" rIns="91440" bIns="45720" rtlCol="0" anchor="b"/>
-          <a:lstStyle>
-            <a:lvl1pPr algn="l">
-              <a:defRPr sz="1200"/>
-            </a:lvl1pPr>
-          </a:lstStyle>
-          <a:p>
-            <a:endParaRPr lang="en-US"/>
-          </a:p>
-        </p:txBody>
-      </p:sp>
-      <p:sp>
-        <p:nvSpPr>
-          <p:cNvPr id="7" name="Slide Number Placeholder 6"/>
-          <p:cNvSpPr>
-            <a:spLocks noGrp="1"/>
-          </p:cNvSpPr>
-          <p:nvPr>
-            <p:ph type="sldNum" sz="quarter" idx="5"/>
-          </p:nvPr>
-        </p:nvSpPr>
-        <p:spPr>
-          <a:xfrm>
-            <a:off x="3884613" y="8685213"/>
-            <a:ext cx="2971800" cy="458787"/>
-          </a:xfrm>
-          <a:prstGeom prst="rect">
-            <a:avLst/>
-          </a:prstGeom>
-        </p:spPr>
-        <p:txBody>
-          <a:bodyPr vert="horz" lIns="91440" tIns="45720" rIns="91440" bIns="45720" rtlCol="0" anchor="b"/>
-          <a:lstStyle>
-            <a:lvl1pPr algn="r">
-              <a:defRPr sz="1200"/>
-            </a:lvl1pPr>
-          </a:lstStyle>
-          <a:p>
-            <a:fld id="{CE5E9CC1-C706-0F49-92D6-E571CC5EEA8F}" type="slidenum">
-              <a:rPr lang="en-US"/>
-              <a:t>‹#›</a:t>
-            </a:fld>
-            <a:endParaRPr lang="en-US"/>
-          </a:p>
-        </p:txBody>
-      </p:sp>
     </p:spTree>
     <p:extLst>
       <p:ext uri="{BB962C8B-B14F-4D97-AF65-F5344CB8AC3E}">
-        <p14:creationId xmlns:p14="http://schemas.microsoft.com/office/powerpoint/2010/main" val="1024086991"/>
+        <p14:creationId xmlns:p14="http://schemas.microsoft.com/office/powerpoint/2010/main" val="1678873339"/>
       </p:ext>
     </p:extLst>
   </p:cSld>
@@ -891,7 +685,6 @@
               <a:rPr lang="en-US" dirty="0"/>
               <a:t>[0:20] One sentence: we rebuilt the paper's mechanism on local hardware, measured it against its own baseline, then re-ran the whole thing with larger judges to find out which conclusions were real. Move on quickly.</a:t>
             </a:r>
-            <a:endParaRPr lang="en-US" dirty="0"/>
           </a:p>
         </p:txBody>
       </p:sp>
@@ -979,7 +772,6 @@
               <a:rPr lang="en-US" dirty="0"/>
               <a:t>[1:00] Frame this as the contribution: the paper ran one configuration, we ran three and asked which results were real. Be explicit that A is the controlled comparison and B is not — that distinction is why the next two slides can say anything at all.</a:t>
             </a:r>
-            <a:endParaRPr lang="en-US" dirty="0"/>
           </a:p>
         </p:txBody>
       </p:sp>
@@ -1067,7 +859,6 @@
               <a:rPr lang="en-US" dirty="0"/>
               <a:t>[1:30] The strongest finding of the project, and it is a methodological one. Any factuality score of this kind is a property of the judge as much as of the system under test. Say plainly: this is why we do not compare our absolute numbers with the paper's.</a:t>
             </a:r>
-            <a:endParaRPr lang="en-US" dirty="0"/>
           </a:p>
         </p:txBody>
       </p:sp>
@@ -1155,7 +946,6 @@
               <a:rPr lang="en-US" dirty="0"/>
               <a:t>[1:15] Two claims, opposite fates. Majority beating union survives everywhere. The dramatic incomplete-rate gap was a 3B artifact and we say so. Then the bottom table: for relations the union really is one judge's opinion at every size, but for incompleteness bigger judges finally complement each other — 33 exceeds both 32 and 27, which is the behaviour the union rule assumes.</a:t>
             </a:r>
-            <a:endParaRPr lang="en-US" dirty="0"/>
           </a:p>
         </p:txBody>
       </p:sp>
@@ -1243,7 +1033,6 @@
               <a:rPr lang="en-US" dirty="0"/>
               <a:t>[0:55] Point at the Agreement column, not the numbers. The claim is that the mechanism behaves as described; the claim is explicitly not that the numbers match.</a:t>
             </a:r>
-            <a:endParaRPr lang="en-US" dirty="0"/>
           </a:p>
         </p:txBody>
       </p:sp>
@@ -1331,7 +1120,6 @@
               <a:rPr lang="en-US" dirty="0"/>
               <a:t>[0:55] Open by owning the 0.92 mistake — it shows the harness was itself tested. Then the table: the top two rows started as proposals on the first version of this talk and are now experiments with results. The rest are still proposals, and are labelled as such.</a:t>
             </a:r>
-            <a:endParaRPr lang="en-US" dirty="0"/>
           </a:p>
         </p:txBody>
       </p:sp>
@@ -1419,7 +1207,6 @@
               <a:rPr lang="en-US" dirty="0"/>
               <a:t>[0:40] Close on points 3 and 4. Point 3 is the finding that generalises beyond this paper. Point 4 is where we corrected ourselves between versions of this talk, which is the honest thing to show. Leave the slide up for the questions.</a:t>
             </a:r>
-            <a:endParaRPr lang="en-US" dirty="0"/>
           </a:p>
         </p:txBody>
       </p:sp>
@@ -1507,7 +1294,6 @@
               <a:rPr lang="en-US" dirty="0"/>
               <a:t>[1:15] This example is the whole paper. Verifying the stripped claim gives a meaningless verdict, because it is not what the answer said. Read the two fact lists side by side, then point at the three numbers: measured on human annotation, not anecdote.</a:t>
             </a:r>
-            <a:endParaRPr lang="en-US" dirty="0"/>
           </a:p>
         </p:txBody>
       </p:sp>
@@ -1595,7 +1381,6 @@
               <a:rPr lang="en-US" dirty="0"/>
               <a:t>[0:45] Three sentences on what the framework is, then the bottom strip: this is what the paper claims. Say explicitly that the bottom row is the paper's, not ours — the rest of the talk is about which of these behaviours survive at this scale.</a:t>
             </a:r>
-            <a:endParaRPr lang="en-US" dirty="0"/>
           </a:p>
         </p:txBody>
       </p:sp>
@@ -1683,7 +1468,6 @@
               <a:rPr lang="en-US" dirty="0"/>
               <a:t>[1:15] Walk the four boxes left to right in about thirty seconds. Spend the rest on the two bottom cards: these are the two mechanisms we reimplemented. The union rule matters later — we test whether it is the right choice.</a:t>
             </a:r>
-            <a:endParaRPr lang="en-US" dirty="0"/>
           </a:p>
         </p:txBody>
       </p:sp>
@@ -1771,7 +1555,6 @@
               <a:rPr lang="en-US" dirty="0"/>
               <a:t>[0:55] Do not read the table. Say: every paid or large component has a local stand-in, and the detection logic itself is unchanged. Then the bottom strip — twelve questions written to contain conditions, comparisons and event order, and an answer key written by hand before any run.</a:t>
             </a:r>
-            <a:endParaRPr lang="en-US" dirty="0"/>
           </a:p>
         </p:txBody>
       </p:sp>
@@ -1856,10 +1639,8 @@
           <a:lstStyle/>
           <a:p>
             <a:r>
-              <a:rPr lang="en-US" dirty="0"/>
-              <a:t>[0:50] The key methodological point: the answer is generated once, so baseline and VERIFACT-Lite differ only in whether refinement runs. Read the recall definition out loud — it explains why recall never moves between variants.</a:t>
+              <a:t>[0:50] The key methodological point: the answer is generated once, so the baseline and VERIFACT-Lite differ only in whether refinement runs. Read the recall definition out loud — it explains why recall never moves between the two.</a:t>
             </a:r>
-            <a:endParaRPr lang="en-US" dirty="0"/>
           </a:p>
         </p:txBody>
       </p:sp>
@@ -1947,7 +1728,6 @@
               <a:rPr lang="en-US" dirty="0"/>
               <a:t>[1:30] The main reproduction slide. The mechanism does what the paper says to the fact set, and measured precision goes down. Flag that contradicted did not move at all — that becomes the tell two slides from now.</a:t>
             </a:r>
-            <a:endParaRPr lang="en-US" dirty="0"/>
           </a:p>
         </p:txBody>
       </p:sp>
@@ -2035,7 +1815,6 @@
               <a:rPr lang="en-US" dirty="0"/>
               <a:t>[0:45] Walk the table once, then read the three card headings only. Each half of the contribution moves its own metric, and the two compose.</a:t>
             </a:r>
-            <a:endParaRPr lang="en-US" dirty="0"/>
           </a:p>
         </p:txBody>
       </p:sp>
@@ -2123,7 +1902,6 @@
               <a:rPr lang="en-US" dirty="0"/>
               <a:t>[1:15] This slide justifies the paper and explains the precision drop. A quarter to nearly half of verdicts are decided by whether the claim kept its context. Dwell on the contradicted row — it is the result we could not get until the judges were bigger, which is the next section.</a:t>
             </a:r>
-            <a:endParaRPr lang="en-US" dirty="0"/>
           </a:p>
         </p:txBody>
       </p:sp>
@@ -2201,6 +1979,7 @@
         <a:solidFill>
           <a:srgbClr val="FFFFFF"/>
         </a:solidFill>
+        <a:effectLst/>
       </p:bgPr>
     </p:bg>
     <p:spTree>
@@ -2233,6 +2012,7 @@
         <a:solidFill>
           <a:srgbClr val="FFFFFF"/>
         </a:solidFill>
+        <a:effectLst/>
       </p:bgPr>
     </p:bg>
     <p:spTree>
@@ -2269,7 +2049,7 @@
           </a:prstGeom>
           <a:extLst>
             <a:ext uri="{C572A759-6A51-4108-AA02-DFA0A04FC94B}">
-              <ma14:wrappingTextBoxFlag xmlns:ma14="http://schemas.microsoft.com/office/mac/drawingml/2011/main" val="0"/>
+              <ma14:wrappingTextBoxFlag xmlns:ma14="http://schemas.microsoft.com/office/mac/drawingml/2011/main" xmlns="" val="0"/>
             </a:ext>
           </a:extLst>
         </p:spPr>
@@ -2287,8 +2067,8 @@
           <a:p>
             <a:pPr algn="r"/>
             <a:fld id="{F7021451-1387-4CA6-816F-3879F97B5CBC}" type="slidenum">
-              <a:rPr b="0" lang="en-US"/>
-              <a:t>1003</a:t>
+              <a:rPr lang="en-US" b="0"/>
+              <a:t>‹#›</a:t>
             </a:fld>
             <a:endParaRPr lang="en-US"/>
           </a:p>
@@ -2305,6 +2085,11 @@
 <file path=ppt/slideMasters/slideMaster1.xml><?xml version="1.0" encoding="utf-8"?>
 <p:sldMaster xmlns:a="http://schemas.openxmlformats.org/drawingml/2006/main" xmlns:r="http://schemas.openxmlformats.org/officeDocument/2006/relationships" xmlns:p="http://schemas.openxmlformats.org/presentationml/2006/main">
   <p:cSld>
+    <p:bg>
+      <p:bgRef idx="1001">
+        <a:schemeClr val="bg1"/>
+      </p:bgRef>
+    </p:bg>
     <p:spTree>
       <p:nvGrpSpPr>
         <p:cNvPr id="1" name=""/>
@@ -2339,7 +2124,7 @@
           </a:prstGeom>
           <a:extLst>
             <a:ext uri="{C572A759-6A51-4108-AA02-DFA0A04FC94B}">
-              <ma14:wrappingTextBoxFlag xmlns:ma14="http://schemas.microsoft.com/office/mac/drawingml/2011/main" val="0"/>
+              <ma14:wrappingTextBoxFlag xmlns:ma14="http://schemas.microsoft.com/office/mac/drawingml/2011/main" xmlns="" val="0"/>
             </a:ext>
           </a:extLst>
         </p:spPr>
@@ -2357,8 +2142,8 @@
           <a:p>
             <a:pPr algn="r"/>
             <a:fld id="{F7021451-1387-4CA6-816F-3879F97B5CBC}" type="slidenum">
-              <a:rPr b="0" lang="en-US"/>
-              <a:t>null</a:t>
+              <a:rPr lang="en-US" b="0"/>
+              <a:t>‹#›</a:t>
             </a:fld>
             <a:endParaRPr lang="en-US"/>
           </a:p>
@@ -2664,11 +2449,11 @@
           <a:bodyPr wrap="square" lIns="0" tIns="0" rIns="0" bIns="0" rtlCol="0" anchor="ctr"/>
           <a:lstStyle/>
           <a:p>
-            <a:pPr indent="0" marL="0">
+            <a:pPr marL="0" indent="0">
               <a:buNone/>
             </a:pPr>
             <a:r>
-              <a:rPr lang="en-US" sz="1100" b="1" spc="200" kern="0" dirty="0">
+              <a:rPr lang="en-US" sz="1100" b="1" kern="0" spc="200" dirty="0">
                 <a:solidFill>
                   <a:srgbClr val="E90802"/>
                 </a:solidFill>
@@ -2703,7 +2488,7 @@
           <a:bodyPr wrap="square" lIns="0" tIns="0" rIns="0" bIns="0" rtlCol="0" anchor="ctr"/>
           <a:lstStyle/>
           <a:p>
-            <a:pPr indent="0" marL="0">
+            <a:pPr marL="0" indent="0">
               <a:buNone/>
             </a:pPr>
             <a:r>
@@ -2712,7 +2497,7 @@
                   <a:srgbClr val="1A1A1A"/>
                 </a:solidFill>
               </a:rPr>
-              <a:t>VERIFACT-Lite</a:t>
+              <a:t>VERIFACT</a:t>
             </a:r>
             <a:endParaRPr lang="en-US" sz="5000" dirty="0"/>
           </a:p>
@@ -2742,6 +2527,13 @@
             <a:prstDash val="solid"/>
           </a:ln>
         </p:spPr>
+        <p:txBody>
+          <a:bodyPr/>
+          <a:lstStyle/>
+          <a:p>
+            <a:endParaRPr lang="en-IN"/>
+          </a:p>
+        </p:txBody>
       </p:sp>
       <p:sp>
         <p:nvSpPr>
@@ -2764,7 +2556,7 @@
           <a:bodyPr wrap="square" lIns="0" tIns="0" rIns="0" bIns="0" rtlCol="0" anchor="ctr"/>
           <a:lstStyle/>
           <a:p>
-            <a:pPr indent="0" marL="0">
+            <a:pPr marL="0" indent="0">
               <a:buNone/>
             </a:pPr>
             <a:r>
@@ -2803,11 +2595,11 @@
           <a:bodyPr wrap="square" lIns="0" tIns="0" rIns="0" bIns="0" rtlCol="0" anchor="ctr"/>
           <a:lstStyle/>
           <a:p>
-            <a:pPr indent="0" marL="0">
+            <a:pPr marL="0" indent="0">
               <a:buNone/>
             </a:pPr>
             <a:r>
-              <a:rPr lang="en-US" sz="1000" b="1" spc="200" kern="0" dirty="0">
+              <a:rPr lang="en-US" sz="1000" b="1" kern="0" spc="200" dirty="0">
                 <a:solidFill>
                   <a:srgbClr val="767676"/>
                 </a:solidFill>
@@ -2842,7 +2634,7 @@
           <a:bodyPr wrap="square" lIns="0" tIns="0" rIns="0" bIns="0" rtlCol="0" anchor="ctr"/>
           <a:lstStyle/>
           <a:p>
-            <a:pPr indent="0" marL="0">
+            <a:pPr marL="0" indent="0">
               <a:buNone/>
             </a:pPr>
             <a:r>
@@ -2886,6 +2678,13 @@
             <a:prstDash val="solid"/>
           </a:ln>
         </p:spPr>
+        <p:txBody>
+          <a:bodyPr/>
+          <a:lstStyle/>
+          <a:p>
+            <a:endParaRPr lang="en-IN"/>
+          </a:p>
+        </p:txBody>
       </p:sp>
       <p:sp>
         <p:nvSpPr>
@@ -2908,7 +2707,7 @@
           <a:bodyPr wrap="square" lIns="0" tIns="0" rIns="0" bIns="0" rtlCol="0" anchor="ctr"/>
           <a:lstStyle/>
           <a:p>
-            <a:pPr algn="ctr" indent="0" marL="0">
+            <a:pPr marL="0" indent="0" algn="ctr">
               <a:buNone/>
             </a:pPr>
             <a:r>
@@ -2952,6 +2751,13 @@
             <a:prstDash val="solid"/>
           </a:ln>
         </p:spPr>
+        <p:txBody>
+          <a:bodyPr/>
+          <a:lstStyle/>
+          <a:p>
+            <a:endParaRPr lang="en-IN"/>
+          </a:p>
+        </p:txBody>
       </p:sp>
       <p:sp>
         <p:nvSpPr>
@@ -2974,7 +2780,7 @@
           <a:bodyPr wrap="square" lIns="0" tIns="0" rIns="0" bIns="0" rtlCol="0" anchor="ctr"/>
           <a:lstStyle/>
           <a:p>
-            <a:pPr algn="ctr" indent="0" marL="0">
+            <a:pPr marL="0" indent="0" algn="ctr">
               <a:buNone/>
             </a:pPr>
             <a:r>
@@ -3018,6 +2824,13 @@
             <a:prstDash val="solid"/>
           </a:ln>
         </p:spPr>
+        <p:txBody>
+          <a:bodyPr/>
+          <a:lstStyle/>
+          <a:p>
+            <a:endParaRPr lang="en-IN"/>
+          </a:p>
+        </p:txBody>
       </p:sp>
       <p:sp>
         <p:nvSpPr>
@@ -3040,7 +2853,7 @@
           <a:bodyPr wrap="square" lIns="0" tIns="0" rIns="0" bIns="0" rtlCol="0" anchor="ctr"/>
           <a:lstStyle/>
           <a:p>
-            <a:pPr algn="ctr" indent="0" marL="0">
+            <a:pPr marL="0" indent="0" algn="ctr">
               <a:buNone/>
             </a:pPr>
             <a:r>
@@ -3084,6 +2897,13 @@
             <a:prstDash val="solid"/>
           </a:ln>
         </p:spPr>
+        <p:txBody>
+          <a:bodyPr/>
+          <a:lstStyle/>
+          <a:p>
+            <a:endParaRPr lang="en-IN"/>
+          </a:p>
+        </p:txBody>
       </p:sp>
       <p:sp>
         <p:nvSpPr>
@@ -3106,7 +2926,7 @@
           <a:bodyPr wrap="square" lIns="0" tIns="0" rIns="0" bIns="0" rtlCol="0" anchor="ctr"/>
           <a:lstStyle/>
           <a:p>
-            <a:pPr algn="ctr" indent="0" marL="0">
+            <a:pPr marL="0" indent="0" algn="ctr">
               <a:buNone/>
             </a:pPr>
             <a:r>
@@ -3145,7 +2965,7 @@
           <a:bodyPr wrap="square" lIns="0" tIns="0" rIns="0" bIns="0" rtlCol="0" anchor="ctr"/>
           <a:lstStyle/>
           <a:p>
-            <a:pPr indent="0" marL="0">
+            <a:pPr marL="0" indent="0">
               <a:buNone/>
             </a:pPr>
             <a:r>
@@ -3209,11 +3029,11 @@
           <a:bodyPr wrap="square" lIns="0" tIns="0" rIns="0" bIns="0" rtlCol="0" anchor="ctr"/>
           <a:lstStyle/>
           <a:p>
-            <a:pPr indent="0" marL="0">
+            <a:pPr marL="0" indent="0">
               <a:buNone/>
             </a:pPr>
             <a:r>
-              <a:rPr lang="en-US" sz="1000" b="1" spc="200" kern="0" dirty="0">
+              <a:rPr lang="en-US" sz="1000" b="1" kern="0" spc="200" dirty="0">
                 <a:solidFill>
                   <a:srgbClr val="E90802"/>
                 </a:solidFill>
@@ -3248,7 +3068,7 @@
           <a:bodyPr wrap="square" lIns="0" tIns="0" rIns="0" bIns="0" rtlCol="0" anchor="ctr"/>
           <a:lstStyle/>
           <a:p>
-            <a:pPr indent="0" marL="0">
+            <a:pPr marL="0" indent="0">
               <a:buNone/>
             </a:pPr>
             <a:r>
@@ -3284,7 +3104,7 @@
           <a:bodyPr wrap="square" lIns="0" tIns="0" rIns="0" bIns="0" rtlCol="0" anchor="ctr"/>
           <a:lstStyle/>
           <a:p>
-            <a:pPr indent="0" marL="0">
+            <a:pPr marL="0" indent="0">
               <a:buNone/>
             </a:pPr>
             <a:r>
@@ -3326,6 +3146,13 @@
             <a:prstDash val="solid"/>
           </a:ln>
         </p:spPr>
+        <p:txBody>
+          <a:bodyPr/>
+          <a:lstStyle/>
+          <a:p>
+            <a:endParaRPr lang="en-IN"/>
+          </a:p>
+        </p:txBody>
       </p:sp>
       <p:sp>
         <p:nvSpPr>
@@ -3351,6 +3178,13 @@
             <a:prstDash val="solid"/>
           </a:ln>
         </p:spPr>
+        <p:txBody>
+          <a:bodyPr/>
+          <a:lstStyle/>
+          <a:p>
+            <a:endParaRPr lang="en-IN"/>
+          </a:p>
+        </p:txBody>
       </p:sp>
       <p:sp>
         <p:nvSpPr>
@@ -3373,7 +3207,7 @@
           <a:bodyPr wrap="square" lIns="0" tIns="0" rIns="0" bIns="0" rtlCol="0" anchor="ctr"/>
           <a:lstStyle/>
           <a:p>
-            <a:pPr indent="0" marL="0">
+            <a:pPr marL="0" indent="0">
               <a:buNone/>
             </a:pPr>
             <a:r>
@@ -3409,7 +3243,7 @@
           <a:bodyPr wrap="square" lIns="0" tIns="0" rIns="0" bIns="0" rtlCol="0" anchor="t"/>
           <a:lstStyle/>
           <a:p>
-            <a:pPr indent="0" marL="0">
+            <a:pPr marL="0" indent="0">
               <a:lnSpc>
                 <a:spcPct val="125000"/>
               </a:lnSpc>
@@ -3454,6 +3288,13 @@
             <a:prstDash val="solid"/>
           </a:ln>
         </p:spPr>
+        <p:txBody>
+          <a:bodyPr/>
+          <a:lstStyle/>
+          <a:p>
+            <a:endParaRPr lang="en-IN"/>
+          </a:p>
+        </p:txBody>
       </p:sp>
       <p:sp>
         <p:nvSpPr>
@@ -3476,7 +3317,7 @@
           <a:bodyPr wrap="square" lIns="0" tIns="0" rIns="0" bIns="0" rtlCol="0" anchor="ctr"/>
           <a:lstStyle/>
           <a:p>
-            <a:pPr indent="0" marL="0">
+            <a:pPr marL="0" indent="0">
               <a:buNone/>
             </a:pPr>
             <a:r>
@@ -3512,7 +3353,7 @@
           <a:bodyPr wrap="square" lIns="0" tIns="0" rIns="0" bIns="0" rtlCol="0" anchor="t"/>
           <a:lstStyle/>
           <a:p>
-            <a:pPr indent="0" marL="0">
+            <a:pPr marL="0" indent="0">
               <a:lnSpc>
                 <a:spcPct val="125000"/>
               </a:lnSpc>
@@ -3557,6 +3398,13 @@
             <a:prstDash val="solid"/>
           </a:ln>
         </p:spPr>
+        <p:txBody>
+          <a:bodyPr/>
+          <a:lstStyle/>
+          <a:p>
+            <a:endParaRPr lang="en-IN"/>
+          </a:p>
+        </p:txBody>
       </p:sp>
       <p:sp>
         <p:nvSpPr>
@@ -3579,7 +3427,7 @@
           <a:bodyPr wrap="square" lIns="0" tIns="0" rIns="0" bIns="0" rtlCol="0" anchor="ctr"/>
           <a:lstStyle/>
           <a:p>
-            <a:pPr indent="0" marL="0">
+            <a:pPr marL="0" indent="0">
               <a:buNone/>
             </a:pPr>
             <a:r>
@@ -3615,7 +3463,7 @@
           <a:bodyPr wrap="square" lIns="0" tIns="0" rIns="0" bIns="0" rtlCol="0" anchor="t"/>
           <a:lstStyle/>
           <a:p>
-            <a:pPr indent="0" marL="0">
+            <a:pPr marL="0" indent="0">
               <a:lnSpc>
                 <a:spcPct val="125000"/>
               </a:lnSpc>
@@ -3638,32 +3486,62 @@
       </p:sp>
       <p:graphicFrame>
         <p:nvGraphicFramePr>
-          <p:cNvPr id="11" name="configs"/>
+          <p:cNvPr id="15" name="configs"/>
           <p:cNvGraphicFramePr>
             <a:graphicFrameLocks noGrp="1"/>
           </p:cNvGraphicFramePr>
           <p:nvPr>
             <p:extLst>
               <p:ext uri="{D42A27DB-BD31-4B8C-83A1-F6EECF244321}">
-                <p14:modId xmlns:p14="http://schemas.microsoft.com/office/powerpoint/2010/main" val="1579011935"/>
+                <p14:modId xmlns:p14="http://schemas.microsoft.com/office/powerpoint/2010/main" val="1777744775"/>
               </p:ext>
             </p:extLst>
           </p:nvPr>
         </p:nvGraphicFramePr>
         <p:xfrm>
           <a:off x="548640" y="3611880"/>
-          <a:ext cx="11064240" cy="914400"/>
+          <a:ext cx="11064240" cy="1609344"/>
         </p:xfrm>
         <a:graphic>
           <a:graphicData uri="http://schemas.openxmlformats.org/drawingml/2006/table">
             <a:tbl>
               <a:tblPr/>
               <a:tblGrid>
-                <a:gridCol w="2194560"/>
-                <a:gridCol w="2834640"/>
-                <a:gridCol w="3108960"/>
-                <a:gridCol w="1737360"/>
-                <a:gridCol w="1188720"/>
+                <a:gridCol w="2194560">
+                  <a:extLst>
+                    <a:ext uri="{9D8B030D-6E8A-4147-A177-3AD203B41FA5}">
+                      <a16:colId xmlns:a16="http://schemas.microsoft.com/office/drawing/2014/main" val="20000"/>
+                    </a:ext>
+                  </a:extLst>
+                </a:gridCol>
+                <a:gridCol w="2834640">
+                  <a:extLst>
+                    <a:ext uri="{9D8B030D-6E8A-4147-A177-3AD203B41FA5}">
+                      <a16:colId xmlns:a16="http://schemas.microsoft.com/office/drawing/2014/main" val="20001"/>
+                    </a:ext>
+                  </a:extLst>
+                </a:gridCol>
+                <a:gridCol w="3108960">
+                  <a:extLst>
+                    <a:ext uri="{9D8B030D-6E8A-4147-A177-3AD203B41FA5}">
+                      <a16:colId xmlns:a16="http://schemas.microsoft.com/office/drawing/2014/main" val="20002"/>
+                    </a:ext>
+                  </a:extLst>
+                </a:gridCol>
+                <a:gridCol w="1737360">
+                  <a:extLst>
+                    <a:ext uri="{9D8B030D-6E8A-4147-A177-3AD203B41FA5}">
+                      <a16:colId xmlns:a16="http://schemas.microsoft.com/office/drawing/2014/main" val="20003"/>
+                    </a:ext>
+                  </a:extLst>
+                </a:gridCol>
+                <a:gridCol w="1188720">
+                  <a:extLst>
+                    <a:ext uri="{9D8B030D-6E8A-4147-A177-3AD203B41FA5}">
+                      <a16:colId xmlns:a16="http://schemas.microsoft.com/office/drawing/2014/main" val="20004"/>
+                    </a:ext>
+                  </a:extLst>
+                </a:gridCol>
               </a:tblGrid>
               <a:tr h="402336">
                 <a:tc>
@@ -3671,7 +3549,7 @@
                     <a:bodyPr/>
                     <a:lstStyle/>
                     <a:p>
-                      <a:pPr algn="l" indent="0" marL="0">
+                      <a:pPr marL="0" indent="0" algn="l">
                         <a:buNone/>
                       </a:pPr>
                       <a:r>
@@ -3739,7 +3617,7 @@
                     <a:bodyPr/>
                     <a:lstStyle/>
                     <a:p>
-                      <a:pPr algn="l" indent="0" marL="0">
+                      <a:pPr marL="0" indent="0" algn="l">
                         <a:buNone/>
                       </a:pPr>
                       <a:r>
@@ -3807,7 +3685,7 @@
                     <a:bodyPr/>
                     <a:lstStyle/>
                     <a:p>
-                      <a:pPr algn="l" indent="0" marL="0">
+                      <a:pPr marL="0" indent="0" algn="l">
                         <a:buNone/>
                       </a:pPr>
                       <a:r>
@@ -3875,7 +3753,7 @@
                     <a:bodyPr/>
                     <a:lstStyle/>
                     <a:p>
-                      <a:pPr algn="l" indent="0" marL="0">
+                      <a:pPr marL="0" indent="0" algn="l">
                         <a:buNone/>
                       </a:pPr>
                       <a:r>
@@ -3943,7 +3821,7 @@
                     <a:bodyPr/>
                     <a:lstStyle/>
                     <a:p>
-                      <a:pPr algn="l" indent="0" marL="0">
+                      <a:pPr marL="0" indent="0" algn="l">
                         <a:buNone/>
                       </a:pPr>
                       <a:r>
@@ -4006,6 +3884,11 @@
                     </a:solidFill>
                   </a:tcPr>
                 </a:tc>
+                <a:extLst>
+                  <a:ext uri="{0D108BD9-81ED-4DB2-BD59-A6C34878D82A}">
+                    <a16:rowId xmlns:a16="http://schemas.microsoft.com/office/drawing/2014/main" val="10000"/>
+                  </a:ext>
+                </a:extLst>
               </a:tr>
               <a:tr h="402336">
                 <a:tc>
@@ -4013,7 +3896,7 @@
                     <a:bodyPr/>
                     <a:lstStyle/>
                     <a:p>
-                      <a:pPr algn="l" indent="0" marL="0">
+                      <a:pPr marL="0" indent="0" algn="l">
                         <a:buNone/>
                       </a:pPr>
                       <a:r>
@@ -4081,7 +3964,7 @@
                     <a:bodyPr/>
                     <a:lstStyle/>
                     <a:p>
-                      <a:pPr algn="l" indent="0" marL="0">
+                      <a:pPr marL="0" indent="0" algn="l">
                         <a:buNone/>
                       </a:pPr>
                       <a:r>
@@ -4149,7 +4032,7 @@
                     <a:bodyPr/>
                     <a:lstStyle/>
                     <a:p>
-                      <a:pPr algn="l" indent="0" marL="0">
+                      <a:pPr marL="0" indent="0" algn="l">
                         <a:buNone/>
                       </a:pPr>
                       <a:r>
@@ -4217,7 +4100,7 @@
                     <a:bodyPr/>
                     <a:lstStyle/>
                     <a:p>
-                      <a:pPr algn="l" indent="0" marL="0">
+                      <a:pPr marL="0" indent="0" algn="l">
                         <a:buNone/>
                       </a:pPr>
                       <a:r>
@@ -4285,7 +4168,7 @@
                     <a:bodyPr/>
                     <a:lstStyle/>
                     <a:p>
-                      <a:pPr algn="l" indent="0" marL="0">
+                      <a:pPr marL="0" indent="0" algn="l">
                         <a:buNone/>
                       </a:pPr>
                       <a:r>
@@ -4348,6 +4231,11 @@
                     </a:solidFill>
                   </a:tcPr>
                 </a:tc>
+                <a:extLst>
+                  <a:ext uri="{0D108BD9-81ED-4DB2-BD59-A6C34878D82A}">
+                    <a16:rowId xmlns:a16="http://schemas.microsoft.com/office/drawing/2014/main" val="10001"/>
+                  </a:ext>
+                </a:extLst>
               </a:tr>
               <a:tr h="402336">
                 <a:tc>
@@ -4355,7 +4243,7 @@
                     <a:bodyPr/>
                     <a:lstStyle/>
                     <a:p>
-                      <a:pPr algn="l" indent="0" marL="0">
+                      <a:pPr marL="0" indent="0" algn="l">
                         <a:buNone/>
                       </a:pPr>
                       <a:r>
@@ -4423,7 +4311,7 @@
                     <a:bodyPr/>
                     <a:lstStyle/>
                     <a:p>
-                      <a:pPr algn="l" indent="0" marL="0">
+                      <a:pPr marL="0" indent="0" algn="l">
                         <a:buNone/>
                       </a:pPr>
                       <a:r>
@@ -4491,7 +4379,7 @@
                     <a:bodyPr/>
                     <a:lstStyle/>
                     <a:p>
-                      <a:pPr algn="l" indent="0" marL="0">
+                      <a:pPr marL="0" indent="0" algn="l">
                         <a:buNone/>
                       </a:pPr>
                       <a:r>
@@ -4559,7 +4447,7 @@
                     <a:bodyPr/>
                     <a:lstStyle/>
                     <a:p>
-                      <a:pPr algn="l" indent="0" marL="0">
+                      <a:pPr marL="0" indent="0" algn="l">
                         <a:buNone/>
                       </a:pPr>
                       <a:r>
@@ -4627,7 +4515,7 @@
                     <a:bodyPr/>
                     <a:lstStyle/>
                     <a:p>
-                      <a:pPr algn="l" indent="0" marL="0">
+                      <a:pPr marL="0" indent="0" algn="l">
                         <a:buNone/>
                       </a:pPr>
                       <a:r>
@@ -4690,6 +4578,11 @@
                     </a:solidFill>
                   </a:tcPr>
                 </a:tc>
+                <a:extLst>
+                  <a:ext uri="{0D108BD9-81ED-4DB2-BD59-A6C34878D82A}">
+                    <a16:rowId xmlns:a16="http://schemas.microsoft.com/office/drawing/2014/main" val="10002"/>
+                  </a:ext>
+                </a:extLst>
               </a:tr>
               <a:tr h="402336">
                 <a:tc>
@@ -4697,7 +4590,7 @@
                     <a:bodyPr/>
                     <a:lstStyle/>
                     <a:p>
-                      <a:pPr algn="l" indent="0" marL="0">
+                      <a:pPr marL="0" indent="0" algn="l">
                         <a:buNone/>
                       </a:pPr>
                       <a:r>
@@ -4765,7 +4658,7 @@
                     <a:bodyPr/>
                     <a:lstStyle/>
                     <a:p>
-                      <a:pPr algn="l" indent="0" marL="0">
+                      <a:pPr marL="0" indent="0" algn="l">
                         <a:buNone/>
                       </a:pPr>
                       <a:r>
@@ -4833,7 +4726,7 @@
                     <a:bodyPr/>
                     <a:lstStyle/>
                     <a:p>
-                      <a:pPr algn="l" indent="0" marL="0">
+                      <a:pPr marL="0" indent="0" algn="l">
                         <a:buNone/>
                       </a:pPr>
                       <a:r>
@@ -4901,7 +4794,7 @@
                     <a:bodyPr/>
                     <a:lstStyle/>
                     <a:p>
-                      <a:pPr algn="l" indent="0" marL="0">
+                      <a:pPr marL="0" indent="0" algn="l">
                         <a:buNone/>
                       </a:pPr>
                       <a:r>
@@ -4969,7 +4862,7 @@
                     <a:bodyPr/>
                     <a:lstStyle/>
                     <a:p>
-                      <a:pPr algn="l" indent="0" marL="0">
+                      <a:pPr marL="0" indent="0" algn="l">
                         <a:buNone/>
                       </a:pPr>
                       <a:r>
@@ -5032,6 +4925,11 @@
                     </a:solidFill>
                   </a:tcPr>
                 </a:tc>
+                <a:extLst>
+                  <a:ext uri="{0D108BD9-81ED-4DB2-BD59-A6C34878D82A}">
+                    <a16:rowId xmlns:a16="http://schemas.microsoft.com/office/drawing/2014/main" val="10003"/>
+                  </a:ext>
+                </a:extLst>
               </a:tr>
             </a:tbl>
           </a:graphicData>
@@ -5061,6 +4959,13 @@
             <a:prstDash val="solid"/>
           </a:ln>
         </p:spPr>
+        <p:txBody>
+          <a:bodyPr/>
+          <a:lstStyle/>
+          <a:p>
+            <a:endParaRPr lang="en-IN"/>
+          </a:p>
+        </p:txBody>
       </p:sp>
       <p:sp>
         <p:nvSpPr>
@@ -5083,7 +4988,7 @@
           <a:bodyPr wrap="square" lIns="0" tIns="0" rIns="0" bIns="0" rtlCol="0" anchor="t"/>
           <a:lstStyle/>
           <a:p>
-            <a:pPr indent="0" marL="0">
+            <a:pPr marL="0" indent="0">
               <a:lnSpc>
                 <a:spcPct val="125000"/>
               </a:lnSpc>
@@ -5125,7 +5030,7 @@
           <a:bodyPr wrap="square" lIns="0" tIns="0" rIns="0" bIns="0" rtlCol="0" anchor="ctr"/>
           <a:lstStyle/>
           <a:p>
-            <a:pPr indent="0" marL="0">
+            <a:pPr marL="0" indent="0">
               <a:buNone/>
             </a:pPr>
             <a:r>
@@ -5163,7 +5068,7 @@
           </a:prstGeom>
           <a:extLst>
             <a:ext uri="{C572A759-6A51-4108-AA02-DFA0A04FC94B}">
-              <ma14:wrappingTextBoxFlag xmlns:ma14="http://schemas.microsoft.com/office/mac/drawingml/2011/main" val="0"/>
+              <ma14:wrappingTextBoxFlag xmlns:ma14="http://schemas.microsoft.com/office/mac/drawingml/2011/main" xmlns="" val="0"/>
             </a:ext>
           </a:extLst>
         </p:spPr>
@@ -5181,7 +5086,7 @@
           <a:p>
             <a:pPr algn="r"/>
             <a:fld id="{F7021451-1387-4CA6-816F-3879F97B5CBC}" type="slidenum">
-              <a:rPr b="0" lang="en-US"/>
+              <a:rPr lang="en-US" b="0"/>
               <a:t>10</a:t>
             </a:fld>
             <a:endParaRPr lang="en-US"/>
@@ -5234,11 +5139,11 @@
           <a:bodyPr wrap="square" lIns="0" tIns="0" rIns="0" bIns="0" rtlCol="0" anchor="ctr"/>
           <a:lstStyle/>
           <a:p>
-            <a:pPr indent="0" marL="0">
+            <a:pPr marL="0" indent="0">
               <a:buNone/>
             </a:pPr>
             <a:r>
-              <a:rPr lang="en-US" sz="1000" b="1" spc="200" kern="0" dirty="0">
+              <a:rPr lang="en-US" sz="1000" b="1" kern="0" spc="200" dirty="0">
                 <a:solidFill>
                   <a:srgbClr val="E90802"/>
                 </a:solidFill>
@@ -5273,7 +5178,7 @@
           <a:bodyPr wrap="square" lIns="0" tIns="0" rIns="0" bIns="0" rtlCol="0" anchor="ctr"/>
           <a:lstStyle/>
           <a:p>
-            <a:pPr indent="0" marL="0">
+            <a:pPr marL="0" indent="0">
               <a:buNone/>
             </a:pPr>
             <a:r>
@@ -5309,7 +5214,7 @@
           <a:bodyPr wrap="square" lIns="0" tIns="0" rIns="0" bIns="0" rtlCol="0" anchor="ctr"/>
           <a:lstStyle/>
           <a:p>
-            <a:pPr indent="0" marL="0">
+            <a:pPr marL="0" indent="0">
               <a:buNone/>
             </a:pPr>
             <a:r>
@@ -5351,6 +5256,13 @@
             <a:prstDash val="solid"/>
           </a:ln>
         </p:spPr>
+        <p:txBody>
+          <a:bodyPr/>
+          <a:lstStyle/>
+          <a:p>
+            <a:endParaRPr lang="en-IN"/>
+          </a:p>
+        </p:txBody>
       </p:sp>
       <p:graphicFrame>
         <p:nvGraphicFramePr>
@@ -5368,17 +5280,41 @@
         </p:nvGraphicFramePr>
         <p:xfrm>
           <a:off x="548640" y="1600200"/>
-          <a:ext cx="11064240" cy="914400"/>
+          <a:ext cx="11064240" cy="1682496"/>
         </p:xfrm>
         <a:graphic>
           <a:graphicData uri="http://schemas.openxmlformats.org/drawingml/2006/table">
             <a:tbl>
               <a:tblPr/>
               <a:tblGrid>
-                <a:gridCol w="4846320"/>
-                <a:gridCol w="2103120"/>
-                <a:gridCol w="2103120"/>
-                <a:gridCol w="2011680"/>
+                <a:gridCol w="4846320">
+                  <a:extLst>
+                    <a:ext uri="{9D8B030D-6E8A-4147-A177-3AD203B41FA5}">
+                      <a16:colId xmlns:a16="http://schemas.microsoft.com/office/drawing/2014/main" val="20000"/>
+                    </a:ext>
+                  </a:extLst>
+                </a:gridCol>
+                <a:gridCol w="2103120">
+                  <a:extLst>
+                    <a:ext uri="{9D8B030D-6E8A-4147-A177-3AD203B41FA5}">
+                      <a16:colId xmlns:a16="http://schemas.microsoft.com/office/drawing/2014/main" val="20001"/>
+                    </a:ext>
+                  </a:extLst>
+                </a:gridCol>
+                <a:gridCol w="2103120">
+                  <a:extLst>
+                    <a:ext uri="{9D8B030D-6E8A-4147-A177-3AD203B41FA5}">
+                      <a16:colId xmlns:a16="http://schemas.microsoft.com/office/drawing/2014/main" val="20002"/>
+                    </a:ext>
+                  </a:extLst>
+                </a:gridCol>
+                <a:gridCol w="2011680">
+                  <a:extLst>
+                    <a:ext uri="{9D8B030D-6E8A-4147-A177-3AD203B41FA5}">
+                      <a16:colId xmlns:a16="http://schemas.microsoft.com/office/drawing/2014/main" val="20003"/>
+                    </a:ext>
+                  </a:extLst>
+                </a:gridCol>
               </a:tblGrid>
               <a:tr h="420624">
                 <a:tc>
@@ -5386,7 +5322,7 @@
                     <a:bodyPr/>
                     <a:lstStyle/>
                     <a:p>
-                      <a:pPr algn="l" indent="0" marL="0">
+                      <a:pPr marL="0" indent="0" algn="l">
                         <a:buNone/>
                       </a:pPr>
                       <a:r>
@@ -5454,7 +5390,7 @@
                     <a:bodyPr/>
                     <a:lstStyle/>
                     <a:p>
-                      <a:pPr algn="l" indent="0" marL="0">
+                      <a:pPr marL="0" indent="0" algn="l">
                         <a:buNone/>
                       </a:pPr>
                       <a:r>
@@ -5522,7 +5458,7 @@
                     <a:bodyPr/>
                     <a:lstStyle/>
                     <a:p>
-                      <a:pPr algn="l" indent="0" marL="0">
+                      <a:pPr marL="0" indent="0" algn="l">
                         <a:buNone/>
                       </a:pPr>
                       <a:r>
@@ -5590,7 +5526,7 @@
                     <a:bodyPr/>
                     <a:lstStyle/>
                     <a:p>
-                      <a:pPr algn="l" indent="0" marL="0">
+                      <a:pPr marL="0" indent="0" algn="l">
                         <a:buNone/>
                       </a:pPr>
                       <a:r>
@@ -5653,6 +5589,11 @@
                     </a:solidFill>
                   </a:tcPr>
                 </a:tc>
+                <a:extLst>
+                  <a:ext uri="{0D108BD9-81ED-4DB2-BD59-A6C34878D82A}">
+                    <a16:rowId xmlns:a16="http://schemas.microsoft.com/office/drawing/2014/main" val="10000"/>
+                  </a:ext>
+                </a:extLst>
               </a:tr>
               <a:tr h="420624">
                 <a:tc>
@@ -5660,7 +5601,7 @@
                     <a:bodyPr/>
                     <a:lstStyle/>
                     <a:p>
-                      <a:pPr algn="l" indent="0" marL="0">
+                      <a:pPr marL="0" indent="0" algn="l">
                         <a:buNone/>
                       </a:pPr>
                       <a:r>
@@ -5728,7 +5669,7 @@
                     <a:bodyPr/>
                     <a:lstStyle/>
                     <a:p>
-                      <a:pPr algn="l" indent="0" marL="0">
+                      <a:pPr marL="0" indent="0" algn="l">
                         <a:buNone/>
                       </a:pPr>
                       <a:r>
@@ -5796,7 +5737,7 @@
                     <a:bodyPr/>
                     <a:lstStyle/>
                     <a:p>
-                      <a:pPr algn="l" indent="0" marL="0">
+                      <a:pPr marL="0" indent="0" algn="l">
                         <a:buNone/>
                       </a:pPr>
                       <a:r>
@@ -5864,7 +5805,7 @@
                     <a:bodyPr/>
                     <a:lstStyle/>
                     <a:p>
-                      <a:pPr algn="l" indent="0" marL="0">
+                      <a:pPr marL="0" indent="0" algn="l">
                         <a:buNone/>
                       </a:pPr>
                       <a:r>
@@ -5927,6 +5868,11 @@
                     </a:solidFill>
                   </a:tcPr>
                 </a:tc>
+                <a:extLst>
+                  <a:ext uri="{0D108BD9-81ED-4DB2-BD59-A6C34878D82A}">
+                    <a16:rowId xmlns:a16="http://schemas.microsoft.com/office/drawing/2014/main" val="10001"/>
+                  </a:ext>
+                </a:extLst>
               </a:tr>
               <a:tr h="420624">
                 <a:tc>
@@ -5934,7 +5880,7 @@
                     <a:bodyPr/>
                     <a:lstStyle/>
                     <a:p>
-                      <a:pPr algn="l" indent="0" marL="0">
+                      <a:pPr marL="0" indent="0" algn="l">
                         <a:buNone/>
                       </a:pPr>
                       <a:r>
@@ -6002,7 +5948,7 @@
                     <a:bodyPr/>
                     <a:lstStyle/>
                     <a:p>
-                      <a:pPr algn="l" indent="0" marL="0">
+                      <a:pPr marL="0" indent="0" algn="l">
                         <a:buNone/>
                       </a:pPr>
                       <a:r>
@@ -6070,7 +6016,7 @@
                     <a:bodyPr/>
                     <a:lstStyle/>
                     <a:p>
-                      <a:pPr algn="l" indent="0" marL="0">
+                      <a:pPr marL="0" indent="0" algn="l">
                         <a:buNone/>
                       </a:pPr>
                       <a:r>
@@ -6138,7 +6084,7 @@
                     <a:bodyPr/>
                     <a:lstStyle/>
                     <a:p>
-                      <a:pPr algn="l" indent="0" marL="0">
+                      <a:pPr marL="0" indent="0" algn="l">
                         <a:buNone/>
                       </a:pPr>
                       <a:r>
@@ -6201,6 +6147,11 @@
                     </a:solidFill>
                   </a:tcPr>
                 </a:tc>
+                <a:extLst>
+                  <a:ext uri="{0D108BD9-81ED-4DB2-BD59-A6C34878D82A}">
+                    <a16:rowId xmlns:a16="http://schemas.microsoft.com/office/drawing/2014/main" val="10002"/>
+                  </a:ext>
+                </a:extLst>
               </a:tr>
               <a:tr h="420624">
                 <a:tc>
@@ -6208,7 +6159,7 @@
                     <a:bodyPr/>
                     <a:lstStyle/>
                     <a:p>
-                      <a:pPr algn="l" indent="0" marL="0">
+                      <a:pPr marL="0" indent="0" algn="l">
                         <a:buNone/>
                       </a:pPr>
                       <a:r>
@@ -6276,7 +6227,7 @@
                     <a:bodyPr/>
                     <a:lstStyle/>
                     <a:p>
-                      <a:pPr algn="l" indent="0" marL="0">
+                      <a:pPr marL="0" indent="0" algn="l">
                         <a:buNone/>
                       </a:pPr>
                       <a:r>
@@ -6344,7 +6295,7 @@
                     <a:bodyPr/>
                     <a:lstStyle/>
                     <a:p>
-                      <a:pPr algn="l" indent="0" marL="0">
+                      <a:pPr marL="0" indent="0" algn="l">
                         <a:buNone/>
                       </a:pPr>
                       <a:r>
@@ -6412,7 +6363,7 @@
                     <a:bodyPr/>
                     <a:lstStyle/>
                     <a:p>
-                      <a:pPr algn="l" indent="0" marL="0">
+                      <a:pPr marL="0" indent="0" algn="l">
                         <a:buNone/>
                       </a:pPr>
                       <a:r>
@@ -6475,6 +6426,11 @@
                     </a:solidFill>
                   </a:tcPr>
                 </a:tc>
+                <a:extLst>
+                  <a:ext uri="{0D108BD9-81ED-4DB2-BD59-A6C34878D82A}">
+                    <a16:rowId xmlns:a16="http://schemas.microsoft.com/office/drawing/2014/main" val="10003"/>
+                  </a:ext>
+                </a:extLst>
               </a:tr>
             </a:tbl>
           </a:graphicData>
@@ -6504,6 +6460,13 @@
             <a:prstDash val="solid"/>
           </a:ln>
         </p:spPr>
+        <p:txBody>
+          <a:bodyPr/>
+          <a:lstStyle/>
+          <a:p>
+            <a:endParaRPr lang="en-IN"/>
+          </a:p>
+        </p:txBody>
       </p:sp>
       <p:sp>
         <p:nvSpPr>
@@ -6529,6 +6492,13 @@
             <a:prstDash val="solid"/>
           </a:ln>
         </p:spPr>
+        <p:txBody>
+          <a:bodyPr/>
+          <a:lstStyle/>
+          <a:p>
+            <a:endParaRPr lang="en-IN"/>
+          </a:p>
+        </p:txBody>
       </p:sp>
       <p:sp>
         <p:nvSpPr>
@@ -6551,7 +6521,7 @@
           <a:bodyPr wrap="square" lIns="0" tIns="0" rIns="0" bIns="0" rtlCol="0" anchor="ctr"/>
           <a:lstStyle/>
           <a:p>
-            <a:pPr indent="0" marL="0">
+            <a:pPr marL="0" indent="0">
               <a:buNone/>
             </a:pPr>
             <a:r>
@@ -6587,7 +6557,7 @@
           <a:bodyPr wrap="square" lIns="0" tIns="0" rIns="0" bIns="0" rtlCol="0" anchor="t"/>
           <a:lstStyle/>
           <a:p>
-            <a:pPr indent="0" marL="0">
+            <a:pPr marL="0" indent="0">
               <a:lnSpc>
                 <a:spcPct val="125000"/>
               </a:lnSpc>
@@ -6632,10 +6602,17 @@
             <a:prstDash val="solid"/>
           </a:ln>
         </p:spPr>
-      </p:sp>
-      <p:sp>
-        <p:nvSpPr>
-          <p:cNvPr id="12" name="i1-l"/>
+        <p:txBody>
+          <a:bodyPr/>
+          <a:lstStyle/>
+          <a:p>
+            <a:endParaRPr lang="en-IN"/>
+          </a:p>
+        </p:txBody>
+      </p:sp>
+      <p:sp>
+        <p:nvSpPr>
+          <p:cNvPr id="6" name="i1-l"/>
           <p:cNvSpPr txBox="1"/>
           <p:nvPr/>
         </p:nvSpPr>
@@ -6654,11 +6631,11 @@
           <a:bodyPr wrap="square" lIns="0" tIns="0" rIns="0" bIns="0" rtlCol="0" anchor="ctr"/>
           <a:lstStyle/>
           <a:p>
-            <a:pPr indent="0" marL="0">
+            <a:pPr marL="0" indent="0">
               <a:buNone/>
             </a:pPr>
             <a:r>
-              <a:rPr lang="en-US" sz="950" b="1" spc="100" kern="0" dirty="0">
+              <a:rPr lang="en-US" sz="950" b="1" kern="0" spc="100" dirty="0">
                 <a:solidFill>
                   <a:srgbClr val="767676"/>
                 </a:solidFill>
@@ -6693,7 +6670,7 @@
           <a:bodyPr wrap="square" lIns="0" tIns="0" rIns="0" bIns="0" rtlCol="0" anchor="ctr"/>
           <a:lstStyle/>
           <a:p>
-            <a:pPr indent="0" marL="0">
+            <a:pPr marL="0" indent="0">
               <a:buNone/>
             </a:pPr>
             <a:r>
@@ -6729,7 +6706,7 @@
           <a:bodyPr wrap="square" lIns="0" tIns="0" rIns="0" bIns="0" rtlCol="0" anchor="ctr"/>
           <a:lstStyle/>
           <a:p>
-            <a:pPr indent="0" marL="0">
+            <a:pPr marL="0" indent="0">
               <a:lnSpc>
                 <a:spcPct val="110000"/>
               </a:lnSpc>
@@ -6774,6 +6751,13 @@
             <a:prstDash val="solid"/>
           </a:ln>
         </p:spPr>
+        <p:txBody>
+          <a:bodyPr/>
+          <a:lstStyle/>
+          <a:p>
+            <a:endParaRPr lang="en-IN"/>
+          </a:p>
+        </p:txBody>
       </p:sp>
       <p:sp>
         <p:nvSpPr>
@@ -6796,11 +6780,11 @@
           <a:bodyPr wrap="square" lIns="0" tIns="0" rIns="0" bIns="0" rtlCol="0" anchor="ctr"/>
           <a:lstStyle/>
           <a:p>
-            <a:pPr indent="0" marL="0">
+            <a:pPr marL="0" indent="0">
               <a:buNone/>
             </a:pPr>
             <a:r>
-              <a:rPr lang="en-US" sz="950" b="1" spc="100" kern="0" dirty="0">
+              <a:rPr lang="en-US" sz="950" b="1" kern="0" spc="100" dirty="0">
                 <a:solidFill>
                   <a:srgbClr val="767676"/>
                 </a:solidFill>
@@ -6835,7 +6819,7 @@
           <a:bodyPr wrap="square" lIns="0" tIns="0" rIns="0" bIns="0" rtlCol="0" anchor="ctr"/>
           <a:lstStyle/>
           <a:p>
-            <a:pPr indent="0" marL="0">
+            <a:pPr marL="0" indent="0">
               <a:buNone/>
             </a:pPr>
             <a:r>
@@ -6871,7 +6855,7 @@
           <a:bodyPr wrap="square" lIns="0" tIns="0" rIns="0" bIns="0" rtlCol="0" anchor="ctr"/>
           <a:lstStyle/>
           <a:p>
-            <a:pPr indent="0" marL="0">
+            <a:pPr marL="0" indent="0">
               <a:lnSpc>
                 <a:spcPct val="110000"/>
               </a:lnSpc>
@@ -6916,6 +6900,13 @@
             <a:prstDash val="solid"/>
           </a:ln>
         </p:spPr>
+        <p:txBody>
+          <a:bodyPr/>
+          <a:lstStyle/>
+          <a:p>
+            <a:endParaRPr lang="en-IN"/>
+          </a:p>
+        </p:txBody>
       </p:sp>
       <p:sp>
         <p:nvSpPr>
@@ -6938,7 +6929,7 @@
           <a:bodyPr wrap="square" lIns="0" tIns="0" rIns="0" bIns="0" rtlCol="0" anchor="t"/>
           <a:lstStyle/>
           <a:p>
-            <a:pPr indent="0" marL="0">
+            <a:pPr marL="0" indent="0">
               <a:lnSpc>
                 <a:spcPct val="125000"/>
               </a:lnSpc>
@@ -6980,7 +6971,7 @@
           <a:bodyPr wrap="square" lIns="0" tIns="0" rIns="0" bIns="0" rtlCol="0" anchor="ctr"/>
           <a:lstStyle/>
           <a:p>
-            <a:pPr indent="0" marL="0">
+            <a:pPr marL="0" indent="0">
               <a:buNone/>
             </a:pPr>
             <a:r>
@@ -7018,7 +7009,7 @@
           </a:prstGeom>
           <a:extLst>
             <a:ext uri="{C572A759-6A51-4108-AA02-DFA0A04FC94B}">
-              <ma14:wrappingTextBoxFlag xmlns:ma14="http://schemas.microsoft.com/office/mac/drawingml/2011/main" val="0"/>
+              <ma14:wrappingTextBoxFlag xmlns:ma14="http://schemas.microsoft.com/office/mac/drawingml/2011/main" xmlns="" val="0"/>
             </a:ext>
           </a:extLst>
         </p:spPr>
@@ -7036,7 +7027,7 @@
           <a:p>
             <a:pPr algn="r"/>
             <a:fld id="{F7021451-1387-4CA6-816F-3879F97B5CBC}" type="slidenum">
-              <a:rPr b="0" lang="en-US"/>
+              <a:rPr lang="en-US" b="0"/>
               <a:t>11</a:t>
             </a:fld>
             <a:endParaRPr lang="en-US"/>
@@ -7089,11 +7080,11 @@
           <a:bodyPr wrap="square" lIns="0" tIns="0" rIns="0" bIns="0" rtlCol="0" anchor="ctr"/>
           <a:lstStyle/>
           <a:p>
-            <a:pPr indent="0" marL="0">
+            <a:pPr marL="0" indent="0">
               <a:buNone/>
             </a:pPr>
             <a:r>
-              <a:rPr lang="en-US" sz="1000" b="1" spc="200" kern="0" dirty="0">
+              <a:rPr lang="en-US" sz="1000" b="1" kern="0" spc="200" dirty="0">
                 <a:solidFill>
                   <a:srgbClr val="E90802"/>
                 </a:solidFill>
@@ -7128,7 +7119,7 @@
           <a:bodyPr wrap="square" lIns="0" tIns="0" rIns="0" bIns="0" rtlCol="0" anchor="ctr"/>
           <a:lstStyle/>
           <a:p>
-            <a:pPr indent="0" marL="0">
+            <a:pPr marL="0" indent="0">
               <a:buNone/>
             </a:pPr>
             <a:r>
@@ -7164,7 +7155,7 @@
           <a:bodyPr wrap="square" lIns="0" tIns="0" rIns="0" bIns="0" rtlCol="0" anchor="ctr"/>
           <a:lstStyle/>
           <a:p>
-            <a:pPr indent="0" marL="0">
+            <a:pPr marL="0" indent="0">
               <a:buNone/>
             </a:pPr>
             <a:r>
@@ -7206,6 +7197,13 @@
             <a:prstDash val="solid"/>
           </a:ln>
         </p:spPr>
+        <p:txBody>
+          <a:bodyPr/>
+          <a:lstStyle/>
+          <a:p>
+            <a:endParaRPr lang="en-IN"/>
+          </a:p>
+        </p:txBody>
       </p:sp>
       <p:graphicFrame>
         <p:nvGraphicFramePr>
@@ -7223,18 +7221,48 @@
         </p:nvGraphicFramePr>
         <p:xfrm>
           <a:off x="548640" y="1600200"/>
-          <a:ext cx="5394960" cy="914400"/>
+          <a:ext cx="5394960" cy="2560320"/>
         </p:xfrm>
         <a:graphic>
           <a:graphicData uri="http://schemas.openxmlformats.org/drawingml/2006/table">
             <a:tbl>
               <a:tblPr/>
               <a:tblGrid>
-                <a:gridCol w="1280160"/>
-                <a:gridCol w="1051560"/>
-                <a:gridCol w="1188720"/>
-                <a:gridCol w="1051560"/>
-                <a:gridCol w="822960"/>
+                <a:gridCol w="1280160">
+                  <a:extLst>
+                    <a:ext uri="{9D8B030D-6E8A-4147-A177-3AD203B41FA5}">
+                      <a16:colId xmlns:a16="http://schemas.microsoft.com/office/drawing/2014/main" val="20000"/>
+                    </a:ext>
+                  </a:extLst>
+                </a:gridCol>
+                <a:gridCol w="1051560">
+                  <a:extLst>
+                    <a:ext uri="{9D8B030D-6E8A-4147-A177-3AD203B41FA5}">
+                      <a16:colId xmlns:a16="http://schemas.microsoft.com/office/drawing/2014/main" val="20001"/>
+                    </a:ext>
+                  </a:extLst>
+                </a:gridCol>
+                <a:gridCol w="1188720">
+                  <a:extLst>
+                    <a:ext uri="{9D8B030D-6E8A-4147-A177-3AD203B41FA5}">
+                      <a16:colId xmlns:a16="http://schemas.microsoft.com/office/drawing/2014/main" val="20002"/>
+                    </a:ext>
+                  </a:extLst>
+                </a:gridCol>
+                <a:gridCol w="1051560">
+                  <a:extLst>
+                    <a:ext uri="{9D8B030D-6E8A-4147-A177-3AD203B41FA5}">
+                      <a16:colId xmlns:a16="http://schemas.microsoft.com/office/drawing/2014/main" val="20003"/>
+                    </a:ext>
+                  </a:extLst>
+                </a:gridCol>
+                <a:gridCol w="822960">
+                  <a:extLst>
+                    <a:ext uri="{9D8B030D-6E8A-4147-A177-3AD203B41FA5}">
+                      <a16:colId xmlns:a16="http://schemas.microsoft.com/office/drawing/2014/main" val="20004"/>
+                    </a:ext>
+                  </a:extLst>
+                </a:gridCol>
               </a:tblGrid>
               <a:tr h="365760">
                 <a:tc>
@@ -7242,7 +7270,7 @@
                     <a:bodyPr/>
                     <a:lstStyle/>
                     <a:p>
-                      <a:pPr algn="l" indent="0" marL="0">
+                      <a:pPr marL="0" indent="0" algn="l">
                         <a:buNone/>
                       </a:pPr>
                       <a:r>
@@ -7310,7 +7338,7 @@
                     <a:bodyPr/>
                     <a:lstStyle/>
                     <a:p>
-                      <a:pPr algn="r" indent="0" marL="0">
+                      <a:pPr marL="0" indent="0" algn="r">
                         <a:buNone/>
                       </a:pPr>
                       <a:r>
@@ -7378,7 +7406,7 @@
                     <a:bodyPr/>
                     <a:lstStyle/>
                     <a:p>
-                      <a:pPr algn="r" indent="0" marL="0">
+                      <a:pPr marL="0" indent="0" algn="r">
                         <a:buNone/>
                       </a:pPr>
                       <a:r>
@@ -7446,7 +7474,7 @@
                     <a:bodyPr/>
                     <a:lstStyle/>
                     <a:p>
-                      <a:pPr algn="r" indent="0" marL="0">
+                      <a:pPr marL="0" indent="0" algn="r">
                         <a:buNone/>
                       </a:pPr>
                       <a:r>
@@ -7514,7 +7542,7 @@
                     <a:bodyPr/>
                     <a:lstStyle/>
                     <a:p>
-                      <a:pPr algn="r" indent="0" marL="0">
+                      <a:pPr marL="0" indent="0" algn="r">
                         <a:buNone/>
                       </a:pPr>
                       <a:r>
@@ -7577,6 +7605,11 @@
                     </a:solidFill>
                   </a:tcPr>
                 </a:tc>
+                <a:extLst>
+                  <a:ext uri="{0D108BD9-81ED-4DB2-BD59-A6C34878D82A}">
+                    <a16:rowId xmlns:a16="http://schemas.microsoft.com/office/drawing/2014/main" val="10000"/>
+                  </a:ext>
+                </a:extLst>
               </a:tr>
               <a:tr h="365760">
                 <a:tc>
@@ -7584,7 +7617,7 @@
                     <a:bodyPr/>
                     <a:lstStyle/>
                     <a:p>
-                      <a:pPr algn="l" indent="0" marL="0">
+                      <a:pPr marL="0" indent="0" algn="l">
                         <a:buNone/>
                       </a:pPr>
                       <a:r>
@@ -7652,7 +7685,7 @@
                     <a:bodyPr/>
                     <a:lstStyle/>
                     <a:p>
-                      <a:pPr algn="r" indent="0" marL="0">
+                      <a:pPr marL="0" indent="0" algn="r">
                         <a:buNone/>
                       </a:pPr>
                       <a:r>
@@ -7720,7 +7753,7 @@
                     <a:bodyPr/>
                     <a:lstStyle/>
                     <a:p>
-                      <a:pPr algn="r" indent="0" marL="0">
+                      <a:pPr marL="0" indent="0" algn="r">
                         <a:buNone/>
                       </a:pPr>
                       <a:r>
@@ -7788,7 +7821,7 @@
                     <a:bodyPr/>
                     <a:lstStyle/>
                     <a:p>
-                      <a:pPr algn="r" indent="0" marL="0">
+                      <a:pPr marL="0" indent="0" algn="r">
                         <a:buNone/>
                       </a:pPr>
                       <a:r>
@@ -7856,7 +7889,7 @@
                     <a:bodyPr/>
                     <a:lstStyle/>
                     <a:p>
-                      <a:pPr algn="r" indent="0" marL="0">
+                      <a:pPr marL="0" indent="0" algn="r">
                         <a:buNone/>
                       </a:pPr>
                       <a:r>
@@ -7919,6 +7952,11 @@
                     </a:solidFill>
                   </a:tcPr>
                 </a:tc>
+                <a:extLst>
+                  <a:ext uri="{0D108BD9-81ED-4DB2-BD59-A6C34878D82A}">
+                    <a16:rowId xmlns:a16="http://schemas.microsoft.com/office/drawing/2014/main" val="10001"/>
+                  </a:ext>
+                </a:extLst>
               </a:tr>
               <a:tr h="365760">
                 <a:tc>
@@ -7926,7 +7964,7 @@
                     <a:bodyPr/>
                     <a:lstStyle/>
                     <a:p>
-                      <a:pPr algn="l" indent="0" marL="0">
+                      <a:pPr marL="0" indent="0" algn="l">
                         <a:buNone/>
                       </a:pPr>
                       <a:r>
@@ -7994,7 +8032,7 @@
                     <a:bodyPr/>
                     <a:lstStyle/>
                     <a:p>
-                      <a:pPr algn="r" indent="0" marL="0">
+                      <a:pPr marL="0" indent="0" algn="r">
                         <a:buNone/>
                       </a:pPr>
                       <a:r>
@@ -8062,7 +8100,7 @@
                     <a:bodyPr/>
                     <a:lstStyle/>
                     <a:p>
-                      <a:pPr algn="r" indent="0" marL="0">
+                      <a:pPr marL="0" indent="0" algn="r">
                         <a:buNone/>
                       </a:pPr>
                       <a:r>
@@ -8130,7 +8168,7 @@
                     <a:bodyPr/>
                     <a:lstStyle/>
                     <a:p>
-                      <a:pPr algn="r" indent="0" marL="0">
+                      <a:pPr marL="0" indent="0" algn="r">
                         <a:buNone/>
                       </a:pPr>
                       <a:r>
@@ -8198,7 +8236,7 @@
                     <a:bodyPr/>
                     <a:lstStyle/>
                     <a:p>
-                      <a:pPr algn="r" indent="0" marL="0">
+                      <a:pPr marL="0" indent="0" algn="r">
                         <a:buNone/>
                       </a:pPr>
                       <a:r>
@@ -8261,6 +8299,11 @@
                     </a:solidFill>
                   </a:tcPr>
                 </a:tc>
+                <a:extLst>
+                  <a:ext uri="{0D108BD9-81ED-4DB2-BD59-A6C34878D82A}">
+                    <a16:rowId xmlns:a16="http://schemas.microsoft.com/office/drawing/2014/main" val="10002"/>
+                  </a:ext>
+                </a:extLst>
               </a:tr>
               <a:tr h="365760">
                 <a:tc>
@@ -8268,7 +8311,7 @@
                     <a:bodyPr/>
                     <a:lstStyle/>
                     <a:p>
-                      <a:pPr algn="l" indent="0" marL="0">
+                      <a:pPr marL="0" indent="0" algn="l">
                         <a:buNone/>
                       </a:pPr>
                       <a:r>
@@ -8336,7 +8379,7 @@
                     <a:bodyPr/>
                     <a:lstStyle/>
                     <a:p>
-                      <a:pPr algn="r" indent="0" marL="0">
+                      <a:pPr marL="0" indent="0" algn="r">
                         <a:buNone/>
                       </a:pPr>
                       <a:r>
@@ -8404,7 +8447,7 @@
                     <a:bodyPr/>
                     <a:lstStyle/>
                     <a:p>
-                      <a:pPr algn="r" indent="0" marL="0">
+                      <a:pPr marL="0" indent="0" algn="r">
                         <a:buNone/>
                       </a:pPr>
                       <a:r>
@@ -8472,7 +8515,7 @@
                     <a:bodyPr/>
                     <a:lstStyle/>
                     <a:p>
-                      <a:pPr algn="r" indent="0" marL="0">
+                      <a:pPr marL="0" indent="0" algn="r">
                         <a:buNone/>
                       </a:pPr>
                       <a:r>
@@ -8540,7 +8583,7 @@
                     <a:bodyPr/>
                     <a:lstStyle/>
                     <a:p>
-                      <a:pPr algn="r" indent="0" marL="0">
+                      <a:pPr marL="0" indent="0" algn="r">
                         <a:buNone/>
                       </a:pPr>
                       <a:r>
@@ -8603,6 +8646,11 @@
                     </a:solidFill>
                   </a:tcPr>
                 </a:tc>
+                <a:extLst>
+                  <a:ext uri="{0D108BD9-81ED-4DB2-BD59-A6C34878D82A}">
+                    <a16:rowId xmlns:a16="http://schemas.microsoft.com/office/drawing/2014/main" val="10003"/>
+                  </a:ext>
+                </a:extLst>
               </a:tr>
               <a:tr h="365760">
                 <a:tc>
@@ -8610,7 +8658,7 @@
                     <a:bodyPr/>
                     <a:lstStyle/>
                     <a:p>
-                      <a:pPr algn="l" indent="0" marL="0">
+                      <a:pPr marL="0" indent="0" algn="l">
                         <a:buNone/>
                       </a:pPr>
                       <a:r>
@@ -8678,7 +8726,7 @@
                     <a:bodyPr/>
                     <a:lstStyle/>
                     <a:p>
-                      <a:pPr algn="r" indent="0" marL="0">
+                      <a:pPr marL="0" indent="0" algn="r">
                         <a:buNone/>
                       </a:pPr>
                       <a:r>
@@ -8746,7 +8794,7 @@
                     <a:bodyPr/>
                     <a:lstStyle/>
                     <a:p>
-                      <a:pPr algn="r" indent="0" marL="0">
+                      <a:pPr marL="0" indent="0" algn="r">
                         <a:buNone/>
                       </a:pPr>
                       <a:r>
@@ -8814,7 +8862,7 @@
                     <a:bodyPr/>
                     <a:lstStyle/>
                     <a:p>
-                      <a:pPr algn="r" indent="0" marL="0">
+                      <a:pPr marL="0" indent="0" algn="r">
                         <a:buNone/>
                       </a:pPr>
                       <a:r>
@@ -8882,7 +8930,7 @@
                     <a:bodyPr/>
                     <a:lstStyle/>
                     <a:p>
-                      <a:pPr algn="r" indent="0" marL="0">
+                      <a:pPr marL="0" indent="0" algn="r">
                         <a:buNone/>
                       </a:pPr>
                       <a:r>
@@ -8945,6 +8993,11 @@
                     </a:solidFill>
                   </a:tcPr>
                 </a:tc>
+                <a:extLst>
+                  <a:ext uri="{0D108BD9-81ED-4DB2-BD59-A6C34878D82A}">
+                    <a16:rowId xmlns:a16="http://schemas.microsoft.com/office/drawing/2014/main" val="10004"/>
+                  </a:ext>
+                </a:extLst>
               </a:tr>
               <a:tr h="365760">
                 <a:tc>
@@ -8952,7 +9005,7 @@
                     <a:bodyPr/>
                     <a:lstStyle/>
                     <a:p>
-                      <a:pPr algn="l" indent="0" marL="0">
+                      <a:pPr marL="0" indent="0" algn="l">
                         <a:buNone/>
                       </a:pPr>
                       <a:r>
@@ -9020,7 +9073,7 @@
                     <a:bodyPr/>
                     <a:lstStyle/>
                     <a:p>
-                      <a:pPr algn="r" indent="0" marL="0">
+                      <a:pPr marL="0" indent="0" algn="r">
                         <a:buNone/>
                       </a:pPr>
                       <a:r>
@@ -9088,7 +9141,7 @@
                     <a:bodyPr/>
                     <a:lstStyle/>
                     <a:p>
-                      <a:pPr algn="r" indent="0" marL="0">
+                      <a:pPr marL="0" indent="0" algn="r">
                         <a:buNone/>
                       </a:pPr>
                       <a:r>
@@ -9156,7 +9209,7 @@
                     <a:bodyPr/>
                     <a:lstStyle/>
                     <a:p>
-                      <a:pPr algn="r" indent="0" marL="0">
+                      <a:pPr marL="0" indent="0" algn="r">
                         <a:buNone/>
                       </a:pPr>
                       <a:r>
@@ -9224,7 +9277,7 @@
                     <a:bodyPr/>
                     <a:lstStyle/>
                     <a:p>
-                      <a:pPr algn="r" indent="0" marL="0">
+                      <a:pPr marL="0" indent="0" algn="r">
                         <a:buNone/>
                       </a:pPr>
                       <a:r>
@@ -9287,6 +9340,11 @@
                     </a:solidFill>
                   </a:tcPr>
                 </a:tc>
+                <a:extLst>
+                  <a:ext uri="{0D108BD9-81ED-4DB2-BD59-A6C34878D82A}">
+                    <a16:rowId xmlns:a16="http://schemas.microsoft.com/office/drawing/2014/main" val="10005"/>
+                  </a:ext>
+                </a:extLst>
               </a:tr>
               <a:tr h="365760">
                 <a:tc>
@@ -9294,7 +9352,7 @@
                     <a:bodyPr/>
                     <a:lstStyle/>
                     <a:p>
-                      <a:pPr algn="l" indent="0" marL="0">
+                      <a:pPr marL="0" indent="0" algn="l">
                         <a:buNone/>
                       </a:pPr>
                       <a:r>
@@ -9362,7 +9420,7 @@
                     <a:bodyPr/>
                     <a:lstStyle/>
                     <a:p>
-                      <a:pPr algn="r" indent="0" marL="0">
+                      <a:pPr marL="0" indent="0" algn="r">
                         <a:buNone/>
                       </a:pPr>
                       <a:r>
@@ -9430,7 +9488,7 @@
                     <a:bodyPr/>
                     <a:lstStyle/>
                     <a:p>
-                      <a:pPr algn="r" indent="0" marL="0">
+                      <a:pPr marL="0" indent="0" algn="r">
                         <a:buNone/>
                       </a:pPr>
                       <a:r>
@@ -9498,7 +9556,7 @@
                     <a:bodyPr/>
                     <a:lstStyle/>
                     <a:p>
-                      <a:pPr algn="r" indent="0" marL="0">
+                      <a:pPr marL="0" indent="0" algn="r">
                         <a:buNone/>
                       </a:pPr>
                       <a:r>
@@ -9566,7 +9624,7 @@
                     <a:bodyPr/>
                     <a:lstStyle/>
                     <a:p>
-                      <a:pPr algn="r" indent="0" marL="0">
+                      <a:pPr marL="0" indent="0" algn="r">
                         <a:buNone/>
                       </a:pPr>
                       <a:r>
@@ -9629,6 +9687,11 @@
                     </a:solidFill>
                   </a:tcPr>
                 </a:tc>
+                <a:extLst>
+                  <a:ext uri="{0D108BD9-81ED-4DB2-BD59-A6C34878D82A}">
+                    <a16:rowId xmlns:a16="http://schemas.microsoft.com/office/drawing/2014/main" val="10006"/>
+                  </a:ext>
+                </a:extLst>
               </a:tr>
             </a:tbl>
           </a:graphicData>
@@ -9658,6 +9721,13 @@
             <a:prstDash val="solid"/>
           </a:ln>
         </p:spPr>
+        <p:txBody>
+          <a:bodyPr/>
+          <a:lstStyle/>
+          <a:p>
+            <a:endParaRPr lang="en-IN"/>
+          </a:p>
+        </p:txBody>
       </p:sp>
       <p:sp>
         <p:nvSpPr>
@@ -9683,6 +9753,13 @@
             <a:prstDash val="solid"/>
           </a:ln>
         </p:spPr>
+        <p:txBody>
+          <a:bodyPr/>
+          <a:lstStyle/>
+          <a:p>
+            <a:endParaRPr lang="en-IN"/>
+          </a:p>
+        </p:txBody>
       </p:sp>
       <p:sp>
         <p:nvSpPr>
@@ -9705,7 +9782,7 @@
           <a:bodyPr wrap="square" lIns="0" tIns="0" rIns="0" bIns="0" rtlCol="0" anchor="ctr"/>
           <a:lstStyle/>
           <a:p>
-            <a:pPr indent="0" marL="0">
+            <a:pPr marL="0" indent="0">
               <a:buNone/>
             </a:pPr>
             <a:r>
@@ -9741,7 +9818,7 @@
           <a:bodyPr wrap="square" lIns="0" tIns="0" rIns="0" bIns="0" rtlCol="0" anchor="t"/>
           <a:lstStyle/>
           <a:p>
-            <a:pPr indent="0" marL="0">
+            <a:pPr marL="0" indent="0">
               <a:lnSpc>
                 <a:spcPct val="125000"/>
               </a:lnSpc>
@@ -9786,6 +9863,13 @@
             <a:prstDash val="solid"/>
           </a:ln>
         </p:spPr>
+        <p:txBody>
+          <a:bodyPr/>
+          <a:lstStyle/>
+          <a:p>
+            <a:endParaRPr lang="en-IN"/>
+          </a:p>
+        </p:txBody>
       </p:sp>
       <p:sp>
         <p:nvSpPr>
@@ -9808,7 +9892,7 @@
           <a:bodyPr wrap="square" lIns="0" tIns="0" rIns="0" bIns="0" rtlCol="0" anchor="ctr"/>
           <a:lstStyle/>
           <a:p>
-            <a:pPr indent="0" marL="0">
+            <a:pPr marL="0" indent="0">
               <a:buNone/>
             </a:pPr>
             <a:r>
@@ -9825,7 +9909,7 @@
       </p:sp>
       <p:sp>
         <p:nvSpPr>
-          <p:cNvPr id="13" name="broke-b"/>
+          <p:cNvPr id="6" name="broke-b"/>
           <p:cNvSpPr txBox="1"/>
           <p:nvPr/>
         </p:nvSpPr>
@@ -9844,7 +9928,7 @@
           <a:bodyPr wrap="square" lIns="0" tIns="0" rIns="0" bIns="0" rtlCol="0" anchor="t"/>
           <a:lstStyle/>
           <a:p>
-            <a:pPr indent="0" marL="0">
+            <a:pPr marL="0" indent="0">
               <a:lnSpc>
                 <a:spcPct val="125000"/>
               </a:lnSpc>
@@ -9881,18 +9965,48 @@
         </p:nvGraphicFramePr>
         <p:xfrm>
           <a:off x="548640" y="4434840"/>
-          <a:ext cx="11064240" cy="914400"/>
+          <a:ext cx="11064240" cy="1554480"/>
         </p:xfrm>
         <a:graphic>
           <a:graphicData uri="http://schemas.openxmlformats.org/drawingml/2006/table">
             <a:tbl>
               <a:tblPr/>
               <a:tblGrid>
-                <a:gridCol w="2834640"/>
-                <a:gridCol w="2103120"/>
-                <a:gridCol w="2103120"/>
-                <a:gridCol w="2011680"/>
-                <a:gridCol w="2011680"/>
+                <a:gridCol w="2834640">
+                  <a:extLst>
+                    <a:ext uri="{9D8B030D-6E8A-4147-A177-3AD203B41FA5}">
+                      <a16:colId xmlns:a16="http://schemas.microsoft.com/office/drawing/2014/main" val="20000"/>
+                    </a:ext>
+                  </a:extLst>
+                </a:gridCol>
+                <a:gridCol w="2103120">
+                  <a:extLst>
+                    <a:ext uri="{9D8B030D-6E8A-4147-A177-3AD203B41FA5}">
+                      <a16:colId xmlns:a16="http://schemas.microsoft.com/office/drawing/2014/main" val="20001"/>
+                    </a:ext>
+                  </a:extLst>
+                </a:gridCol>
+                <a:gridCol w="2103120">
+                  <a:extLst>
+                    <a:ext uri="{9D8B030D-6E8A-4147-A177-3AD203B41FA5}">
+                      <a16:colId xmlns:a16="http://schemas.microsoft.com/office/drawing/2014/main" val="20002"/>
+                    </a:ext>
+                  </a:extLst>
+                </a:gridCol>
+                <a:gridCol w="2011680">
+                  <a:extLst>
+                    <a:ext uri="{9D8B030D-6E8A-4147-A177-3AD203B41FA5}">
+                      <a16:colId xmlns:a16="http://schemas.microsoft.com/office/drawing/2014/main" val="20003"/>
+                    </a:ext>
+                  </a:extLst>
+                </a:gridCol>
+                <a:gridCol w="2011680">
+                  <a:extLst>
+                    <a:ext uri="{9D8B030D-6E8A-4147-A177-3AD203B41FA5}">
+                      <a16:colId xmlns:a16="http://schemas.microsoft.com/office/drawing/2014/main" val="20004"/>
+                    </a:ext>
+                  </a:extLst>
+                </a:gridCol>
               </a:tblGrid>
               <a:tr h="310896">
                 <a:tc>
@@ -9900,7 +10014,7 @@
                     <a:bodyPr/>
                     <a:lstStyle/>
                     <a:p>
-                      <a:pPr algn="l" indent="0" marL="0">
+                      <a:pPr marL="0" indent="0" algn="l">
                         <a:buNone/>
                       </a:pPr>
                       <a:r>
@@ -9968,7 +10082,7 @@
                     <a:bodyPr/>
                     <a:lstStyle/>
                     <a:p>
-                      <a:pPr algn="l" indent="0" marL="0">
+                      <a:pPr marL="0" indent="0" algn="l">
                         <a:buNone/>
                       </a:pPr>
                       <a:r>
@@ -10036,7 +10150,7 @@
                     <a:bodyPr/>
                     <a:lstStyle/>
                     <a:p>
-                      <a:pPr algn="l" indent="0" marL="0">
+                      <a:pPr marL="0" indent="0" algn="l">
                         <a:buNone/>
                       </a:pPr>
                       <a:r>
@@ -10104,7 +10218,7 @@
                     <a:bodyPr/>
                     <a:lstStyle/>
                     <a:p>
-                      <a:pPr algn="l" indent="0" marL="0">
+                      <a:pPr marL="0" indent="0" algn="l">
                         <a:buNone/>
                       </a:pPr>
                       <a:r>
@@ -10172,7 +10286,7 @@
                     <a:bodyPr/>
                     <a:lstStyle/>
                     <a:p>
-                      <a:pPr algn="l" indent="0" marL="0">
+                      <a:pPr marL="0" indent="0" algn="l">
                         <a:buNone/>
                       </a:pPr>
                       <a:r>
@@ -10235,6 +10349,11 @@
                     </a:solidFill>
                   </a:tcPr>
                 </a:tc>
+                <a:extLst>
+                  <a:ext uri="{0D108BD9-81ED-4DB2-BD59-A6C34878D82A}">
+                    <a16:rowId xmlns:a16="http://schemas.microsoft.com/office/drawing/2014/main" val="10000"/>
+                  </a:ext>
+                </a:extLst>
               </a:tr>
               <a:tr h="310896">
                 <a:tc>
@@ -10242,7 +10361,7 @@
                     <a:bodyPr/>
                     <a:lstStyle/>
                     <a:p>
-                      <a:pPr algn="l" indent="0" marL="0">
+                      <a:pPr marL="0" indent="0" algn="l">
                         <a:buNone/>
                       </a:pPr>
                       <a:r>
@@ -10310,7 +10429,7 @@
                     <a:bodyPr/>
                     <a:lstStyle/>
                     <a:p>
-                      <a:pPr algn="l" indent="0" marL="0">
+                      <a:pPr marL="0" indent="0" algn="l">
                         <a:buNone/>
                       </a:pPr>
                       <a:r>
@@ -10378,7 +10497,7 @@
                     <a:bodyPr/>
                     <a:lstStyle/>
                     <a:p>
-                      <a:pPr algn="l" indent="0" marL="0">
+                      <a:pPr marL="0" indent="0" algn="l">
                         <a:buNone/>
                       </a:pPr>
                       <a:r>
@@ -10446,7 +10565,7 @@
                     <a:bodyPr/>
                     <a:lstStyle/>
                     <a:p>
-                      <a:pPr algn="l" indent="0" marL="0">
+                      <a:pPr marL="0" indent="0" algn="l">
                         <a:buNone/>
                       </a:pPr>
                       <a:r>
@@ -10514,7 +10633,7 @@
                     <a:bodyPr/>
                     <a:lstStyle/>
                     <a:p>
-                      <a:pPr algn="l" indent="0" marL="0">
+                      <a:pPr marL="0" indent="0" algn="l">
                         <a:buNone/>
                       </a:pPr>
                       <a:r>
@@ -10577,6 +10696,11 @@
                     </a:solidFill>
                   </a:tcPr>
                 </a:tc>
+                <a:extLst>
+                  <a:ext uri="{0D108BD9-81ED-4DB2-BD59-A6C34878D82A}">
+                    <a16:rowId xmlns:a16="http://schemas.microsoft.com/office/drawing/2014/main" val="10001"/>
+                  </a:ext>
+                </a:extLst>
               </a:tr>
               <a:tr h="310896">
                 <a:tc>
@@ -10584,7 +10708,7 @@
                     <a:bodyPr/>
                     <a:lstStyle/>
                     <a:p>
-                      <a:pPr algn="l" indent="0" marL="0">
+                      <a:pPr marL="0" indent="0" algn="l">
                         <a:buNone/>
                       </a:pPr>
                       <a:r>
@@ -10652,7 +10776,7 @@
                     <a:bodyPr/>
                     <a:lstStyle/>
                     <a:p>
-                      <a:pPr algn="l" indent="0" marL="0">
+                      <a:pPr marL="0" indent="0" algn="l">
                         <a:buNone/>
                       </a:pPr>
                       <a:r>
@@ -10720,7 +10844,7 @@
                     <a:bodyPr/>
                     <a:lstStyle/>
                     <a:p>
-                      <a:pPr algn="l" indent="0" marL="0">
+                      <a:pPr marL="0" indent="0" algn="l">
                         <a:buNone/>
                       </a:pPr>
                       <a:r>
@@ -10788,7 +10912,7 @@
                     <a:bodyPr/>
                     <a:lstStyle/>
                     <a:p>
-                      <a:pPr algn="l" indent="0" marL="0">
+                      <a:pPr marL="0" indent="0" algn="l">
                         <a:buNone/>
                       </a:pPr>
                       <a:r>
@@ -10856,7 +10980,7 @@
                     <a:bodyPr/>
                     <a:lstStyle/>
                     <a:p>
-                      <a:pPr algn="l" indent="0" marL="0">
+                      <a:pPr marL="0" indent="0" algn="l">
                         <a:buNone/>
                       </a:pPr>
                       <a:r>
@@ -10919,6 +11043,11 @@
                     </a:solidFill>
                   </a:tcPr>
                 </a:tc>
+                <a:extLst>
+                  <a:ext uri="{0D108BD9-81ED-4DB2-BD59-A6C34878D82A}">
+                    <a16:rowId xmlns:a16="http://schemas.microsoft.com/office/drawing/2014/main" val="10002"/>
+                  </a:ext>
+                </a:extLst>
               </a:tr>
               <a:tr h="310896">
                 <a:tc>
@@ -10926,7 +11055,7 @@
                     <a:bodyPr/>
                     <a:lstStyle/>
                     <a:p>
-                      <a:pPr algn="l" indent="0" marL="0">
+                      <a:pPr marL="0" indent="0" algn="l">
                         <a:buNone/>
                       </a:pPr>
                       <a:r>
@@ -10994,7 +11123,7 @@
                     <a:bodyPr/>
                     <a:lstStyle/>
                     <a:p>
-                      <a:pPr algn="l" indent="0" marL="0">
+                      <a:pPr marL="0" indent="0" algn="l">
                         <a:buNone/>
                       </a:pPr>
                       <a:r>
@@ -11062,7 +11191,7 @@
                     <a:bodyPr/>
                     <a:lstStyle/>
                     <a:p>
-                      <a:pPr algn="l" indent="0" marL="0">
+                      <a:pPr marL="0" indent="0" algn="l">
                         <a:buNone/>
                       </a:pPr>
                       <a:r>
@@ -11130,7 +11259,7 @@
                     <a:bodyPr/>
                     <a:lstStyle/>
                     <a:p>
-                      <a:pPr algn="l" indent="0" marL="0">
+                      <a:pPr marL="0" indent="0" algn="l">
                         <a:buNone/>
                       </a:pPr>
                       <a:r>
@@ -11198,7 +11327,7 @@
                     <a:bodyPr/>
                     <a:lstStyle/>
                     <a:p>
-                      <a:pPr algn="l" indent="0" marL="0">
+                      <a:pPr marL="0" indent="0" algn="l">
                         <a:buNone/>
                       </a:pPr>
                       <a:r>
@@ -11261,6 +11390,11 @@
                     </a:solidFill>
                   </a:tcPr>
                 </a:tc>
+                <a:extLst>
+                  <a:ext uri="{0D108BD9-81ED-4DB2-BD59-A6C34878D82A}">
+                    <a16:rowId xmlns:a16="http://schemas.microsoft.com/office/drawing/2014/main" val="10003"/>
+                  </a:ext>
+                </a:extLst>
               </a:tr>
               <a:tr h="310896">
                 <a:tc>
@@ -11268,7 +11402,7 @@
                     <a:bodyPr/>
                     <a:lstStyle/>
                     <a:p>
-                      <a:pPr algn="l" indent="0" marL="0">
+                      <a:pPr marL="0" indent="0" algn="l">
                         <a:buNone/>
                       </a:pPr>
                       <a:r>
@@ -11336,7 +11470,7 @@
                     <a:bodyPr/>
                     <a:lstStyle/>
                     <a:p>
-                      <a:pPr algn="l" indent="0" marL="0">
+                      <a:pPr marL="0" indent="0" algn="l">
                         <a:buNone/>
                       </a:pPr>
                       <a:r>
@@ -11404,7 +11538,7 @@
                     <a:bodyPr/>
                     <a:lstStyle/>
                     <a:p>
-                      <a:pPr algn="l" indent="0" marL="0">
+                      <a:pPr marL="0" indent="0" algn="l">
                         <a:buNone/>
                       </a:pPr>
                       <a:r>
@@ -11472,7 +11606,7 @@
                     <a:bodyPr/>
                     <a:lstStyle/>
                     <a:p>
-                      <a:pPr algn="l" indent="0" marL="0">
+                      <a:pPr marL="0" indent="0" algn="l">
                         <a:buNone/>
                       </a:pPr>
                       <a:r>
@@ -11540,7 +11674,7 @@
                     <a:bodyPr/>
                     <a:lstStyle/>
                     <a:p>
-                      <a:pPr algn="l" indent="0" marL="0">
+                      <a:pPr marL="0" indent="0" algn="l">
                         <a:buNone/>
                       </a:pPr>
                       <a:r>
@@ -11603,6 +11737,11 @@
                     </a:solidFill>
                   </a:tcPr>
                 </a:tc>
+                <a:extLst>
+                  <a:ext uri="{0D108BD9-81ED-4DB2-BD59-A6C34878D82A}">
+                    <a16:rowId xmlns:a16="http://schemas.microsoft.com/office/drawing/2014/main" val="10004"/>
+                  </a:ext>
+                </a:extLst>
               </a:tr>
             </a:tbl>
           </a:graphicData>
@@ -11629,7 +11768,7 @@
           <a:bodyPr wrap="square" lIns="0" tIns="0" rIns="0" bIns="0" rtlCol="0" anchor="ctr"/>
           <a:lstStyle/>
           <a:p>
-            <a:pPr indent="0" marL="0">
+            <a:pPr marL="0" indent="0">
               <a:buNone/>
             </a:pPr>
             <a:r>
@@ -11649,7 +11788,7 @@
       </p:sp>
       <p:sp>
         <p:nvSpPr>
-          <p:cNvPr id="25" name="Slide Number Placeholder 0"/>
+          <p:cNvPr id="14" name="Slide Number Placeholder 0"/>
           <p:cNvSpPr>
             <a:spLocks noGrp="1"/>
           </p:cNvSpPr>
@@ -11667,7 +11806,7 @@
           </a:prstGeom>
           <a:extLst>
             <a:ext uri="{C572A759-6A51-4108-AA02-DFA0A04FC94B}">
-              <ma14:wrappingTextBoxFlag xmlns:ma14="http://schemas.microsoft.com/office/mac/drawingml/2011/main" val="0"/>
+              <ma14:wrappingTextBoxFlag xmlns:ma14="http://schemas.microsoft.com/office/mac/drawingml/2011/main" xmlns="" val="0"/>
             </a:ext>
           </a:extLst>
         </p:spPr>
@@ -11685,7 +11824,7 @@
           <a:p>
             <a:pPr algn="r"/>
             <a:fld id="{F7021451-1387-4CA6-816F-3879F97B5CBC}" type="slidenum">
-              <a:rPr b="0" lang="en-US"/>
+              <a:rPr lang="en-US" b="0"/>
               <a:t>12</a:t>
             </a:fld>
             <a:endParaRPr lang="en-US"/>
@@ -11738,11 +11877,11 @@
           <a:bodyPr wrap="square" lIns="0" tIns="0" rIns="0" bIns="0" rtlCol="0" anchor="ctr"/>
           <a:lstStyle/>
           <a:p>
-            <a:pPr indent="0" marL="0">
+            <a:pPr marL="0" indent="0">
               <a:buNone/>
             </a:pPr>
             <a:r>
-              <a:rPr lang="en-US" sz="1000" b="1" spc="200" kern="0" dirty="0">
+              <a:rPr lang="en-US" sz="1000" b="1" kern="0" spc="200" dirty="0">
                 <a:solidFill>
                   <a:srgbClr val="E90802"/>
                 </a:solidFill>
@@ -11777,7 +11916,7 @@
           <a:bodyPr wrap="square" lIns="0" tIns="0" rIns="0" bIns="0" rtlCol="0" anchor="ctr"/>
           <a:lstStyle/>
           <a:p>
-            <a:pPr indent="0" marL="0">
+            <a:pPr marL="0" indent="0">
               <a:buNone/>
             </a:pPr>
             <a:r>
@@ -11813,7 +11952,7 @@
           <a:bodyPr wrap="square" lIns="0" tIns="0" rIns="0" bIns="0" rtlCol="0" anchor="ctr"/>
           <a:lstStyle/>
           <a:p>
-            <a:pPr indent="0" marL="0">
+            <a:pPr marL="0" indent="0">
               <a:buNone/>
             </a:pPr>
             <a:r>
@@ -11855,6 +11994,13 @@
             <a:prstDash val="solid"/>
           </a:ln>
         </p:spPr>
+        <p:txBody>
+          <a:bodyPr/>
+          <a:lstStyle/>
+          <a:p>
+            <a:endParaRPr lang="en-IN"/>
+          </a:p>
+        </p:txBody>
       </p:sp>
       <p:graphicFrame>
         <p:nvGraphicFramePr>
@@ -11872,17 +12018,41 @@
         </p:nvGraphicFramePr>
         <p:xfrm>
           <a:off x="548640" y="1600200"/>
-          <a:ext cx="11064240" cy="914400"/>
+          <a:ext cx="11064240" cy="2962656"/>
         </p:xfrm>
         <a:graphic>
           <a:graphicData uri="http://schemas.openxmlformats.org/drawingml/2006/table">
             <a:tbl>
               <a:tblPr/>
               <a:tblGrid>
-                <a:gridCol w="3017520"/>
-                <a:gridCol w="2743200"/>
-                <a:gridCol w="3566160"/>
-                <a:gridCol w="1737360"/>
+                <a:gridCol w="3017520">
+                  <a:extLst>
+                    <a:ext uri="{9D8B030D-6E8A-4147-A177-3AD203B41FA5}">
+                      <a16:colId xmlns:a16="http://schemas.microsoft.com/office/drawing/2014/main" val="20000"/>
+                    </a:ext>
+                  </a:extLst>
+                </a:gridCol>
+                <a:gridCol w="2743200">
+                  <a:extLst>
+                    <a:ext uri="{9D8B030D-6E8A-4147-A177-3AD203B41FA5}">
+                      <a16:colId xmlns:a16="http://schemas.microsoft.com/office/drawing/2014/main" val="20001"/>
+                    </a:ext>
+                  </a:extLst>
+                </a:gridCol>
+                <a:gridCol w="3566160">
+                  <a:extLst>
+                    <a:ext uri="{9D8B030D-6E8A-4147-A177-3AD203B41FA5}">
+                      <a16:colId xmlns:a16="http://schemas.microsoft.com/office/drawing/2014/main" val="20002"/>
+                    </a:ext>
+                  </a:extLst>
+                </a:gridCol>
+                <a:gridCol w="1737360">
+                  <a:extLst>
+                    <a:ext uri="{9D8B030D-6E8A-4147-A177-3AD203B41FA5}">
+                      <a16:colId xmlns:a16="http://schemas.microsoft.com/office/drawing/2014/main" val="20003"/>
+                    </a:ext>
+                  </a:extLst>
+                </a:gridCol>
               </a:tblGrid>
               <a:tr h="329184">
                 <a:tc>
@@ -11890,7 +12060,7 @@
                     <a:bodyPr/>
                     <a:lstStyle/>
                     <a:p>
-                      <a:pPr algn="l" indent="0" marL="0">
+                      <a:pPr marL="0" indent="0" algn="l">
                         <a:buNone/>
                       </a:pPr>
                       <a:r>
@@ -11958,7 +12128,7 @@
                     <a:bodyPr/>
                     <a:lstStyle/>
                     <a:p>
-                      <a:pPr algn="l" indent="0" marL="0">
+                      <a:pPr marL="0" indent="0" algn="l">
                         <a:buNone/>
                       </a:pPr>
                       <a:r>
@@ -12026,7 +12196,7 @@
                     <a:bodyPr/>
                     <a:lstStyle/>
                     <a:p>
-                      <a:pPr algn="l" indent="0" marL="0">
+                      <a:pPr marL="0" indent="0" algn="l">
                         <a:buNone/>
                       </a:pPr>
                       <a:r>
@@ -12094,7 +12264,7 @@
                     <a:bodyPr/>
                     <a:lstStyle/>
                     <a:p>
-                      <a:pPr algn="l" indent="0" marL="0">
+                      <a:pPr marL="0" indent="0" algn="l">
                         <a:buNone/>
                       </a:pPr>
                       <a:r>
@@ -12157,6 +12327,11 @@
                     </a:solidFill>
                   </a:tcPr>
                 </a:tc>
+                <a:extLst>
+                  <a:ext uri="{0D108BD9-81ED-4DB2-BD59-A6C34878D82A}">
+                    <a16:rowId xmlns:a16="http://schemas.microsoft.com/office/drawing/2014/main" val="10000"/>
+                  </a:ext>
+                </a:extLst>
               </a:tr>
               <a:tr h="329184">
                 <a:tc>
@@ -12164,7 +12339,7 @@
                     <a:bodyPr/>
                     <a:lstStyle/>
                     <a:p>
-                      <a:pPr algn="l" indent="0" marL="0">
+                      <a:pPr marL="0" indent="0" algn="l">
                         <a:buNone/>
                       </a:pPr>
                       <a:r>
@@ -12232,7 +12407,7 @@
                     <a:bodyPr/>
                     <a:lstStyle/>
                     <a:p>
-                      <a:pPr algn="l" indent="0" marL="0">
+                      <a:pPr marL="0" indent="0" algn="l">
                         <a:buNone/>
                       </a:pPr>
                       <a:r>
@@ -12300,7 +12475,7 @@
                     <a:bodyPr/>
                     <a:lstStyle/>
                     <a:p>
-                      <a:pPr algn="l" indent="0" marL="0">
+                      <a:pPr marL="0" indent="0" algn="l">
                         <a:buNone/>
                       </a:pPr>
                       <a:r>
@@ -12368,7 +12543,7 @@
                     <a:bodyPr/>
                     <a:lstStyle/>
                     <a:p>
-                      <a:pPr algn="l" indent="0" marL="0">
+                      <a:pPr marL="0" indent="0" algn="l">
                         <a:buNone/>
                       </a:pPr>
                       <a:r>
@@ -12431,6 +12606,11 @@
                     </a:solidFill>
                   </a:tcPr>
                 </a:tc>
+                <a:extLst>
+                  <a:ext uri="{0D108BD9-81ED-4DB2-BD59-A6C34878D82A}">
+                    <a16:rowId xmlns:a16="http://schemas.microsoft.com/office/drawing/2014/main" val="10001"/>
+                  </a:ext>
+                </a:extLst>
               </a:tr>
               <a:tr h="329184">
                 <a:tc>
@@ -12438,7 +12618,7 @@
                     <a:bodyPr/>
                     <a:lstStyle/>
                     <a:p>
-                      <a:pPr algn="l" indent="0" marL="0">
+                      <a:pPr marL="0" indent="0" algn="l">
                         <a:buNone/>
                       </a:pPr>
                       <a:r>
@@ -12506,7 +12686,7 @@
                     <a:bodyPr/>
                     <a:lstStyle/>
                     <a:p>
-                      <a:pPr algn="l" indent="0" marL="0">
+                      <a:pPr marL="0" indent="0" algn="l">
                         <a:buNone/>
                       </a:pPr>
                       <a:r>
@@ -12574,7 +12754,7 @@
                     <a:bodyPr/>
                     <a:lstStyle/>
                     <a:p>
-                      <a:pPr algn="l" indent="0" marL="0">
+                      <a:pPr marL="0" indent="0" algn="l">
                         <a:buNone/>
                       </a:pPr>
                       <a:r>
@@ -12642,7 +12822,7 @@
                     <a:bodyPr/>
                     <a:lstStyle/>
                     <a:p>
-                      <a:pPr algn="l" indent="0" marL="0">
+                      <a:pPr marL="0" indent="0" algn="l">
                         <a:buNone/>
                       </a:pPr>
                       <a:r>
@@ -12705,6 +12885,11 @@
                     </a:solidFill>
                   </a:tcPr>
                 </a:tc>
+                <a:extLst>
+                  <a:ext uri="{0D108BD9-81ED-4DB2-BD59-A6C34878D82A}">
+                    <a16:rowId xmlns:a16="http://schemas.microsoft.com/office/drawing/2014/main" val="10002"/>
+                  </a:ext>
+                </a:extLst>
               </a:tr>
               <a:tr h="329184">
                 <a:tc>
@@ -12712,7 +12897,7 @@
                     <a:bodyPr/>
                     <a:lstStyle/>
                     <a:p>
-                      <a:pPr algn="l" indent="0" marL="0">
+                      <a:pPr marL="0" indent="0" algn="l">
                         <a:buNone/>
                       </a:pPr>
                       <a:r>
@@ -12780,7 +12965,7 @@
                     <a:bodyPr/>
                     <a:lstStyle/>
                     <a:p>
-                      <a:pPr algn="l" indent="0" marL="0">
+                      <a:pPr marL="0" indent="0" algn="l">
                         <a:buNone/>
                       </a:pPr>
                       <a:r>
@@ -12848,7 +13033,7 @@
                     <a:bodyPr/>
                     <a:lstStyle/>
                     <a:p>
-                      <a:pPr algn="l" indent="0" marL="0">
+                      <a:pPr marL="0" indent="0" algn="l">
                         <a:buNone/>
                       </a:pPr>
                       <a:r>
@@ -12916,7 +13101,7 @@
                     <a:bodyPr/>
                     <a:lstStyle/>
                     <a:p>
-                      <a:pPr algn="l" indent="0" marL="0">
+                      <a:pPr marL="0" indent="0" algn="l">
                         <a:buNone/>
                       </a:pPr>
                       <a:r>
@@ -12979,6 +13164,11 @@
                     </a:solidFill>
                   </a:tcPr>
                 </a:tc>
+                <a:extLst>
+                  <a:ext uri="{0D108BD9-81ED-4DB2-BD59-A6C34878D82A}">
+                    <a16:rowId xmlns:a16="http://schemas.microsoft.com/office/drawing/2014/main" val="10003"/>
+                  </a:ext>
+                </a:extLst>
               </a:tr>
               <a:tr h="329184">
                 <a:tc>
@@ -12986,7 +13176,7 @@
                     <a:bodyPr/>
                     <a:lstStyle/>
                     <a:p>
-                      <a:pPr algn="l" indent="0" marL="0">
+                      <a:pPr marL="0" indent="0" algn="l">
                         <a:buNone/>
                       </a:pPr>
                       <a:r>
@@ -13054,7 +13244,7 @@
                     <a:bodyPr/>
                     <a:lstStyle/>
                     <a:p>
-                      <a:pPr algn="l" indent="0" marL="0">
+                      <a:pPr marL="0" indent="0" algn="l">
                         <a:buNone/>
                       </a:pPr>
                       <a:r>
@@ -13122,7 +13312,7 @@
                     <a:bodyPr/>
                     <a:lstStyle/>
                     <a:p>
-                      <a:pPr algn="l" indent="0" marL="0">
+                      <a:pPr marL="0" indent="0" algn="l">
                         <a:buNone/>
                       </a:pPr>
                       <a:r>
@@ -13190,7 +13380,7 @@
                     <a:bodyPr/>
                     <a:lstStyle/>
                     <a:p>
-                      <a:pPr algn="l" indent="0" marL="0">
+                      <a:pPr marL="0" indent="0" algn="l">
                         <a:buNone/>
                       </a:pPr>
                       <a:r>
@@ -13253,6 +13443,11 @@
                     </a:solidFill>
                   </a:tcPr>
                 </a:tc>
+                <a:extLst>
+                  <a:ext uri="{0D108BD9-81ED-4DB2-BD59-A6C34878D82A}">
+                    <a16:rowId xmlns:a16="http://schemas.microsoft.com/office/drawing/2014/main" val="10004"/>
+                  </a:ext>
+                </a:extLst>
               </a:tr>
               <a:tr h="329184">
                 <a:tc>
@@ -13260,7 +13455,7 @@
                     <a:bodyPr/>
                     <a:lstStyle/>
                     <a:p>
-                      <a:pPr algn="l" indent="0" marL="0">
+                      <a:pPr marL="0" indent="0" algn="l">
                         <a:buNone/>
                       </a:pPr>
                       <a:r>
@@ -13328,7 +13523,7 @@
                     <a:bodyPr/>
                     <a:lstStyle/>
                     <a:p>
-                      <a:pPr algn="l" indent="0" marL="0">
+                      <a:pPr marL="0" indent="0" algn="l">
                         <a:buNone/>
                       </a:pPr>
                       <a:r>
@@ -13396,7 +13591,7 @@
                     <a:bodyPr/>
                     <a:lstStyle/>
                     <a:p>
-                      <a:pPr algn="l" indent="0" marL="0">
+                      <a:pPr marL="0" indent="0" algn="l">
                         <a:buNone/>
                       </a:pPr>
                       <a:r>
@@ -13464,7 +13659,7 @@
                     <a:bodyPr/>
                     <a:lstStyle/>
                     <a:p>
-                      <a:pPr algn="l" indent="0" marL="0">
+                      <a:pPr marL="0" indent="0" algn="l">
                         <a:buNone/>
                       </a:pPr>
                       <a:r>
@@ -13527,6 +13722,11 @@
                     </a:solidFill>
                   </a:tcPr>
                 </a:tc>
+                <a:extLst>
+                  <a:ext uri="{0D108BD9-81ED-4DB2-BD59-A6C34878D82A}">
+                    <a16:rowId xmlns:a16="http://schemas.microsoft.com/office/drawing/2014/main" val="10005"/>
+                  </a:ext>
+                </a:extLst>
               </a:tr>
               <a:tr h="329184">
                 <a:tc>
@@ -13534,7 +13734,7 @@
                     <a:bodyPr/>
                     <a:lstStyle/>
                     <a:p>
-                      <a:pPr algn="l" indent="0" marL="0">
+                      <a:pPr marL="0" indent="0" algn="l">
                         <a:buNone/>
                       </a:pPr>
                       <a:r>
@@ -13602,7 +13802,7 @@
                     <a:bodyPr/>
                     <a:lstStyle/>
                     <a:p>
-                      <a:pPr algn="l" indent="0" marL="0">
+                      <a:pPr marL="0" indent="0" algn="l">
                         <a:buNone/>
                       </a:pPr>
                       <a:r>
@@ -13670,7 +13870,7 @@
                     <a:bodyPr/>
                     <a:lstStyle/>
                     <a:p>
-                      <a:pPr algn="l" indent="0" marL="0">
+                      <a:pPr marL="0" indent="0" algn="l">
                         <a:buNone/>
                       </a:pPr>
                       <a:r>
@@ -13738,7 +13938,7 @@
                     <a:bodyPr/>
                     <a:lstStyle/>
                     <a:p>
-                      <a:pPr algn="l" indent="0" marL="0">
+                      <a:pPr marL="0" indent="0" algn="l">
                         <a:buNone/>
                       </a:pPr>
                       <a:r>
@@ -13801,6 +14001,11 @@
                     </a:solidFill>
                   </a:tcPr>
                 </a:tc>
+                <a:extLst>
+                  <a:ext uri="{0D108BD9-81ED-4DB2-BD59-A6C34878D82A}">
+                    <a16:rowId xmlns:a16="http://schemas.microsoft.com/office/drawing/2014/main" val="10006"/>
+                  </a:ext>
+                </a:extLst>
               </a:tr>
               <a:tr h="329184">
                 <a:tc>
@@ -13808,7 +14013,7 @@
                     <a:bodyPr/>
                     <a:lstStyle/>
                     <a:p>
-                      <a:pPr algn="l" indent="0" marL="0">
+                      <a:pPr marL="0" indent="0" algn="l">
                         <a:buNone/>
                       </a:pPr>
                       <a:r>
@@ -13876,7 +14081,7 @@
                     <a:bodyPr/>
                     <a:lstStyle/>
                     <a:p>
-                      <a:pPr algn="l" indent="0" marL="0">
+                      <a:pPr marL="0" indent="0" algn="l">
                         <a:buNone/>
                       </a:pPr>
                       <a:r>
@@ -13944,7 +14149,7 @@
                     <a:bodyPr/>
                     <a:lstStyle/>
                     <a:p>
-                      <a:pPr algn="l" indent="0" marL="0">
+                      <a:pPr marL="0" indent="0" algn="l">
                         <a:buNone/>
                       </a:pPr>
                       <a:r>
@@ -14012,7 +14217,7 @@
                     <a:bodyPr/>
                     <a:lstStyle/>
                     <a:p>
-                      <a:pPr algn="l" indent="0" marL="0">
+                      <a:pPr marL="0" indent="0" algn="l">
                         <a:buNone/>
                       </a:pPr>
                       <a:r>
@@ -14075,6 +14280,11 @@
                     </a:solidFill>
                   </a:tcPr>
                 </a:tc>
+                <a:extLst>
+                  <a:ext uri="{0D108BD9-81ED-4DB2-BD59-A6C34878D82A}">
+                    <a16:rowId xmlns:a16="http://schemas.microsoft.com/office/drawing/2014/main" val="10007"/>
+                  </a:ext>
+                </a:extLst>
               </a:tr>
               <a:tr h="329184">
                 <a:tc>
@@ -14082,7 +14292,7 @@
                     <a:bodyPr/>
                     <a:lstStyle/>
                     <a:p>
-                      <a:pPr algn="l" indent="0" marL="0">
+                      <a:pPr marL="0" indent="0" algn="l">
                         <a:buNone/>
                       </a:pPr>
                       <a:r>
@@ -14150,7 +14360,7 @@
                     <a:bodyPr/>
                     <a:lstStyle/>
                     <a:p>
-                      <a:pPr algn="l" indent="0" marL="0">
+                      <a:pPr marL="0" indent="0" algn="l">
                         <a:buNone/>
                       </a:pPr>
                       <a:r>
@@ -14218,7 +14428,7 @@
                     <a:bodyPr/>
                     <a:lstStyle/>
                     <a:p>
-                      <a:pPr algn="l" indent="0" marL="0">
+                      <a:pPr marL="0" indent="0" algn="l">
                         <a:buNone/>
                       </a:pPr>
                       <a:r>
@@ -14286,7 +14496,7 @@
                     <a:bodyPr/>
                     <a:lstStyle/>
                     <a:p>
-                      <a:pPr algn="l" indent="0" marL="0">
+                      <a:pPr marL="0" indent="0" algn="l">
                         <a:buNone/>
                       </a:pPr>
                       <a:r>
@@ -14349,6 +14559,11 @@
                     </a:solidFill>
                   </a:tcPr>
                 </a:tc>
+                <a:extLst>
+                  <a:ext uri="{0D108BD9-81ED-4DB2-BD59-A6C34878D82A}">
+                    <a16:rowId xmlns:a16="http://schemas.microsoft.com/office/drawing/2014/main" val="10008"/>
+                  </a:ext>
+                </a:extLst>
               </a:tr>
             </a:tbl>
           </a:graphicData>
@@ -14378,6 +14593,13 @@
             <a:prstDash val="solid"/>
           </a:ln>
         </p:spPr>
+        <p:txBody>
+          <a:bodyPr/>
+          <a:lstStyle/>
+          <a:p>
+            <a:endParaRPr lang="en-IN"/>
+          </a:p>
+        </p:txBody>
       </p:sp>
       <p:sp>
         <p:nvSpPr>
@@ -14403,6 +14625,13 @@
             <a:prstDash val="solid"/>
           </a:ln>
         </p:spPr>
+        <p:txBody>
+          <a:bodyPr/>
+          <a:lstStyle/>
+          <a:p>
+            <a:endParaRPr lang="en-IN"/>
+          </a:p>
+        </p:txBody>
       </p:sp>
       <p:sp>
         <p:nvSpPr>
@@ -14425,7 +14654,7 @@
           <a:bodyPr wrap="square" lIns="0" tIns="0" rIns="0" bIns="0" rtlCol="0" anchor="ctr"/>
           <a:lstStyle/>
           <a:p>
-            <a:pPr indent="0" marL="0">
+            <a:pPr marL="0" indent="0">
               <a:buNone/>
             </a:pPr>
             <a:r>
@@ -14461,7 +14690,7 @@
           <a:bodyPr wrap="square" lIns="0" tIns="0" rIns="0" bIns="0" rtlCol="0" anchor="t"/>
           <a:lstStyle/>
           <a:p>
-            <a:pPr indent="0" marL="0">
+            <a:pPr marL="0" indent="0">
               <a:lnSpc>
                 <a:spcPct val="125000"/>
               </a:lnSpc>
@@ -14506,6 +14735,13 @@
             <a:prstDash val="solid"/>
           </a:ln>
         </p:spPr>
+        <p:txBody>
+          <a:bodyPr/>
+          <a:lstStyle/>
+          <a:p>
+            <a:endParaRPr lang="en-IN"/>
+          </a:p>
+        </p:txBody>
       </p:sp>
       <p:sp>
         <p:nvSpPr>
@@ -14528,7 +14764,7 @@
           <a:bodyPr wrap="square" lIns="0" tIns="0" rIns="0" bIns="0" rtlCol="0" anchor="ctr"/>
           <a:lstStyle/>
           <a:p>
-            <a:pPr indent="0" marL="0">
+            <a:pPr marL="0" indent="0">
               <a:buNone/>
             </a:pPr>
             <a:r>
@@ -14564,7 +14800,7 @@
           <a:bodyPr wrap="square" lIns="0" tIns="0" rIns="0" bIns="0" rtlCol="0" anchor="t"/>
           <a:lstStyle/>
           <a:p>
-            <a:pPr indent="0" marL="0">
+            <a:pPr marL="0" indent="0">
               <a:lnSpc>
                 <a:spcPct val="125000"/>
               </a:lnSpc>
@@ -14587,7 +14823,7 @@
       </p:sp>
       <p:sp>
         <p:nvSpPr>
-          <p:cNvPr id="14" name="vs2"/>
+          <p:cNvPr id="6" name="vs2"/>
           <p:cNvSpPr/>
           <p:nvPr/>
         </p:nvSpPr>
@@ -14609,6 +14845,13 @@
             <a:prstDash val="solid"/>
           </a:ln>
         </p:spPr>
+        <p:txBody>
+          <a:bodyPr/>
+          <a:lstStyle/>
+          <a:p>
+            <a:endParaRPr lang="en-IN"/>
+          </a:p>
+        </p:txBody>
       </p:sp>
       <p:sp>
         <p:nvSpPr>
@@ -14631,7 +14874,7 @@
           <a:bodyPr wrap="square" lIns="0" tIns="0" rIns="0" bIns="0" rtlCol="0" anchor="ctr"/>
           <a:lstStyle/>
           <a:p>
-            <a:pPr indent="0" marL="0">
+            <a:pPr marL="0" indent="0">
               <a:buNone/>
             </a:pPr>
             <a:r>
@@ -14667,7 +14910,7 @@
           <a:bodyPr wrap="square" lIns="0" tIns="0" rIns="0" bIns="0" rtlCol="0" anchor="t"/>
           <a:lstStyle/>
           <a:p>
-            <a:pPr indent="0" marL="0">
+            <a:pPr marL="0" indent="0">
               <a:lnSpc>
                 <a:spcPct val="125000"/>
               </a:lnSpc>
@@ -14690,45 +14933,6 @@
       </p:sp>
       <p:sp>
         <p:nvSpPr>
-          <p:cNvPr id="17" name="note"/>
-          <p:cNvSpPr txBox="1"/>
-          <p:nvPr/>
-        </p:nvSpPr>
-        <p:spPr>
-          <a:xfrm>
-            <a:off x="548640" y="6291072"/>
-            <a:ext cx="10607040" cy="274320"/>
-          </a:xfrm>
-          <a:prstGeom prst="rect">
-            <a:avLst/>
-          </a:prstGeom>
-          <a:noFill/>
-          <a:ln/>
-        </p:spPr>
-        <p:txBody>
-          <a:bodyPr wrap="square" lIns="0" tIns="0" rIns="0" bIns="0" rtlCol="0" anchor="ctr"/>
-          <a:lstStyle/>
-          <a:p>
-            <a:pPr indent="0" marL="0">
-              <a:buNone/>
-            </a:pPr>
-            <a:r>
-              <a:rPr lang="en-US" sz="950" dirty="0">
-                <a:solidFill>
-                  <a:srgbClr val="767676"/>
-                </a:solidFill>
-                <a:latin typeface="Arial" pitchFamily="34" charset="0"/>
-                <a:ea typeface="Arial" pitchFamily="34" charset="-122"/>
-                <a:cs typeface="Arial" pitchFamily="34" charset="-120"/>
-              </a:rPr>
-              <a:t>Every VERIFACT-Lite value is measured by this repository; none is copied from the paper or estimated.</a:t>
-            </a:r>
-            <a:endParaRPr lang="en-US" sz="950" dirty="0"/>
-          </a:p>
-        </p:txBody>
-      </p:sp>
-      <p:sp>
-        <p:nvSpPr>
           <p:cNvPr id="25" name="Slide Number Placeholder 0"/>
           <p:cNvSpPr>
             <a:spLocks noGrp="1"/>
@@ -14747,7 +14951,7 @@
           </a:prstGeom>
           <a:extLst>
             <a:ext uri="{C572A759-6A51-4108-AA02-DFA0A04FC94B}">
-              <ma14:wrappingTextBoxFlag xmlns:ma14="http://schemas.microsoft.com/office/mac/drawingml/2011/main" val="0"/>
+              <ma14:wrappingTextBoxFlag xmlns:ma14="http://schemas.microsoft.com/office/mac/drawingml/2011/main" xmlns="" val="0"/>
             </a:ext>
           </a:extLst>
         </p:spPr>
@@ -14765,7 +14969,7 @@
           <a:p>
             <a:pPr algn="r"/>
             <a:fld id="{F7021451-1387-4CA6-816F-3879F97B5CBC}" type="slidenum">
-              <a:rPr b="0" lang="en-US"/>
+              <a:rPr lang="en-US" b="0"/>
               <a:t>13</a:t>
             </a:fld>
             <a:endParaRPr lang="en-US"/>
@@ -14818,11 +15022,11 @@
           <a:bodyPr wrap="square" lIns="0" tIns="0" rIns="0" bIns="0" rtlCol="0" anchor="ctr"/>
           <a:lstStyle/>
           <a:p>
-            <a:pPr indent="0" marL="0">
+            <a:pPr marL="0" indent="0">
               <a:buNone/>
             </a:pPr>
             <a:r>
-              <a:rPr lang="en-US" sz="1000" b="1" spc="200" kern="0" dirty="0">
+              <a:rPr lang="en-US" sz="1000" b="1" kern="0" spc="200" dirty="0">
                 <a:solidFill>
                   <a:srgbClr val="E90802"/>
                 </a:solidFill>
@@ -14857,7 +15061,7 @@
           <a:bodyPr wrap="square" lIns="0" tIns="0" rIns="0" bIns="0" rtlCol="0" anchor="ctr"/>
           <a:lstStyle/>
           <a:p>
-            <a:pPr indent="0" marL="0">
+            <a:pPr marL="0" indent="0">
               <a:buNone/>
             </a:pPr>
             <a:r>
@@ -14893,7 +15097,7 @@
           <a:bodyPr wrap="square" lIns="0" tIns="0" rIns="0" bIns="0" rtlCol="0" anchor="ctr"/>
           <a:lstStyle/>
           <a:p>
-            <a:pPr indent="0" marL="0">
+            <a:pPr marL="0" indent="0">
               <a:buNone/>
             </a:pPr>
             <a:r>
@@ -14935,6 +15139,13 @@
             <a:prstDash val="solid"/>
           </a:ln>
         </p:spPr>
+        <p:txBody>
+          <a:bodyPr/>
+          <a:lstStyle/>
+          <a:p>
+            <a:endParaRPr lang="en-IN"/>
+          </a:p>
+        </p:txBody>
       </p:sp>
       <p:sp>
         <p:nvSpPr>
@@ -14960,6 +15171,13 @@
             <a:prstDash val="solid"/>
           </a:ln>
         </p:spPr>
+        <p:txBody>
+          <a:bodyPr/>
+          <a:lstStyle/>
+          <a:p>
+            <a:endParaRPr lang="en-IN"/>
+          </a:p>
+        </p:txBody>
       </p:sp>
       <p:sp>
         <p:nvSpPr>
@@ -14985,6 +15203,13 @@
             <a:prstDash val="solid"/>
           </a:ln>
         </p:spPr>
+        <p:txBody>
+          <a:bodyPr/>
+          <a:lstStyle/>
+          <a:p>
+            <a:endParaRPr lang="en-IN"/>
+          </a:p>
+        </p:txBody>
       </p:sp>
       <p:sp>
         <p:nvSpPr>
@@ -15007,7 +15232,7 @@
           <a:bodyPr wrap="square" lIns="0" tIns="0" rIns="0" bIns="0" rtlCol="0" anchor="ctr"/>
           <a:lstStyle/>
           <a:p>
-            <a:pPr indent="0" marL="0">
+            <a:pPr marL="0" indent="0">
               <a:buNone/>
             </a:pPr>
             <a:r>
@@ -15043,7 +15268,7 @@
           <a:bodyPr wrap="square" lIns="0" tIns="0" rIns="0" bIns="0" rtlCol="0" anchor="t"/>
           <a:lstStyle/>
           <a:p>
-            <a:pPr indent="0" marL="0">
+            <a:pPr marL="0" indent="0">
               <a:lnSpc>
                 <a:spcPct val="125000"/>
               </a:lnSpc>
@@ -15080,16 +15305,34 @@
         </p:nvGraphicFramePr>
         <p:xfrm>
           <a:off x="548640" y="3017520"/>
-          <a:ext cx="11064240" cy="914400"/>
+          <a:ext cx="11064240" cy="2816352"/>
         </p:xfrm>
         <a:graphic>
           <a:graphicData uri="http://schemas.openxmlformats.org/drawingml/2006/table">
             <a:tbl>
               <a:tblPr/>
               <a:tblGrid>
-                <a:gridCol w="4206240"/>
-                <a:gridCol w="4114800"/>
-                <a:gridCol w="2743200"/>
+                <a:gridCol w="4206240">
+                  <a:extLst>
+                    <a:ext uri="{9D8B030D-6E8A-4147-A177-3AD203B41FA5}">
+                      <a16:colId xmlns:a16="http://schemas.microsoft.com/office/drawing/2014/main" val="20000"/>
+                    </a:ext>
+                  </a:extLst>
+                </a:gridCol>
+                <a:gridCol w="4114800">
+                  <a:extLst>
+                    <a:ext uri="{9D8B030D-6E8A-4147-A177-3AD203B41FA5}">
+                      <a16:colId xmlns:a16="http://schemas.microsoft.com/office/drawing/2014/main" val="20001"/>
+                    </a:ext>
+                  </a:extLst>
+                </a:gridCol>
+                <a:gridCol w="2743200">
+                  <a:extLst>
+                    <a:ext uri="{9D8B030D-6E8A-4147-A177-3AD203B41FA5}">
+                      <a16:colId xmlns:a16="http://schemas.microsoft.com/office/drawing/2014/main" val="20002"/>
+                    </a:ext>
+                  </a:extLst>
+                </a:gridCol>
               </a:tblGrid>
               <a:tr h="402336">
                 <a:tc>
@@ -15097,7 +15340,7 @@
                     <a:bodyPr/>
                     <a:lstStyle/>
                     <a:p>
-                      <a:pPr algn="l" indent="0" marL="0">
+                      <a:pPr marL="0" indent="0" algn="l">
                         <a:buNone/>
                       </a:pPr>
                       <a:r>
@@ -15165,7 +15408,7 @@
                     <a:bodyPr/>
                     <a:lstStyle/>
                     <a:p>
-                      <a:pPr algn="l" indent="0" marL="0">
+                      <a:pPr marL="0" indent="0" algn="l">
                         <a:buNone/>
                       </a:pPr>
                       <a:r>
@@ -15233,7 +15476,7 @@
                     <a:bodyPr/>
                     <a:lstStyle/>
                     <a:p>
-                      <a:pPr algn="l" indent="0" marL="0">
+                      <a:pPr marL="0" indent="0" algn="l">
                         <a:buNone/>
                       </a:pPr>
                       <a:r>
@@ -15296,6 +15539,11 @@
                     </a:solidFill>
                   </a:tcPr>
                 </a:tc>
+                <a:extLst>
+                  <a:ext uri="{0D108BD9-81ED-4DB2-BD59-A6C34878D82A}">
+                    <a16:rowId xmlns:a16="http://schemas.microsoft.com/office/drawing/2014/main" val="10000"/>
+                  </a:ext>
+                </a:extLst>
               </a:tr>
               <a:tr h="402336">
                 <a:tc>
@@ -15303,7 +15551,7 @@
                     <a:bodyPr/>
                     <a:lstStyle/>
                     <a:p>
-                      <a:pPr algn="l" indent="0" marL="0">
+                      <a:pPr marL="0" indent="0" algn="l">
                         <a:buNone/>
                       </a:pPr>
                       <a:r>
@@ -15371,7 +15619,7 @@
                     <a:bodyPr/>
                     <a:lstStyle/>
                     <a:p>
-                      <a:pPr algn="l" indent="0" marL="0">
+                      <a:pPr marL="0" indent="0" algn="l">
                         <a:buNone/>
                       </a:pPr>
                       <a:r>
@@ -15439,7 +15687,7 @@
                     <a:bodyPr/>
                     <a:lstStyle/>
                     <a:p>
-                      <a:pPr algn="l" indent="0" marL="0">
+                      <a:pPr marL="0" indent="0" algn="l">
                         <a:buNone/>
                       </a:pPr>
                       <a:r>
@@ -15502,6 +15750,11 @@
                     </a:solidFill>
                   </a:tcPr>
                 </a:tc>
+                <a:extLst>
+                  <a:ext uri="{0D108BD9-81ED-4DB2-BD59-A6C34878D82A}">
+                    <a16:rowId xmlns:a16="http://schemas.microsoft.com/office/drawing/2014/main" val="10001"/>
+                  </a:ext>
+                </a:extLst>
               </a:tr>
               <a:tr h="402336">
                 <a:tc>
@@ -15509,7 +15762,7 @@
                     <a:bodyPr/>
                     <a:lstStyle/>
                     <a:p>
-                      <a:pPr algn="l" indent="0" marL="0">
+                      <a:pPr marL="0" indent="0" algn="l">
                         <a:buNone/>
                       </a:pPr>
                       <a:r>
@@ -15577,7 +15830,7 @@
                     <a:bodyPr/>
                     <a:lstStyle/>
                     <a:p>
-                      <a:pPr algn="l" indent="0" marL="0">
+                      <a:pPr marL="0" indent="0" algn="l">
                         <a:buNone/>
                       </a:pPr>
                       <a:r>
@@ -15645,7 +15898,7 @@
                     <a:bodyPr/>
                     <a:lstStyle/>
                     <a:p>
-                      <a:pPr algn="l" indent="0" marL="0">
+                      <a:pPr marL="0" indent="0" algn="l">
                         <a:buNone/>
                       </a:pPr>
                       <a:r>
@@ -15708,6 +15961,11 @@
                     </a:solidFill>
                   </a:tcPr>
                 </a:tc>
+                <a:extLst>
+                  <a:ext uri="{0D108BD9-81ED-4DB2-BD59-A6C34878D82A}">
+                    <a16:rowId xmlns:a16="http://schemas.microsoft.com/office/drawing/2014/main" val="10002"/>
+                  </a:ext>
+                </a:extLst>
               </a:tr>
               <a:tr h="402336">
                 <a:tc>
@@ -15715,7 +15973,7 @@
                     <a:bodyPr/>
                     <a:lstStyle/>
                     <a:p>
-                      <a:pPr algn="l" indent="0" marL="0">
+                      <a:pPr marL="0" indent="0" algn="l">
                         <a:buNone/>
                       </a:pPr>
                       <a:r>
@@ -15783,7 +16041,7 @@
                     <a:bodyPr/>
                     <a:lstStyle/>
                     <a:p>
-                      <a:pPr algn="l" indent="0" marL="0">
+                      <a:pPr marL="0" indent="0" algn="l">
                         <a:buNone/>
                       </a:pPr>
                       <a:r>
@@ -15851,7 +16109,7 @@
                     <a:bodyPr/>
                     <a:lstStyle/>
                     <a:p>
-                      <a:pPr algn="l" indent="0" marL="0">
+                      <a:pPr marL="0" indent="0" algn="l">
                         <a:buNone/>
                       </a:pPr>
                       <a:r>
@@ -15914,6 +16172,11 @@
                     </a:solidFill>
                   </a:tcPr>
                 </a:tc>
+                <a:extLst>
+                  <a:ext uri="{0D108BD9-81ED-4DB2-BD59-A6C34878D82A}">
+                    <a16:rowId xmlns:a16="http://schemas.microsoft.com/office/drawing/2014/main" val="10003"/>
+                  </a:ext>
+                </a:extLst>
               </a:tr>
               <a:tr h="402336">
                 <a:tc>
@@ -15921,7 +16184,7 @@
                     <a:bodyPr/>
                     <a:lstStyle/>
                     <a:p>
-                      <a:pPr algn="l" indent="0" marL="0">
+                      <a:pPr marL="0" indent="0" algn="l">
                         <a:buNone/>
                       </a:pPr>
                       <a:r>
@@ -15989,7 +16252,7 @@
                     <a:bodyPr/>
                     <a:lstStyle/>
                     <a:p>
-                      <a:pPr algn="l" indent="0" marL="0">
+                      <a:pPr marL="0" indent="0" algn="l">
                         <a:buNone/>
                       </a:pPr>
                       <a:r>
@@ -16057,7 +16320,7 @@
                     <a:bodyPr/>
                     <a:lstStyle/>
                     <a:p>
-                      <a:pPr algn="l" indent="0" marL="0">
+                      <a:pPr marL="0" indent="0" algn="l">
                         <a:buNone/>
                       </a:pPr>
                       <a:r>
@@ -16120,6 +16383,11 @@
                     </a:solidFill>
                   </a:tcPr>
                 </a:tc>
+                <a:extLst>
+                  <a:ext uri="{0D108BD9-81ED-4DB2-BD59-A6C34878D82A}">
+                    <a16:rowId xmlns:a16="http://schemas.microsoft.com/office/drawing/2014/main" val="10004"/>
+                  </a:ext>
+                </a:extLst>
               </a:tr>
               <a:tr h="402336">
                 <a:tc>
@@ -16127,7 +16395,7 @@
                     <a:bodyPr/>
                     <a:lstStyle/>
                     <a:p>
-                      <a:pPr algn="l" indent="0" marL="0">
+                      <a:pPr marL="0" indent="0" algn="l">
                         <a:buNone/>
                       </a:pPr>
                       <a:r>
@@ -16195,7 +16463,7 @@
                     <a:bodyPr/>
                     <a:lstStyle/>
                     <a:p>
-                      <a:pPr algn="l" indent="0" marL="0">
+                      <a:pPr marL="0" indent="0" algn="l">
                         <a:buNone/>
                       </a:pPr>
                       <a:r>
@@ -16263,7 +16531,7 @@
                     <a:bodyPr/>
                     <a:lstStyle/>
                     <a:p>
-                      <a:pPr algn="l" indent="0" marL="0">
+                      <a:pPr marL="0" indent="0" algn="l">
                         <a:buNone/>
                       </a:pPr>
                       <a:r>
@@ -16326,6 +16594,11 @@
                     </a:solidFill>
                   </a:tcPr>
                 </a:tc>
+                <a:extLst>
+                  <a:ext uri="{0D108BD9-81ED-4DB2-BD59-A6C34878D82A}">
+                    <a16:rowId xmlns:a16="http://schemas.microsoft.com/office/drawing/2014/main" val="10005"/>
+                  </a:ext>
+                </a:extLst>
               </a:tr>
               <a:tr h="402336">
                 <a:tc>
@@ -16333,7 +16606,7 @@
                     <a:bodyPr/>
                     <a:lstStyle/>
                     <a:p>
-                      <a:pPr algn="l" indent="0" marL="0">
+                      <a:pPr marL="0" indent="0" algn="l">
                         <a:buNone/>
                       </a:pPr>
                       <a:r>
@@ -16401,7 +16674,7 @@
                     <a:bodyPr/>
                     <a:lstStyle/>
                     <a:p>
-                      <a:pPr algn="l" indent="0" marL="0">
+                      <a:pPr marL="0" indent="0" algn="l">
                         <a:buNone/>
                       </a:pPr>
                       <a:r>
@@ -16469,7 +16742,7 @@
                     <a:bodyPr/>
                     <a:lstStyle/>
                     <a:p>
-                      <a:pPr algn="l" indent="0" marL="0">
+                      <a:pPr marL="0" indent="0" algn="l">
                         <a:buNone/>
                       </a:pPr>
                       <a:r>
@@ -16532,50 +16805,16 @@
                     </a:solidFill>
                   </a:tcPr>
                 </a:tc>
+                <a:extLst>
+                  <a:ext uri="{0D108BD9-81ED-4DB2-BD59-A6C34878D82A}">
+                    <a16:rowId xmlns:a16="http://schemas.microsoft.com/office/drawing/2014/main" val="10006"/>
+                  </a:ext>
+                </a:extLst>
               </a:tr>
             </a:tbl>
           </a:graphicData>
         </a:graphic>
       </p:graphicFrame>
-      <p:sp>
-        <p:nvSpPr>
-          <p:cNvPr id="11" name="note"/>
-          <p:cNvSpPr txBox="1"/>
-          <p:nvPr/>
-        </p:nvSpPr>
-        <p:spPr>
-          <a:xfrm>
-            <a:off x="548640" y="6291072"/>
-            <a:ext cx="10607040" cy="274320"/>
-          </a:xfrm>
-          <a:prstGeom prst="rect">
-            <a:avLst/>
-          </a:prstGeom>
-          <a:noFill/>
-          <a:ln/>
-        </p:spPr>
-        <p:txBody>
-          <a:bodyPr wrap="square" lIns="0" tIns="0" rIns="0" bIns="0" rtlCol="0" anchor="ctr"/>
-          <a:lstStyle/>
-          <a:p>
-            <a:pPr indent="0" marL="0">
-              <a:buNone/>
-            </a:pPr>
-            <a:r>
-              <a:rPr lang="en-US" sz="950" dirty="0">
-                <a:solidFill>
-                  <a:srgbClr val="767676"/>
-                </a:solidFill>
-                <a:latin typeface="Arial" pitchFamily="34" charset="0"/>
-                <a:ea typeface="Arial" pitchFamily="34" charset="-122"/>
-                <a:cs typeface="Arial" pitchFamily="34" charset="-120"/>
-              </a:rPr>
-              <a:t>Full ranked list in the appendix. Nothing in the 'not yet run' rows is claimed as a result.</a:t>
-            </a:r>
-            <a:endParaRPr lang="en-US" sz="950" dirty="0"/>
-          </a:p>
-        </p:txBody>
-      </p:sp>
       <p:sp>
         <p:nvSpPr>
           <p:cNvPr id="25" name="Slide Number Placeholder 0"/>
@@ -16596,7 +16835,7 @@
           </a:prstGeom>
           <a:extLst>
             <a:ext uri="{C572A759-6A51-4108-AA02-DFA0A04FC94B}">
-              <ma14:wrappingTextBoxFlag xmlns:ma14="http://schemas.microsoft.com/office/mac/drawingml/2011/main" val="0"/>
+              <ma14:wrappingTextBoxFlag xmlns:ma14="http://schemas.microsoft.com/office/mac/drawingml/2011/main" xmlns="" val="0"/>
             </a:ext>
           </a:extLst>
         </p:spPr>
@@ -16614,7 +16853,7 @@
           <a:p>
             <a:pPr algn="r"/>
             <a:fld id="{F7021451-1387-4CA6-816F-3879F97B5CBC}" type="slidenum">
-              <a:rPr b="0" lang="en-US"/>
+              <a:rPr lang="en-US" b="0"/>
               <a:t>14</a:t>
             </a:fld>
             <a:endParaRPr lang="en-US"/>
@@ -16667,11 +16906,11 @@
           <a:bodyPr wrap="square" lIns="0" tIns="0" rIns="0" bIns="0" rtlCol="0" anchor="ctr"/>
           <a:lstStyle/>
           <a:p>
-            <a:pPr indent="0" marL="0">
+            <a:pPr marL="0" indent="0">
               <a:buNone/>
             </a:pPr>
             <a:r>
-              <a:rPr lang="en-US" sz="1000" b="1" spc="200" kern="0" dirty="0">
+              <a:rPr lang="en-US" sz="1000" b="1" kern="0" spc="200" dirty="0">
                 <a:solidFill>
                   <a:srgbClr val="E90802"/>
                 </a:solidFill>
@@ -16706,7 +16945,7 @@
           <a:bodyPr wrap="square" lIns="0" tIns="0" rIns="0" bIns="0" rtlCol="0" anchor="ctr"/>
           <a:lstStyle/>
           <a:p>
-            <a:pPr indent="0" marL="0">
+            <a:pPr marL="0" indent="0">
               <a:buNone/>
             </a:pPr>
             <a:r>
@@ -16742,7 +16981,7 @@
           <a:bodyPr wrap="square" lIns="0" tIns="0" rIns="0" bIns="0" rtlCol="0" anchor="ctr"/>
           <a:lstStyle/>
           <a:p>
-            <a:pPr indent="0" marL="0">
+            <a:pPr marL="0" indent="0">
               <a:buNone/>
             </a:pPr>
             <a:r>
@@ -16775,15 +17014,22 @@
             <a:avLst/>
           </a:prstGeom>
           <a:solidFill>
-            <a:srgbClr val="DCDCDC"/>
+            <a:schemeClr val="tx1"/>
           </a:solidFill>
           <a:ln w="3175">
             <a:solidFill>
-              <a:srgbClr val="DCDCDC"/>
+              <a:schemeClr val="tx1"/>
             </a:solidFill>
             <a:prstDash val="solid"/>
           </a:ln>
         </p:spPr>
+        <p:txBody>
+          <a:bodyPr/>
+          <a:lstStyle/>
+          <a:p>
+            <a:endParaRPr lang="en-IN"/>
+          </a:p>
+        </p:txBody>
       </p:sp>
       <p:sp>
         <p:nvSpPr>
@@ -16809,6 +17055,13 @@
             <a:prstDash val="solid"/>
           </a:ln>
         </p:spPr>
+        <p:txBody>
+          <a:bodyPr/>
+          <a:lstStyle/>
+          <a:p>
+            <a:endParaRPr lang="en-IN"/>
+          </a:p>
+        </p:txBody>
       </p:sp>
       <p:sp>
         <p:nvSpPr>
@@ -16831,7 +17084,7 @@
           <a:bodyPr wrap="square" lIns="0" tIns="0" rIns="0" bIns="0" rtlCol="0" anchor="ctr"/>
           <a:lstStyle/>
           <a:p>
-            <a:pPr indent="0" marL="0">
+            <a:pPr marL="0" indent="0">
               <a:buNone/>
             </a:pPr>
             <a:r>
@@ -16867,7 +17120,7 @@
           <a:bodyPr wrap="square" lIns="0" tIns="0" rIns="0" bIns="0" rtlCol="0" anchor="t"/>
           <a:lstStyle/>
           <a:p>
-            <a:pPr indent="0" marL="0">
+            <a:pPr marL="0" indent="0">
               <a:lnSpc>
                 <a:spcPct val="120000"/>
               </a:lnSpc>
@@ -16912,6 +17165,13 @@
             <a:prstDash val="solid"/>
           </a:ln>
         </p:spPr>
+        <p:txBody>
+          <a:bodyPr/>
+          <a:lstStyle/>
+          <a:p>
+            <a:endParaRPr lang="en-IN"/>
+          </a:p>
+        </p:txBody>
       </p:sp>
       <p:sp>
         <p:nvSpPr>
@@ -16934,7 +17194,7 @@
           <a:bodyPr wrap="square" lIns="0" tIns="0" rIns="0" bIns="0" rtlCol="0" anchor="ctr"/>
           <a:lstStyle/>
           <a:p>
-            <a:pPr indent="0" marL="0">
+            <a:pPr marL="0" indent="0">
               <a:buNone/>
             </a:pPr>
             <a:r>
@@ -16970,7 +17230,7 @@
           <a:bodyPr wrap="square" lIns="0" tIns="0" rIns="0" bIns="0" rtlCol="0" anchor="t"/>
           <a:lstStyle/>
           <a:p>
-            <a:pPr indent="0" marL="0">
+            <a:pPr marL="0" indent="0">
               <a:lnSpc>
                 <a:spcPct val="120000"/>
               </a:lnSpc>
@@ -17015,6 +17275,13 @@
             <a:prstDash val="solid"/>
           </a:ln>
         </p:spPr>
+        <p:txBody>
+          <a:bodyPr/>
+          <a:lstStyle/>
+          <a:p>
+            <a:endParaRPr lang="en-IN"/>
+          </a:p>
+        </p:txBody>
       </p:sp>
       <p:sp>
         <p:nvSpPr>
@@ -17037,7 +17304,7 @@
           <a:bodyPr wrap="square" lIns="0" tIns="0" rIns="0" bIns="0" rtlCol="0" anchor="ctr"/>
           <a:lstStyle/>
           <a:p>
-            <a:pPr indent="0" marL="0">
+            <a:pPr marL="0" indent="0">
               <a:buNone/>
             </a:pPr>
             <a:r>
@@ -17073,7 +17340,7 @@
           <a:bodyPr wrap="square" lIns="0" tIns="0" rIns="0" bIns="0" rtlCol="0" anchor="t"/>
           <a:lstStyle/>
           <a:p>
-            <a:pPr indent="0" marL="0">
+            <a:pPr marL="0" indent="0">
               <a:lnSpc>
                 <a:spcPct val="120000"/>
               </a:lnSpc>
@@ -17118,6 +17385,13 @@
             <a:prstDash val="solid"/>
           </a:ln>
         </p:spPr>
+        <p:txBody>
+          <a:bodyPr/>
+          <a:lstStyle/>
+          <a:p>
+            <a:endParaRPr lang="en-IN"/>
+          </a:p>
+        </p:txBody>
       </p:sp>
       <p:sp>
         <p:nvSpPr>
@@ -17140,7 +17414,7 @@
           <a:bodyPr wrap="square" lIns="0" tIns="0" rIns="0" bIns="0" rtlCol="0" anchor="ctr"/>
           <a:lstStyle/>
           <a:p>
-            <a:pPr indent="0" marL="0">
+            <a:pPr marL="0" indent="0">
               <a:buNone/>
             </a:pPr>
             <a:r>
@@ -17176,7 +17450,7 @@
           <a:bodyPr wrap="square" lIns="0" tIns="0" rIns="0" bIns="0" rtlCol="0" anchor="t"/>
           <a:lstStyle/>
           <a:p>
-            <a:pPr indent="0" marL="0">
+            <a:pPr marL="0" indent="0">
               <a:lnSpc>
                 <a:spcPct val="120000"/>
               </a:lnSpc>
@@ -17199,45 +17473,6 @@
       </p:sp>
       <p:sp>
         <p:nvSpPr>
-          <p:cNvPr id="18" name="note"/>
-          <p:cNvSpPr txBox="1"/>
-          <p:nvPr/>
-        </p:nvSpPr>
-        <p:spPr>
-          <a:xfrm>
-            <a:off x="548640" y="6291072"/>
-            <a:ext cx="10607040" cy="274320"/>
-          </a:xfrm>
-          <a:prstGeom prst="rect">
-            <a:avLst/>
-          </a:prstGeom>
-          <a:noFill/>
-          <a:ln/>
-        </p:spPr>
-        <p:txBody>
-          <a:bodyPr wrap="square" lIns="0" tIns="0" rIns="0" bIns="0" rtlCol="0" anchor="ctr"/>
-          <a:lstStyle/>
-          <a:p>
-            <a:pPr indent="0" marL="0">
-              <a:buNone/>
-            </a:pPr>
-            <a:r>
-              <a:rPr lang="en-US" sz="950" dirty="0">
-                <a:solidFill>
-                  <a:srgbClr val="767676"/>
-                </a:solidFill>
-                <a:latin typeface="Arial" pitchFamily="34" charset="0"/>
-                <a:ea typeface="Arial" pitchFamily="34" charset="-122"/>
-                <a:cs typeface="Arial" pitchFamily="34" charset="-120"/>
-              </a:rPr>
-              <a:t>Config-driven, fully cached, 59 unit tests  ·  all three runs reproduce from one command without a GPU</a:t>
-            </a:r>
-            <a:endParaRPr lang="en-US" sz="950" dirty="0"/>
-          </a:p>
-        </p:txBody>
-      </p:sp>
-      <p:sp>
-        <p:nvSpPr>
           <p:cNvPr id="25" name="Slide Number Placeholder 0"/>
           <p:cNvSpPr>
             <a:spLocks noGrp="1"/>
@@ -17256,7 +17491,7 @@
           </a:prstGeom>
           <a:extLst>
             <a:ext uri="{C572A759-6A51-4108-AA02-DFA0A04FC94B}">
-              <ma14:wrappingTextBoxFlag xmlns:ma14="http://schemas.microsoft.com/office/mac/drawingml/2011/main" val="0"/>
+              <ma14:wrappingTextBoxFlag xmlns:ma14="http://schemas.microsoft.com/office/mac/drawingml/2011/main" xmlns="" val="0"/>
             </a:ext>
           </a:extLst>
         </p:spPr>
@@ -17274,7 +17509,7 @@
           <a:p>
             <a:pPr algn="r"/>
             <a:fld id="{F7021451-1387-4CA6-816F-3879F97B5CBC}" type="slidenum">
-              <a:rPr b="0" lang="en-US"/>
+              <a:rPr lang="en-US" b="0"/>
               <a:t>15</a:t>
             </a:fld>
             <a:endParaRPr lang="en-US"/>
@@ -17327,11 +17562,11 @@
           <a:bodyPr wrap="square" lIns="0" tIns="0" rIns="0" bIns="0" rtlCol="0" anchor="ctr"/>
           <a:lstStyle/>
           <a:p>
-            <a:pPr indent="0" marL="0">
+            <a:pPr marL="0" indent="0">
               <a:buNone/>
             </a:pPr>
             <a:r>
-              <a:rPr lang="en-US" sz="1000" b="1" spc="200" kern="0" dirty="0">
+              <a:rPr lang="en-US" sz="1000" b="1" kern="0" spc="200" dirty="0">
                 <a:solidFill>
                   <a:srgbClr val="E90802"/>
                 </a:solidFill>
@@ -17366,7 +17601,7 @@
           <a:bodyPr wrap="square" lIns="0" tIns="0" rIns="0" bIns="0" rtlCol="0" anchor="ctr"/>
           <a:lstStyle/>
           <a:p>
-            <a:pPr indent="0" marL="0">
+            <a:pPr marL="0" indent="0">
               <a:buNone/>
             </a:pPr>
             <a:r>
@@ -17402,7 +17637,7 @@
           <a:bodyPr wrap="square" lIns="0" tIns="0" rIns="0" bIns="0" rtlCol="0" anchor="ctr"/>
           <a:lstStyle/>
           <a:p>
-            <a:pPr indent="0" marL="0">
+            <a:pPr marL="0" indent="0">
               <a:buNone/>
             </a:pPr>
             <a:r>
@@ -17444,6 +17679,13 @@
             <a:prstDash val="solid"/>
           </a:ln>
         </p:spPr>
+        <p:txBody>
+          <a:bodyPr/>
+          <a:lstStyle/>
+          <a:p>
+            <a:endParaRPr lang="en-IN"/>
+          </a:p>
+        </p:txBody>
       </p:sp>
       <p:sp>
         <p:nvSpPr>
@@ -17469,6 +17711,13 @@
             <a:prstDash val="solid"/>
           </a:ln>
         </p:spPr>
+        <p:txBody>
+          <a:bodyPr/>
+          <a:lstStyle/>
+          <a:p>
+            <a:endParaRPr lang="en-IN"/>
+          </a:p>
+        </p:txBody>
       </p:sp>
       <p:sp>
         <p:nvSpPr>
@@ -17491,7 +17740,7 @@
           <a:bodyPr wrap="square" lIns="0" tIns="0" rIns="0" bIns="0" rtlCol="0" anchor="ctr"/>
           <a:lstStyle/>
           <a:p>
-            <a:pPr indent="0" marL="0">
+            <a:pPr marL="0" indent="0">
               <a:lnSpc>
                 <a:spcPct val="112000"/>
               </a:lnSpc>
@@ -17508,12 +17757,6 @@
               </a:rPr>
               <a:t>Model answer:  </a:t>
             </a:r>
-            <a:pPr indent="0" marL="0">
-              <a:lnSpc>
-                <a:spcPct val="112000"/>
-              </a:lnSpc>
-              <a:buNone/>
-            </a:pPr>
             <a:r>
               <a:rPr lang="en-US" sz="1400" dirty="0">
                 <a:solidFill>
@@ -17525,12 +17768,6 @@
               </a:rPr>
               <a:t>"If the demand for gold as jewelry were to disappear, the price of gold could drop by 20–50% or more, </a:t>
             </a:r>
-            <a:pPr indent="0" marL="0">
-              <a:lnSpc>
-                <a:spcPct val="112000"/>
-              </a:lnSpc>
-              <a:buNone/>
-            </a:pPr>
             <a:r>
               <a:rPr lang="en-US" sz="1400" b="1" dirty="0">
                 <a:solidFill>
@@ -17542,12 +17779,6 @@
               </a:rPr>
               <a:t>making</a:t>
             </a:r>
-            <a:pPr indent="0" marL="0">
-              <a:lnSpc>
-                <a:spcPct val="112000"/>
-              </a:lnSpc>
-              <a:buNone/>
-            </a:pPr>
             <a:r>
               <a:rPr lang="en-US" sz="1400" dirty="0">
                 <a:solidFill>
@@ -17587,6 +17818,13 @@
             <a:prstDash val="solid"/>
           </a:ln>
         </p:spPr>
+        <p:txBody>
+          <a:bodyPr/>
+          <a:lstStyle/>
+          <a:p>
+            <a:endParaRPr lang="en-IN"/>
+          </a:p>
+        </p:txBody>
       </p:sp>
       <p:sp>
         <p:nvSpPr>
@@ -17609,7 +17847,7 @@
           <a:bodyPr wrap="square" lIns="0" tIns="0" rIns="0" bIns="0" rtlCol="0" anchor="ctr"/>
           <a:lstStyle/>
           <a:p>
-            <a:pPr indent="0" marL="0">
+            <a:pPr marL="0" indent="0">
               <a:buNone/>
             </a:pPr>
             <a:r>
@@ -17687,7 +17925,7 @@
             <a:endParaRPr lang="en-US" sz="1250" dirty="0"/>
           </a:p>
           <a:p>
-            <a:pPr indent="0" marL="0">
+            <a:pPr marL="0" indent="0">
               <a:spcAft>
                 <a:spcPts val="400"/>
               </a:spcAft>
@@ -17728,7 +17966,7 @@
             <a:endParaRPr lang="en-US" sz="1250" dirty="0"/>
           </a:p>
           <a:p>
-            <a:pPr indent="0" marL="0">
+            <a:pPr marL="0" indent="0">
               <a:spcAft>
                 <a:spcPts val="400"/>
               </a:spcAft>
@@ -17773,6 +18011,13 @@
             <a:prstDash val="solid"/>
           </a:ln>
         </p:spPr>
+        <p:txBody>
+          <a:bodyPr/>
+          <a:lstStyle/>
+          <a:p>
+            <a:endParaRPr lang="en-IN"/>
+          </a:p>
+        </p:txBody>
       </p:sp>
       <p:sp>
         <p:nvSpPr>
@@ -17798,6 +18043,13 @@
             <a:prstDash val="solid"/>
           </a:ln>
         </p:spPr>
+        <p:txBody>
+          <a:bodyPr/>
+          <a:lstStyle/>
+          <a:p>
+            <a:endParaRPr lang="en-IN"/>
+          </a:p>
+        </p:txBody>
       </p:sp>
       <p:sp>
         <p:nvSpPr>
@@ -17820,7 +18072,7 @@
           <a:bodyPr wrap="square" lIns="0" tIns="0" rIns="0" bIns="0" rtlCol="0" anchor="ctr"/>
           <a:lstStyle/>
           <a:p>
-            <a:pPr indent="0" marL="0">
+            <a:pPr marL="0" indent="0">
               <a:buNone/>
             </a:pPr>
             <a:r>
@@ -17919,7 +18171,7 @@
             <a:endParaRPr lang="en-US" sz="1250" dirty="0"/>
           </a:p>
           <a:p>
-            <a:pPr indent="0" marL="0">
+            <a:pPr marL="0" indent="0">
               <a:spcAft>
                 <a:spcPts val="400"/>
               </a:spcAft>
@@ -17964,6 +18216,13 @@
             <a:prstDash val="solid"/>
           </a:ln>
         </p:spPr>
+        <p:txBody>
+          <a:bodyPr/>
+          <a:lstStyle/>
+          <a:p>
+            <a:endParaRPr lang="en-IN"/>
+          </a:p>
+        </p:txBody>
       </p:sp>
       <p:sp>
         <p:nvSpPr>
@@ -17986,11 +18245,11 @@
           <a:bodyPr wrap="square" lIns="0" tIns="0" rIns="0" bIns="0" rtlCol="0" anchor="ctr"/>
           <a:lstStyle/>
           <a:p>
-            <a:pPr indent="0" marL="0">
+            <a:pPr marL="0" indent="0">
               <a:buNone/>
             </a:pPr>
             <a:r>
-              <a:rPr lang="en-US" sz="950" b="1" spc="100" kern="0" dirty="0">
+              <a:rPr lang="en-US" sz="950" b="1" kern="0" spc="100" dirty="0">
                 <a:solidFill>
                   <a:srgbClr val="767676"/>
                 </a:solidFill>
@@ -18025,7 +18284,7 @@
           <a:bodyPr wrap="square" lIns="0" tIns="0" rIns="0" bIns="0" rtlCol="0" anchor="ctr"/>
           <a:lstStyle/>
           <a:p>
-            <a:pPr indent="0" marL="0">
+            <a:pPr marL="0" indent="0">
               <a:buNone/>
             </a:pPr>
             <a:r>
@@ -18061,7 +18320,7 @@
           <a:bodyPr wrap="square" lIns="0" tIns="0" rIns="0" bIns="0" rtlCol="0" anchor="ctr"/>
           <a:lstStyle/>
           <a:p>
-            <a:pPr indent="0" marL="0">
+            <a:pPr marL="0" indent="0">
               <a:lnSpc>
                 <a:spcPct val="110000"/>
               </a:lnSpc>
@@ -18106,6 +18365,13 @@
             <a:prstDash val="solid"/>
           </a:ln>
         </p:spPr>
+        <p:txBody>
+          <a:bodyPr/>
+          <a:lstStyle/>
+          <a:p>
+            <a:endParaRPr lang="en-IN"/>
+          </a:p>
+        </p:txBody>
       </p:sp>
       <p:sp>
         <p:nvSpPr>
@@ -18128,11 +18394,11 @@
           <a:bodyPr wrap="square" lIns="0" tIns="0" rIns="0" bIns="0" rtlCol="0" anchor="ctr"/>
           <a:lstStyle/>
           <a:p>
-            <a:pPr indent="0" marL="0">
+            <a:pPr marL="0" indent="0">
               <a:buNone/>
             </a:pPr>
             <a:r>
-              <a:rPr lang="en-US" sz="950" b="1" spc="100" kern="0" dirty="0">
+              <a:rPr lang="en-US" sz="950" b="1" kern="0" spc="100" dirty="0">
                 <a:solidFill>
                   <a:srgbClr val="767676"/>
                 </a:solidFill>
@@ -18167,7 +18433,7 @@
           <a:bodyPr wrap="square" lIns="0" tIns="0" rIns="0" bIns="0" rtlCol="0" anchor="ctr"/>
           <a:lstStyle/>
           <a:p>
-            <a:pPr indent="0" marL="0">
+            <a:pPr marL="0" indent="0">
               <a:buNone/>
             </a:pPr>
             <a:r>
@@ -18203,7 +18469,7 @@
           <a:bodyPr wrap="square" lIns="0" tIns="0" rIns="0" bIns="0" rtlCol="0" anchor="ctr"/>
           <a:lstStyle/>
           <a:p>
-            <a:pPr indent="0" marL="0">
+            <a:pPr marL="0" indent="0">
               <a:lnSpc>
                 <a:spcPct val="110000"/>
               </a:lnSpc>
@@ -18248,6 +18514,13 @@
             <a:prstDash val="solid"/>
           </a:ln>
         </p:spPr>
+        <p:txBody>
+          <a:bodyPr/>
+          <a:lstStyle/>
+          <a:p>
+            <a:endParaRPr lang="en-IN"/>
+          </a:p>
+        </p:txBody>
       </p:sp>
       <p:sp>
         <p:nvSpPr>
@@ -18270,11 +18543,11 @@
           <a:bodyPr wrap="square" lIns="0" tIns="0" rIns="0" bIns="0" rtlCol="0" anchor="ctr"/>
           <a:lstStyle/>
           <a:p>
-            <a:pPr indent="0" marL="0">
+            <a:pPr marL="0" indent="0">
               <a:buNone/>
             </a:pPr>
             <a:r>
-              <a:rPr lang="en-US" sz="950" b="1" spc="100" kern="0" dirty="0">
+              <a:rPr lang="en-US" sz="950" b="1" kern="0" spc="100" dirty="0">
                 <a:solidFill>
                   <a:srgbClr val="767676"/>
                 </a:solidFill>
@@ -18309,7 +18582,7 @@
           <a:bodyPr wrap="square" lIns="0" tIns="0" rIns="0" bIns="0" rtlCol="0" anchor="ctr"/>
           <a:lstStyle/>
           <a:p>
-            <a:pPr indent="0" marL="0">
+            <a:pPr marL="0" indent="0">
               <a:buNone/>
             </a:pPr>
             <a:r>
@@ -18345,7 +18618,7 @@
           <a:bodyPr wrap="square" lIns="0" tIns="0" rIns="0" bIns="0" rtlCol="0" anchor="ctr"/>
           <a:lstStyle/>
           <a:p>
-            <a:pPr indent="0" marL="0">
+            <a:pPr marL="0" indent="0">
               <a:lnSpc>
                 <a:spcPct val="110000"/>
               </a:lnSpc>
@@ -18387,7 +18660,7 @@
           <a:bodyPr wrap="square" lIns="0" tIns="0" rIns="0" bIns="0" rtlCol="0" anchor="ctr"/>
           <a:lstStyle/>
           <a:p>
-            <a:pPr indent="0" marL="0">
+            <a:pPr marL="0" indent="0">
               <a:buNone/>
             </a:pPr>
             <a:r>
@@ -18407,7 +18680,7 @@
       </p:sp>
       <p:sp>
         <p:nvSpPr>
-          <p:cNvPr id="25" name="Slide Number Placeholder 0"/>
+          <p:cNvPr id="28" name="Slide Number Placeholder 0"/>
           <p:cNvSpPr>
             <a:spLocks noGrp="1"/>
           </p:cNvSpPr>
@@ -18425,7 +18698,7 @@
           </a:prstGeom>
           <a:extLst>
             <a:ext uri="{C572A759-6A51-4108-AA02-DFA0A04FC94B}">
-              <ma14:wrappingTextBoxFlag xmlns:ma14="http://schemas.microsoft.com/office/mac/drawingml/2011/main" val="0"/>
+              <ma14:wrappingTextBoxFlag xmlns:ma14="http://schemas.microsoft.com/office/mac/drawingml/2011/main" xmlns="" val="0"/>
             </a:ext>
           </a:extLst>
         </p:spPr>
@@ -18443,7 +18716,7 @@
           <a:p>
             <a:pPr algn="r"/>
             <a:fld id="{F7021451-1387-4CA6-816F-3879F97B5CBC}" type="slidenum">
-              <a:rPr b="0" lang="en-US"/>
+              <a:rPr lang="en-US" b="0"/>
               <a:t>2</a:t>
             </a:fld>
             <a:endParaRPr lang="en-US"/>
@@ -18496,11 +18769,11 @@
           <a:bodyPr wrap="square" lIns="0" tIns="0" rIns="0" bIns="0" rtlCol="0" anchor="ctr"/>
           <a:lstStyle/>
           <a:p>
-            <a:pPr indent="0" marL="0">
+            <a:pPr marL="0" indent="0">
               <a:buNone/>
             </a:pPr>
             <a:r>
-              <a:rPr lang="en-US" sz="1000" b="1" spc="200" kern="0" dirty="0">
+              <a:rPr lang="en-US" sz="1000" b="1" kern="0" spc="200" dirty="0">
                 <a:solidFill>
                   <a:srgbClr val="E90802"/>
                 </a:solidFill>
@@ -18535,7 +18808,7 @@
           <a:bodyPr wrap="square" lIns="0" tIns="0" rIns="0" bIns="0" rtlCol="0" anchor="ctr"/>
           <a:lstStyle/>
           <a:p>
-            <a:pPr indent="0" marL="0">
+            <a:pPr marL="0" indent="0">
               <a:buNone/>
             </a:pPr>
             <a:r>
@@ -18571,7 +18844,7 @@
           <a:bodyPr wrap="square" lIns="0" tIns="0" rIns="0" bIns="0" rtlCol="0" anchor="ctr"/>
           <a:lstStyle/>
           <a:p>
-            <a:pPr indent="0" marL="0">
+            <a:pPr marL="0" indent="0">
               <a:buNone/>
             </a:pPr>
             <a:r>
@@ -18613,6 +18886,13 @@
             <a:prstDash val="solid"/>
           </a:ln>
         </p:spPr>
+        <p:txBody>
+          <a:bodyPr/>
+          <a:lstStyle/>
+          <a:p>
+            <a:endParaRPr lang="en-IN"/>
+          </a:p>
+        </p:txBody>
       </p:sp>
       <p:sp>
         <p:nvSpPr>
@@ -18638,6 +18918,13 @@
             <a:prstDash val="solid"/>
           </a:ln>
         </p:spPr>
+        <p:txBody>
+          <a:bodyPr/>
+          <a:lstStyle/>
+          <a:p>
+            <a:endParaRPr lang="en-IN"/>
+          </a:p>
+        </p:txBody>
       </p:sp>
       <p:sp>
         <p:nvSpPr>
@@ -18660,7 +18947,7 @@
           <a:bodyPr wrap="square" lIns="0" tIns="0" rIns="0" bIns="0" rtlCol="0" anchor="ctr"/>
           <a:lstStyle/>
           <a:p>
-            <a:pPr indent="0" marL="0">
+            <a:pPr marL="0" indent="0">
               <a:buNone/>
             </a:pPr>
             <a:r>
@@ -18696,7 +18983,7 @@
           <a:bodyPr wrap="square" lIns="0" tIns="0" rIns="0" bIns="0" rtlCol="0" anchor="t"/>
           <a:lstStyle/>
           <a:p>
-            <a:pPr indent="0" marL="0">
+            <a:pPr marL="0" indent="0">
               <a:lnSpc>
                 <a:spcPct val="125000"/>
               </a:lnSpc>
@@ -18741,6 +19028,13 @@
             <a:prstDash val="solid"/>
           </a:ln>
         </p:spPr>
+        <p:txBody>
+          <a:bodyPr/>
+          <a:lstStyle/>
+          <a:p>
+            <a:endParaRPr lang="en-IN"/>
+          </a:p>
+        </p:txBody>
       </p:sp>
       <p:sp>
         <p:nvSpPr>
@@ -18763,7 +19057,7 @@
           <a:bodyPr wrap="square" lIns="0" tIns="0" rIns="0" bIns="0" rtlCol="0" anchor="ctr"/>
           <a:lstStyle/>
           <a:p>
-            <a:pPr indent="0" marL="0">
+            <a:pPr marL="0" indent="0">
               <a:buNone/>
             </a:pPr>
             <a:r>
@@ -18799,7 +19093,7 @@
           <a:bodyPr wrap="square" lIns="0" tIns="0" rIns="0" bIns="0" rtlCol="0" anchor="t"/>
           <a:lstStyle/>
           <a:p>
-            <a:pPr indent="0" marL="0">
+            <a:pPr marL="0" indent="0">
               <a:lnSpc>
                 <a:spcPct val="125000"/>
               </a:lnSpc>
@@ -18844,6 +19138,13 @@
             <a:prstDash val="solid"/>
           </a:ln>
         </p:spPr>
+        <p:txBody>
+          <a:bodyPr/>
+          <a:lstStyle/>
+          <a:p>
+            <a:endParaRPr lang="en-IN"/>
+          </a:p>
+        </p:txBody>
       </p:sp>
       <p:sp>
         <p:nvSpPr>
@@ -18866,7 +19167,7 @@
           <a:bodyPr wrap="square" lIns="0" tIns="0" rIns="0" bIns="0" rtlCol="0" anchor="ctr"/>
           <a:lstStyle/>
           <a:p>
-            <a:pPr indent="0" marL="0">
+            <a:pPr marL="0" indent="0">
               <a:buNone/>
             </a:pPr>
             <a:r>
@@ -18902,7 +19203,7 @@
           <a:bodyPr wrap="square" lIns="0" tIns="0" rIns="0" bIns="0" rtlCol="0" anchor="t"/>
           <a:lstStyle/>
           <a:p>
-            <a:pPr indent="0" marL="0">
+            <a:pPr marL="0" indent="0">
               <a:lnSpc>
                 <a:spcPct val="125000"/>
               </a:lnSpc>
@@ -18944,7 +19245,7 @@
           <a:bodyPr wrap="square" lIns="0" tIns="0" rIns="0" bIns="0" rtlCol="0" anchor="ctr"/>
           <a:lstStyle/>
           <a:p>
-            <a:pPr indent="0" marL="0">
+            <a:pPr marL="0" indent="0">
               <a:buNone/>
             </a:pPr>
             <a:r>
@@ -18986,6 +19287,13 @@
             <a:prstDash val="solid"/>
           </a:ln>
         </p:spPr>
+        <p:txBody>
+          <a:bodyPr/>
+          <a:lstStyle/>
+          <a:p>
+            <a:endParaRPr lang="en-IN"/>
+          </a:p>
+        </p:txBody>
       </p:sp>
       <p:sp>
         <p:nvSpPr>
@@ -19008,11 +19316,11 @@
           <a:bodyPr wrap="square" lIns="0" tIns="0" rIns="0" bIns="0" rtlCol="0" anchor="ctr"/>
           <a:lstStyle/>
           <a:p>
-            <a:pPr indent="0" marL="0">
+            <a:pPr marL="0" indent="0">
               <a:buNone/>
             </a:pPr>
             <a:r>
-              <a:rPr lang="en-US" sz="950" b="1" spc="100" kern="0" dirty="0">
+              <a:rPr lang="en-US" sz="950" b="1" kern="0" spc="100" dirty="0">
                 <a:solidFill>
                   <a:srgbClr val="767676"/>
                 </a:solidFill>
@@ -19047,7 +19355,7 @@
           <a:bodyPr wrap="square" lIns="0" tIns="0" rIns="0" bIns="0" rtlCol="0" anchor="ctr"/>
           <a:lstStyle/>
           <a:p>
-            <a:pPr indent="0" marL="0">
+            <a:pPr marL="0" indent="0">
               <a:buNone/>
             </a:pPr>
             <a:r>
@@ -19083,7 +19391,7 @@
           <a:bodyPr wrap="square" lIns="0" tIns="0" rIns="0" bIns="0" rtlCol="0" anchor="ctr"/>
           <a:lstStyle/>
           <a:p>
-            <a:pPr indent="0" marL="0">
+            <a:pPr marL="0" indent="0">
               <a:lnSpc>
                 <a:spcPct val="110000"/>
               </a:lnSpc>
@@ -19128,6 +19436,13 @@
             <a:prstDash val="solid"/>
           </a:ln>
         </p:spPr>
+        <p:txBody>
+          <a:bodyPr/>
+          <a:lstStyle/>
+          <a:p>
+            <a:endParaRPr lang="en-IN"/>
+          </a:p>
+        </p:txBody>
       </p:sp>
       <p:sp>
         <p:nvSpPr>
@@ -19150,11 +19465,11 @@
           <a:bodyPr wrap="square" lIns="0" tIns="0" rIns="0" bIns="0" rtlCol="0" anchor="ctr"/>
           <a:lstStyle/>
           <a:p>
-            <a:pPr indent="0" marL="0">
+            <a:pPr marL="0" indent="0">
               <a:buNone/>
             </a:pPr>
             <a:r>
-              <a:rPr lang="en-US" sz="950" b="1" spc="100" kern="0" dirty="0">
+              <a:rPr lang="en-US" sz="950" b="1" kern="0" spc="100" dirty="0">
                 <a:solidFill>
                   <a:srgbClr val="767676"/>
                 </a:solidFill>
@@ -19189,7 +19504,7 @@
           <a:bodyPr wrap="square" lIns="0" tIns="0" rIns="0" bIns="0" rtlCol="0" anchor="ctr"/>
           <a:lstStyle/>
           <a:p>
-            <a:pPr indent="0" marL="0">
+            <a:pPr marL="0" indent="0">
               <a:buNone/>
             </a:pPr>
             <a:r>
@@ -19225,7 +19540,7 @@
           <a:bodyPr wrap="square" lIns="0" tIns="0" rIns="0" bIns="0" rtlCol="0" anchor="ctr"/>
           <a:lstStyle/>
           <a:p>
-            <a:pPr indent="0" marL="0">
+            <a:pPr marL="0" indent="0">
               <a:lnSpc>
                 <a:spcPct val="110000"/>
               </a:lnSpc>
@@ -19270,6 +19585,13 @@
             <a:prstDash val="solid"/>
           </a:ln>
         </p:spPr>
+        <p:txBody>
+          <a:bodyPr/>
+          <a:lstStyle/>
+          <a:p>
+            <a:endParaRPr lang="en-IN"/>
+          </a:p>
+        </p:txBody>
       </p:sp>
       <p:sp>
         <p:nvSpPr>
@@ -19292,11 +19614,11 @@
           <a:bodyPr wrap="square" lIns="0" tIns="0" rIns="0" bIns="0" rtlCol="0" anchor="ctr"/>
           <a:lstStyle/>
           <a:p>
-            <a:pPr indent="0" marL="0">
+            <a:pPr marL="0" indent="0">
               <a:buNone/>
             </a:pPr>
             <a:r>
-              <a:rPr lang="en-US" sz="950" b="1" spc="100" kern="0" dirty="0">
+              <a:rPr lang="en-US" sz="950" b="1" kern="0" spc="100" dirty="0">
                 <a:solidFill>
                   <a:srgbClr val="767676"/>
                 </a:solidFill>
@@ -19331,7 +19653,7 @@
           <a:bodyPr wrap="square" lIns="0" tIns="0" rIns="0" bIns="0" rtlCol="0" anchor="ctr"/>
           <a:lstStyle/>
           <a:p>
-            <a:pPr indent="0" marL="0">
+            <a:pPr marL="0" indent="0">
               <a:buNone/>
             </a:pPr>
             <a:r>
@@ -19367,7 +19689,7 @@
           <a:bodyPr wrap="square" lIns="0" tIns="0" rIns="0" bIns="0" rtlCol="0" anchor="ctr"/>
           <a:lstStyle/>
           <a:p>
-            <a:pPr indent="0" marL="0">
+            <a:pPr marL="0" indent="0">
               <a:lnSpc>
                 <a:spcPct val="110000"/>
               </a:lnSpc>
@@ -19412,6 +19734,13 @@
             <a:prstDash val="solid"/>
           </a:ln>
         </p:spPr>
+        <p:txBody>
+          <a:bodyPr/>
+          <a:lstStyle/>
+          <a:p>
+            <a:endParaRPr lang="en-IN"/>
+          </a:p>
+        </p:txBody>
       </p:sp>
       <p:sp>
         <p:nvSpPr>
@@ -19434,11 +19763,11 @@
           <a:bodyPr wrap="square" lIns="0" tIns="0" rIns="0" bIns="0" rtlCol="0" anchor="ctr"/>
           <a:lstStyle/>
           <a:p>
-            <a:pPr indent="0" marL="0">
+            <a:pPr marL="0" indent="0">
               <a:buNone/>
             </a:pPr>
             <a:r>
-              <a:rPr lang="en-US" sz="950" b="1" spc="100" kern="0" dirty="0">
+              <a:rPr lang="en-US" sz="950" b="1" kern="0" spc="100" dirty="0">
                 <a:solidFill>
                   <a:srgbClr val="767676"/>
                 </a:solidFill>
@@ -19473,7 +19802,7 @@
           <a:bodyPr wrap="square" lIns="0" tIns="0" rIns="0" bIns="0" rtlCol="0" anchor="ctr"/>
           <a:lstStyle/>
           <a:p>
-            <a:pPr indent="0" marL="0">
+            <a:pPr marL="0" indent="0">
               <a:buNone/>
             </a:pPr>
             <a:r>
@@ -19509,7 +19838,7 @@
           <a:bodyPr wrap="square" lIns="0" tIns="0" rIns="0" bIns="0" rtlCol="0" anchor="ctr"/>
           <a:lstStyle/>
           <a:p>
-            <a:pPr indent="0" marL="0">
+            <a:pPr marL="0" indent="0">
               <a:lnSpc>
                 <a:spcPct val="110000"/>
               </a:lnSpc>
@@ -19551,7 +19880,7 @@
           <a:bodyPr wrap="square" lIns="0" tIns="0" rIns="0" bIns="0" rtlCol="0" anchor="ctr"/>
           <a:lstStyle/>
           <a:p>
-            <a:pPr indent="0" marL="0">
+            <a:pPr marL="0" indent="0">
               <a:buNone/>
             </a:pPr>
             <a:r>
@@ -19563,7 +19892,7 @@
                 <a:ea typeface="Arial" pitchFamily="34" charset="-122"/>
                 <a:cs typeface="Arial" pitchFamily="34" charset="-120"/>
               </a:rPr>
-              <a:t>These are the paper's numbers, on 1,096 prompts with GPT-4o, Llama 3.3-70B and Qwen 2.5-32B. We do not attempt to match them.</a:t>
+              <a:t>These are the paper's numbers, on 1,096 prompts with GPT-4o, Llama 3.3-70B and Qwen 2.5-32B.</a:t>
             </a:r>
             <a:endParaRPr lang="en-US" sz="950" dirty="0"/>
           </a:p>
@@ -19571,7 +19900,7 @@
       </p:sp>
       <p:sp>
         <p:nvSpPr>
-          <p:cNvPr id="25" name="Slide Number Placeholder 0"/>
+          <p:cNvPr id="33" name="Slide Number Placeholder 0"/>
           <p:cNvSpPr>
             <a:spLocks noGrp="1"/>
           </p:cNvSpPr>
@@ -19589,7 +19918,7 @@
           </a:prstGeom>
           <a:extLst>
             <a:ext uri="{C572A759-6A51-4108-AA02-DFA0A04FC94B}">
-              <ma14:wrappingTextBoxFlag xmlns:ma14="http://schemas.microsoft.com/office/mac/drawingml/2011/main" val="0"/>
+              <ma14:wrappingTextBoxFlag xmlns:ma14="http://schemas.microsoft.com/office/mac/drawingml/2011/main" xmlns="" val="0"/>
             </a:ext>
           </a:extLst>
         </p:spPr>
@@ -19607,7 +19936,7 @@
           <a:p>
             <a:pPr algn="r"/>
             <a:fld id="{F7021451-1387-4CA6-816F-3879F97B5CBC}" type="slidenum">
-              <a:rPr b="0" lang="en-US"/>
+              <a:rPr lang="en-US" b="0"/>
               <a:t>3</a:t>
             </a:fld>
             <a:endParaRPr lang="en-US"/>
@@ -19660,11 +19989,11 @@
           <a:bodyPr wrap="square" lIns="0" tIns="0" rIns="0" bIns="0" rtlCol="0" anchor="ctr"/>
           <a:lstStyle/>
           <a:p>
-            <a:pPr indent="0" marL="0">
+            <a:pPr marL="0" indent="0">
               <a:buNone/>
             </a:pPr>
             <a:r>
-              <a:rPr lang="en-US" sz="1000" b="1" spc="200" kern="0" dirty="0">
+              <a:rPr lang="en-US" sz="1000" b="1" kern="0" spc="200" dirty="0">
                 <a:solidFill>
                   <a:srgbClr val="E90802"/>
                 </a:solidFill>
@@ -19699,7 +20028,7 @@
           <a:bodyPr wrap="square" lIns="0" tIns="0" rIns="0" bIns="0" rtlCol="0" anchor="ctr"/>
           <a:lstStyle/>
           <a:p>
-            <a:pPr indent="0" marL="0">
+            <a:pPr marL="0" indent="0">
               <a:buNone/>
             </a:pPr>
             <a:r>
@@ -19735,7 +20064,7 @@
           <a:bodyPr wrap="square" lIns="0" tIns="0" rIns="0" bIns="0" rtlCol="0" anchor="ctr"/>
           <a:lstStyle/>
           <a:p>
-            <a:pPr indent="0" marL="0">
+            <a:pPr marL="0" indent="0">
               <a:buNone/>
             </a:pPr>
             <a:r>
@@ -19777,6 +20106,13 @@
             <a:prstDash val="solid"/>
           </a:ln>
         </p:spPr>
+        <p:txBody>
+          <a:bodyPr/>
+          <a:lstStyle/>
+          <a:p>
+            <a:endParaRPr lang="en-IN"/>
+          </a:p>
+        </p:txBody>
       </p:sp>
       <p:sp>
         <p:nvSpPr>
@@ -19802,6 +20138,13 @@
             <a:prstDash val="solid"/>
           </a:ln>
         </p:spPr>
+        <p:txBody>
+          <a:bodyPr/>
+          <a:lstStyle/>
+          <a:p>
+            <a:endParaRPr lang="en-IN"/>
+          </a:p>
+        </p:txBody>
       </p:sp>
       <p:sp>
         <p:nvSpPr>
@@ -19824,7 +20167,7 @@
           <a:bodyPr wrap="square" lIns="0" tIns="0" rIns="0" bIns="0" rtlCol="0" anchor="ctr"/>
           <a:lstStyle/>
           <a:p>
-            <a:pPr indent="0" marL="0">
+            <a:pPr marL="0" indent="0">
               <a:buNone/>
             </a:pPr>
             <a:r>
@@ -19860,7 +20203,7 @@
           <a:bodyPr wrap="square" lIns="0" tIns="0" rIns="0" bIns="0" rtlCol="0" anchor="ctr"/>
           <a:lstStyle/>
           <a:p>
-            <a:pPr indent="0" marL="0">
+            <a:pPr marL="0" indent="0">
               <a:buNone/>
             </a:pPr>
             <a:r>
@@ -19896,7 +20239,7 @@
           <a:bodyPr wrap="square" lIns="0" tIns="0" rIns="0" bIns="0" rtlCol="0" anchor="t"/>
           <a:lstStyle/>
           <a:p>
-            <a:pPr indent="0" marL="0">
+            <a:pPr marL="0" indent="0">
               <a:lnSpc>
                 <a:spcPct val="125000"/>
               </a:lnSpc>
@@ -19941,6 +20284,13 @@
             <a:prstDash val="solid"/>
           </a:ln>
         </p:spPr>
+        <p:txBody>
+          <a:bodyPr/>
+          <a:lstStyle/>
+          <a:p>
+            <a:endParaRPr lang="en-IN"/>
+          </a:p>
+        </p:txBody>
       </p:sp>
       <p:sp>
         <p:nvSpPr>
@@ -19966,6 +20316,13 @@
             <a:prstDash val="solid"/>
           </a:ln>
         </p:spPr>
+        <p:txBody>
+          <a:bodyPr/>
+          <a:lstStyle/>
+          <a:p>
+            <a:endParaRPr lang="en-IN"/>
+          </a:p>
+        </p:txBody>
       </p:sp>
       <p:sp>
         <p:nvSpPr>
@@ -19988,7 +20345,7 @@
           <a:bodyPr wrap="square" lIns="0" tIns="0" rIns="0" bIns="0" rtlCol="0" anchor="ctr"/>
           <a:lstStyle/>
           <a:p>
-            <a:pPr indent="0" marL="0">
+            <a:pPr marL="0" indent="0">
               <a:buNone/>
             </a:pPr>
             <a:r>
@@ -20024,7 +20381,7 @@
           <a:bodyPr wrap="square" lIns="0" tIns="0" rIns="0" bIns="0" rtlCol="0" anchor="ctr"/>
           <a:lstStyle/>
           <a:p>
-            <a:pPr indent="0" marL="0">
+            <a:pPr marL="0" indent="0">
               <a:buNone/>
             </a:pPr>
             <a:r>
@@ -20060,7 +20417,7 @@
           <a:bodyPr wrap="square" lIns="0" tIns="0" rIns="0" bIns="0" rtlCol="0" anchor="t"/>
           <a:lstStyle/>
           <a:p>
-            <a:pPr indent="0" marL="0">
+            <a:pPr marL="0" indent="0">
               <a:lnSpc>
                 <a:spcPct val="125000"/>
               </a:lnSpc>
@@ -20105,6 +20462,13 @@
             <a:prstDash val="solid"/>
           </a:ln>
         </p:spPr>
+        <p:txBody>
+          <a:bodyPr/>
+          <a:lstStyle/>
+          <a:p>
+            <a:endParaRPr lang="en-IN"/>
+          </a:p>
+        </p:txBody>
       </p:sp>
       <p:sp>
         <p:nvSpPr>
@@ -20130,6 +20494,13 @@
             <a:prstDash val="solid"/>
           </a:ln>
         </p:spPr>
+        <p:txBody>
+          <a:bodyPr/>
+          <a:lstStyle/>
+          <a:p>
+            <a:endParaRPr lang="en-IN"/>
+          </a:p>
+        </p:txBody>
       </p:sp>
       <p:sp>
         <p:nvSpPr>
@@ -20152,7 +20523,7 @@
           <a:bodyPr wrap="square" lIns="0" tIns="0" rIns="0" bIns="0" rtlCol="0" anchor="ctr"/>
           <a:lstStyle/>
           <a:p>
-            <a:pPr indent="0" marL="0">
+            <a:pPr marL="0" indent="0">
               <a:buNone/>
             </a:pPr>
             <a:r>
@@ -20188,7 +20559,7 @@
           <a:bodyPr wrap="square" lIns="0" tIns="0" rIns="0" bIns="0" rtlCol="0" anchor="ctr"/>
           <a:lstStyle/>
           <a:p>
-            <a:pPr indent="0" marL="0">
+            <a:pPr marL="0" indent="0">
               <a:buNone/>
             </a:pPr>
             <a:r>
@@ -20224,7 +20595,7 @@
           <a:bodyPr wrap="square" lIns="0" tIns="0" rIns="0" bIns="0" rtlCol="0" anchor="t"/>
           <a:lstStyle/>
           <a:p>
-            <a:pPr indent="0" marL="0">
+            <a:pPr marL="0" indent="0">
               <a:lnSpc>
                 <a:spcPct val="125000"/>
               </a:lnSpc>
@@ -20269,6 +20640,13 @@
             <a:prstDash val="solid"/>
           </a:ln>
         </p:spPr>
+        <p:txBody>
+          <a:bodyPr/>
+          <a:lstStyle/>
+          <a:p>
+            <a:endParaRPr lang="en-IN"/>
+          </a:p>
+        </p:txBody>
       </p:sp>
       <p:sp>
         <p:nvSpPr>
@@ -20291,7 +20669,7 @@
           <a:bodyPr wrap="square" lIns="0" tIns="0" rIns="0" bIns="0" rtlCol="0" anchor="ctr"/>
           <a:lstStyle/>
           <a:p>
-            <a:pPr indent="0" marL="0">
+            <a:pPr marL="0" indent="0">
               <a:buNone/>
             </a:pPr>
             <a:r>
@@ -20327,7 +20705,7 @@
           <a:bodyPr wrap="square" lIns="0" tIns="0" rIns="0" bIns="0" rtlCol="0" anchor="ctr"/>
           <a:lstStyle/>
           <a:p>
-            <a:pPr indent="0" marL="0">
+            <a:pPr marL="0" indent="0">
               <a:buNone/>
             </a:pPr>
             <a:r>
@@ -20363,7 +20741,7 @@
           <a:bodyPr wrap="square" lIns="0" tIns="0" rIns="0" bIns="0" rtlCol="0" anchor="t"/>
           <a:lstStyle/>
           <a:p>
-            <a:pPr indent="0" marL="0">
+            <a:pPr marL="0" indent="0">
               <a:lnSpc>
                 <a:spcPct val="125000"/>
               </a:lnSpc>
@@ -20408,6 +20786,13 @@
             <a:prstDash val="solid"/>
           </a:ln>
         </p:spPr>
+        <p:txBody>
+          <a:bodyPr/>
+          <a:lstStyle/>
+          <a:p>
+            <a:endParaRPr lang="en-IN"/>
+          </a:p>
+        </p:txBody>
       </p:sp>
       <p:sp>
         <p:nvSpPr>
@@ -20430,7 +20815,7 @@
           <a:bodyPr wrap="square" lIns="0" tIns="0" rIns="0" bIns="0" rtlCol="0" anchor="ctr"/>
           <a:lstStyle/>
           <a:p>
-            <a:pPr indent="0" marL="0">
+            <a:pPr marL="0" indent="0">
               <a:buNone/>
             </a:pPr>
             <a:r>
@@ -20466,7 +20851,7 @@
           <a:bodyPr wrap="square" lIns="0" tIns="0" rIns="0" bIns="0" rtlCol="0" anchor="t"/>
           <a:lstStyle/>
           <a:p>
-            <a:pPr indent="0" marL="0">
+            <a:pPr marL="0" indent="0">
               <a:lnSpc>
                 <a:spcPct val="125000"/>
               </a:lnSpc>
@@ -20511,6 +20896,13 @@
             <a:prstDash val="solid"/>
           </a:ln>
         </p:spPr>
+        <p:txBody>
+          <a:bodyPr/>
+          <a:lstStyle/>
+          <a:p>
+            <a:endParaRPr lang="en-IN"/>
+          </a:p>
+        </p:txBody>
       </p:sp>
       <p:sp>
         <p:nvSpPr>
@@ -20536,6 +20928,13 @@
             <a:prstDash val="solid"/>
           </a:ln>
         </p:spPr>
+        <p:txBody>
+          <a:bodyPr/>
+          <a:lstStyle/>
+          <a:p>
+            <a:endParaRPr lang="en-IN"/>
+          </a:p>
+        </p:txBody>
       </p:sp>
       <p:sp>
         <p:nvSpPr>
@@ -20558,7 +20957,7 @@
           <a:bodyPr wrap="square" lIns="0" tIns="0" rIns="0" bIns="0" rtlCol="0" anchor="ctr"/>
           <a:lstStyle/>
           <a:p>
-            <a:pPr indent="0" marL="0">
+            <a:pPr marL="0" indent="0">
               <a:buNone/>
             </a:pPr>
             <a:r>
@@ -20594,7 +20993,7 @@
           <a:bodyPr wrap="square" lIns="0" tIns="0" rIns="0" bIns="0" rtlCol="0" anchor="t"/>
           <a:lstStyle/>
           <a:p>
-            <a:pPr indent="0" marL="0">
+            <a:pPr marL="0" indent="0">
               <a:lnSpc>
                 <a:spcPct val="125000"/>
               </a:lnSpc>
@@ -20636,7 +21035,7 @@
           <a:bodyPr wrap="square" lIns="0" tIns="0" rIns="0" bIns="0" rtlCol="0" anchor="ctr"/>
           <a:lstStyle/>
           <a:p>
-            <a:pPr indent="0" marL="0">
+            <a:pPr marL="0" indent="0">
               <a:buNone/>
             </a:pPr>
             <a:r>
@@ -20648,7 +21047,7 @@
                 <a:ea typeface="Arial" pitchFamily="34" charset="-122"/>
                 <a:cs typeface="Arial" pitchFamily="34" charset="-120"/>
               </a:rPr>
-              <a:t>The three detection judges are GPT-4o + Llama 3.3-70B + Qwen 2.5-32B — not the 12 models the paper separately benchmarks.</a:t>
+              <a:t>The three detection judges are GPT-4o + Llama 3.3-70B + Qwen 2.5-32B </a:t>
             </a:r>
             <a:endParaRPr lang="en-US" sz="950" dirty="0"/>
           </a:p>
@@ -20656,7 +21055,7 @@
       </p:sp>
       <p:sp>
         <p:nvSpPr>
-          <p:cNvPr id="25" name="Slide Number Placeholder 0"/>
+          <p:cNvPr id="32" name="Slide Number Placeholder 0"/>
           <p:cNvSpPr>
             <a:spLocks noGrp="1"/>
           </p:cNvSpPr>
@@ -20674,7 +21073,7 @@
           </a:prstGeom>
           <a:extLst>
             <a:ext uri="{C572A759-6A51-4108-AA02-DFA0A04FC94B}">
-              <ma14:wrappingTextBoxFlag xmlns:ma14="http://schemas.microsoft.com/office/mac/drawingml/2011/main" val="0"/>
+              <ma14:wrappingTextBoxFlag xmlns:ma14="http://schemas.microsoft.com/office/mac/drawingml/2011/main" xmlns="" val="0"/>
             </a:ext>
           </a:extLst>
         </p:spPr>
@@ -20692,7 +21091,7 @@
           <a:p>
             <a:pPr algn="r"/>
             <a:fld id="{F7021451-1387-4CA6-816F-3879F97B5CBC}" type="slidenum">
-              <a:rPr b="0" lang="en-US"/>
+              <a:rPr lang="en-US" b="0"/>
               <a:t>4</a:t>
             </a:fld>
             <a:endParaRPr lang="en-US"/>
@@ -20745,11 +21144,11 @@
           <a:bodyPr wrap="square" lIns="0" tIns="0" rIns="0" bIns="0" rtlCol="0" anchor="ctr"/>
           <a:lstStyle/>
           <a:p>
-            <a:pPr indent="0" marL="0">
+            <a:pPr marL="0" indent="0">
               <a:buNone/>
             </a:pPr>
             <a:r>
-              <a:rPr lang="en-US" sz="1000" b="1" spc="200" kern="0" dirty="0">
+              <a:rPr lang="en-US" sz="1000" b="1" kern="0" spc="200" dirty="0">
                 <a:solidFill>
                   <a:srgbClr val="E90802"/>
                 </a:solidFill>
@@ -20784,7 +21183,7 @@
           <a:bodyPr wrap="square" lIns="0" tIns="0" rIns="0" bIns="0" rtlCol="0" anchor="ctr"/>
           <a:lstStyle/>
           <a:p>
-            <a:pPr indent="0" marL="0">
+            <a:pPr marL="0" indent="0">
               <a:buNone/>
             </a:pPr>
             <a:r>
@@ -20820,7 +21219,7 @@
           <a:bodyPr wrap="square" lIns="0" tIns="0" rIns="0" bIns="0" rtlCol="0" anchor="ctr"/>
           <a:lstStyle/>
           <a:p>
-            <a:pPr indent="0" marL="0">
+            <a:pPr marL="0" indent="0">
               <a:buNone/>
             </a:pPr>
             <a:r>
@@ -20862,6 +21261,13 @@
             <a:prstDash val="solid"/>
           </a:ln>
         </p:spPr>
+        <p:txBody>
+          <a:bodyPr/>
+          <a:lstStyle/>
+          <a:p>
+            <a:endParaRPr lang="en-IN"/>
+          </a:p>
+        </p:txBody>
       </p:sp>
       <p:graphicFrame>
         <p:nvGraphicFramePr>
@@ -20872,23 +21278,41 @@
           <p:nvPr>
             <p:extLst>
               <p:ext uri="{D42A27DB-BD31-4B8C-83A1-F6EECF244321}">
-                <p14:modId xmlns:p14="http://schemas.microsoft.com/office/powerpoint/2010/main" val="1579011935"/>
+                <p14:modId xmlns:p14="http://schemas.microsoft.com/office/powerpoint/2010/main" val="3244196388"/>
               </p:ext>
             </p:extLst>
           </p:nvPr>
         </p:nvGraphicFramePr>
         <p:xfrm>
           <a:off x="548640" y="1600200"/>
-          <a:ext cx="11064240" cy="914400"/>
+          <a:ext cx="11064240" cy="2926080"/>
         </p:xfrm>
         <a:graphic>
           <a:graphicData uri="http://schemas.openxmlformats.org/drawingml/2006/table">
             <a:tbl>
               <a:tblPr/>
               <a:tblGrid>
-                <a:gridCol w="3017520"/>
-                <a:gridCol w="4023360"/>
-                <a:gridCol w="4023360"/>
+                <a:gridCol w="3017520">
+                  <a:extLst>
+                    <a:ext uri="{9D8B030D-6E8A-4147-A177-3AD203B41FA5}">
+                      <a16:colId xmlns:a16="http://schemas.microsoft.com/office/drawing/2014/main" val="20000"/>
+                    </a:ext>
+                  </a:extLst>
+                </a:gridCol>
+                <a:gridCol w="4023360">
+                  <a:extLst>
+                    <a:ext uri="{9D8B030D-6E8A-4147-A177-3AD203B41FA5}">
+                      <a16:colId xmlns:a16="http://schemas.microsoft.com/office/drawing/2014/main" val="20001"/>
+                    </a:ext>
+                  </a:extLst>
+                </a:gridCol>
+                <a:gridCol w="4023360">
+                  <a:extLst>
+                    <a:ext uri="{9D8B030D-6E8A-4147-A177-3AD203B41FA5}">
+                      <a16:colId xmlns:a16="http://schemas.microsoft.com/office/drawing/2014/main" val="20002"/>
+                    </a:ext>
+                  </a:extLst>
+                </a:gridCol>
               </a:tblGrid>
               <a:tr h="365760">
                 <a:tc>
@@ -20896,7 +21320,7 @@
                     <a:bodyPr/>
                     <a:lstStyle/>
                     <a:p>
-                      <a:pPr algn="l" indent="0" marL="0">
+                      <a:pPr marL="0" indent="0" algn="l">
                         <a:buNone/>
                       </a:pPr>
                       <a:r>
@@ -20964,7 +21388,7 @@
                     <a:bodyPr/>
                     <a:lstStyle/>
                     <a:p>
-                      <a:pPr algn="l" indent="0" marL="0">
+                      <a:pPr marL="0" indent="0" algn="l">
                         <a:buNone/>
                       </a:pPr>
                       <a:r>
@@ -21032,7 +21456,7 @@
                     <a:bodyPr/>
                     <a:lstStyle/>
                     <a:p>
-                      <a:pPr algn="l" indent="0" marL="0">
+                      <a:pPr marL="0" indent="0" algn="l">
                         <a:buNone/>
                       </a:pPr>
                       <a:r>
@@ -21095,6 +21519,11 @@
                     </a:solidFill>
                   </a:tcPr>
                 </a:tc>
+                <a:extLst>
+                  <a:ext uri="{0D108BD9-81ED-4DB2-BD59-A6C34878D82A}">
+                    <a16:rowId xmlns:a16="http://schemas.microsoft.com/office/drawing/2014/main" val="10000"/>
+                  </a:ext>
+                </a:extLst>
               </a:tr>
               <a:tr h="365760">
                 <a:tc>
@@ -21102,7 +21531,7 @@
                     <a:bodyPr/>
                     <a:lstStyle/>
                     <a:p>
-                      <a:pPr algn="l" indent="0" marL="0">
+                      <a:pPr marL="0" indent="0" algn="l">
                         <a:buNone/>
                       </a:pPr>
                       <a:r>
@@ -21170,7 +21599,7 @@
                     <a:bodyPr/>
                     <a:lstStyle/>
                     <a:p>
-                      <a:pPr algn="l" indent="0" marL="0">
+                      <a:pPr marL="0" indent="0" algn="l">
                         <a:buNone/>
                       </a:pPr>
                       <a:r>
@@ -21238,7 +21667,7 @@
                     <a:bodyPr/>
                     <a:lstStyle/>
                     <a:p>
-                      <a:pPr algn="l" indent="0" marL="0">
+                      <a:pPr marL="0" indent="0" algn="l">
                         <a:buNone/>
                       </a:pPr>
                       <a:r>
@@ -21301,6 +21730,11 @@
                     </a:solidFill>
                   </a:tcPr>
                 </a:tc>
+                <a:extLst>
+                  <a:ext uri="{0D108BD9-81ED-4DB2-BD59-A6C34878D82A}">
+                    <a16:rowId xmlns:a16="http://schemas.microsoft.com/office/drawing/2014/main" val="10001"/>
+                  </a:ext>
+                </a:extLst>
               </a:tr>
               <a:tr h="365760">
                 <a:tc>
@@ -21308,7 +21742,7 @@
                     <a:bodyPr/>
                     <a:lstStyle/>
                     <a:p>
-                      <a:pPr algn="l" indent="0" marL="0">
+                      <a:pPr marL="0" indent="0" algn="l">
                         <a:buNone/>
                       </a:pPr>
                       <a:r>
@@ -21376,7 +21810,7 @@
                     <a:bodyPr/>
                     <a:lstStyle/>
                     <a:p>
-                      <a:pPr algn="l" indent="0" marL="0">
+                      <a:pPr marL="0" indent="0" algn="l">
                         <a:buNone/>
                       </a:pPr>
                       <a:r>
@@ -21444,7 +21878,7 @@
                     <a:bodyPr/>
                     <a:lstStyle/>
                     <a:p>
-                      <a:pPr algn="l" indent="0" marL="0">
+                      <a:pPr marL="0" indent="0" algn="l">
                         <a:buNone/>
                       </a:pPr>
                       <a:r>
@@ -21507,6 +21941,11 @@
                     </a:solidFill>
                   </a:tcPr>
                 </a:tc>
+                <a:extLst>
+                  <a:ext uri="{0D108BD9-81ED-4DB2-BD59-A6C34878D82A}">
+                    <a16:rowId xmlns:a16="http://schemas.microsoft.com/office/drawing/2014/main" val="10002"/>
+                  </a:ext>
+                </a:extLst>
               </a:tr>
               <a:tr h="365760">
                 <a:tc>
@@ -21514,7 +21953,7 @@
                     <a:bodyPr/>
                     <a:lstStyle/>
                     <a:p>
-                      <a:pPr algn="l" indent="0" marL="0">
+                      <a:pPr marL="0" indent="0" algn="l">
                         <a:buNone/>
                       </a:pPr>
                       <a:r>
@@ -21582,7 +22021,7 @@
                     <a:bodyPr/>
                     <a:lstStyle/>
                     <a:p>
-                      <a:pPr algn="l" indent="0" marL="0">
+                      <a:pPr marL="0" indent="0" algn="l">
                         <a:buNone/>
                       </a:pPr>
                       <a:r>
@@ -21650,7 +22089,7 @@
                     <a:bodyPr/>
                     <a:lstStyle/>
                     <a:p>
-                      <a:pPr algn="l" indent="0" marL="0">
+                      <a:pPr marL="0" indent="0" algn="l">
                         <a:buNone/>
                       </a:pPr>
                       <a:r>
@@ -21713,6 +22152,11 @@
                     </a:solidFill>
                   </a:tcPr>
                 </a:tc>
+                <a:extLst>
+                  <a:ext uri="{0D108BD9-81ED-4DB2-BD59-A6C34878D82A}">
+                    <a16:rowId xmlns:a16="http://schemas.microsoft.com/office/drawing/2014/main" val="10003"/>
+                  </a:ext>
+                </a:extLst>
               </a:tr>
               <a:tr h="365760">
                 <a:tc>
@@ -21720,7 +22164,7 @@
                     <a:bodyPr/>
                     <a:lstStyle/>
                     <a:p>
-                      <a:pPr algn="l" indent="0" marL="0">
+                      <a:pPr marL="0" indent="0" algn="l">
                         <a:buNone/>
                       </a:pPr>
                       <a:r>
@@ -21788,7 +22232,7 @@
                     <a:bodyPr/>
                     <a:lstStyle/>
                     <a:p>
-                      <a:pPr algn="l" indent="0" marL="0">
+                      <a:pPr marL="0" indent="0" algn="l">
                         <a:buNone/>
                       </a:pPr>
                       <a:r>
@@ -21856,7 +22300,7 @@
                     <a:bodyPr/>
                     <a:lstStyle/>
                     <a:p>
-                      <a:pPr algn="l" indent="0" marL="0">
+                      <a:pPr marL="0" indent="0" algn="l">
                         <a:buNone/>
                       </a:pPr>
                       <a:r>
@@ -21919,6 +22363,11 @@
                     </a:solidFill>
                   </a:tcPr>
                 </a:tc>
+                <a:extLst>
+                  <a:ext uri="{0D108BD9-81ED-4DB2-BD59-A6C34878D82A}">
+                    <a16:rowId xmlns:a16="http://schemas.microsoft.com/office/drawing/2014/main" val="10004"/>
+                  </a:ext>
+                </a:extLst>
               </a:tr>
               <a:tr h="365760">
                 <a:tc>
@@ -21926,7 +22375,7 @@
                     <a:bodyPr/>
                     <a:lstStyle/>
                     <a:p>
-                      <a:pPr algn="l" indent="0" marL="0">
+                      <a:pPr marL="0" indent="0" algn="l">
                         <a:buNone/>
                       </a:pPr>
                       <a:r>
@@ -21994,7 +22443,7 @@
                     <a:bodyPr/>
                     <a:lstStyle/>
                     <a:p>
-                      <a:pPr algn="l" indent="0" marL="0">
+                      <a:pPr marL="0" indent="0" algn="l">
                         <a:buNone/>
                       </a:pPr>
                       <a:r>
@@ -22062,7 +22511,7 @@
                     <a:bodyPr/>
                     <a:lstStyle/>
                     <a:p>
-                      <a:pPr algn="l" indent="0" marL="0">
+                      <a:pPr marL="0" indent="0" algn="l">
                         <a:buNone/>
                       </a:pPr>
                       <a:r>
@@ -22125,6 +22574,11 @@
                     </a:solidFill>
                   </a:tcPr>
                 </a:tc>
+                <a:extLst>
+                  <a:ext uri="{0D108BD9-81ED-4DB2-BD59-A6C34878D82A}">
+                    <a16:rowId xmlns:a16="http://schemas.microsoft.com/office/drawing/2014/main" val="10005"/>
+                  </a:ext>
+                </a:extLst>
               </a:tr>
               <a:tr h="365760">
                 <a:tc>
@@ -22132,7 +22586,7 @@
                     <a:bodyPr/>
                     <a:lstStyle/>
                     <a:p>
-                      <a:pPr algn="l" indent="0" marL="0">
+                      <a:pPr marL="0" indent="0" algn="l">
                         <a:buNone/>
                       </a:pPr>
                       <a:r>
@@ -22200,7 +22654,7 @@
                     <a:bodyPr/>
                     <a:lstStyle/>
                     <a:p>
-                      <a:pPr algn="l" indent="0" marL="0">
+                      <a:pPr marL="0" indent="0" algn="l">
                         <a:buNone/>
                       </a:pPr>
                       <a:r>
@@ -22268,7 +22722,7 @@
                     <a:bodyPr/>
                     <a:lstStyle/>
                     <a:p>
-                      <a:pPr algn="l" indent="0" marL="0">
+                      <a:pPr marL="0" indent="0" algn="l">
                         <a:buNone/>
                       </a:pPr>
                       <a:r>
@@ -22331,6 +22785,11 @@
                     </a:solidFill>
                   </a:tcPr>
                 </a:tc>
+                <a:extLst>
+                  <a:ext uri="{0D108BD9-81ED-4DB2-BD59-A6C34878D82A}">
+                    <a16:rowId xmlns:a16="http://schemas.microsoft.com/office/drawing/2014/main" val="10006"/>
+                  </a:ext>
+                </a:extLst>
               </a:tr>
               <a:tr h="365760">
                 <a:tc>
@@ -22338,7 +22797,7 @@
                     <a:bodyPr/>
                     <a:lstStyle/>
                     <a:p>
-                      <a:pPr algn="l" indent="0" marL="0">
+                      <a:pPr marL="0" indent="0" algn="l">
                         <a:buNone/>
                       </a:pPr>
                       <a:r>
@@ -22406,7 +22865,7 @@
                     <a:bodyPr/>
                     <a:lstStyle/>
                     <a:p>
-                      <a:pPr algn="l" indent="0" marL="0">
+                      <a:pPr marL="0" indent="0" algn="l">
                         <a:buNone/>
                       </a:pPr>
                       <a:r>
@@ -22474,7 +22933,7 @@
                     <a:bodyPr/>
                     <a:lstStyle/>
                     <a:p>
-                      <a:pPr algn="l" indent="0" marL="0">
+                      <a:pPr marL="0" indent="0" algn="l">
                         <a:buNone/>
                       </a:pPr>
                       <a:r>
@@ -22486,7 +22945,29 @@
                           <a:ea typeface="Arial" pitchFamily="34" charset="-122"/>
                           <a:cs typeface="Arial" pitchFamily="34" charset="-120"/>
                         </a:rPr>
-                        <a:t>Ollama on a 4 GB GTX 1650 and a Colab T4</a:t>
+                        <a:t>Ollama on a 4 GB VRAM GPU and </a:t>
+                      </a:r>
+                      <a:r>
+                        <a:rPr lang="en-US" sz="1250" dirty="0" err="1">
+                          <a:solidFill>
+                            <a:srgbClr val="444444"/>
+                          </a:solidFill>
+                          <a:latin typeface="Arial" pitchFamily="34" charset="0"/>
+                          <a:ea typeface="Arial" pitchFamily="34" charset="-122"/>
+                          <a:cs typeface="Arial" pitchFamily="34" charset="-120"/>
+                        </a:rPr>
+                        <a:t>Colab</a:t>
+                      </a:r>
+                      <a:r>
+                        <a:rPr lang="en-US" sz="1250" dirty="0">
+                          <a:solidFill>
+                            <a:srgbClr val="444444"/>
+                          </a:solidFill>
+                          <a:latin typeface="Arial" pitchFamily="34" charset="0"/>
+                          <a:ea typeface="Arial" pitchFamily="34" charset="-122"/>
+                          <a:cs typeface="Arial" pitchFamily="34" charset="-120"/>
+                        </a:rPr>
+                        <a:t> T4</a:t>
                       </a:r>
                       <a:endParaRPr lang="en-US" sz="1250" dirty="0">
                         <a:latin typeface="Arial" charset="0"/>
@@ -22537,6 +23018,11 @@
                     </a:solidFill>
                   </a:tcPr>
                 </a:tc>
+                <a:extLst>
+                  <a:ext uri="{0D108BD9-81ED-4DB2-BD59-A6C34878D82A}">
+                    <a16:rowId xmlns:a16="http://schemas.microsoft.com/office/drawing/2014/main" val="10007"/>
+                  </a:ext>
+                </a:extLst>
               </a:tr>
             </a:tbl>
           </a:graphicData>
@@ -22566,6 +23052,13 @@
             <a:prstDash val="solid"/>
           </a:ln>
         </p:spPr>
+        <p:txBody>
+          <a:bodyPr/>
+          <a:lstStyle/>
+          <a:p>
+            <a:endParaRPr lang="en-IN"/>
+          </a:p>
+        </p:txBody>
       </p:sp>
       <p:sp>
         <p:nvSpPr>
@@ -22588,11 +23081,11 @@
           <a:bodyPr wrap="square" lIns="0" tIns="0" rIns="0" bIns="0" rtlCol="0" anchor="ctr"/>
           <a:lstStyle/>
           <a:p>
-            <a:pPr indent="0" marL="0">
+            <a:pPr marL="0" indent="0">
               <a:buNone/>
             </a:pPr>
             <a:r>
-              <a:rPr lang="en-US" sz="950" b="1" spc="100" kern="0" dirty="0">
+              <a:rPr lang="en-US" sz="950" b="1" kern="0" spc="100" dirty="0">
                 <a:solidFill>
                   <a:srgbClr val="767676"/>
                 </a:solidFill>
@@ -22627,7 +23120,7 @@
           <a:bodyPr wrap="square" lIns="0" tIns="0" rIns="0" bIns="0" rtlCol="0" anchor="ctr"/>
           <a:lstStyle/>
           <a:p>
-            <a:pPr indent="0" marL="0">
+            <a:pPr marL="0" indent="0">
               <a:buNone/>
             </a:pPr>
             <a:r>
@@ -22663,7 +23156,7 @@
           <a:bodyPr wrap="square" lIns="0" tIns="0" rIns="0" bIns="0" rtlCol="0" anchor="ctr"/>
           <a:lstStyle/>
           <a:p>
-            <a:pPr indent="0" marL="0">
+            <a:pPr marL="0" indent="0">
               <a:lnSpc>
                 <a:spcPct val="110000"/>
               </a:lnSpc>
@@ -22708,6 +23201,13 @@
             <a:prstDash val="solid"/>
           </a:ln>
         </p:spPr>
+        <p:txBody>
+          <a:bodyPr/>
+          <a:lstStyle/>
+          <a:p>
+            <a:endParaRPr lang="en-IN"/>
+          </a:p>
+        </p:txBody>
       </p:sp>
       <p:sp>
         <p:nvSpPr>
@@ -22730,11 +23230,11 @@
           <a:bodyPr wrap="square" lIns="0" tIns="0" rIns="0" bIns="0" rtlCol="0" anchor="ctr"/>
           <a:lstStyle/>
           <a:p>
-            <a:pPr indent="0" marL="0">
+            <a:pPr marL="0" indent="0">
               <a:buNone/>
             </a:pPr>
             <a:r>
-              <a:rPr lang="en-US" sz="950" b="1" spc="100" kern="0" dirty="0">
+              <a:rPr lang="en-US" sz="950" b="1" kern="0" spc="100" dirty="0">
                 <a:solidFill>
                   <a:srgbClr val="767676"/>
                 </a:solidFill>
@@ -22769,7 +23269,7 @@
           <a:bodyPr wrap="square" lIns="0" tIns="0" rIns="0" bIns="0" rtlCol="0" anchor="ctr"/>
           <a:lstStyle/>
           <a:p>
-            <a:pPr indent="0" marL="0">
+            <a:pPr marL="0" indent="0">
               <a:buNone/>
             </a:pPr>
             <a:r>
@@ -22805,7 +23305,7 @@
           <a:bodyPr wrap="square" lIns="0" tIns="0" rIns="0" bIns="0" rtlCol="0" anchor="ctr"/>
           <a:lstStyle/>
           <a:p>
-            <a:pPr indent="0" marL="0">
+            <a:pPr marL="0" indent="0">
               <a:lnSpc>
                 <a:spcPct val="110000"/>
               </a:lnSpc>
@@ -22850,6 +23350,13 @@
             <a:prstDash val="solid"/>
           </a:ln>
         </p:spPr>
+        <p:txBody>
+          <a:bodyPr/>
+          <a:lstStyle/>
+          <a:p>
+            <a:endParaRPr lang="en-IN"/>
+          </a:p>
+        </p:txBody>
       </p:sp>
       <p:sp>
         <p:nvSpPr>
@@ -22872,11 +23379,11 @@
           <a:bodyPr wrap="square" lIns="0" tIns="0" rIns="0" bIns="0" rtlCol="0" anchor="ctr"/>
           <a:lstStyle/>
           <a:p>
-            <a:pPr indent="0" marL="0">
+            <a:pPr marL="0" indent="0">
               <a:buNone/>
             </a:pPr>
             <a:r>
-              <a:rPr lang="en-US" sz="950" b="1" spc="100" kern="0" dirty="0">
+              <a:rPr lang="en-US" sz="950" b="1" kern="0" spc="100" dirty="0">
                 <a:solidFill>
                   <a:srgbClr val="767676"/>
                 </a:solidFill>
@@ -22911,7 +23418,7 @@
           <a:bodyPr wrap="square" lIns="0" tIns="0" rIns="0" bIns="0" rtlCol="0" anchor="ctr"/>
           <a:lstStyle/>
           <a:p>
-            <a:pPr indent="0" marL="0">
+            <a:pPr marL="0" indent="0">
               <a:buNone/>
             </a:pPr>
             <a:r>
@@ -22947,7 +23454,7 @@
           <a:bodyPr wrap="square" lIns="0" tIns="0" rIns="0" bIns="0" rtlCol="0" anchor="ctr"/>
           <a:lstStyle/>
           <a:p>
-            <a:pPr indent="0" marL="0">
+            <a:pPr marL="0" indent="0">
               <a:lnSpc>
                 <a:spcPct val="110000"/>
               </a:lnSpc>
@@ -22992,6 +23499,13 @@
             <a:prstDash val="solid"/>
           </a:ln>
         </p:spPr>
+        <p:txBody>
+          <a:bodyPr/>
+          <a:lstStyle/>
+          <a:p>
+            <a:endParaRPr lang="en-IN"/>
+          </a:p>
+        </p:txBody>
       </p:sp>
       <p:sp>
         <p:nvSpPr>
@@ -23014,11 +23528,11 @@
           <a:bodyPr wrap="square" lIns="0" tIns="0" rIns="0" bIns="0" rtlCol="0" anchor="ctr"/>
           <a:lstStyle/>
           <a:p>
-            <a:pPr indent="0" marL="0">
+            <a:pPr marL="0" indent="0">
               <a:buNone/>
             </a:pPr>
             <a:r>
-              <a:rPr lang="en-US" sz="950" b="1" spc="100" kern="0" dirty="0">
+              <a:rPr lang="en-US" sz="950" b="1" kern="0" spc="100" dirty="0">
                 <a:solidFill>
                   <a:srgbClr val="767676"/>
                 </a:solidFill>
@@ -23053,7 +23567,7 @@
           <a:bodyPr wrap="square" lIns="0" tIns="0" rIns="0" bIns="0" rtlCol="0" anchor="ctr"/>
           <a:lstStyle/>
           <a:p>
-            <a:pPr indent="0" marL="0">
+            <a:pPr marL="0" indent="0">
               <a:buNone/>
             </a:pPr>
             <a:r>
@@ -23089,7 +23603,7 @@
           <a:bodyPr wrap="square" lIns="0" tIns="0" rIns="0" bIns="0" rtlCol="0" anchor="ctr"/>
           <a:lstStyle/>
           <a:p>
-            <a:pPr indent="0" marL="0">
+            <a:pPr marL="0" indent="0">
               <a:lnSpc>
                 <a:spcPct val="110000"/>
               </a:lnSpc>
@@ -23104,7 +23618,7 @@
                 <a:ea typeface="Arial" pitchFamily="34" charset="-122"/>
                 <a:cs typeface="Arial" pitchFamily="34" charset="-120"/>
               </a:rPr>
-              <a:t>4 GB laptop GPU and a Colab T4</a:t>
+              <a:t>4 GB VRAM GPU and Colab T4</a:t>
             </a:r>
             <a:endParaRPr lang="en-US" sz="1050" dirty="0"/>
           </a:p>
@@ -23118,7 +23632,7 @@
         </p:nvSpPr>
         <p:spPr>
           <a:xfrm>
-            <a:off x="548640" y="6291072"/>
+            <a:off x="548640" y="6327648"/>
             <a:ext cx="10607040" cy="274320"/>
           </a:xfrm>
           <a:prstGeom prst="rect">
@@ -23131,7 +23645,7 @@
           <a:bodyPr wrap="square" lIns="0" tIns="0" rIns="0" bIns="0" rtlCol="0" anchor="ctr"/>
           <a:lstStyle/>
           <a:p>
-            <a:pPr indent="0" marL="0">
+            <a:pPr marL="0" indent="0">
               <a:buNone/>
             </a:pPr>
             <a:r>
@@ -23143,7 +23657,7 @@
                 <a:ea typeface="Arial" pitchFamily="34" charset="-122"/>
                 <a:cs typeface="Arial" pitchFamily="34" charset="-120"/>
               </a:rPr>
-              <a:t>Reference facts are written from authoritative sources and deliberately not derived from the answer being evaluated. All model names live in config.yaml; none is hard-coded.</a:t>
+              <a:t>Reference facts are written from authoritative sources and deliberately not derived from the answer being evaluated.</a:t>
             </a:r>
             <a:endParaRPr lang="en-US" sz="950" dirty="0"/>
           </a:p>
@@ -23169,7 +23683,7 @@
           </a:prstGeom>
           <a:extLst>
             <a:ext uri="{C572A759-6A51-4108-AA02-DFA0A04FC94B}">
-              <ma14:wrappingTextBoxFlag xmlns:ma14="http://schemas.microsoft.com/office/mac/drawingml/2011/main" val="0"/>
+              <ma14:wrappingTextBoxFlag xmlns:ma14="http://schemas.microsoft.com/office/mac/drawingml/2011/main" xmlns="" val="0"/>
             </a:ext>
           </a:extLst>
         </p:spPr>
@@ -23187,7 +23701,7 @@
           <a:p>
             <a:pPr algn="r"/>
             <a:fld id="{F7021451-1387-4CA6-816F-3879F97B5CBC}" type="slidenum">
-              <a:rPr b="0" lang="en-US"/>
+              <a:rPr lang="en-US" b="0"/>
               <a:t>5</a:t>
             </a:fld>
             <a:endParaRPr lang="en-US"/>
@@ -23240,11 +23754,11 @@
           <a:bodyPr wrap="square" lIns="0" tIns="0" rIns="0" bIns="0" rtlCol="0" anchor="ctr"/>
           <a:lstStyle/>
           <a:p>
-            <a:pPr indent="0" marL="0">
+            <a:pPr marL="0" indent="0">
               <a:buNone/>
             </a:pPr>
             <a:r>
-              <a:rPr lang="en-US" sz="1000" b="1" spc="200" kern="0" dirty="0">
+              <a:rPr lang="en-US" sz="1000" b="1" kern="0" spc="200" dirty="0">
                 <a:solidFill>
                   <a:srgbClr val="E90802"/>
                 </a:solidFill>
@@ -23279,7 +23793,7 @@
           <a:bodyPr wrap="square" lIns="0" tIns="0" rIns="0" bIns="0" rtlCol="0" anchor="ctr"/>
           <a:lstStyle/>
           <a:p>
-            <a:pPr indent="0" marL="0">
+            <a:pPr marL="0" indent="0">
               <a:buNone/>
             </a:pPr>
             <a:r>
@@ -23315,7 +23829,7 @@
           <a:bodyPr wrap="square" lIns="0" tIns="0" rIns="0" bIns="0" rtlCol="0" anchor="ctr"/>
           <a:lstStyle/>
           <a:p>
-            <a:pPr indent="0" marL="0">
+            <a:pPr marL="0" indent="0">
               <a:buNone/>
             </a:pPr>
             <a:r>
@@ -23357,6 +23871,13 @@
             <a:prstDash val="solid"/>
           </a:ln>
         </p:spPr>
+        <p:txBody>
+          <a:bodyPr/>
+          <a:lstStyle/>
+          <a:p>
+            <a:endParaRPr lang="en-IN"/>
+          </a:p>
+        </p:txBody>
       </p:sp>
       <p:sp>
         <p:nvSpPr>
@@ -23384,6 +23905,13 @@
             <a:prstDash val="solid"/>
           </a:ln>
         </p:spPr>
+        <p:txBody>
+          <a:bodyPr/>
+          <a:lstStyle/>
+          <a:p>
+            <a:endParaRPr lang="en-IN"/>
+          </a:p>
+        </p:txBody>
       </p:sp>
       <p:sp>
         <p:nvSpPr>
@@ -23406,7 +23934,7 @@
           <a:bodyPr wrap="square" lIns="0" tIns="0" rIns="0" bIns="0" rtlCol="0" anchor="ctr"/>
           <a:lstStyle/>
           <a:p>
-            <a:pPr algn="ctr" indent="0" marL="0">
+            <a:pPr marL="0" indent="0" algn="ctr">
               <a:buNone/>
             </a:pPr>
             <a:r>
@@ -23448,6 +23976,13 @@
             <a:prstDash val="solid"/>
           </a:ln>
         </p:spPr>
+        <p:txBody>
+          <a:bodyPr/>
+          <a:lstStyle/>
+          <a:p>
+            <a:endParaRPr lang="en-IN"/>
+          </a:p>
+        </p:txBody>
       </p:sp>
       <p:sp>
         <p:nvSpPr>
@@ -23470,7 +24005,7 @@
           <a:bodyPr wrap="square" lIns="0" tIns="0" rIns="0" bIns="0" rtlCol="0" anchor="ctr"/>
           <a:lstStyle/>
           <a:p>
-            <a:pPr indent="0" marL="0">
+            <a:pPr marL="0" indent="0">
               <a:buNone/>
             </a:pPr>
             <a:r>
@@ -23479,7 +24014,7 @@
                   <a:srgbClr val="1A1A1A"/>
                 </a:solidFill>
               </a:rPr>
-              <a:t>Baseline — variant A</a:t>
+              <a:t>Baseline — no refinement</a:t>
             </a:r>
             <a:endParaRPr lang="en-US" sz="1450" dirty="0"/>
           </a:p>
@@ -23506,7 +24041,7 @@
           <a:bodyPr wrap="square" lIns="0" tIns="0" rIns="0" bIns="0" rtlCol="0" anchor="t"/>
           <a:lstStyle/>
           <a:p>
-            <a:pPr indent="0" marL="0">
+            <a:pPr marL="0" indent="0">
               <a:lnSpc>
                 <a:spcPct val="125000"/>
               </a:lnSpc>
@@ -23551,6 +24086,13 @@
             <a:prstDash val="solid"/>
           </a:ln>
         </p:spPr>
+        <p:txBody>
+          <a:bodyPr/>
+          <a:lstStyle/>
+          <a:p>
+            <a:endParaRPr lang="en-IN"/>
+          </a:p>
+        </p:txBody>
       </p:sp>
       <p:sp>
         <p:nvSpPr>
@@ -23576,6 +24118,13 @@
             <a:prstDash val="solid"/>
           </a:ln>
         </p:spPr>
+        <p:txBody>
+          <a:bodyPr/>
+          <a:lstStyle/>
+          <a:p>
+            <a:endParaRPr lang="en-IN"/>
+          </a:p>
+        </p:txBody>
       </p:sp>
       <p:sp>
         <p:nvSpPr>
@@ -23598,7 +24147,7 @@
           <a:bodyPr wrap="square" lIns="0" tIns="0" rIns="0" bIns="0" rtlCol="0" anchor="ctr"/>
           <a:lstStyle/>
           <a:p>
-            <a:pPr indent="0" marL="0">
+            <a:pPr marL="0" indent="0">
               <a:buNone/>
             </a:pPr>
             <a:r>
@@ -23607,7 +24156,7 @@
                   <a:srgbClr val="E90802"/>
                 </a:solidFill>
               </a:rPr>
-              <a:t>VERIFACT-Lite — variant D</a:t>
+              <a:t>VERIFACT-Lite — with refinement</a:t>
             </a:r>
             <a:endParaRPr lang="en-US" sz="1450" dirty="0"/>
           </a:p>
@@ -23634,7 +24183,7 @@
           <a:bodyPr wrap="square" lIns="0" tIns="0" rIns="0" bIns="0" rtlCol="0" anchor="t"/>
           <a:lstStyle/>
           <a:p>
-            <a:pPr indent="0" marL="0">
+            <a:pPr marL="0" indent="0">
               <a:lnSpc>
                 <a:spcPct val="125000"/>
               </a:lnSpc>
@@ -23679,6 +24228,13 @@
             <a:prstDash val="solid"/>
           </a:ln>
         </p:spPr>
+        <p:txBody>
+          <a:bodyPr/>
+          <a:lstStyle/>
+          <a:p>
+            <a:endParaRPr lang="en-IN"/>
+          </a:p>
+        </p:txBody>
       </p:sp>
       <p:sp>
         <p:nvSpPr>
@@ -23701,7 +24257,7 @@
           <a:bodyPr wrap="square" lIns="0" tIns="0" rIns="0" bIns="0" rtlCol="0" anchor="ctr"/>
           <a:lstStyle/>
           <a:p>
-            <a:pPr indent="0" marL="0">
+            <a:pPr marL="0" indent="0">
               <a:buNone/>
             </a:pPr>
             <a:r>
@@ -23737,7 +24293,7 @@
           <a:bodyPr wrap="square" lIns="0" tIns="0" rIns="0" bIns="0" rtlCol="0" anchor="t"/>
           <a:lstStyle/>
           <a:p>
-            <a:pPr indent="0" marL="0">
+            <a:pPr marL="0" indent="0">
               <a:lnSpc>
                 <a:spcPct val="125000"/>
               </a:lnSpc>
@@ -23782,6 +24338,13 @@
             <a:prstDash val="solid"/>
           </a:ln>
         </p:spPr>
+        <p:txBody>
+          <a:bodyPr/>
+          <a:lstStyle/>
+          <a:p>
+            <a:endParaRPr lang="en-IN"/>
+          </a:p>
+        </p:txBody>
       </p:sp>
       <p:sp>
         <p:nvSpPr>
@@ -23804,7 +24367,7 @@
           <a:bodyPr wrap="square" lIns="0" tIns="0" rIns="0" bIns="0" rtlCol="0" anchor="ctr"/>
           <a:lstStyle/>
           <a:p>
-            <a:pPr indent="0" marL="0">
+            <a:pPr marL="0" indent="0">
               <a:buNone/>
             </a:pPr>
             <a:r>
@@ -23840,7 +24403,7 @@
           <a:bodyPr wrap="square" lIns="0" tIns="0" rIns="0" bIns="0" rtlCol="0" anchor="t"/>
           <a:lstStyle/>
           <a:p>
-            <a:pPr indent="0" marL="0">
+            <a:pPr marL="0" indent="0">
               <a:lnSpc>
                 <a:spcPct val="125000"/>
               </a:lnSpc>
@@ -23885,6 +24448,13 @@
             <a:prstDash val="solid"/>
           </a:ln>
         </p:spPr>
+        <p:txBody>
+          <a:bodyPr/>
+          <a:lstStyle/>
+          <a:p>
+            <a:endParaRPr lang="en-IN"/>
+          </a:p>
+        </p:txBody>
       </p:sp>
       <p:sp>
         <p:nvSpPr>
@@ -23907,7 +24477,7 @@
           <a:bodyPr wrap="square" lIns="0" tIns="0" rIns="0" bIns="0" rtlCol="0" anchor="ctr"/>
           <a:lstStyle/>
           <a:p>
-            <a:pPr indent="0" marL="0">
+            <a:pPr marL="0" indent="0">
               <a:buNone/>
             </a:pPr>
             <a:r>
@@ -23943,7 +24513,7 @@
           <a:bodyPr wrap="square" lIns="0" tIns="0" rIns="0" bIns="0" rtlCol="0" anchor="t"/>
           <a:lstStyle/>
           <a:p>
-            <a:pPr indent="0" marL="0">
+            <a:pPr marL="0" indent="0">
               <a:lnSpc>
                 <a:spcPct val="125000"/>
               </a:lnSpc>
@@ -23985,7 +24555,7 @@
           <a:bodyPr wrap="square" lIns="0" tIns="0" rIns="0" bIns="0" rtlCol="0" anchor="ctr"/>
           <a:lstStyle/>
           <a:p>
-            <a:pPr indent="0" marL="0">
+            <a:pPr marL="0" indent="0">
               <a:buNone/>
             </a:pPr>
             <a:r>
@@ -24023,7 +24593,7 @@
           </a:prstGeom>
           <a:extLst>
             <a:ext uri="{C572A759-6A51-4108-AA02-DFA0A04FC94B}">
-              <ma14:wrappingTextBoxFlag xmlns:ma14="http://schemas.microsoft.com/office/mac/drawingml/2011/main" val="0"/>
+              <ma14:wrappingTextBoxFlag xmlns:ma14="http://schemas.microsoft.com/office/mac/drawingml/2011/main" xmlns="" val="0"/>
             </a:ext>
           </a:extLst>
         </p:spPr>
@@ -24041,7 +24611,7 @@
           <a:p>
             <a:pPr algn="r"/>
             <a:fld id="{F7021451-1387-4CA6-816F-3879F97B5CBC}" type="slidenum">
-              <a:rPr b="0" lang="en-US"/>
+              <a:rPr lang="en-US" b="0"/>
               <a:t>6</a:t>
             </a:fld>
             <a:endParaRPr lang="en-US"/>
@@ -24094,11 +24664,11 @@
           <a:bodyPr wrap="square" lIns="0" tIns="0" rIns="0" bIns="0" rtlCol="0" anchor="ctr"/>
           <a:lstStyle/>
           <a:p>
-            <a:pPr indent="0" marL="0">
+            <a:pPr marL="0" indent="0">
               <a:buNone/>
             </a:pPr>
             <a:r>
-              <a:rPr lang="en-US" sz="1000" b="1" spc="200" kern="0" dirty="0">
+              <a:rPr lang="en-US" sz="1000" b="1" kern="0" spc="200" dirty="0">
                 <a:solidFill>
                   <a:srgbClr val="E90802"/>
                 </a:solidFill>
@@ -24133,7 +24703,7 @@
           <a:bodyPr wrap="square" lIns="0" tIns="0" rIns="0" bIns="0" rtlCol="0" anchor="ctr"/>
           <a:lstStyle/>
           <a:p>
-            <a:pPr indent="0" marL="0">
+            <a:pPr marL="0" indent="0">
               <a:buNone/>
             </a:pPr>
             <a:r>
@@ -24169,7 +24739,7 @@
           <a:bodyPr wrap="square" lIns="0" tIns="0" rIns="0" bIns="0" rtlCol="0" anchor="ctr"/>
           <a:lstStyle/>
           <a:p>
-            <a:pPr indent="0" marL="0">
+            <a:pPr marL="0" indent="0">
               <a:buNone/>
             </a:pPr>
             <a:r>
@@ -24211,6 +24781,13 @@
             <a:prstDash val="solid"/>
           </a:ln>
         </p:spPr>
+        <p:txBody>
+          <a:bodyPr/>
+          <a:lstStyle/>
+          <a:p>
+            <a:endParaRPr lang="en-IN"/>
+          </a:p>
+        </p:txBody>
       </p:sp>
       <p:sp>
         <p:nvSpPr>
@@ -24227,15 +24804,22 @@
             <a:avLst/>
           </a:prstGeom>
           <a:solidFill>
-            <a:srgbClr val="DCDCDC"/>
+            <a:schemeClr val="tx1"/>
           </a:solidFill>
           <a:ln w="3175">
             <a:solidFill>
-              <a:srgbClr val="DCDCDC"/>
+              <a:schemeClr val="tx1"/>
             </a:solidFill>
             <a:prstDash val="solid"/>
           </a:ln>
         </p:spPr>
+        <p:txBody>
+          <a:bodyPr/>
+          <a:lstStyle/>
+          <a:p>
+            <a:endParaRPr lang="en-IN"/>
+          </a:p>
+        </p:txBody>
       </p:sp>
       <p:sp>
         <p:nvSpPr>
@@ -24258,11 +24842,11 @@
           <a:bodyPr wrap="square" lIns="0" tIns="0" rIns="0" bIns="0" rtlCol="0" anchor="ctr"/>
           <a:lstStyle/>
           <a:p>
-            <a:pPr indent="0" marL="0">
+            <a:pPr marL="0" indent="0">
               <a:buNone/>
             </a:pPr>
             <a:r>
-              <a:rPr lang="en-US" sz="950" b="1" spc="100" kern="0" dirty="0">
+              <a:rPr lang="en-US" sz="950" b="1" kern="0" spc="100" dirty="0">
                 <a:solidFill>
                   <a:srgbClr val="767676"/>
                 </a:solidFill>
@@ -24297,7 +24881,7 @@
           <a:bodyPr wrap="square" lIns="0" tIns="0" rIns="0" bIns="0" rtlCol="0" anchor="ctr"/>
           <a:lstStyle/>
           <a:p>
-            <a:pPr indent="0" marL="0">
+            <a:pPr marL="0" indent="0">
               <a:buNone/>
             </a:pPr>
             <a:r>
@@ -24333,7 +24917,7 @@
           <a:bodyPr wrap="square" lIns="0" tIns="0" rIns="0" bIns="0" rtlCol="0" anchor="ctr"/>
           <a:lstStyle/>
           <a:p>
-            <a:pPr indent="0" marL="0">
+            <a:pPr marL="0" indent="0">
               <a:lnSpc>
                 <a:spcPct val="110000"/>
               </a:lnSpc>
@@ -24369,15 +24953,22 @@
             <a:avLst/>
           </a:prstGeom>
           <a:solidFill>
-            <a:srgbClr val="DCDCDC"/>
+            <a:schemeClr val="tx1"/>
           </a:solidFill>
           <a:ln w="3175">
             <a:solidFill>
-              <a:srgbClr val="DCDCDC"/>
+              <a:schemeClr val="tx1"/>
             </a:solidFill>
             <a:prstDash val="solid"/>
           </a:ln>
         </p:spPr>
+        <p:txBody>
+          <a:bodyPr/>
+          <a:lstStyle/>
+          <a:p>
+            <a:endParaRPr lang="en-IN"/>
+          </a:p>
+        </p:txBody>
       </p:sp>
       <p:sp>
         <p:nvSpPr>
@@ -24400,11 +24991,11 @@
           <a:bodyPr wrap="square" lIns="0" tIns="0" rIns="0" bIns="0" rtlCol="0" anchor="ctr"/>
           <a:lstStyle/>
           <a:p>
-            <a:pPr indent="0" marL="0">
+            <a:pPr marL="0" indent="0">
               <a:buNone/>
             </a:pPr>
             <a:r>
-              <a:rPr lang="en-US" sz="950" b="1" spc="100" kern="0" dirty="0">
+              <a:rPr lang="en-US" sz="950" b="1" kern="0" spc="100" dirty="0">
                 <a:solidFill>
                   <a:srgbClr val="767676"/>
                 </a:solidFill>
@@ -24439,7 +25030,7 @@
           <a:bodyPr wrap="square" lIns="0" tIns="0" rIns="0" bIns="0" rtlCol="0" anchor="ctr"/>
           <a:lstStyle/>
           <a:p>
-            <a:pPr indent="0" marL="0">
+            <a:pPr marL="0" indent="0">
               <a:buNone/>
             </a:pPr>
             <a:r>
@@ -24475,7 +25066,7 @@
           <a:bodyPr wrap="square" lIns="0" tIns="0" rIns="0" bIns="0" rtlCol="0" anchor="ctr"/>
           <a:lstStyle/>
           <a:p>
-            <a:pPr indent="0" marL="0">
+            <a:pPr marL="0" indent="0">
               <a:lnSpc>
                 <a:spcPct val="110000"/>
               </a:lnSpc>
@@ -24520,6 +25111,13 @@
             <a:prstDash val="solid"/>
           </a:ln>
         </p:spPr>
+        <p:txBody>
+          <a:bodyPr/>
+          <a:lstStyle/>
+          <a:p>
+            <a:endParaRPr lang="en-IN"/>
+          </a:p>
+        </p:txBody>
       </p:sp>
       <p:sp>
         <p:nvSpPr>
@@ -24542,11 +25140,11 @@
           <a:bodyPr wrap="square" lIns="0" tIns="0" rIns="0" bIns="0" rtlCol="0" anchor="ctr"/>
           <a:lstStyle/>
           <a:p>
-            <a:pPr indent="0" marL="0">
+            <a:pPr marL="0" indent="0">
               <a:buNone/>
             </a:pPr>
             <a:r>
-              <a:rPr lang="en-US" sz="950" b="1" spc="100" kern="0" dirty="0">
+              <a:rPr lang="en-US" sz="950" b="1" kern="0" spc="100" dirty="0">
                 <a:solidFill>
                   <a:srgbClr val="767676"/>
                 </a:solidFill>
@@ -24581,7 +25179,7 @@
           <a:bodyPr wrap="square" lIns="0" tIns="0" rIns="0" bIns="0" rtlCol="0" anchor="ctr"/>
           <a:lstStyle/>
           <a:p>
-            <a:pPr indent="0" marL="0">
+            <a:pPr marL="0" indent="0">
               <a:buNone/>
             </a:pPr>
             <a:r>
@@ -24617,7 +25215,7 @@
           <a:bodyPr wrap="square" lIns="0" tIns="0" rIns="0" bIns="0" rtlCol="0" anchor="ctr"/>
           <a:lstStyle/>
           <a:p>
-            <a:pPr indent="0" marL="0">
+            <a:pPr marL="0" indent="0">
               <a:lnSpc>
                 <a:spcPct val="110000"/>
               </a:lnSpc>
@@ -24653,15 +25251,22 @@
             <a:avLst/>
           </a:prstGeom>
           <a:solidFill>
-            <a:srgbClr val="DCDCDC"/>
+            <a:schemeClr val="tx1"/>
           </a:solidFill>
           <a:ln w="3175">
             <a:solidFill>
-              <a:srgbClr val="DCDCDC"/>
+              <a:schemeClr val="tx1"/>
             </a:solidFill>
             <a:prstDash val="solid"/>
           </a:ln>
         </p:spPr>
+        <p:txBody>
+          <a:bodyPr/>
+          <a:lstStyle/>
+          <a:p>
+            <a:endParaRPr lang="en-IN"/>
+          </a:p>
+        </p:txBody>
       </p:sp>
       <p:sp>
         <p:nvSpPr>
@@ -24684,11 +25289,11 @@
           <a:bodyPr wrap="square" lIns="0" tIns="0" rIns="0" bIns="0" rtlCol="0" anchor="ctr"/>
           <a:lstStyle/>
           <a:p>
-            <a:pPr indent="0" marL="0">
+            <a:pPr marL="0" indent="0">
               <a:buNone/>
             </a:pPr>
             <a:r>
-              <a:rPr lang="en-US" sz="950" b="1" spc="100" kern="0" dirty="0">
+              <a:rPr lang="en-US" sz="950" b="1" kern="0" spc="100" dirty="0">
                 <a:solidFill>
                   <a:srgbClr val="767676"/>
                 </a:solidFill>
@@ -24723,7 +25328,7 @@
           <a:bodyPr wrap="square" lIns="0" tIns="0" rIns="0" bIns="0" rtlCol="0" anchor="ctr"/>
           <a:lstStyle/>
           <a:p>
-            <a:pPr indent="0" marL="0">
+            <a:pPr marL="0" indent="0">
               <a:buNone/>
             </a:pPr>
             <a:r>
@@ -24759,7 +25364,7 @@
           <a:bodyPr wrap="square" lIns="0" tIns="0" rIns="0" bIns="0" rtlCol="0" anchor="ctr"/>
           <a:lstStyle/>
           <a:p>
-            <a:pPr indent="0" marL="0">
+            <a:pPr marL="0" indent="0">
               <a:lnSpc>
                 <a:spcPct val="110000"/>
               </a:lnSpc>
@@ -24782,7 +25387,7 @@
       </p:sp>
       <p:graphicFrame>
         <p:nvGraphicFramePr>
-          <p:cNvPr id="22" name="chart-prf" descr=""/>
+          <p:cNvPr id="22" name="chart-prf"/>
           <p:cNvGraphicFramePr/>
           <p:nvPr/>
         </p:nvGraphicFramePr>
@@ -24790,9 +25395,9 @@
           <a:off x="292608" y="3063240"/>
           <a:ext cx="5650992" cy="2834640"/>
         </p:xfrm>
-        <a:graphic xmlns:a="http://schemas.openxmlformats.org/drawingml/2006/main">
+        <a:graphic>
           <a:graphicData uri="http://schemas.openxmlformats.org/drawingml/2006/chart">
-            <c:chart xmlns:c="http://schemas.openxmlformats.org/drawingml/2006/chart" r:id="rId1"/>
+            <c:chart xmlns:c="http://schemas.openxmlformats.org/drawingml/2006/chart" xmlns:r="http://schemas.openxmlformats.org/officeDocument/2006/relationships" r:id="rId3"/>
           </a:graphicData>
         </a:graphic>
       </p:graphicFrame>
@@ -24820,6 +25425,13 @@
             <a:prstDash val="solid"/>
           </a:ln>
         </p:spPr>
+        <p:txBody>
+          <a:bodyPr/>
+          <a:lstStyle/>
+          <a:p>
+            <a:endParaRPr lang="en-IN"/>
+          </a:p>
+        </p:txBody>
       </p:sp>
       <p:sp>
         <p:nvSpPr>
@@ -24845,6 +25457,13 @@
             <a:prstDash val="solid"/>
           </a:ln>
         </p:spPr>
+        <p:txBody>
+          <a:bodyPr/>
+          <a:lstStyle/>
+          <a:p>
+            <a:endParaRPr lang="en-IN"/>
+          </a:p>
+        </p:txBody>
       </p:sp>
       <p:sp>
         <p:nvSpPr>
@@ -24867,7 +25486,7 @@
           <a:bodyPr wrap="square" lIns="0" tIns="0" rIns="0" bIns="0" rtlCol="0" anchor="ctr"/>
           <a:lstStyle/>
           <a:p>
-            <a:pPr indent="0" marL="0">
+            <a:pPr marL="0" indent="0">
               <a:buNone/>
             </a:pPr>
             <a:r>
@@ -24903,7 +25522,7 @@
           <a:bodyPr wrap="square" lIns="0" tIns="0" rIns="0" bIns="0" rtlCol="0" anchor="t"/>
           <a:lstStyle/>
           <a:p>
-            <a:pPr indent="0" marL="0">
+            <a:pPr marL="0" indent="0">
               <a:lnSpc>
                 <a:spcPct val="125000"/>
               </a:lnSpc>
@@ -24923,7 +25542,7 @@
             <a:endParaRPr lang="en-US" sz="1250" dirty="0"/>
           </a:p>
           <a:p>
-            <a:pPr indent="0" marL="0">
+            <a:pPr marL="0" indent="0">
               <a:lnSpc>
                 <a:spcPct val="125000"/>
               </a:lnSpc>
@@ -24932,7 +25551,7 @@
             <a:endParaRPr lang="en-US" sz="1250" dirty="0"/>
           </a:p>
           <a:p>
-            <a:pPr indent="0" marL="0">
+            <a:pPr marL="0" indent="0">
               <a:lnSpc>
                 <a:spcPct val="125000"/>
               </a:lnSpc>
@@ -24952,7 +25571,7 @@
             <a:endParaRPr lang="en-US" sz="1250" dirty="0"/>
           </a:p>
           <a:p>
-            <a:pPr indent="0" marL="0">
+            <a:pPr marL="0" indent="0">
               <a:lnSpc>
                 <a:spcPct val="125000"/>
               </a:lnSpc>
@@ -24961,7 +25580,7 @@
             <a:endParaRPr lang="en-US" sz="1250" dirty="0"/>
           </a:p>
           <a:p>
-            <a:pPr indent="0" marL="0">
+            <a:pPr marL="0" indent="0">
               <a:lnSpc>
                 <a:spcPct val="125000"/>
               </a:lnSpc>
@@ -25003,7 +25622,7 @@
           <a:bodyPr wrap="square" lIns="0" tIns="0" rIns="0" bIns="0" rtlCol="0" anchor="ctr"/>
           <a:lstStyle/>
           <a:p>
-            <a:pPr indent="0" marL="0">
+            <a:pPr marL="0" indent="0">
               <a:buNone/>
             </a:pPr>
             <a:r>
@@ -25023,7 +25642,7 @@
       </p:sp>
       <p:sp>
         <p:nvSpPr>
-          <p:cNvPr id="25" name="Slide Number Placeholder 0"/>
+          <p:cNvPr id="28" name="Slide Number Placeholder 0"/>
           <p:cNvSpPr>
             <a:spLocks noGrp="1"/>
           </p:cNvSpPr>
@@ -25041,7 +25660,7 @@
           </a:prstGeom>
           <a:extLst>
             <a:ext uri="{C572A759-6A51-4108-AA02-DFA0A04FC94B}">
-              <ma14:wrappingTextBoxFlag xmlns:ma14="http://schemas.microsoft.com/office/mac/drawingml/2011/main" val="0"/>
+              <ma14:wrappingTextBoxFlag xmlns:ma14="http://schemas.microsoft.com/office/mac/drawingml/2011/main" xmlns="" val="0"/>
             </a:ext>
           </a:extLst>
         </p:spPr>
@@ -25059,7 +25678,7 @@
           <a:p>
             <a:pPr algn="r"/>
             <a:fld id="{F7021451-1387-4CA6-816F-3879F97B5CBC}" type="slidenum">
-              <a:rPr b="0" lang="en-US"/>
+              <a:rPr lang="en-US" b="0"/>
               <a:t>7</a:t>
             </a:fld>
             <a:endParaRPr lang="en-US"/>
@@ -25112,11 +25731,11 @@
           <a:bodyPr wrap="square" lIns="0" tIns="0" rIns="0" bIns="0" rtlCol="0" anchor="ctr"/>
           <a:lstStyle/>
           <a:p>
-            <a:pPr indent="0" marL="0">
+            <a:pPr marL="0" indent="0">
               <a:buNone/>
             </a:pPr>
             <a:r>
-              <a:rPr lang="en-US" sz="1000" b="1" spc="200" kern="0" dirty="0">
+              <a:rPr lang="en-US" sz="1000" b="1" kern="0" spc="200" dirty="0">
                 <a:solidFill>
                   <a:srgbClr val="E90802"/>
                 </a:solidFill>
@@ -25151,7 +25770,7 @@
           <a:bodyPr wrap="square" lIns="0" tIns="0" rIns="0" bIns="0" rtlCol="0" anchor="ctr"/>
           <a:lstStyle/>
           <a:p>
-            <a:pPr indent="0" marL="0">
+            <a:pPr marL="0" indent="0">
               <a:buNone/>
             </a:pPr>
             <a:r>
@@ -25187,7 +25806,7 @@
           <a:bodyPr wrap="square" lIns="0" tIns="0" rIns="0" bIns="0" rtlCol="0" anchor="ctr"/>
           <a:lstStyle/>
           <a:p>
-            <a:pPr indent="0" marL="0">
+            <a:pPr marL="0" indent="0">
               <a:buNone/>
             </a:pPr>
             <a:r>
@@ -25229,6 +25848,13 @@
             <a:prstDash val="solid"/>
           </a:ln>
         </p:spPr>
+        <p:txBody>
+          <a:bodyPr/>
+          <a:lstStyle/>
+          <a:p>
+            <a:endParaRPr lang="en-IN"/>
+          </a:p>
+        </p:txBody>
       </p:sp>
       <p:graphicFrame>
         <p:nvGraphicFramePr>
@@ -25246,19 +25872,55 @@
         </p:nvGraphicFramePr>
         <p:xfrm>
           <a:off x="548640" y="1600200"/>
-          <a:ext cx="11064240" cy="914400"/>
+          <a:ext cx="11064240" cy="2103120"/>
         </p:xfrm>
         <a:graphic>
           <a:graphicData uri="http://schemas.openxmlformats.org/drawingml/2006/table">
             <a:tbl>
               <a:tblPr/>
               <a:tblGrid>
-                <a:gridCol w="3383280"/>
-                <a:gridCol w="1737360"/>
-                <a:gridCol w="1463040"/>
-                <a:gridCol w="1554480"/>
-                <a:gridCol w="1463040"/>
-                <a:gridCol w="1463040"/>
+                <a:gridCol w="3383280">
+                  <a:extLst>
+                    <a:ext uri="{9D8B030D-6E8A-4147-A177-3AD203B41FA5}">
+                      <a16:colId xmlns:a16="http://schemas.microsoft.com/office/drawing/2014/main" val="20000"/>
+                    </a:ext>
+                  </a:extLst>
+                </a:gridCol>
+                <a:gridCol w="1737360">
+                  <a:extLst>
+                    <a:ext uri="{9D8B030D-6E8A-4147-A177-3AD203B41FA5}">
+                      <a16:colId xmlns:a16="http://schemas.microsoft.com/office/drawing/2014/main" val="20001"/>
+                    </a:ext>
+                  </a:extLst>
+                </a:gridCol>
+                <a:gridCol w="1463040">
+                  <a:extLst>
+                    <a:ext uri="{9D8B030D-6E8A-4147-A177-3AD203B41FA5}">
+                      <a16:colId xmlns:a16="http://schemas.microsoft.com/office/drawing/2014/main" val="20002"/>
+                    </a:ext>
+                  </a:extLst>
+                </a:gridCol>
+                <a:gridCol w="1554480">
+                  <a:extLst>
+                    <a:ext uri="{9D8B030D-6E8A-4147-A177-3AD203B41FA5}">
+                      <a16:colId xmlns:a16="http://schemas.microsoft.com/office/drawing/2014/main" val="20003"/>
+                    </a:ext>
+                  </a:extLst>
+                </a:gridCol>
+                <a:gridCol w="1463040">
+                  <a:extLst>
+                    <a:ext uri="{9D8B030D-6E8A-4147-A177-3AD203B41FA5}">
+                      <a16:colId xmlns:a16="http://schemas.microsoft.com/office/drawing/2014/main" val="20004"/>
+                    </a:ext>
+                  </a:extLst>
+                </a:gridCol>
+                <a:gridCol w="1463040">
+                  <a:extLst>
+                    <a:ext uri="{9D8B030D-6E8A-4147-A177-3AD203B41FA5}">
+                      <a16:colId xmlns:a16="http://schemas.microsoft.com/office/drawing/2014/main" val="20005"/>
+                    </a:ext>
+                  </a:extLst>
+                </a:gridCol>
               </a:tblGrid>
               <a:tr h="420624">
                 <a:tc>
@@ -25266,7 +25928,7 @@
                     <a:bodyPr/>
                     <a:lstStyle/>
                     <a:p>
-                      <a:pPr algn="l" indent="0" marL="0">
+                      <a:pPr marL="0" indent="0" algn="l">
                         <a:buNone/>
                       </a:pPr>
                       <a:r>
@@ -25334,7 +25996,7 @@
                     <a:bodyPr/>
                     <a:lstStyle/>
                     <a:p>
-                      <a:pPr algn="r" indent="0" marL="0">
+                      <a:pPr marL="0" indent="0" algn="r">
                         <a:buNone/>
                       </a:pPr>
                       <a:r>
@@ -25402,7 +26064,7 @@
                     <a:bodyPr/>
                     <a:lstStyle/>
                     <a:p>
-                      <a:pPr algn="r" indent="0" marL="0">
+                      <a:pPr marL="0" indent="0" algn="r">
                         <a:buNone/>
                       </a:pPr>
                       <a:r>
@@ -25470,7 +26132,7 @@
                     <a:bodyPr/>
                     <a:lstStyle/>
                     <a:p>
-                      <a:pPr algn="r" indent="0" marL="0">
+                      <a:pPr marL="0" indent="0" algn="r">
                         <a:buNone/>
                       </a:pPr>
                       <a:r>
@@ -25538,7 +26200,7 @@
                     <a:bodyPr/>
                     <a:lstStyle/>
                     <a:p>
-                      <a:pPr algn="r" indent="0" marL="0">
+                      <a:pPr marL="0" indent="0" algn="r">
                         <a:buNone/>
                       </a:pPr>
                       <a:r>
@@ -25606,7 +26268,7 @@
                     <a:bodyPr/>
                     <a:lstStyle/>
                     <a:p>
-                      <a:pPr algn="r" indent="0" marL="0">
+                      <a:pPr marL="0" indent="0" algn="r">
                         <a:buNone/>
                       </a:pPr>
                       <a:r>
@@ -25669,6 +26331,11 @@
                     </a:solidFill>
                   </a:tcPr>
                 </a:tc>
+                <a:extLst>
+                  <a:ext uri="{0D108BD9-81ED-4DB2-BD59-A6C34878D82A}">
+                    <a16:rowId xmlns:a16="http://schemas.microsoft.com/office/drawing/2014/main" val="10000"/>
+                  </a:ext>
+                </a:extLst>
               </a:tr>
               <a:tr h="420624">
                 <a:tc>
@@ -25676,7 +26343,7 @@
                     <a:bodyPr/>
                     <a:lstStyle/>
                     <a:p>
-                      <a:pPr algn="l" indent="0" marL="0">
+                      <a:pPr marL="0" indent="0" algn="l">
                         <a:buNone/>
                       </a:pPr>
                       <a:r>
@@ -25688,7 +26355,7 @@
                           <a:ea typeface="Arial" pitchFamily="34" charset="-122"/>
                           <a:cs typeface="Arial" pitchFamily="34" charset="-120"/>
                         </a:rPr>
-                        <a:t>A  Baseline</a:t>
+                        <a:t>Baseline</a:t>
                       </a:r>
                       <a:endParaRPr lang="en-US" sz="1250" dirty="0">
                         <a:latin typeface="Arial" charset="0"/>
@@ -25744,7 +26411,7 @@
                     <a:bodyPr/>
                     <a:lstStyle/>
                     <a:p>
-                      <a:pPr algn="r" indent="0" marL="0">
+                      <a:pPr marL="0" indent="0" algn="r">
                         <a:buNone/>
                       </a:pPr>
                       <a:r>
@@ -25812,7 +26479,7 @@
                     <a:bodyPr/>
                     <a:lstStyle/>
                     <a:p>
-                      <a:pPr algn="r" indent="0" marL="0">
+                      <a:pPr marL="0" indent="0" algn="r">
                         <a:buNone/>
                       </a:pPr>
                       <a:r>
@@ -25880,7 +26547,7 @@
                     <a:bodyPr/>
                     <a:lstStyle/>
                     <a:p>
-                      <a:pPr algn="r" indent="0" marL="0">
+                      <a:pPr marL="0" indent="0" algn="r">
                         <a:buNone/>
                       </a:pPr>
                       <a:r>
@@ -25948,7 +26615,7 @@
                     <a:bodyPr/>
                     <a:lstStyle/>
                     <a:p>
-                      <a:pPr algn="r" indent="0" marL="0">
+                      <a:pPr marL="0" indent="0" algn="r">
                         <a:buNone/>
                       </a:pPr>
                       <a:r>
@@ -26016,7 +26683,7 @@
                     <a:bodyPr/>
                     <a:lstStyle/>
                     <a:p>
-                      <a:pPr algn="r" indent="0" marL="0">
+                      <a:pPr marL="0" indent="0" algn="r">
                         <a:buNone/>
                       </a:pPr>
                       <a:r>
@@ -26079,6 +26746,11 @@
                     </a:solidFill>
                   </a:tcPr>
                 </a:tc>
+                <a:extLst>
+                  <a:ext uri="{0D108BD9-81ED-4DB2-BD59-A6C34878D82A}">
+                    <a16:rowId xmlns:a16="http://schemas.microsoft.com/office/drawing/2014/main" val="10001"/>
+                  </a:ext>
+                </a:extLst>
               </a:tr>
               <a:tr h="420624">
                 <a:tc>
@@ -26086,7 +26758,7 @@
                     <a:bodyPr/>
                     <a:lstStyle/>
                     <a:p>
-                      <a:pPr algn="l" indent="0" marL="0">
+                      <a:pPr marL="0" indent="0" algn="l">
                         <a:buNone/>
                       </a:pPr>
                       <a:r>
@@ -26098,7 +26770,7 @@
                           <a:ea typeface="Arial" pitchFamily="34" charset="-122"/>
                           <a:cs typeface="Arial" pitchFamily="34" charset="-120"/>
                         </a:rPr>
-                        <a:t>B  + incomplete refine</a:t>
+                        <a:t>+ incomplete-fact refinement</a:t>
                       </a:r>
                       <a:endParaRPr lang="en-US" sz="1250" dirty="0">
                         <a:latin typeface="Arial" charset="0"/>
@@ -26154,7 +26826,7 @@
                     <a:bodyPr/>
                     <a:lstStyle/>
                     <a:p>
-                      <a:pPr algn="r" indent="0" marL="0">
+                      <a:pPr marL="0" indent="0" algn="r">
                         <a:buNone/>
                       </a:pPr>
                       <a:r>
@@ -26222,7 +26894,7 @@
                     <a:bodyPr/>
                     <a:lstStyle/>
                     <a:p>
-                      <a:pPr algn="r" indent="0" marL="0">
+                      <a:pPr marL="0" indent="0" algn="r">
                         <a:buNone/>
                       </a:pPr>
                       <a:r>
@@ -26290,7 +26962,7 @@
                     <a:bodyPr/>
                     <a:lstStyle/>
                     <a:p>
-                      <a:pPr algn="r" indent="0" marL="0">
+                      <a:pPr marL="0" indent="0" algn="r">
                         <a:buNone/>
                       </a:pPr>
                       <a:r>
@@ -26358,7 +27030,7 @@
                     <a:bodyPr/>
                     <a:lstStyle/>
                     <a:p>
-                      <a:pPr algn="r" indent="0" marL="0">
+                      <a:pPr marL="0" indent="0" algn="r">
                         <a:buNone/>
                       </a:pPr>
                       <a:r>
@@ -26426,7 +27098,7 @@
                     <a:bodyPr/>
                     <a:lstStyle/>
                     <a:p>
-                      <a:pPr algn="r" indent="0" marL="0">
+                      <a:pPr marL="0" indent="0" algn="r">
                         <a:buNone/>
                       </a:pPr>
                       <a:r>
@@ -26489,6 +27161,11 @@
                     </a:solidFill>
                   </a:tcPr>
                 </a:tc>
+                <a:extLst>
+                  <a:ext uri="{0D108BD9-81ED-4DB2-BD59-A6C34878D82A}">
+                    <a16:rowId xmlns:a16="http://schemas.microsoft.com/office/drawing/2014/main" val="10002"/>
+                  </a:ext>
+                </a:extLst>
               </a:tr>
               <a:tr h="420624">
                 <a:tc>
@@ -26496,7 +27173,7 @@
                     <a:bodyPr/>
                     <a:lstStyle/>
                     <a:p>
-                      <a:pPr algn="l" indent="0" marL="0">
+                      <a:pPr marL="0" indent="0" algn="l">
                         <a:buNone/>
                       </a:pPr>
                       <a:r>
@@ -26508,7 +27185,7 @@
                           <a:ea typeface="Arial" pitchFamily="34" charset="-122"/>
                           <a:cs typeface="Arial" pitchFamily="34" charset="-120"/>
                         </a:rPr>
-                        <a:t>C  + missing relation</a:t>
+                        <a:t>+ missing-relation recovery</a:t>
                       </a:r>
                       <a:endParaRPr lang="en-US" sz="1250" dirty="0">
                         <a:latin typeface="Arial" charset="0"/>
@@ -26564,7 +27241,7 @@
                     <a:bodyPr/>
                     <a:lstStyle/>
                     <a:p>
-                      <a:pPr algn="r" indent="0" marL="0">
+                      <a:pPr marL="0" indent="0" algn="r">
                         <a:buNone/>
                       </a:pPr>
                       <a:r>
@@ -26632,7 +27309,7 @@
                     <a:bodyPr/>
                     <a:lstStyle/>
                     <a:p>
-                      <a:pPr algn="r" indent="0" marL="0">
+                      <a:pPr marL="0" indent="0" algn="r">
                         <a:buNone/>
                       </a:pPr>
                       <a:r>
@@ -26700,7 +27377,7 @@
                     <a:bodyPr/>
                     <a:lstStyle/>
                     <a:p>
-                      <a:pPr algn="r" indent="0" marL="0">
+                      <a:pPr marL="0" indent="0" algn="r">
                         <a:buNone/>
                       </a:pPr>
                       <a:r>
@@ -26768,7 +27445,7 @@
                     <a:bodyPr/>
                     <a:lstStyle/>
                     <a:p>
-                      <a:pPr algn="r" indent="0" marL="0">
+                      <a:pPr marL="0" indent="0" algn="r">
                         <a:buNone/>
                       </a:pPr>
                       <a:r>
@@ -26836,7 +27513,7 @@
                     <a:bodyPr/>
                     <a:lstStyle/>
                     <a:p>
-                      <a:pPr algn="r" indent="0" marL="0">
+                      <a:pPr marL="0" indent="0" algn="r">
                         <a:buNone/>
                       </a:pPr>
                       <a:r>
@@ -26899,6 +27576,11 @@
                     </a:solidFill>
                   </a:tcPr>
                 </a:tc>
+                <a:extLst>
+                  <a:ext uri="{0D108BD9-81ED-4DB2-BD59-A6C34878D82A}">
+                    <a16:rowId xmlns:a16="http://schemas.microsoft.com/office/drawing/2014/main" val="10003"/>
+                  </a:ext>
+                </a:extLst>
               </a:tr>
               <a:tr h="420624">
                 <a:tc>
@@ -26906,7 +27588,7 @@
                     <a:bodyPr/>
                     <a:lstStyle/>
                     <a:p>
-                      <a:pPr algn="l" indent="0" marL="0">
+                      <a:pPr marL="0" indent="0" algn="l">
                         <a:buNone/>
                       </a:pPr>
                       <a:r>
@@ -26918,7 +27600,7 @@
                           <a:ea typeface="Arial" pitchFamily="34" charset="-122"/>
                           <a:cs typeface="Arial" pitchFamily="34" charset="-120"/>
                         </a:rPr>
-                        <a:t>D  Full VERIFACT-Lite</a:t>
+                        <a:t>Full VERIFACT-Lite</a:t>
                       </a:r>
                       <a:endParaRPr lang="en-US" sz="1250" dirty="0">
                         <a:latin typeface="Arial" charset="0"/>
@@ -26974,7 +27656,7 @@
                     <a:bodyPr/>
                     <a:lstStyle/>
                     <a:p>
-                      <a:pPr algn="r" indent="0" marL="0">
+                      <a:pPr marL="0" indent="0" algn="r">
                         <a:buNone/>
                       </a:pPr>
                       <a:r>
@@ -27042,7 +27724,7 @@
                     <a:bodyPr/>
                     <a:lstStyle/>
                     <a:p>
-                      <a:pPr algn="r" indent="0" marL="0">
+                      <a:pPr marL="0" indent="0" algn="r">
                         <a:buNone/>
                       </a:pPr>
                       <a:r>
@@ -27110,7 +27792,7 @@
                     <a:bodyPr/>
                     <a:lstStyle/>
                     <a:p>
-                      <a:pPr algn="r" indent="0" marL="0">
+                      <a:pPr marL="0" indent="0" algn="r">
                         <a:buNone/>
                       </a:pPr>
                       <a:r>
@@ -27178,7 +27860,7 @@
                     <a:bodyPr/>
                     <a:lstStyle/>
                     <a:p>
-                      <a:pPr algn="r" indent="0" marL="0">
+                      <a:pPr marL="0" indent="0" algn="r">
                         <a:buNone/>
                       </a:pPr>
                       <a:r>
@@ -27246,7 +27928,7 @@
                     <a:bodyPr/>
                     <a:lstStyle/>
                     <a:p>
-                      <a:pPr algn="r" indent="0" marL="0">
+                      <a:pPr marL="0" indent="0" algn="r">
                         <a:buNone/>
                       </a:pPr>
                       <a:r>
@@ -27309,6 +27991,11 @@
                     </a:solidFill>
                   </a:tcPr>
                 </a:tc>
+                <a:extLst>
+                  <a:ext uri="{0D108BD9-81ED-4DB2-BD59-A6C34878D82A}">
+                    <a16:rowId xmlns:a16="http://schemas.microsoft.com/office/drawing/2014/main" val="10004"/>
+                  </a:ext>
+                </a:extLst>
               </a:tr>
             </a:tbl>
           </a:graphicData>
@@ -27338,6 +28025,13 @@
             <a:prstDash val="solid"/>
           </a:ln>
         </p:spPr>
+        <p:txBody>
+          <a:bodyPr/>
+          <a:lstStyle/>
+          <a:p>
+            <a:endParaRPr lang="en-IN"/>
+          </a:p>
+        </p:txBody>
       </p:sp>
       <p:sp>
         <p:nvSpPr>
@@ -27360,7 +28054,7 @@
           <a:bodyPr wrap="square" lIns="0" tIns="0" rIns="0" bIns="0" rtlCol="0" anchor="ctr"/>
           <a:lstStyle/>
           <a:p>
-            <a:pPr indent="0" marL="0">
+            <a:pPr marL="0" indent="0">
               <a:buNone/>
             </a:pPr>
             <a:r>
@@ -27369,7 +28063,7 @@
                   <a:srgbClr val="1A1A1A"/>
                 </a:solidFill>
               </a:rPr>
-              <a:t>B isolates the refiner</a:t>
+              <a:t>Incomplete refinement alone</a:t>
             </a:r>
             <a:endParaRPr lang="en-US" sz="1350" dirty="0"/>
           </a:p>
@@ -27377,7 +28071,7 @@
       </p:sp>
       <p:sp>
         <p:nvSpPr>
-          <p:cNvPr id="9" name="abl0-b"/>
+          <p:cNvPr id="6" name="abl0-b"/>
           <p:cNvSpPr txBox="1"/>
           <p:nvPr/>
         </p:nvSpPr>
@@ -27396,7 +28090,7 @@
           <a:bodyPr wrap="square" lIns="0" tIns="0" rIns="0" bIns="0" rtlCol="0" anchor="t"/>
           <a:lstStyle/>
           <a:p>
-            <a:pPr indent="0" marL="0">
+            <a:pPr marL="0" indent="0">
               <a:lnSpc>
                 <a:spcPct val="125000"/>
               </a:lnSpc>
@@ -27441,6 +28135,13 @@
             <a:prstDash val="solid"/>
           </a:ln>
         </p:spPr>
+        <p:txBody>
+          <a:bodyPr/>
+          <a:lstStyle/>
+          <a:p>
+            <a:endParaRPr lang="en-IN"/>
+          </a:p>
+        </p:txBody>
       </p:sp>
       <p:sp>
         <p:nvSpPr>
@@ -27463,7 +28164,7 @@
           <a:bodyPr wrap="square" lIns="0" tIns="0" rIns="0" bIns="0" rtlCol="0" anchor="ctr"/>
           <a:lstStyle/>
           <a:p>
-            <a:pPr indent="0" marL="0">
+            <a:pPr marL="0" indent="0">
               <a:buNone/>
             </a:pPr>
             <a:r>
@@ -27472,7 +28173,7 @@
                   <a:srgbClr val="1A1A1A"/>
                 </a:solidFill>
               </a:rPr>
-              <a:t>C isolates relation recovery</a:t>
+              <a:t>Relation recovery alone</a:t>
             </a:r>
             <a:endParaRPr lang="en-US" sz="1350" dirty="0"/>
           </a:p>
@@ -27499,7 +28200,7 @@
           <a:bodyPr wrap="square" lIns="0" tIns="0" rIns="0" bIns="0" rtlCol="0" anchor="t"/>
           <a:lstStyle/>
           <a:p>
-            <a:pPr indent="0" marL="0">
+            <a:pPr marL="0" indent="0">
               <a:lnSpc>
                 <a:spcPct val="125000"/>
               </a:lnSpc>
@@ -27544,6 +28245,13 @@
             <a:prstDash val="solid"/>
           </a:ln>
         </p:spPr>
+        <p:txBody>
+          <a:bodyPr/>
+          <a:lstStyle/>
+          <a:p>
+            <a:endParaRPr lang="en-IN"/>
+          </a:p>
+        </p:txBody>
       </p:sp>
       <p:sp>
         <p:nvSpPr>
@@ -27566,7 +28274,7 @@
           <a:bodyPr wrap="square" lIns="0" tIns="0" rIns="0" bIns="0" rtlCol="0" anchor="ctr"/>
           <a:lstStyle/>
           <a:p>
-            <a:pPr indent="0" marL="0">
+            <a:pPr marL="0" indent="0">
               <a:buNone/>
             </a:pPr>
             <a:r>
@@ -27602,7 +28310,7 @@
           <a:bodyPr wrap="square" lIns="0" tIns="0" rIns="0" bIns="0" rtlCol="0" anchor="t"/>
           <a:lstStyle/>
           <a:p>
-            <a:pPr indent="0" marL="0">
+            <a:pPr marL="0" indent="0">
               <a:lnSpc>
                 <a:spcPct val="125000"/>
               </a:lnSpc>
@@ -27617,7 +28325,7 @@
                 <a:ea typeface="Arial" pitchFamily="34" charset="-122"/>
                 <a:cs typeface="Arial" pitchFamily="34" charset="-120"/>
               </a:rPr>
-              <a:t>D inherits B's lower incomplete rate and C's zero missing relations — and both precision costs.</a:t>
+              <a:t>The full system inherits the lower incomplete rate and the zero missing relations — and both precision costs.</a:t>
             </a:r>
             <a:endParaRPr lang="en-US" sz="1200" dirty="0"/>
           </a:p>
@@ -27644,7 +28352,7 @@
           <a:bodyPr wrap="square" lIns="0" tIns="0" rIns="0" bIns="0" rtlCol="0" anchor="ctr"/>
           <a:lstStyle/>
           <a:p>
-            <a:pPr indent="0" marL="0">
+            <a:pPr marL="0" indent="0">
               <a:buNone/>
             </a:pPr>
             <a:r>
@@ -27656,7 +28364,7 @@
                 <a:ea typeface="Arial" pitchFamily="34" charset="-122"/>
                 <a:cs typeface="Arial" pitchFamily="34" charset="-120"/>
               </a:rPr>
-              <a:t>All four variants scored on one identical answer set, union ensemble, as in the paper.</a:t>
+              <a:t>All four systems scored on one identical answer set, union ensemble, as in the paper.</a:t>
             </a:r>
             <a:endParaRPr lang="en-US" sz="950" dirty="0"/>
           </a:p>
@@ -27682,7 +28390,7 @@
           </a:prstGeom>
           <a:extLst>
             <a:ext uri="{C572A759-6A51-4108-AA02-DFA0A04FC94B}">
-              <ma14:wrappingTextBoxFlag xmlns:ma14="http://schemas.microsoft.com/office/mac/drawingml/2011/main" val="0"/>
+              <ma14:wrappingTextBoxFlag xmlns:ma14="http://schemas.microsoft.com/office/mac/drawingml/2011/main" xmlns="" val="0"/>
             </a:ext>
           </a:extLst>
         </p:spPr>
@@ -27700,7 +28408,7 @@
           <a:p>
             <a:pPr algn="r"/>
             <a:fld id="{F7021451-1387-4CA6-816F-3879F97B5CBC}" type="slidenum">
-              <a:rPr b="0" lang="en-US"/>
+              <a:rPr lang="en-US" b="0"/>
               <a:t>8</a:t>
             </a:fld>
             <a:endParaRPr lang="en-US"/>
@@ -27753,11 +28461,11 @@
           <a:bodyPr wrap="square" lIns="0" tIns="0" rIns="0" bIns="0" rtlCol="0" anchor="ctr"/>
           <a:lstStyle/>
           <a:p>
-            <a:pPr indent="0" marL="0">
+            <a:pPr marL="0" indent="0">
               <a:buNone/>
             </a:pPr>
             <a:r>
-              <a:rPr lang="en-US" sz="1000" b="1" spc="200" kern="0" dirty="0">
+              <a:rPr lang="en-US" sz="1000" b="1" kern="0" spc="200" dirty="0">
                 <a:solidFill>
                   <a:srgbClr val="E90802"/>
                 </a:solidFill>
@@ -27792,7 +28500,7 @@
           <a:bodyPr wrap="square" lIns="0" tIns="0" rIns="0" bIns="0" rtlCol="0" anchor="ctr"/>
           <a:lstStyle/>
           <a:p>
-            <a:pPr indent="0" marL="0">
+            <a:pPr marL="0" indent="0">
               <a:buNone/>
             </a:pPr>
             <a:r>
@@ -27828,7 +28536,7 @@
           <a:bodyPr wrap="square" lIns="0" tIns="0" rIns="0" bIns="0" rtlCol="0" anchor="ctr"/>
           <a:lstStyle/>
           <a:p>
-            <a:pPr indent="0" marL="0">
+            <a:pPr marL="0" indent="0">
               <a:buNone/>
             </a:pPr>
             <a:r>
@@ -27870,6 +28578,13 @@
             <a:prstDash val="solid"/>
           </a:ln>
         </p:spPr>
+        <p:txBody>
+          <a:bodyPr/>
+          <a:lstStyle/>
+          <a:p>
+            <a:endParaRPr lang="en-IN"/>
+          </a:p>
+        </p:txBody>
       </p:sp>
       <p:sp>
         <p:nvSpPr>
@@ -27895,6 +28610,13 @@
             <a:prstDash val="solid"/>
           </a:ln>
         </p:spPr>
+        <p:txBody>
+          <a:bodyPr/>
+          <a:lstStyle/>
+          <a:p>
+            <a:endParaRPr lang="en-IN"/>
+          </a:p>
+        </p:txBody>
       </p:sp>
       <p:sp>
         <p:nvSpPr>
@@ -27917,7 +28639,7 @@
           <a:bodyPr wrap="square" lIns="0" tIns="0" rIns="0" bIns="0" rtlCol="0" anchor="ctr"/>
           <a:lstStyle/>
           <a:p>
-            <a:pPr indent="0" marL="0">
+            <a:pPr marL="0" indent="0">
               <a:buNone/>
             </a:pPr>
             <a:r>
@@ -27953,7 +28675,7 @@
           <a:bodyPr wrap="square" lIns="0" tIns="0" rIns="0" bIns="0" rtlCol="0" anchor="ctr"/>
           <a:lstStyle/>
           <a:p>
-            <a:pPr indent="0" marL="0">
+            <a:pPr marL="0" indent="0">
               <a:lnSpc>
                 <a:spcPct val="120000"/>
               </a:lnSpc>
@@ -27990,17 +28712,41 @@
         </p:nvGraphicFramePr>
         <p:xfrm>
           <a:off x="3749040" y="1600200"/>
-          <a:ext cx="7863840" cy="914400"/>
+          <a:ext cx="7863840" cy="1920240"/>
         </p:xfrm>
         <a:graphic>
           <a:graphicData uri="http://schemas.openxmlformats.org/drawingml/2006/table">
             <a:tbl>
               <a:tblPr/>
               <a:tblGrid>
-                <a:gridCol w="3200400"/>
-                <a:gridCol w="1097280"/>
-                <a:gridCol w="1097280"/>
-                <a:gridCol w="2468880"/>
+                <a:gridCol w="3200400">
+                  <a:extLst>
+                    <a:ext uri="{9D8B030D-6E8A-4147-A177-3AD203B41FA5}">
+                      <a16:colId xmlns:a16="http://schemas.microsoft.com/office/drawing/2014/main" val="20000"/>
+                    </a:ext>
+                  </a:extLst>
+                </a:gridCol>
+                <a:gridCol w="1097280">
+                  <a:extLst>
+                    <a:ext uri="{9D8B030D-6E8A-4147-A177-3AD203B41FA5}">
+                      <a16:colId xmlns:a16="http://schemas.microsoft.com/office/drawing/2014/main" val="20001"/>
+                    </a:ext>
+                  </a:extLst>
+                </a:gridCol>
+                <a:gridCol w="1097280">
+                  <a:extLst>
+                    <a:ext uri="{9D8B030D-6E8A-4147-A177-3AD203B41FA5}">
+                      <a16:colId xmlns:a16="http://schemas.microsoft.com/office/drawing/2014/main" val="20002"/>
+                    </a:ext>
+                  </a:extLst>
+                </a:gridCol>
+                <a:gridCol w="2468880">
+                  <a:extLst>
+                    <a:ext uri="{9D8B030D-6E8A-4147-A177-3AD203B41FA5}">
+                      <a16:colId xmlns:a16="http://schemas.microsoft.com/office/drawing/2014/main" val="20003"/>
+                    </a:ext>
+                  </a:extLst>
+                </a:gridCol>
               </a:tblGrid>
               <a:tr h="384048">
                 <a:tc>
@@ -28008,7 +28754,7 @@
                     <a:bodyPr/>
                     <a:lstStyle/>
                     <a:p>
-                      <a:pPr algn="l" indent="0" marL="0">
+                      <a:pPr marL="0" indent="0" algn="l">
                         <a:buNone/>
                       </a:pPr>
                       <a:r>
@@ -28076,7 +28822,7 @@
                     <a:bodyPr/>
                     <a:lstStyle/>
                     <a:p>
-                      <a:pPr algn="l" indent="0" marL="0">
+                      <a:pPr marL="0" indent="0" algn="l">
                         <a:buNone/>
                       </a:pPr>
                       <a:r>
@@ -28144,7 +28890,7 @@
                     <a:bodyPr/>
                     <a:lstStyle/>
                     <a:p>
-                      <a:pPr algn="l" indent="0" marL="0">
+                      <a:pPr marL="0" indent="0" algn="l">
                         <a:buNone/>
                       </a:pPr>
                       <a:r>
@@ -28212,7 +28958,7 @@
                     <a:bodyPr/>
                     <a:lstStyle/>
                     <a:p>
-                      <a:pPr algn="l" indent="0" marL="0">
+                      <a:pPr marL="0" indent="0" algn="l">
                         <a:buNone/>
                       </a:pPr>
                       <a:r>
@@ -28275,6 +29021,11 @@
                     </a:solidFill>
                   </a:tcPr>
                 </a:tc>
+                <a:extLst>
+                  <a:ext uri="{0D108BD9-81ED-4DB2-BD59-A6C34878D82A}">
+                    <a16:rowId xmlns:a16="http://schemas.microsoft.com/office/drawing/2014/main" val="10000"/>
+                  </a:ext>
+                </a:extLst>
               </a:tr>
               <a:tr h="384048">
                 <a:tc>
@@ -28282,7 +29033,7 @@
                     <a:bodyPr/>
                     <a:lstStyle/>
                     <a:p>
-                      <a:pPr algn="l" indent="0" marL="0">
+                      <a:pPr marL="0" indent="0" algn="l">
                         <a:buNone/>
                       </a:pPr>
                       <a:r>
@@ -28350,7 +29101,7 @@
                     <a:bodyPr/>
                     <a:lstStyle/>
                     <a:p>
-                      <a:pPr algn="l" indent="0" marL="0">
+                      <a:pPr marL="0" indent="0" algn="l">
                         <a:buNone/>
                       </a:pPr>
                       <a:r>
@@ -28418,7 +29169,7 @@
                     <a:bodyPr/>
                     <a:lstStyle/>
                     <a:p>
-                      <a:pPr algn="l" indent="0" marL="0">
+                      <a:pPr marL="0" indent="0" algn="l">
                         <a:buNone/>
                       </a:pPr>
                       <a:r>
@@ -28486,7 +29237,7 @@
                     <a:bodyPr/>
                     <a:lstStyle/>
                     <a:p>
-                      <a:pPr algn="l" indent="0" marL="0">
+                      <a:pPr marL="0" indent="0" algn="l">
                         <a:buNone/>
                       </a:pPr>
                       <a:r>
@@ -28549,6 +29300,11 @@
                     </a:solidFill>
                   </a:tcPr>
                 </a:tc>
+                <a:extLst>
+                  <a:ext uri="{0D108BD9-81ED-4DB2-BD59-A6C34878D82A}">
+                    <a16:rowId xmlns:a16="http://schemas.microsoft.com/office/drawing/2014/main" val="10001"/>
+                  </a:ext>
+                </a:extLst>
               </a:tr>
               <a:tr h="384048">
                 <a:tc>
@@ -28556,7 +29312,7 @@
                     <a:bodyPr/>
                     <a:lstStyle/>
                     <a:p>
-                      <a:pPr algn="l" indent="0" marL="0">
+                      <a:pPr marL="0" indent="0" algn="l">
                         <a:buNone/>
                       </a:pPr>
                       <a:r>
@@ -28624,7 +29380,7 @@
                     <a:bodyPr/>
                     <a:lstStyle/>
                     <a:p>
-                      <a:pPr algn="l" indent="0" marL="0">
+                      <a:pPr marL="0" indent="0" algn="l">
                         <a:buNone/>
                       </a:pPr>
                       <a:r>
@@ -28692,7 +29448,7 @@
                     <a:bodyPr/>
                     <a:lstStyle/>
                     <a:p>
-                      <a:pPr algn="l" indent="0" marL="0">
+                      <a:pPr marL="0" indent="0" algn="l">
                         <a:buNone/>
                       </a:pPr>
                       <a:r>
@@ -28760,7 +29516,7 @@
                     <a:bodyPr/>
                     <a:lstStyle/>
                     <a:p>
-                      <a:pPr algn="l" indent="0" marL="0">
+                      <a:pPr marL="0" indent="0" algn="l">
                         <a:buNone/>
                       </a:pPr>
                       <a:r>
@@ -28823,6 +29579,11 @@
                     </a:solidFill>
                   </a:tcPr>
                 </a:tc>
+                <a:extLst>
+                  <a:ext uri="{0D108BD9-81ED-4DB2-BD59-A6C34878D82A}">
+                    <a16:rowId xmlns:a16="http://schemas.microsoft.com/office/drawing/2014/main" val="10002"/>
+                  </a:ext>
+                </a:extLst>
               </a:tr>
               <a:tr h="384048">
                 <a:tc>
@@ -28830,7 +29591,7 @@
                     <a:bodyPr/>
                     <a:lstStyle/>
                     <a:p>
-                      <a:pPr algn="l" indent="0" marL="0">
+                      <a:pPr marL="0" indent="0" algn="l">
                         <a:buNone/>
                       </a:pPr>
                       <a:r>
@@ -28898,7 +29659,7 @@
                     <a:bodyPr/>
                     <a:lstStyle/>
                     <a:p>
-                      <a:pPr algn="l" indent="0" marL="0">
+                      <a:pPr marL="0" indent="0" algn="l">
                         <a:buNone/>
                       </a:pPr>
                       <a:r>
@@ -28966,7 +29727,7 @@
                     <a:bodyPr/>
                     <a:lstStyle/>
                     <a:p>
-                      <a:pPr algn="l" indent="0" marL="0">
+                      <a:pPr marL="0" indent="0" algn="l">
                         <a:buNone/>
                       </a:pPr>
                       <a:r>
@@ -29034,7 +29795,7 @@
                     <a:bodyPr/>
                     <a:lstStyle/>
                     <a:p>
-                      <a:pPr algn="l" indent="0" marL="0">
+                      <a:pPr marL="0" indent="0" algn="l">
                         <a:buNone/>
                       </a:pPr>
                       <a:r>
@@ -29097,6 +29858,11 @@
                     </a:solidFill>
                   </a:tcPr>
                 </a:tc>
+                <a:extLst>
+                  <a:ext uri="{0D108BD9-81ED-4DB2-BD59-A6C34878D82A}">
+                    <a16:rowId xmlns:a16="http://schemas.microsoft.com/office/drawing/2014/main" val="10003"/>
+                  </a:ext>
+                </a:extLst>
               </a:tr>
               <a:tr h="384048">
                 <a:tc>
@@ -29104,7 +29870,7 @@
                     <a:bodyPr/>
                     <a:lstStyle/>
                     <a:p>
-                      <a:pPr algn="l" indent="0" marL="0">
+                      <a:pPr marL="0" indent="0" algn="l">
                         <a:buNone/>
                       </a:pPr>
                       <a:r>
@@ -29172,7 +29938,7 @@
                     <a:bodyPr/>
                     <a:lstStyle/>
                     <a:p>
-                      <a:pPr algn="l" indent="0" marL="0">
+                      <a:pPr marL="0" indent="0" algn="l">
                         <a:buNone/>
                       </a:pPr>
                       <a:r>
@@ -29240,7 +30006,7 @@
                     <a:bodyPr/>
                     <a:lstStyle/>
                     <a:p>
-                      <a:pPr algn="l" indent="0" marL="0">
+                      <a:pPr marL="0" indent="0" algn="l">
                         <a:buNone/>
                       </a:pPr>
                       <a:r>
@@ -29308,7 +30074,7 @@
                     <a:bodyPr/>
                     <a:lstStyle/>
                     <a:p>
-                      <a:pPr algn="l" indent="0" marL="0">
+                      <a:pPr marL="0" indent="0" algn="l">
                         <a:buNone/>
                       </a:pPr>
                       <a:r>
@@ -29371,6 +30137,11 @@
                     </a:solidFill>
                   </a:tcPr>
                 </a:tc>
+                <a:extLst>
+                  <a:ext uri="{0D108BD9-81ED-4DB2-BD59-A6C34878D82A}">
+                    <a16:rowId xmlns:a16="http://schemas.microsoft.com/office/drawing/2014/main" val="10004"/>
+                  </a:ext>
+                </a:extLst>
               </a:tr>
             </a:tbl>
           </a:graphicData>
@@ -29378,7 +30149,7 @@
       </p:graphicFrame>
       <p:sp>
         <p:nvSpPr>
-          <p:cNvPr id="10" name="cmp-paper"/>
+          <p:cNvPr id="9" name="cmp-paper"/>
           <p:cNvSpPr/>
           <p:nvPr/>
         </p:nvSpPr>
@@ -29400,6 +30171,13 @@
             <a:prstDash val="solid"/>
           </a:ln>
         </p:spPr>
+        <p:txBody>
+          <a:bodyPr/>
+          <a:lstStyle/>
+          <a:p>
+            <a:endParaRPr lang="en-IN"/>
+          </a:p>
+        </p:txBody>
       </p:sp>
       <p:sp>
         <p:nvSpPr>
@@ -29425,6 +30203,13 @@
             <a:prstDash val="solid"/>
           </a:ln>
         </p:spPr>
+        <p:txBody>
+          <a:bodyPr/>
+          <a:lstStyle/>
+          <a:p>
+            <a:endParaRPr lang="en-IN"/>
+          </a:p>
+        </p:txBody>
       </p:sp>
       <p:sp>
         <p:nvSpPr>
@@ -29447,7 +30232,7 @@
           <a:bodyPr wrap="square" lIns="0" tIns="0" rIns="0" bIns="0" rtlCol="0" anchor="ctr"/>
           <a:lstStyle/>
           <a:p>
-            <a:pPr indent="0" marL="0">
+            <a:pPr marL="0" indent="0">
               <a:buNone/>
             </a:pPr>
             <a:r>
@@ -29483,7 +30268,7 @@
           <a:bodyPr wrap="square" lIns="0" tIns="0" rIns="0" bIns="0" rtlCol="0" anchor="t"/>
           <a:lstStyle/>
           <a:p>
-            <a:pPr indent="0" marL="0">
+            <a:pPr marL="0" indent="0">
               <a:lnSpc>
                 <a:spcPct val="125000"/>
               </a:lnSpc>
@@ -29503,7 +30288,7 @@
             <a:endParaRPr lang="en-US" sz="1250" dirty="0"/>
           </a:p>
           <a:p>
-            <a:pPr indent="0" marL="0">
+            <a:pPr marL="0" indent="0">
               <a:lnSpc>
                 <a:spcPct val="125000"/>
               </a:lnSpc>
@@ -29512,7 +30297,7 @@
             <a:endParaRPr lang="en-US" sz="1250" dirty="0"/>
           </a:p>
           <a:p>
-            <a:pPr indent="0" marL="0">
+            <a:pPr marL="0" indent="0">
               <a:lnSpc>
                 <a:spcPct val="125000"/>
               </a:lnSpc>
@@ -29554,7 +30339,7 @@
           <a:bodyPr wrap="square" lIns="0" tIns="0" rIns="0" bIns="0" rtlCol="0" anchor="ctr"/>
           <a:lstStyle/>
           <a:p>
-            <a:pPr indent="0" marL="0">
+            <a:pPr marL="0" indent="0">
               <a:buNone/>
             </a:pPr>
             <a:r>
@@ -29592,7 +30377,7 @@
           </a:prstGeom>
           <a:extLst>
             <a:ext uri="{C572A759-6A51-4108-AA02-DFA0A04FC94B}">
-              <ma14:wrappingTextBoxFlag xmlns:ma14="http://schemas.microsoft.com/office/mac/drawingml/2011/main" val="0"/>
+              <ma14:wrappingTextBoxFlag xmlns:ma14="http://schemas.microsoft.com/office/mac/drawingml/2011/main" xmlns="" val="0"/>
             </a:ext>
           </a:extLst>
         </p:spPr>
@@ -29610,7 +30395,7 @@
           <a:p>
             <a:pPr algn="r"/>
             <a:fld id="{F7021451-1387-4CA6-816F-3879F97B5CBC}" type="slidenum">
-              <a:rPr b="0" lang="en-US"/>
+              <a:rPr lang="en-US" b="0"/>
               <a:t>9</a:t>
             </a:fld>
             <a:endParaRPr lang="en-US"/>
@@ -29918,4 +30703,319 @@
     </a:ext>
   </a:extLst>
 </a:theme>
+</file>
+
+<file path=ppt/theme/theme2.xml><?xml version="1.0" encoding="utf-8"?>
+<a:theme xmlns:a="http://schemas.openxmlformats.org/drawingml/2006/main" name="Office Theme">
+  <a:themeElements>
+    <a:clrScheme name="Office">
+      <a:dk1>
+        <a:sysClr val="windowText" lastClr="000000"/>
+      </a:dk1>
+      <a:lt1>
+        <a:sysClr val="window" lastClr="FFFFFF"/>
+      </a:lt1>
+      <a:dk2>
+        <a:srgbClr val="0E2841"/>
+      </a:dk2>
+      <a:lt2>
+        <a:srgbClr val="E8E8E8"/>
+      </a:lt2>
+      <a:accent1>
+        <a:srgbClr val="156082"/>
+      </a:accent1>
+      <a:accent2>
+        <a:srgbClr val="E97132"/>
+      </a:accent2>
+      <a:accent3>
+        <a:srgbClr val="196B24"/>
+      </a:accent3>
+      <a:accent4>
+        <a:srgbClr val="0F9ED5"/>
+      </a:accent4>
+      <a:accent5>
+        <a:srgbClr val="A02B93"/>
+      </a:accent5>
+      <a:accent6>
+        <a:srgbClr val="4EA72E"/>
+      </a:accent6>
+      <a:hlink>
+        <a:srgbClr val="467886"/>
+      </a:hlink>
+      <a:folHlink>
+        <a:srgbClr val="96607D"/>
+      </a:folHlink>
+    </a:clrScheme>
+    <a:fontScheme name="Office">
+      <a:majorFont>
+        <a:latin typeface="Aptos Display" panose="02110004020202020204"/>
+        <a:ea typeface=""/>
+        <a:cs typeface=""/>
+        <a:font script="Jpan" typeface="游ゴシック Light"/>
+        <a:font script="Hang" typeface="맑은 고딕"/>
+        <a:font script="Hans" typeface="等线 Light"/>
+        <a:font script="Hant" typeface="新細明體"/>
+        <a:font script="Arab" typeface="Times New Roman"/>
+        <a:font script="Hebr" typeface="Times New Roman"/>
+        <a:font script="Thai" typeface="Angsana New"/>
+        <a:font script="Ethi" typeface="Nyala"/>
+        <a:font script="Beng" typeface="Vrinda"/>
+        <a:font script="Gujr" typeface="Shruti"/>
+        <a:font script="Khmr" typeface="MoolBoran"/>
+        <a:font script="Knda" typeface="Tunga"/>
+        <a:font script="Guru" typeface="Raavi"/>
+        <a:font script="Cans" typeface="Euphemia"/>
+        <a:font script="Cher" typeface="Plantagenet Cherokee"/>
+        <a:font script="Yiii" typeface="Microsoft Yi Baiti"/>
+        <a:font script="Tibt" typeface="Microsoft Himalaya"/>
+        <a:font script="Thaa" typeface="MV Boli"/>
+        <a:font script="Deva" typeface="Mangal"/>
+        <a:font script="Telu" typeface="Gautami"/>
+        <a:font script="Taml" typeface="Latha"/>
+        <a:font script="Syrc" typeface="Estrangelo Edessa"/>
+        <a:font script="Orya" typeface="Kalinga"/>
+        <a:font script="Mlym" typeface="Kartika"/>
+        <a:font script="Laoo" typeface="DokChampa"/>
+        <a:font script="Sinh" typeface="Iskoola Pota"/>
+        <a:font script="Mong" typeface="Mongolian Baiti"/>
+        <a:font script="Viet" typeface="Times New Roman"/>
+        <a:font script="Uigh" typeface="Microsoft Uighur"/>
+        <a:font script="Geor" typeface="Sylfaen"/>
+        <a:font script="Armn" typeface="Arial"/>
+        <a:font script="Bugi" typeface="Leelawadee UI"/>
+        <a:font script="Bopo" typeface="Microsoft JhengHei"/>
+        <a:font script="Java" typeface="Javanese Text"/>
+        <a:font script="Lisu" typeface="Segoe UI"/>
+        <a:font script="Mymr" typeface="Myanmar Text"/>
+        <a:font script="Nkoo" typeface="Ebrima"/>
+        <a:font script="Olck" typeface="Nirmala UI"/>
+        <a:font script="Osma" typeface="Ebrima"/>
+        <a:font script="Phag" typeface="Phagspa"/>
+        <a:font script="Syrn" typeface="Estrangelo Edessa"/>
+        <a:font script="Syrj" typeface="Estrangelo Edessa"/>
+        <a:font script="Syre" typeface="Estrangelo Edessa"/>
+        <a:font script="Sora" typeface="Nirmala UI"/>
+        <a:font script="Tale" typeface="Microsoft Tai Le"/>
+        <a:font script="Talu" typeface="Microsoft New Tai Lue"/>
+        <a:font script="Tfng" typeface="Ebrima"/>
+      </a:majorFont>
+      <a:minorFont>
+        <a:latin typeface="Aptos" panose="02110004020202020204"/>
+        <a:ea typeface=""/>
+        <a:cs typeface=""/>
+        <a:font script="Jpan" typeface="游ゴシック"/>
+        <a:font script="Hang" typeface="맑은 고딕"/>
+        <a:font script="Hans" typeface="等线"/>
+        <a:font script="Hant" typeface="新細明體"/>
+        <a:font script="Arab" typeface="Arial"/>
+        <a:font script="Hebr" typeface="Arial"/>
+        <a:font script="Thai" typeface="Cordia New"/>
+        <a:font script="Ethi" typeface="Nyala"/>
+        <a:font script="Beng" typeface="Vrinda"/>
+        <a:font script="Gujr" typeface="Shruti"/>
+        <a:font script="Khmr" typeface="DaunPenh"/>
+        <a:font script="Knda" typeface="Tunga"/>
+        <a:font script="Guru" typeface="Raavi"/>
+        <a:font script="Cans" typeface="Euphemia"/>
+        <a:font script="Cher" typeface="Plantagenet Cherokee"/>
+        <a:font script="Yiii" typeface="Microsoft Yi Baiti"/>
+        <a:font script="Tibt" typeface="Microsoft Himalaya"/>
+        <a:font script="Thaa" typeface="MV Boli"/>
+        <a:font script="Deva" typeface="Mangal"/>
+        <a:font script="Telu" typeface="Gautami"/>
+        <a:font script="Taml" typeface="Latha"/>
+        <a:font script="Syrc" typeface="Estrangelo Edessa"/>
+        <a:font script="Orya" typeface="Kalinga"/>
+        <a:font script="Mlym" typeface="Kartika"/>
+        <a:font script="Laoo" typeface="DokChampa"/>
+        <a:font script="Sinh" typeface="Iskoola Pota"/>
+        <a:font script="Mong" typeface="Mongolian Baiti"/>
+        <a:font script="Viet" typeface="Arial"/>
+        <a:font script="Uigh" typeface="Microsoft Uighur"/>
+        <a:font script="Geor" typeface="Sylfaen"/>
+        <a:font script="Armn" typeface="Arial"/>
+        <a:font script="Bugi" typeface="Leelawadee UI"/>
+        <a:font script="Bopo" typeface="Microsoft JhengHei"/>
+        <a:font script="Java" typeface="Javanese Text"/>
+        <a:font script="Lisu" typeface="Segoe UI"/>
+        <a:font script="Mymr" typeface="Myanmar Text"/>
+        <a:font script="Nkoo" typeface="Ebrima"/>
+        <a:font script="Olck" typeface="Nirmala UI"/>
+        <a:font script="Osma" typeface="Ebrima"/>
+        <a:font script="Phag" typeface="Phagspa"/>
+        <a:font script="Syrn" typeface="Estrangelo Edessa"/>
+        <a:font script="Syrj" typeface="Estrangelo Edessa"/>
+        <a:font script="Syre" typeface="Estrangelo Edessa"/>
+        <a:font script="Sora" typeface="Nirmala UI"/>
+        <a:font script="Tale" typeface="Microsoft Tai Le"/>
+        <a:font script="Talu" typeface="Microsoft New Tai Lue"/>
+        <a:font script="Tfng" typeface="Ebrima"/>
+      </a:minorFont>
+    </a:fontScheme>
+    <a:fmtScheme name="Office">
+      <a:fillStyleLst>
+        <a:solidFill>
+          <a:schemeClr val="phClr"/>
+        </a:solidFill>
+        <a:gradFill rotWithShape="1">
+          <a:gsLst>
+            <a:gs pos="0">
+              <a:schemeClr val="phClr">
+                <a:lumMod val="110000"/>
+                <a:satMod val="105000"/>
+                <a:tint val="67000"/>
+              </a:schemeClr>
+            </a:gs>
+            <a:gs pos="50000">
+              <a:schemeClr val="phClr">
+                <a:lumMod val="105000"/>
+                <a:satMod val="103000"/>
+                <a:tint val="73000"/>
+              </a:schemeClr>
+            </a:gs>
+            <a:gs pos="100000">
+              <a:schemeClr val="phClr">
+                <a:lumMod val="105000"/>
+                <a:satMod val="109000"/>
+                <a:tint val="81000"/>
+              </a:schemeClr>
+            </a:gs>
+          </a:gsLst>
+          <a:lin ang="5400000" scaled="0"/>
+        </a:gradFill>
+        <a:gradFill rotWithShape="1">
+          <a:gsLst>
+            <a:gs pos="0">
+              <a:schemeClr val="phClr">
+                <a:satMod val="103000"/>
+                <a:lumMod val="102000"/>
+                <a:tint val="94000"/>
+              </a:schemeClr>
+            </a:gs>
+            <a:gs pos="50000">
+              <a:schemeClr val="phClr">
+                <a:satMod val="110000"/>
+                <a:lumMod val="100000"/>
+                <a:shade val="100000"/>
+              </a:schemeClr>
+            </a:gs>
+            <a:gs pos="100000">
+              <a:schemeClr val="phClr">
+                <a:lumMod val="99000"/>
+                <a:satMod val="120000"/>
+                <a:shade val="78000"/>
+              </a:schemeClr>
+            </a:gs>
+          </a:gsLst>
+          <a:lin ang="5400000" scaled="0"/>
+        </a:gradFill>
+      </a:fillStyleLst>
+      <a:lnStyleLst>
+        <a:ln w="12700" cap="flat" cmpd="sng" algn="ctr">
+          <a:solidFill>
+            <a:schemeClr val="phClr"/>
+          </a:solidFill>
+          <a:prstDash val="solid"/>
+          <a:miter lim="800000"/>
+        </a:ln>
+        <a:ln w="19050" cap="flat" cmpd="sng" algn="ctr">
+          <a:solidFill>
+            <a:schemeClr val="phClr"/>
+          </a:solidFill>
+          <a:prstDash val="solid"/>
+          <a:miter lim="800000"/>
+        </a:ln>
+        <a:ln w="25400" cap="flat" cmpd="sng" algn="ctr">
+          <a:solidFill>
+            <a:schemeClr val="phClr"/>
+          </a:solidFill>
+          <a:prstDash val="solid"/>
+          <a:miter lim="800000"/>
+        </a:ln>
+      </a:lnStyleLst>
+      <a:effectStyleLst>
+        <a:effectStyle>
+          <a:effectLst/>
+        </a:effectStyle>
+        <a:effectStyle>
+          <a:effectLst/>
+        </a:effectStyle>
+        <a:effectStyle>
+          <a:effectLst>
+            <a:outerShdw blurRad="57150" dist="19050" dir="5400000" algn="ctr" rotWithShape="0">
+              <a:srgbClr val="000000">
+                <a:alpha val="63000"/>
+              </a:srgbClr>
+            </a:outerShdw>
+          </a:effectLst>
+        </a:effectStyle>
+      </a:effectStyleLst>
+      <a:bgFillStyleLst>
+        <a:solidFill>
+          <a:schemeClr val="phClr"/>
+        </a:solidFill>
+        <a:solidFill>
+          <a:schemeClr val="phClr">
+            <a:tint val="95000"/>
+            <a:satMod val="170000"/>
+          </a:schemeClr>
+        </a:solidFill>
+        <a:gradFill rotWithShape="1">
+          <a:gsLst>
+            <a:gs pos="0">
+              <a:schemeClr val="phClr">
+                <a:tint val="93000"/>
+                <a:satMod val="150000"/>
+                <a:shade val="98000"/>
+                <a:lumMod val="102000"/>
+              </a:schemeClr>
+            </a:gs>
+            <a:gs pos="50000">
+              <a:schemeClr val="phClr">
+                <a:tint val="98000"/>
+                <a:satMod val="130000"/>
+                <a:shade val="90000"/>
+                <a:lumMod val="103000"/>
+              </a:schemeClr>
+            </a:gs>
+            <a:gs pos="100000">
+              <a:schemeClr val="phClr">
+                <a:shade val="63000"/>
+                <a:satMod val="120000"/>
+              </a:schemeClr>
+            </a:gs>
+          </a:gsLst>
+          <a:lin ang="5400000" scaled="0"/>
+        </a:gradFill>
+      </a:bgFillStyleLst>
+    </a:fmtScheme>
+  </a:themeElements>
+  <a:objectDefaults>
+    <a:lnDef>
+      <a:spPr/>
+      <a:bodyPr/>
+      <a:lstStyle/>
+      <a:style>
+        <a:lnRef idx="2">
+          <a:schemeClr val="accent1"/>
+        </a:lnRef>
+        <a:fillRef idx="0">
+          <a:schemeClr val="accent1"/>
+        </a:fillRef>
+        <a:effectRef idx="1">
+          <a:schemeClr val="accent1"/>
+        </a:effectRef>
+        <a:fontRef idx="minor">
+          <a:schemeClr val="tx1"/>
+        </a:fontRef>
+      </a:style>
+    </a:lnDef>
+  </a:objectDefaults>
+  <a:extraClrSchemeLst/>
+  <a:extLst>
+    <a:ext uri="{05A4C25C-085E-4340-85A3-A5531E510DB2}">
+      <thm15:themeFamily xmlns:thm15="http://schemas.microsoft.com/office/thememl/2012/main" name="Office Theme" id="{2E142A2C-CD16-42D6-873A-C26D2A0506FA}" vid="{1BDDFF52-6CD6-40A5-AB3C-68EB2F1E4D0A}"/>
+    </a:ext>
+  </a:extLst>
+</a:theme>
 </file>
--- a/presentation/VERIFACT-Lite-TTU.pptx
+++ b/presentation/VERIFACT-Lite-TTU.pptx
@@ -1117,8 +1117,7 @@
           <a:lstStyle/>
           <a:p>
             <a:r>
-              <a:rPr lang="en-US" dirty="0"/>
-              <a:t>[0:55] Open by owning the 0.92 mistake — it shows the harness was itself tested. Then the table: the top two rows started as proposals on the first version of this talk and are now experiments with results. The rest are still proposals, and are labelled as such.</a:t>
+              <a:t>[0:55] Six proposals, each named with the failure it targets. Spend the time on the two in scarlet. Faithfulness-guarded refinement fixes the meaning flip we found by reading our own output; judge-normalized reporting is the one that generalises past this paper, because it makes two judges' scores comparable at all. Mention in passing that we found the verifier rubber-stamping — precision 0.92 with zero contradictions across 258 facts — until we required a verbatim quote from the evidence.</a:t>
             </a:r>
           </a:p>
         </p:txBody>
@@ -2977,7 +2976,18 @@
                 <a:ea typeface="Arial" pitchFamily="34" charset="-122"/>
                 <a:cs typeface="Arial" pitchFamily="34" charset="-120"/>
               </a:rPr>
-              <a:t>Liu, Zhang, Munir, Gu &amp; Wang — EMNLP 2025  ·  Not a reproduction of the paper's reported results</a:t>
+              <a:t>Liu, Zhang, Munir, Gu &amp; Wang — EMNLP </a:t>
+            </a:r>
+            <a:r>
+              <a:rPr lang="en-US" sz="1050">
+                <a:solidFill>
+                  <a:srgbClr val="767676"/>
+                </a:solidFill>
+                <a:latin typeface="Arial" pitchFamily="34" charset="0"/>
+                <a:ea typeface="Arial" pitchFamily="34" charset="-122"/>
+                <a:cs typeface="Arial" pitchFamily="34" charset="-120"/>
+              </a:rPr>
+              <a:t>2025 </a:t>
             </a:r>
             <a:endParaRPr lang="en-US" sz="1050" dirty="0"/>
           </a:p>
@@ -12011,7 +12021,7 @@
           <p:nvPr>
             <p:extLst>
               <p:ext uri="{D42A27DB-BD31-4B8C-83A1-F6EECF244321}">
-                <p14:modId xmlns:p14="http://schemas.microsoft.com/office/powerpoint/2010/main" val="1579011935"/>
+                <p14:modId xmlns:p14="http://schemas.microsoft.com/office/powerpoint/2010/main" val="2754489017"/>
               </p:ext>
             </p:extLst>
           </p:nvPr>
@@ -12205,10 +12215,10 @@
                             <a:srgbClr val="1A1A1A"/>
                           </a:solidFill>
                           <a:latin typeface="Arial" pitchFamily="34" charset="0"/>
-                          <a:ea typeface="Arial" pitchFamily="34" charset="-122"/>
+                          <a:ea typeface="Arial" charset="0"/>
                           <a:cs typeface="Arial" pitchFamily="34" charset="-120"/>
                         </a:rPr>
-                        <a:t>VERIFACT-Lite</a:t>
+                        <a:t>Reimplementation</a:t>
                       </a:r>
                       <a:endParaRPr lang="en-US" sz="1150" dirty="0">
                         <a:latin typeface="Arial" charset="0"/>
@@ -15062,6 +15072,9 @@
           <a:lstStyle/>
           <a:p>
             <a:pPr marL="0" indent="0">
+              <a:lnSpc>
+                <a:spcPct val="100000"/>
+              </a:lnSpc>
               <a:buNone/>
             </a:pPr>
             <a:r>
@@ -15070,7 +15083,7 @@
                   <a:srgbClr val="1A1A1A"/>
                 </a:solidFill>
               </a:rPr>
-              <a:t>Every limitation points at a next step</a:t>
+              <a:t>Six proposals, each aimed at a failure we measured</a:t>
             </a:r>
             <a:endParaRPr lang="en-US" sz="2700" dirty="0"/>
           </a:p>
@@ -15098,6 +15111,9 @@
           <a:lstStyle/>
           <a:p>
             <a:pPr marL="0" indent="0">
+              <a:lnSpc>
+                <a:spcPct val="100000"/>
+              </a:lnSpc>
               <a:buNone/>
             </a:pPr>
             <a:r>
@@ -15109,7 +15125,7 @@
                 <a:ea typeface="Arial" pitchFamily="34" charset="-122"/>
                 <a:cs typeface="Arial" pitchFamily="34" charset="-120"/>
               </a:rPr>
-              <a:t>Two were tested; the rest are proposals, labelled as such</a:t>
+              <a:t>Two earlier proposals are already answered in the results; these six are not</a:t>
             </a:r>
             <a:endParaRPr lang="en-US" sz="1350" dirty="0"/>
           </a:p>
@@ -15147,1674 +15163,6 @@
           </a:p>
         </p:txBody>
       </p:sp>
-      <p:sp>
-        <p:nvSpPr>
-          <p:cNvPr id="6" name="rubber"/>
-          <p:cNvSpPr/>
-          <p:nvPr/>
-        </p:nvSpPr>
-        <p:spPr>
-          <a:xfrm>
-            <a:off x="548640" y="1600200"/>
-            <a:ext cx="11064240" cy="1188720"/>
-          </a:xfrm>
-          <a:prstGeom prst="rect">
-            <a:avLst/>
-          </a:prstGeom>
-          <a:solidFill>
-            <a:srgbClr val="F4F4F4"/>
-          </a:solidFill>
-          <a:ln w="9525">
-            <a:solidFill>
-              <a:srgbClr val="F4F4F4"/>
-            </a:solidFill>
-            <a:prstDash val="solid"/>
-          </a:ln>
-        </p:spPr>
-        <p:txBody>
-          <a:bodyPr/>
-          <a:lstStyle/>
-          <a:p>
-            <a:endParaRPr lang="en-IN"/>
-          </a:p>
-        </p:txBody>
-      </p:sp>
-      <p:sp>
-        <p:nvSpPr>
-          <p:cNvPr id="7" name="rubber-edge"/>
-          <p:cNvSpPr/>
-          <p:nvPr/>
-        </p:nvSpPr>
-        <p:spPr>
-          <a:xfrm>
-            <a:off x="548640" y="1600200"/>
-            <a:ext cx="29261" cy="1188720"/>
-          </a:xfrm>
-          <a:prstGeom prst="rect">
-            <a:avLst/>
-          </a:prstGeom>
-          <a:solidFill>
-            <a:srgbClr val="E90802"/>
-          </a:solidFill>
-          <a:ln w="3175">
-            <a:solidFill>
-              <a:srgbClr val="E90802"/>
-            </a:solidFill>
-            <a:prstDash val="solid"/>
-          </a:ln>
-        </p:spPr>
-        <p:txBody>
-          <a:bodyPr/>
-          <a:lstStyle/>
-          <a:p>
-            <a:endParaRPr lang="en-IN"/>
-          </a:p>
-        </p:txBody>
-      </p:sp>
-      <p:sp>
-        <p:nvSpPr>
-          <p:cNvPr id="8" name="rubber-h"/>
-          <p:cNvSpPr txBox="1"/>
-          <p:nvPr/>
-        </p:nvSpPr>
-        <p:spPr>
-          <a:xfrm>
-            <a:off x="804672" y="1801368"/>
-            <a:ext cx="10552176" cy="292608"/>
-          </a:xfrm>
-          <a:prstGeom prst="rect">
-            <a:avLst/>
-          </a:prstGeom>
-          <a:noFill/>
-          <a:ln/>
-        </p:spPr>
-        <p:txBody>
-          <a:bodyPr wrap="square" lIns="0" tIns="0" rIns="0" bIns="0" rtlCol="0" anchor="ctr"/>
-          <a:lstStyle/>
-          <a:p>
-            <a:pPr marL="0" indent="0">
-              <a:buNone/>
-            </a:pPr>
-            <a:r>
-              <a:rPr lang="en-US" sz="1350" b="1" dirty="0">
-                <a:solidFill>
-                  <a:srgbClr val="E90802"/>
-                </a:solidFill>
-              </a:rPr>
-              <a:t>Found by breaking our own result: a 3B verifier rubber-stamps unless forced to quote</a:t>
-            </a:r>
-            <a:endParaRPr lang="en-US" sz="1350" dirty="0"/>
-          </a:p>
-        </p:txBody>
-      </p:sp>
-      <p:sp>
-        <p:nvSpPr>
-          <p:cNvPr id="9" name="rubber-b"/>
-          <p:cNvSpPr txBox="1"/>
-          <p:nvPr/>
-        </p:nvSpPr>
-        <p:spPr>
-          <a:xfrm>
-            <a:off x="804672" y="2203704"/>
-            <a:ext cx="10552176" cy="420624"/>
-          </a:xfrm>
-          <a:prstGeom prst="rect">
-            <a:avLst/>
-          </a:prstGeom>
-          <a:noFill/>
-          <a:ln/>
-        </p:spPr>
-        <p:txBody>
-          <a:bodyPr wrap="square" lIns="0" tIns="0" rIns="0" bIns="0" rtlCol="0" anchor="t"/>
-          <a:lstStyle/>
-          <a:p>
-            <a:pPr marL="0" indent="0">
-              <a:lnSpc>
-                <a:spcPct val="125000"/>
-              </a:lnSpc>
-              <a:buNone/>
-            </a:pPr>
-            <a:r>
-              <a:rPr lang="en-US" sz="1200" dirty="0">
-                <a:solidFill>
-                  <a:srgbClr val="444444"/>
-                </a:solidFill>
-                <a:latin typeface="Arial" pitchFamily="34" charset="0"/>
-                <a:ea typeface="Arial" pitchFamily="34" charset="-122"/>
-                <a:cs typeface="Arial" pitchFamily="34" charset="-120"/>
-              </a:rPr>
-              <a:t>An earlier version reported precision 0.92 and zero contradictions across 258 facts, calling “Aluminium is the rarest metal in the Earth's crust” SUPPORTED with confidence 1.0. Requiring a verbatim quote from the evidence moved precision to 0.42 and made contradictions appear.</a:t>
-            </a:r>
-            <a:endParaRPr lang="en-US" sz="1200" dirty="0"/>
-          </a:p>
-        </p:txBody>
-      </p:sp>
-      <p:graphicFrame>
-        <p:nvGraphicFramePr>
-          <p:cNvPr id="15" name="fixes"/>
-          <p:cNvGraphicFramePr>
-            <a:graphicFrameLocks noGrp="1"/>
-          </p:cNvGraphicFramePr>
-          <p:nvPr>
-            <p:extLst>
-              <p:ext uri="{D42A27DB-BD31-4B8C-83A1-F6EECF244321}">
-                <p14:modId xmlns:p14="http://schemas.microsoft.com/office/powerpoint/2010/main" val="1579011935"/>
-              </p:ext>
-            </p:extLst>
-          </p:nvPr>
-        </p:nvGraphicFramePr>
-        <p:xfrm>
-          <a:off x="548640" y="3017520"/>
-          <a:ext cx="11064240" cy="2816352"/>
-        </p:xfrm>
-        <a:graphic>
-          <a:graphicData uri="http://schemas.openxmlformats.org/drawingml/2006/table">
-            <a:tbl>
-              <a:tblPr/>
-              <a:tblGrid>
-                <a:gridCol w="4206240">
-                  <a:extLst>
-                    <a:ext uri="{9D8B030D-6E8A-4147-A177-3AD203B41FA5}">
-                      <a16:colId xmlns:a16="http://schemas.microsoft.com/office/drawing/2014/main" val="20000"/>
-                    </a:ext>
-                  </a:extLst>
-                </a:gridCol>
-                <a:gridCol w="4114800">
-                  <a:extLst>
-                    <a:ext uri="{9D8B030D-6E8A-4147-A177-3AD203B41FA5}">
-                      <a16:colId xmlns:a16="http://schemas.microsoft.com/office/drawing/2014/main" val="20001"/>
-                    </a:ext>
-                  </a:extLst>
-                </a:gridCol>
-                <a:gridCol w="2743200">
-                  <a:extLst>
-                    <a:ext uri="{9D8B030D-6E8A-4147-A177-3AD203B41FA5}">
-                      <a16:colId xmlns:a16="http://schemas.microsoft.com/office/drawing/2014/main" val="20002"/>
-                    </a:ext>
-                  </a:extLst>
-                </a:gridCol>
-              </a:tblGrid>
-              <a:tr h="402336">
-                <a:tc>
-                  <a:txBody>
-                    <a:bodyPr/>
-                    <a:lstStyle/>
-                    <a:p>
-                      <a:pPr marL="0" indent="0" algn="l">
-                        <a:buNone/>
-                      </a:pPr>
-                      <a:r>
-                        <a:rPr lang="en-US" sz="1200" b="1" dirty="0">
-                          <a:solidFill>
-                            <a:srgbClr val="1A1A1A"/>
-                          </a:solidFill>
-                          <a:latin typeface="Arial" pitchFamily="34" charset="0"/>
-                          <a:ea typeface="Arial" pitchFamily="34" charset="-122"/>
-                          <a:cs typeface="Arial" pitchFamily="34" charset="-120"/>
-                        </a:rPr>
-                        <a:t>Limitation</a:t>
-                      </a:r>
-                      <a:endParaRPr lang="en-US" sz="1200" dirty="0">
-                        <a:latin typeface="Arial" charset="0"/>
-                        <a:ea typeface="Arial" charset="0"/>
-                        <a:cs typeface="Arial" charset="0"/>
-                      </a:endParaRPr>
-                    </a:p>
-                  </a:txBody>
-                  <a:tcPr marL="109728" marR="109728" marT="36576" marB="36576" anchor="ctr">
-                    <a:lnL w="6350" cap="flat" cmpd="sng" algn="ctr">
-                      <a:solidFill>
-                        <a:srgbClr val="DCDCDC"/>
-                      </a:solidFill>
-                      <a:prstDash val="solid"/>
-                      <a:round/>
-                      <a:headEnd type="none" w="med" len="med"/>
-                      <a:tailEnd type="none" w="med" len="med"/>
-                    </a:lnL>
-                    <a:lnR w="6350" cap="flat" cmpd="sng" algn="ctr">
-                      <a:solidFill>
-                        <a:srgbClr val="DCDCDC"/>
-                      </a:solidFill>
-                      <a:prstDash val="solid"/>
-                      <a:round/>
-                      <a:headEnd type="none" w="med" len="med"/>
-                      <a:tailEnd type="none" w="med" len="med"/>
-                    </a:lnR>
-                    <a:lnT w="6350" cap="flat" cmpd="sng" algn="ctr">
-                      <a:solidFill>
-                        <a:srgbClr val="DCDCDC"/>
-                      </a:solidFill>
-                      <a:prstDash val="solid"/>
-                      <a:round/>
-                      <a:headEnd type="none" w="med" len="med"/>
-                      <a:tailEnd type="none" w="med" len="med"/>
-                    </a:lnT>
-                    <a:lnB w="6350" cap="flat" cmpd="sng" algn="ctr">
-                      <a:solidFill>
-                        <a:srgbClr val="DCDCDC"/>
-                      </a:solidFill>
-                      <a:prstDash val="solid"/>
-                      <a:round/>
-                      <a:headEnd type="none" w="med" len="med"/>
-                      <a:tailEnd type="none" w="med" len="med"/>
-                    </a:lnB>
-                    <a:solidFill>
-                      <a:srgbClr val="F4F4F4"/>
-                    </a:solidFill>
-                  </a:tcPr>
-                </a:tc>
-                <a:tc>
-                  <a:txBody>
-                    <a:bodyPr/>
-                    <a:lstStyle/>
-                    <a:p>
-                      <a:pPr marL="0" indent="0" algn="l">
-                        <a:buNone/>
-                      </a:pPr>
-                      <a:r>
-                        <a:rPr lang="en-US" sz="1200" b="1" dirty="0">
-                          <a:solidFill>
-                            <a:srgbClr val="1A1A1A"/>
-                          </a:solidFill>
-                          <a:latin typeface="Arial" pitchFamily="34" charset="0"/>
-                          <a:ea typeface="Arial" pitchFamily="34" charset="-122"/>
-                          <a:cs typeface="Arial" pitchFamily="34" charset="-120"/>
-                        </a:rPr>
-                        <a:t>What would fix it</a:t>
-                      </a:r>
-                      <a:endParaRPr lang="en-US" sz="1200" dirty="0">
-                        <a:latin typeface="Arial" charset="0"/>
-                        <a:ea typeface="Arial" charset="0"/>
-                        <a:cs typeface="Arial" charset="0"/>
-                      </a:endParaRPr>
-                    </a:p>
-                  </a:txBody>
-                  <a:tcPr marL="109728" marR="109728" marT="36576" marB="36576" anchor="ctr">
-                    <a:lnL w="6350" cap="flat" cmpd="sng" algn="ctr">
-                      <a:solidFill>
-                        <a:srgbClr val="DCDCDC"/>
-                      </a:solidFill>
-                      <a:prstDash val="solid"/>
-                      <a:round/>
-                      <a:headEnd type="none" w="med" len="med"/>
-                      <a:tailEnd type="none" w="med" len="med"/>
-                    </a:lnL>
-                    <a:lnR w="6350" cap="flat" cmpd="sng" algn="ctr">
-                      <a:solidFill>
-                        <a:srgbClr val="DCDCDC"/>
-                      </a:solidFill>
-                      <a:prstDash val="solid"/>
-                      <a:round/>
-                      <a:headEnd type="none" w="med" len="med"/>
-                      <a:tailEnd type="none" w="med" len="med"/>
-                    </a:lnR>
-                    <a:lnT w="6350" cap="flat" cmpd="sng" algn="ctr">
-                      <a:solidFill>
-                        <a:srgbClr val="DCDCDC"/>
-                      </a:solidFill>
-                      <a:prstDash val="solid"/>
-                      <a:round/>
-                      <a:headEnd type="none" w="med" len="med"/>
-                      <a:tailEnd type="none" w="med" len="med"/>
-                    </a:lnT>
-                    <a:lnB w="6350" cap="flat" cmpd="sng" algn="ctr">
-                      <a:solidFill>
-                        <a:srgbClr val="DCDCDC"/>
-                      </a:solidFill>
-                      <a:prstDash val="solid"/>
-                      <a:round/>
-                      <a:headEnd type="none" w="med" len="med"/>
-                      <a:tailEnd type="none" w="med" len="med"/>
-                    </a:lnB>
-                    <a:solidFill>
-                      <a:srgbClr val="F4F4F4"/>
-                    </a:solidFill>
-                  </a:tcPr>
-                </a:tc>
-                <a:tc>
-                  <a:txBody>
-                    <a:bodyPr/>
-                    <a:lstStyle/>
-                    <a:p>
-                      <a:pPr marL="0" indent="0" algn="l">
-                        <a:buNone/>
-                      </a:pPr>
-                      <a:r>
-                        <a:rPr lang="en-US" sz="1200" b="1" dirty="0">
-                          <a:solidFill>
-                            <a:srgbClr val="1A1A1A"/>
-                          </a:solidFill>
-                          <a:latin typeface="Arial" pitchFamily="34" charset="0"/>
-                          <a:ea typeface="Arial" pitchFamily="34" charset="-122"/>
-                          <a:cs typeface="Arial" pitchFamily="34" charset="-120"/>
-                        </a:rPr>
-                        <a:t>Status</a:t>
-                      </a:r>
-                      <a:endParaRPr lang="en-US" sz="1200" dirty="0">
-                        <a:latin typeface="Arial" charset="0"/>
-                        <a:ea typeface="Arial" charset="0"/>
-                        <a:cs typeface="Arial" charset="0"/>
-                      </a:endParaRPr>
-                    </a:p>
-                  </a:txBody>
-                  <a:tcPr marL="109728" marR="109728" marT="36576" marB="36576" anchor="ctr">
-                    <a:lnL w="6350" cap="flat" cmpd="sng" algn="ctr">
-                      <a:solidFill>
-                        <a:srgbClr val="DCDCDC"/>
-                      </a:solidFill>
-                      <a:prstDash val="solid"/>
-                      <a:round/>
-                      <a:headEnd type="none" w="med" len="med"/>
-                      <a:tailEnd type="none" w="med" len="med"/>
-                    </a:lnL>
-                    <a:lnR w="6350" cap="flat" cmpd="sng" algn="ctr">
-                      <a:solidFill>
-                        <a:srgbClr val="DCDCDC"/>
-                      </a:solidFill>
-                      <a:prstDash val="solid"/>
-                      <a:round/>
-                      <a:headEnd type="none" w="med" len="med"/>
-                      <a:tailEnd type="none" w="med" len="med"/>
-                    </a:lnR>
-                    <a:lnT w="6350" cap="flat" cmpd="sng" algn="ctr">
-                      <a:solidFill>
-                        <a:srgbClr val="DCDCDC"/>
-                      </a:solidFill>
-                      <a:prstDash val="solid"/>
-                      <a:round/>
-                      <a:headEnd type="none" w="med" len="med"/>
-                      <a:tailEnd type="none" w="med" len="med"/>
-                    </a:lnT>
-                    <a:lnB w="6350" cap="flat" cmpd="sng" algn="ctr">
-                      <a:solidFill>
-                        <a:srgbClr val="DCDCDC"/>
-                      </a:solidFill>
-                      <a:prstDash val="solid"/>
-                      <a:round/>
-                      <a:headEnd type="none" w="med" len="med"/>
-                      <a:tailEnd type="none" w="med" len="med"/>
-                    </a:lnB>
-                    <a:solidFill>
-                      <a:srgbClr val="F4F4F4"/>
-                    </a:solidFill>
-                  </a:tcPr>
-                </a:tc>
-                <a:extLst>
-                  <a:ext uri="{0D108BD9-81ED-4DB2-BD59-A6C34878D82A}">
-                    <a16:rowId xmlns:a16="http://schemas.microsoft.com/office/drawing/2014/main" val="10000"/>
-                  </a:ext>
-                </a:extLst>
-              </a:tr>
-              <a:tr h="402336">
-                <a:tc>
-                  <a:txBody>
-                    <a:bodyPr/>
-                    <a:lstStyle/>
-                    <a:p>
-                      <a:pPr marL="0" indent="0" algn="l">
-                        <a:buNone/>
-                      </a:pPr>
-                      <a:r>
-                        <a:rPr lang="en-US" sz="1200" dirty="0">
-                          <a:solidFill>
-                            <a:srgbClr val="444444"/>
-                          </a:solidFill>
-                          <a:latin typeface="Arial" pitchFamily="34" charset="0"/>
-                          <a:ea typeface="Arial" pitchFamily="34" charset="-122"/>
-                          <a:cs typeface="Arial" pitchFamily="34" charset="-120"/>
-                        </a:rPr>
-                        <a:t>Judges are 3B; metrics track the judge</a:t>
-                      </a:r>
-                      <a:endParaRPr lang="en-US" sz="1200" dirty="0">
-                        <a:latin typeface="Arial" charset="0"/>
-                        <a:ea typeface="Arial" charset="0"/>
-                        <a:cs typeface="Arial" charset="0"/>
-                      </a:endParaRPr>
-                    </a:p>
-                  </a:txBody>
-                  <a:tcPr marL="109728" marR="109728" marT="36576" marB="36576" anchor="ctr">
-                    <a:lnL w="6350" cap="flat" cmpd="sng" algn="ctr">
-                      <a:solidFill>
-                        <a:srgbClr val="DCDCDC"/>
-                      </a:solidFill>
-                      <a:prstDash val="solid"/>
-                      <a:round/>
-                      <a:headEnd type="none" w="med" len="med"/>
-                      <a:tailEnd type="none" w="med" len="med"/>
-                    </a:lnL>
-                    <a:lnR w="6350" cap="flat" cmpd="sng" algn="ctr">
-                      <a:solidFill>
-                        <a:srgbClr val="DCDCDC"/>
-                      </a:solidFill>
-                      <a:prstDash val="solid"/>
-                      <a:round/>
-                      <a:headEnd type="none" w="med" len="med"/>
-                      <a:tailEnd type="none" w="med" len="med"/>
-                    </a:lnR>
-                    <a:lnT w="6350" cap="flat" cmpd="sng" algn="ctr">
-                      <a:solidFill>
-                        <a:srgbClr val="DCDCDC"/>
-                      </a:solidFill>
-                      <a:prstDash val="solid"/>
-                      <a:round/>
-                      <a:headEnd type="none" w="med" len="med"/>
-                      <a:tailEnd type="none" w="med" len="med"/>
-                    </a:lnT>
-                    <a:lnB w="6350" cap="flat" cmpd="sng" algn="ctr">
-                      <a:solidFill>
-                        <a:srgbClr val="DCDCDC"/>
-                      </a:solidFill>
-                      <a:prstDash val="solid"/>
-                      <a:round/>
-                      <a:headEnd type="none" w="med" len="med"/>
-                      <a:tailEnd type="none" w="med" len="med"/>
-                    </a:lnB>
-                    <a:solidFill>
-                      <a:srgbClr val="FFFFFF"/>
-                    </a:solidFill>
-                  </a:tcPr>
-                </a:tc>
-                <a:tc>
-                  <a:txBody>
-                    <a:bodyPr/>
-                    <a:lstStyle/>
-                    <a:p>
-                      <a:pPr marL="0" indent="0" algn="l">
-                        <a:buNone/>
-                      </a:pPr>
-                      <a:r>
-                        <a:rPr lang="en-US" sz="1200" dirty="0">
-                          <a:solidFill>
-                            <a:srgbClr val="444444"/>
-                          </a:solidFill>
-                          <a:latin typeface="Arial" pitchFamily="34" charset="0"/>
-                          <a:ea typeface="Arial" pitchFamily="34" charset="-122"/>
-                          <a:cs typeface="Arial" pitchFamily="34" charset="-120"/>
-                        </a:rPr>
-                        <a:t>Stronger local judge (7–14B)</a:t>
-                      </a:r>
-                      <a:endParaRPr lang="en-US" sz="1200" dirty="0">
-                        <a:latin typeface="Arial" charset="0"/>
-                        <a:ea typeface="Arial" charset="0"/>
-                        <a:cs typeface="Arial" charset="0"/>
-                      </a:endParaRPr>
-                    </a:p>
-                  </a:txBody>
-                  <a:tcPr marL="109728" marR="109728" marT="36576" marB="36576" anchor="ctr">
-                    <a:lnL w="6350" cap="flat" cmpd="sng" algn="ctr">
-                      <a:solidFill>
-                        <a:srgbClr val="DCDCDC"/>
-                      </a:solidFill>
-                      <a:prstDash val="solid"/>
-                      <a:round/>
-                      <a:headEnd type="none" w="med" len="med"/>
-                      <a:tailEnd type="none" w="med" len="med"/>
-                    </a:lnL>
-                    <a:lnR w="6350" cap="flat" cmpd="sng" algn="ctr">
-                      <a:solidFill>
-                        <a:srgbClr val="DCDCDC"/>
-                      </a:solidFill>
-                      <a:prstDash val="solid"/>
-                      <a:round/>
-                      <a:headEnd type="none" w="med" len="med"/>
-                      <a:tailEnd type="none" w="med" len="med"/>
-                    </a:lnR>
-                    <a:lnT w="6350" cap="flat" cmpd="sng" algn="ctr">
-                      <a:solidFill>
-                        <a:srgbClr val="DCDCDC"/>
-                      </a:solidFill>
-                      <a:prstDash val="solid"/>
-                      <a:round/>
-                      <a:headEnd type="none" w="med" len="med"/>
-                      <a:tailEnd type="none" w="med" len="med"/>
-                    </a:lnT>
-                    <a:lnB w="6350" cap="flat" cmpd="sng" algn="ctr">
-                      <a:solidFill>
-                        <a:srgbClr val="DCDCDC"/>
-                      </a:solidFill>
-                      <a:prstDash val="solid"/>
-                      <a:round/>
-                      <a:headEnd type="none" w="med" len="med"/>
-                      <a:tailEnd type="none" w="med" len="med"/>
-                    </a:lnB>
-                    <a:solidFill>
-                      <a:srgbClr val="FFFFFF"/>
-                    </a:solidFill>
-                  </a:tcPr>
-                </a:tc>
-                <a:tc>
-                  <a:txBody>
-                    <a:bodyPr/>
-                    <a:lstStyle/>
-                    <a:p>
-                      <a:pPr marL="0" indent="0" algn="l">
-                        <a:buNone/>
-                      </a:pPr>
-                      <a:r>
-                        <a:rPr lang="en-US" sz="1200" b="1" dirty="0">
-                          <a:solidFill>
-                            <a:srgbClr val="E90802"/>
-                          </a:solidFill>
-                          <a:latin typeface="Arial" pitchFamily="34" charset="0"/>
-                          <a:ea typeface="Arial" pitchFamily="34" charset="-122"/>
-                          <a:cs typeface="Arial" pitchFamily="34" charset="-120"/>
-                        </a:rPr>
-                        <a:t>tested — 4.2× more found</a:t>
-                      </a:r>
-                      <a:endParaRPr lang="en-US" sz="1200" dirty="0">
-                        <a:latin typeface="Arial" charset="0"/>
-                        <a:ea typeface="Arial" charset="0"/>
-                        <a:cs typeface="Arial" charset="0"/>
-                      </a:endParaRPr>
-                    </a:p>
-                  </a:txBody>
-                  <a:tcPr marL="109728" marR="109728" marT="36576" marB="36576" anchor="ctr">
-                    <a:lnL w="6350" cap="flat" cmpd="sng" algn="ctr">
-                      <a:solidFill>
-                        <a:srgbClr val="DCDCDC"/>
-                      </a:solidFill>
-                      <a:prstDash val="solid"/>
-                      <a:round/>
-                      <a:headEnd type="none" w="med" len="med"/>
-                      <a:tailEnd type="none" w="med" len="med"/>
-                    </a:lnL>
-                    <a:lnR w="6350" cap="flat" cmpd="sng" algn="ctr">
-                      <a:solidFill>
-                        <a:srgbClr val="DCDCDC"/>
-                      </a:solidFill>
-                      <a:prstDash val="solid"/>
-                      <a:round/>
-                      <a:headEnd type="none" w="med" len="med"/>
-                      <a:tailEnd type="none" w="med" len="med"/>
-                    </a:lnR>
-                    <a:lnT w="6350" cap="flat" cmpd="sng" algn="ctr">
-                      <a:solidFill>
-                        <a:srgbClr val="DCDCDC"/>
-                      </a:solidFill>
-                      <a:prstDash val="solid"/>
-                      <a:round/>
-                      <a:headEnd type="none" w="med" len="med"/>
-                      <a:tailEnd type="none" w="med" len="med"/>
-                    </a:lnT>
-                    <a:lnB w="6350" cap="flat" cmpd="sng" algn="ctr">
-                      <a:solidFill>
-                        <a:srgbClr val="DCDCDC"/>
-                      </a:solidFill>
-                      <a:prstDash val="solid"/>
-                      <a:round/>
-                      <a:headEnd type="none" w="med" len="med"/>
-                      <a:tailEnd type="none" w="med" len="med"/>
-                    </a:lnB>
-                    <a:solidFill>
-                      <a:srgbClr val="FFFFFF"/>
-                    </a:solidFill>
-                  </a:tcPr>
-                </a:tc>
-                <a:extLst>
-                  <a:ext uri="{0D108BD9-81ED-4DB2-BD59-A6C34878D82A}">
-                    <a16:rowId xmlns:a16="http://schemas.microsoft.com/office/drawing/2014/main" val="10001"/>
-                  </a:ext>
-                </a:extLst>
-              </a:tr>
-              <a:tr h="402336">
-                <a:tc>
-                  <a:txBody>
-                    <a:bodyPr/>
-                    <a:lstStyle/>
-                    <a:p>
-                      <a:pPr marL="0" indent="0" algn="l">
-                        <a:buNone/>
-                      </a:pPr>
-                      <a:r>
-                        <a:rPr lang="en-US" sz="1200" dirty="0">
-                          <a:solidFill>
-                            <a:srgbClr val="444444"/>
-                          </a:solidFill>
-                          <a:latin typeface="Arial" pitchFamily="34" charset="0"/>
-                          <a:ea typeface="Arial" pitchFamily="34" charset="-122"/>
-                          <a:cs typeface="Arial" pitchFamily="34" charset="-120"/>
-                        </a:rPr>
-                        <a:t>Union is dominated by the permissive judge</a:t>
-                      </a:r>
-                      <a:endParaRPr lang="en-US" sz="1200" dirty="0">
-                        <a:latin typeface="Arial" charset="0"/>
-                        <a:ea typeface="Arial" charset="0"/>
-                        <a:cs typeface="Arial" charset="0"/>
-                      </a:endParaRPr>
-                    </a:p>
-                  </a:txBody>
-                  <a:tcPr marL="109728" marR="109728" marT="36576" marB="36576" anchor="ctr">
-                    <a:lnL w="6350" cap="flat" cmpd="sng" algn="ctr">
-                      <a:solidFill>
-                        <a:srgbClr val="DCDCDC"/>
-                      </a:solidFill>
-                      <a:prstDash val="solid"/>
-                      <a:round/>
-                      <a:headEnd type="none" w="med" len="med"/>
-                      <a:tailEnd type="none" w="med" len="med"/>
-                    </a:lnL>
-                    <a:lnR w="6350" cap="flat" cmpd="sng" algn="ctr">
-                      <a:solidFill>
-                        <a:srgbClr val="DCDCDC"/>
-                      </a:solidFill>
-                      <a:prstDash val="solid"/>
-                      <a:round/>
-                      <a:headEnd type="none" w="med" len="med"/>
-                      <a:tailEnd type="none" w="med" len="med"/>
-                    </a:lnR>
-                    <a:lnT w="6350" cap="flat" cmpd="sng" algn="ctr">
-                      <a:solidFill>
-                        <a:srgbClr val="DCDCDC"/>
-                      </a:solidFill>
-                      <a:prstDash val="solid"/>
-                      <a:round/>
-                      <a:headEnd type="none" w="med" len="med"/>
-                      <a:tailEnd type="none" w="med" len="med"/>
-                    </a:lnT>
-                    <a:lnB w="6350" cap="flat" cmpd="sng" algn="ctr">
-                      <a:solidFill>
-                        <a:srgbClr val="DCDCDC"/>
-                      </a:solidFill>
-                      <a:prstDash val="solid"/>
-                      <a:round/>
-                      <a:headEnd type="none" w="med" len="med"/>
-                      <a:tailEnd type="none" w="med" len="med"/>
-                    </a:lnB>
-                    <a:solidFill>
-                      <a:srgbClr val="FFFFFF"/>
-                    </a:solidFill>
-                  </a:tcPr>
-                </a:tc>
-                <a:tc>
-                  <a:txBody>
-                    <a:bodyPr/>
-                    <a:lstStyle/>
-                    <a:p>
-                      <a:pPr marL="0" indent="0" algn="l">
-                        <a:buNone/>
-                      </a:pPr>
-                      <a:r>
-                        <a:rPr lang="en-US" sz="1200" dirty="0">
-                          <a:solidFill>
-                            <a:srgbClr val="444444"/>
-                          </a:solidFill>
-                          <a:latin typeface="Arial" pitchFamily="34" charset="0"/>
-                          <a:ea typeface="Arial" pitchFamily="34" charset="-122"/>
-                          <a:cs typeface="Arial" pitchFamily="34" charset="-120"/>
-                        </a:rPr>
-                        <a:t>Majority vote, or a third judge</a:t>
-                      </a:r>
-                      <a:endParaRPr lang="en-US" sz="1200" dirty="0">
-                        <a:latin typeface="Arial" charset="0"/>
-                        <a:ea typeface="Arial" charset="0"/>
-                        <a:cs typeface="Arial" charset="0"/>
-                      </a:endParaRPr>
-                    </a:p>
-                  </a:txBody>
-                  <a:tcPr marL="109728" marR="109728" marT="36576" marB="36576" anchor="ctr">
-                    <a:lnL w="6350" cap="flat" cmpd="sng" algn="ctr">
-                      <a:solidFill>
-                        <a:srgbClr val="DCDCDC"/>
-                      </a:solidFill>
-                      <a:prstDash val="solid"/>
-                      <a:round/>
-                      <a:headEnd type="none" w="med" len="med"/>
-                      <a:tailEnd type="none" w="med" len="med"/>
-                    </a:lnL>
-                    <a:lnR w="6350" cap="flat" cmpd="sng" algn="ctr">
-                      <a:solidFill>
-                        <a:srgbClr val="DCDCDC"/>
-                      </a:solidFill>
-                      <a:prstDash val="solid"/>
-                      <a:round/>
-                      <a:headEnd type="none" w="med" len="med"/>
-                      <a:tailEnd type="none" w="med" len="med"/>
-                    </a:lnR>
-                    <a:lnT w="6350" cap="flat" cmpd="sng" algn="ctr">
-                      <a:solidFill>
-                        <a:srgbClr val="DCDCDC"/>
-                      </a:solidFill>
-                      <a:prstDash val="solid"/>
-                      <a:round/>
-                      <a:headEnd type="none" w="med" len="med"/>
-                      <a:tailEnd type="none" w="med" len="med"/>
-                    </a:lnT>
-                    <a:lnB w="6350" cap="flat" cmpd="sng" algn="ctr">
-                      <a:solidFill>
-                        <a:srgbClr val="DCDCDC"/>
-                      </a:solidFill>
-                      <a:prstDash val="solid"/>
-                      <a:round/>
-                      <a:headEnd type="none" w="med" len="med"/>
-                      <a:tailEnd type="none" w="med" len="med"/>
-                    </a:lnB>
-                    <a:solidFill>
-                      <a:srgbClr val="FFFFFF"/>
-                    </a:solidFill>
-                  </a:tcPr>
-                </a:tc>
-                <a:tc>
-                  <a:txBody>
-                    <a:bodyPr/>
-                    <a:lstStyle/>
-                    <a:p>
-                      <a:pPr marL="0" indent="0" algn="l">
-                        <a:buNone/>
-                      </a:pPr>
-                      <a:r>
-                        <a:rPr lang="en-US" sz="1200" b="1" dirty="0">
-                          <a:solidFill>
-                            <a:srgbClr val="E90802"/>
-                          </a:solidFill>
-                          <a:latin typeface="Arial" pitchFamily="34" charset="0"/>
-                          <a:ea typeface="Arial" pitchFamily="34" charset="-122"/>
-                          <a:cs typeface="Arial" pitchFamily="34" charset="-120"/>
-                        </a:rPr>
-                        <a:t>tested — majority wins</a:t>
-                      </a:r>
-                      <a:endParaRPr lang="en-US" sz="1200" dirty="0">
-                        <a:latin typeface="Arial" charset="0"/>
-                        <a:ea typeface="Arial" charset="0"/>
-                        <a:cs typeface="Arial" charset="0"/>
-                      </a:endParaRPr>
-                    </a:p>
-                  </a:txBody>
-                  <a:tcPr marL="109728" marR="109728" marT="36576" marB="36576" anchor="ctr">
-                    <a:lnL w="6350" cap="flat" cmpd="sng" algn="ctr">
-                      <a:solidFill>
-                        <a:srgbClr val="DCDCDC"/>
-                      </a:solidFill>
-                      <a:prstDash val="solid"/>
-                      <a:round/>
-                      <a:headEnd type="none" w="med" len="med"/>
-                      <a:tailEnd type="none" w="med" len="med"/>
-                    </a:lnL>
-                    <a:lnR w="6350" cap="flat" cmpd="sng" algn="ctr">
-                      <a:solidFill>
-                        <a:srgbClr val="DCDCDC"/>
-                      </a:solidFill>
-                      <a:prstDash val="solid"/>
-                      <a:round/>
-                      <a:headEnd type="none" w="med" len="med"/>
-                      <a:tailEnd type="none" w="med" len="med"/>
-                    </a:lnR>
-                    <a:lnT w="6350" cap="flat" cmpd="sng" algn="ctr">
-                      <a:solidFill>
-                        <a:srgbClr val="DCDCDC"/>
-                      </a:solidFill>
-                      <a:prstDash val="solid"/>
-                      <a:round/>
-                      <a:headEnd type="none" w="med" len="med"/>
-                      <a:tailEnd type="none" w="med" len="med"/>
-                    </a:lnT>
-                    <a:lnB w="6350" cap="flat" cmpd="sng" algn="ctr">
-                      <a:solidFill>
-                        <a:srgbClr val="DCDCDC"/>
-                      </a:solidFill>
-                      <a:prstDash val="solid"/>
-                      <a:round/>
-                      <a:headEnd type="none" w="med" len="med"/>
-                      <a:tailEnd type="none" w="med" len="med"/>
-                    </a:lnB>
-                    <a:solidFill>
-                      <a:srgbClr val="FFFFFF"/>
-                    </a:solidFill>
-                  </a:tcPr>
-                </a:tc>
-                <a:extLst>
-                  <a:ext uri="{0D108BD9-81ED-4DB2-BD59-A6C34878D82A}">
-                    <a16:rowId xmlns:a16="http://schemas.microsoft.com/office/drawing/2014/main" val="10002"/>
-                  </a:ext>
-                </a:extLst>
-              </a:tr>
-              <a:tr h="402336">
-                <a:tc>
-                  <a:txBody>
-                    <a:bodyPr/>
-                    <a:lstStyle/>
-                    <a:p>
-                      <a:pPr marL="0" indent="0" algn="l">
-                        <a:buNone/>
-                      </a:pPr>
-                      <a:r>
-                        <a:rPr lang="en-US" sz="1200" dirty="0">
-                          <a:solidFill>
-                            <a:srgbClr val="444444"/>
-                          </a:solidFill>
-                          <a:latin typeface="Arial" pitchFamily="34" charset="0"/>
-                          <a:ea typeface="Arial" pitchFamily="34" charset="-122"/>
-                          <a:cs typeface="Arial" pitchFamily="34" charset="-120"/>
-                        </a:rPr>
-                        <a:t>Undecided dominates — 146 of 258 verdicts</a:t>
-                      </a:r>
-                      <a:endParaRPr lang="en-US" sz="1200" dirty="0">
-                        <a:latin typeface="Arial" charset="0"/>
-                        <a:ea typeface="Arial" charset="0"/>
-                        <a:cs typeface="Arial" charset="0"/>
-                      </a:endParaRPr>
-                    </a:p>
-                  </a:txBody>
-                  <a:tcPr marL="109728" marR="109728" marT="36576" marB="36576" anchor="ctr">
-                    <a:lnL w="6350" cap="flat" cmpd="sng" algn="ctr">
-                      <a:solidFill>
-                        <a:srgbClr val="DCDCDC"/>
-                      </a:solidFill>
-                      <a:prstDash val="solid"/>
-                      <a:round/>
-                      <a:headEnd type="none" w="med" len="med"/>
-                      <a:tailEnd type="none" w="med" len="med"/>
-                    </a:lnL>
-                    <a:lnR w="6350" cap="flat" cmpd="sng" algn="ctr">
-                      <a:solidFill>
-                        <a:srgbClr val="DCDCDC"/>
-                      </a:solidFill>
-                      <a:prstDash val="solid"/>
-                      <a:round/>
-                      <a:headEnd type="none" w="med" len="med"/>
-                      <a:tailEnd type="none" w="med" len="med"/>
-                    </a:lnR>
-                    <a:lnT w="6350" cap="flat" cmpd="sng" algn="ctr">
-                      <a:solidFill>
-                        <a:srgbClr val="DCDCDC"/>
-                      </a:solidFill>
-                      <a:prstDash val="solid"/>
-                      <a:round/>
-                      <a:headEnd type="none" w="med" len="med"/>
-                      <a:tailEnd type="none" w="med" len="med"/>
-                    </a:lnT>
-                    <a:lnB w="6350" cap="flat" cmpd="sng" algn="ctr">
-                      <a:solidFill>
-                        <a:srgbClr val="DCDCDC"/>
-                      </a:solidFill>
-                      <a:prstDash val="solid"/>
-                      <a:round/>
-                      <a:headEnd type="none" w="med" len="med"/>
-                      <a:tailEnd type="none" w="med" len="med"/>
-                    </a:lnB>
-                    <a:solidFill>
-                      <a:srgbClr val="FFFFFF"/>
-                    </a:solidFill>
-                  </a:tcPr>
-                </a:tc>
-                <a:tc>
-                  <a:txBody>
-                    <a:bodyPr/>
-                    <a:lstStyle/>
-                    <a:p>
-                      <a:pPr marL="0" indent="0" algn="l">
-                        <a:buNone/>
-                      </a:pPr>
-                      <a:r>
-                        <a:rPr lang="en-US" sz="1200" dirty="0">
-                          <a:solidFill>
-                            <a:srgbClr val="444444"/>
-                          </a:solidFill>
-                          <a:latin typeface="Arial" pitchFamily="34" charset="0"/>
-                          <a:ea typeface="Arial" pitchFamily="34" charset="-122"/>
-                          <a:cs typeface="Arial" pitchFamily="34" charset="-120"/>
-                        </a:rPr>
-                        <a:t>Dense retrieval, query expansion, reranking</a:t>
-                      </a:r>
-                      <a:endParaRPr lang="en-US" sz="1200" dirty="0">
-                        <a:latin typeface="Arial" charset="0"/>
-                        <a:ea typeface="Arial" charset="0"/>
-                        <a:cs typeface="Arial" charset="0"/>
-                      </a:endParaRPr>
-                    </a:p>
-                  </a:txBody>
-                  <a:tcPr marL="109728" marR="109728" marT="36576" marB="36576" anchor="ctr">
-                    <a:lnL w="6350" cap="flat" cmpd="sng" algn="ctr">
-                      <a:solidFill>
-                        <a:srgbClr val="DCDCDC"/>
-                      </a:solidFill>
-                      <a:prstDash val="solid"/>
-                      <a:round/>
-                      <a:headEnd type="none" w="med" len="med"/>
-                      <a:tailEnd type="none" w="med" len="med"/>
-                    </a:lnL>
-                    <a:lnR w="6350" cap="flat" cmpd="sng" algn="ctr">
-                      <a:solidFill>
-                        <a:srgbClr val="DCDCDC"/>
-                      </a:solidFill>
-                      <a:prstDash val="solid"/>
-                      <a:round/>
-                      <a:headEnd type="none" w="med" len="med"/>
-                      <a:tailEnd type="none" w="med" len="med"/>
-                    </a:lnR>
-                    <a:lnT w="6350" cap="flat" cmpd="sng" algn="ctr">
-                      <a:solidFill>
-                        <a:srgbClr val="DCDCDC"/>
-                      </a:solidFill>
-                      <a:prstDash val="solid"/>
-                      <a:round/>
-                      <a:headEnd type="none" w="med" len="med"/>
-                      <a:tailEnd type="none" w="med" len="med"/>
-                    </a:lnT>
-                    <a:lnB w="6350" cap="flat" cmpd="sng" algn="ctr">
-                      <a:solidFill>
-                        <a:srgbClr val="DCDCDC"/>
-                      </a:solidFill>
-                      <a:prstDash val="solid"/>
-                      <a:round/>
-                      <a:headEnd type="none" w="med" len="med"/>
-                      <a:tailEnd type="none" w="med" len="med"/>
-                    </a:lnB>
-                    <a:solidFill>
-                      <a:srgbClr val="FFFFFF"/>
-                    </a:solidFill>
-                  </a:tcPr>
-                </a:tc>
-                <a:tc>
-                  <a:txBody>
-                    <a:bodyPr/>
-                    <a:lstStyle/>
-                    <a:p>
-                      <a:pPr marL="0" indent="0" algn="l">
-                        <a:buNone/>
-                      </a:pPr>
-                      <a:r>
-                        <a:rPr lang="en-US" sz="1200" dirty="0">
-                          <a:solidFill>
-                            <a:srgbClr val="444444"/>
-                          </a:solidFill>
-                          <a:latin typeface="Arial" pitchFamily="34" charset="0"/>
-                          <a:ea typeface="Arial" pitchFamily="34" charset="-122"/>
-                          <a:cs typeface="Arial" pitchFamily="34" charset="-120"/>
-                        </a:rPr>
-                        <a:t>not yet run</a:t>
-                      </a:r>
-                      <a:endParaRPr lang="en-US" sz="1200" dirty="0">
-                        <a:latin typeface="Arial" charset="0"/>
-                        <a:ea typeface="Arial" charset="0"/>
-                        <a:cs typeface="Arial" charset="0"/>
-                      </a:endParaRPr>
-                    </a:p>
-                  </a:txBody>
-                  <a:tcPr marL="109728" marR="109728" marT="36576" marB="36576" anchor="ctr">
-                    <a:lnL w="6350" cap="flat" cmpd="sng" algn="ctr">
-                      <a:solidFill>
-                        <a:srgbClr val="DCDCDC"/>
-                      </a:solidFill>
-                      <a:prstDash val="solid"/>
-                      <a:round/>
-                      <a:headEnd type="none" w="med" len="med"/>
-                      <a:tailEnd type="none" w="med" len="med"/>
-                    </a:lnL>
-                    <a:lnR w="6350" cap="flat" cmpd="sng" algn="ctr">
-                      <a:solidFill>
-                        <a:srgbClr val="DCDCDC"/>
-                      </a:solidFill>
-                      <a:prstDash val="solid"/>
-                      <a:round/>
-                      <a:headEnd type="none" w="med" len="med"/>
-                      <a:tailEnd type="none" w="med" len="med"/>
-                    </a:lnR>
-                    <a:lnT w="6350" cap="flat" cmpd="sng" algn="ctr">
-                      <a:solidFill>
-                        <a:srgbClr val="DCDCDC"/>
-                      </a:solidFill>
-                      <a:prstDash val="solid"/>
-                      <a:round/>
-                      <a:headEnd type="none" w="med" len="med"/>
-                      <a:tailEnd type="none" w="med" len="med"/>
-                    </a:lnT>
-                    <a:lnB w="6350" cap="flat" cmpd="sng" algn="ctr">
-                      <a:solidFill>
-                        <a:srgbClr val="DCDCDC"/>
-                      </a:solidFill>
-                      <a:prstDash val="solid"/>
-                      <a:round/>
-                      <a:headEnd type="none" w="med" len="med"/>
-                      <a:tailEnd type="none" w="med" len="med"/>
-                    </a:lnB>
-                    <a:solidFill>
-                      <a:srgbClr val="FFFFFF"/>
-                    </a:solidFill>
-                  </a:tcPr>
-                </a:tc>
-                <a:extLst>
-                  <a:ext uri="{0D108BD9-81ED-4DB2-BD59-A6C34878D82A}">
-                    <a16:rowId xmlns:a16="http://schemas.microsoft.com/office/drawing/2014/main" val="10003"/>
-                  </a:ext>
-                </a:extLst>
-              </a:tr>
-              <a:tr h="402336">
-                <a:tc>
-                  <a:txBody>
-                    <a:bodyPr/>
-                    <a:lstStyle/>
-                    <a:p>
-                      <a:pPr marL="0" indent="0" algn="l">
-                        <a:buNone/>
-                      </a:pPr>
-                      <a:r>
-                        <a:rPr lang="en-US" sz="1200" dirty="0">
-                          <a:solidFill>
-                            <a:srgbClr val="444444"/>
-                          </a:solidFill>
-                          <a:latin typeface="Arial" pitchFamily="34" charset="0"/>
-                          <a:ea typeface="Arial" pitchFamily="34" charset="-122"/>
-                          <a:cs typeface="Arial" pitchFamily="34" charset="-120"/>
-                        </a:rPr>
-                        <a:t>Refined facts are sometimes still flagged</a:t>
-                      </a:r>
-                      <a:endParaRPr lang="en-US" sz="1200" dirty="0">
-                        <a:latin typeface="Arial" charset="0"/>
-                        <a:ea typeface="Arial" charset="0"/>
-                        <a:cs typeface="Arial" charset="0"/>
-                      </a:endParaRPr>
-                    </a:p>
-                  </a:txBody>
-                  <a:tcPr marL="109728" marR="109728" marT="36576" marB="36576" anchor="ctr">
-                    <a:lnL w="6350" cap="flat" cmpd="sng" algn="ctr">
-                      <a:solidFill>
-                        <a:srgbClr val="DCDCDC"/>
-                      </a:solidFill>
-                      <a:prstDash val="solid"/>
-                      <a:round/>
-                      <a:headEnd type="none" w="med" len="med"/>
-                      <a:tailEnd type="none" w="med" len="med"/>
-                    </a:lnL>
-                    <a:lnR w="6350" cap="flat" cmpd="sng" algn="ctr">
-                      <a:solidFill>
-                        <a:srgbClr val="DCDCDC"/>
-                      </a:solidFill>
-                      <a:prstDash val="solid"/>
-                      <a:round/>
-                      <a:headEnd type="none" w="med" len="med"/>
-                      <a:tailEnd type="none" w="med" len="med"/>
-                    </a:lnR>
-                    <a:lnT w="6350" cap="flat" cmpd="sng" algn="ctr">
-                      <a:solidFill>
-                        <a:srgbClr val="DCDCDC"/>
-                      </a:solidFill>
-                      <a:prstDash val="solid"/>
-                      <a:round/>
-                      <a:headEnd type="none" w="med" len="med"/>
-                      <a:tailEnd type="none" w="med" len="med"/>
-                    </a:lnT>
-                    <a:lnB w="6350" cap="flat" cmpd="sng" algn="ctr">
-                      <a:solidFill>
-                        <a:srgbClr val="DCDCDC"/>
-                      </a:solidFill>
-                      <a:prstDash val="solid"/>
-                      <a:round/>
-                      <a:headEnd type="none" w="med" len="med"/>
-                      <a:tailEnd type="none" w="med" len="med"/>
-                    </a:lnB>
-                    <a:solidFill>
-                      <a:srgbClr val="FFFFFF"/>
-                    </a:solidFill>
-                  </a:tcPr>
-                </a:tc>
-                <a:tc>
-                  <a:txBody>
-                    <a:bodyPr/>
-                    <a:lstStyle/>
-                    <a:p>
-                      <a:pPr marL="0" indent="0" algn="l">
-                        <a:buNone/>
-                      </a:pPr>
-                      <a:r>
-                        <a:rPr lang="en-US" sz="1200" dirty="0">
-                          <a:solidFill>
-                            <a:srgbClr val="444444"/>
-                          </a:solidFill>
-                          <a:latin typeface="Arial" pitchFamily="34" charset="0"/>
-                          <a:ea typeface="Arial" pitchFamily="34" charset="-122"/>
-                          <a:cs typeface="Arial" pitchFamily="34" charset="-120"/>
-                        </a:rPr>
-                        <a:t>Iterative refinement, maximum two passes</a:t>
-                      </a:r>
-                      <a:endParaRPr lang="en-US" sz="1200" dirty="0">
-                        <a:latin typeface="Arial" charset="0"/>
-                        <a:ea typeface="Arial" charset="0"/>
-                        <a:cs typeface="Arial" charset="0"/>
-                      </a:endParaRPr>
-                    </a:p>
-                  </a:txBody>
-                  <a:tcPr marL="109728" marR="109728" marT="36576" marB="36576" anchor="ctr">
-                    <a:lnL w="6350" cap="flat" cmpd="sng" algn="ctr">
-                      <a:solidFill>
-                        <a:srgbClr val="DCDCDC"/>
-                      </a:solidFill>
-                      <a:prstDash val="solid"/>
-                      <a:round/>
-                      <a:headEnd type="none" w="med" len="med"/>
-                      <a:tailEnd type="none" w="med" len="med"/>
-                    </a:lnL>
-                    <a:lnR w="6350" cap="flat" cmpd="sng" algn="ctr">
-                      <a:solidFill>
-                        <a:srgbClr val="DCDCDC"/>
-                      </a:solidFill>
-                      <a:prstDash val="solid"/>
-                      <a:round/>
-                      <a:headEnd type="none" w="med" len="med"/>
-                      <a:tailEnd type="none" w="med" len="med"/>
-                    </a:lnR>
-                    <a:lnT w="6350" cap="flat" cmpd="sng" algn="ctr">
-                      <a:solidFill>
-                        <a:srgbClr val="DCDCDC"/>
-                      </a:solidFill>
-                      <a:prstDash val="solid"/>
-                      <a:round/>
-                      <a:headEnd type="none" w="med" len="med"/>
-                      <a:tailEnd type="none" w="med" len="med"/>
-                    </a:lnT>
-                    <a:lnB w="6350" cap="flat" cmpd="sng" algn="ctr">
-                      <a:solidFill>
-                        <a:srgbClr val="DCDCDC"/>
-                      </a:solidFill>
-                      <a:prstDash val="solid"/>
-                      <a:round/>
-                      <a:headEnd type="none" w="med" len="med"/>
-                      <a:tailEnd type="none" w="med" len="med"/>
-                    </a:lnB>
-                    <a:solidFill>
-                      <a:srgbClr val="FFFFFF"/>
-                    </a:solidFill>
-                  </a:tcPr>
-                </a:tc>
-                <a:tc>
-                  <a:txBody>
-                    <a:bodyPr/>
-                    <a:lstStyle/>
-                    <a:p>
-                      <a:pPr marL="0" indent="0" algn="l">
-                        <a:buNone/>
-                      </a:pPr>
-                      <a:r>
-                        <a:rPr lang="en-US" sz="1200" dirty="0">
-                          <a:solidFill>
-                            <a:srgbClr val="444444"/>
-                          </a:solidFill>
-                          <a:latin typeface="Arial" pitchFamily="34" charset="0"/>
-                          <a:ea typeface="Arial" pitchFamily="34" charset="-122"/>
-                          <a:cs typeface="Arial" pitchFamily="34" charset="-120"/>
-                        </a:rPr>
-                        <a:t>not yet run</a:t>
-                      </a:r>
-                      <a:endParaRPr lang="en-US" sz="1200" dirty="0">
-                        <a:latin typeface="Arial" charset="0"/>
-                        <a:ea typeface="Arial" charset="0"/>
-                        <a:cs typeface="Arial" charset="0"/>
-                      </a:endParaRPr>
-                    </a:p>
-                  </a:txBody>
-                  <a:tcPr marL="109728" marR="109728" marT="36576" marB="36576" anchor="ctr">
-                    <a:lnL w="6350" cap="flat" cmpd="sng" algn="ctr">
-                      <a:solidFill>
-                        <a:srgbClr val="DCDCDC"/>
-                      </a:solidFill>
-                      <a:prstDash val="solid"/>
-                      <a:round/>
-                      <a:headEnd type="none" w="med" len="med"/>
-                      <a:tailEnd type="none" w="med" len="med"/>
-                    </a:lnL>
-                    <a:lnR w="6350" cap="flat" cmpd="sng" algn="ctr">
-                      <a:solidFill>
-                        <a:srgbClr val="DCDCDC"/>
-                      </a:solidFill>
-                      <a:prstDash val="solid"/>
-                      <a:round/>
-                      <a:headEnd type="none" w="med" len="med"/>
-                      <a:tailEnd type="none" w="med" len="med"/>
-                    </a:lnR>
-                    <a:lnT w="6350" cap="flat" cmpd="sng" algn="ctr">
-                      <a:solidFill>
-                        <a:srgbClr val="DCDCDC"/>
-                      </a:solidFill>
-                      <a:prstDash val="solid"/>
-                      <a:round/>
-                      <a:headEnd type="none" w="med" len="med"/>
-                      <a:tailEnd type="none" w="med" len="med"/>
-                    </a:lnT>
-                    <a:lnB w="6350" cap="flat" cmpd="sng" algn="ctr">
-                      <a:solidFill>
-                        <a:srgbClr val="DCDCDC"/>
-                      </a:solidFill>
-                      <a:prstDash val="solid"/>
-                      <a:round/>
-                      <a:headEnd type="none" w="med" len="med"/>
-                      <a:tailEnd type="none" w="med" len="med"/>
-                    </a:lnB>
-                    <a:solidFill>
-                      <a:srgbClr val="FFFFFF"/>
-                    </a:solidFill>
-                  </a:tcPr>
-                </a:tc>
-                <a:extLst>
-                  <a:ext uri="{0D108BD9-81ED-4DB2-BD59-A6C34878D82A}">
-                    <a16:rowId xmlns:a16="http://schemas.microsoft.com/office/drawing/2014/main" val="10004"/>
-                  </a:ext>
-                </a:extLst>
-              </a:tr>
-              <a:tr h="402336">
-                <a:tc>
-                  <a:txBody>
-                    <a:bodyPr/>
-                    <a:lstStyle/>
-                    <a:p>
-                      <a:pPr marL="0" indent="0" algn="l">
-                        <a:buNone/>
-                      </a:pPr>
-                      <a:r>
-                        <a:rPr lang="en-US" sz="1200" dirty="0">
-                          <a:solidFill>
-                            <a:srgbClr val="444444"/>
-                          </a:solidFill>
-                          <a:latin typeface="Arial" pitchFamily="34" charset="0"/>
-                          <a:ea typeface="Arial" pitchFamily="34" charset="-122"/>
-                          <a:cs typeface="Arial" pitchFamily="34" charset="-120"/>
-                        </a:rPr>
-                        <a:t>12 questions, 86 facts, no human annotation</a:t>
-                      </a:r>
-                      <a:endParaRPr lang="en-US" sz="1200" dirty="0">
-                        <a:latin typeface="Arial" charset="0"/>
-                        <a:ea typeface="Arial" charset="0"/>
-                        <a:cs typeface="Arial" charset="0"/>
-                      </a:endParaRPr>
-                    </a:p>
-                  </a:txBody>
-                  <a:tcPr marL="109728" marR="109728" marT="36576" marB="36576" anchor="ctr">
-                    <a:lnL w="6350" cap="flat" cmpd="sng" algn="ctr">
-                      <a:solidFill>
-                        <a:srgbClr val="DCDCDC"/>
-                      </a:solidFill>
-                      <a:prstDash val="solid"/>
-                      <a:round/>
-                      <a:headEnd type="none" w="med" len="med"/>
-                      <a:tailEnd type="none" w="med" len="med"/>
-                    </a:lnL>
-                    <a:lnR w="6350" cap="flat" cmpd="sng" algn="ctr">
-                      <a:solidFill>
-                        <a:srgbClr val="DCDCDC"/>
-                      </a:solidFill>
-                      <a:prstDash val="solid"/>
-                      <a:round/>
-                      <a:headEnd type="none" w="med" len="med"/>
-                      <a:tailEnd type="none" w="med" len="med"/>
-                    </a:lnR>
-                    <a:lnT w="6350" cap="flat" cmpd="sng" algn="ctr">
-                      <a:solidFill>
-                        <a:srgbClr val="DCDCDC"/>
-                      </a:solidFill>
-                      <a:prstDash val="solid"/>
-                      <a:round/>
-                      <a:headEnd type="none" w="med" len="med"/>
-                      <a:tailEnd type="none" w="med" len="med"/>
-                    </a:lnT>
-                    <a:lnB w="6350" cap="flat" cmpd="sng" algn="ctr">
-                      <a:solidFill>
-                        <a:srgbClr val="DCDCDC"/>
-                      </a:solidFill>
-                      <a:prstDash val="solid"/>
-                      <a:round/>
-                      <a:headEnd type="none" w="med" len="med"/>
-                      <a:tailEnd type="none" w="med" len="med"/>
-                    </a:lnB>
-                    <a:solidFill>
-                      <a:srgbClr val="FFFFFF"/>
-                    </a:solidFill>
-                  </a:tcPr>
-                </a:tc>
-                <a:tc>
-                  <a:txBody>
-                    <a:bodyPr/>
-                    <a:lstStyle/>
-                    <a:p>
-                      <a:pPr marL="0" indent="0" algn="l">
-                        <a:buNone/>
-                      </a:pPr>
-                      <a:r>
-                        <a:rPr lang="en-US" sz="1200" dirty="0">
-                          <a:solidFill>
-                            <a:srgbClr val="444444"/>
-                          </a:solidFill>
-                          <a:latin typeface="Arial" pitchFamily="34" charset="0"/>
-                          <a:ea typeface="Arial" pitchFamily="34" charset="-122"/>
-                          <a:cs typeface="Arial" pitchFamily="34" charset="-120"/>
-                        </a:rPr>
-                        <a:t>Larger benchmark, human-verified references</a:t>
-                      </a:r>
-                      <a:endParaRPr lang="en-US" sz="1200" dirty="0">
-                        <a:latin typeface="Arial" charset="0"/>
-                        <a:ea typeface="Arial" charset="0"/>
-                        <a:cs typeface="Arial" charset="0"/>
-                      </a:endParaRPr>
-                    </a:p>
-                  </a:txBody>
-                  <a:tcPr marL="109728" marR="109728" marT="36576" marB="36576" anchor="ctr">
-                    <a:lnL w="6350" cap="flat" cmpd="sng" algn="ctr">
-                      <a:solidFill>
-                        <a:srgbClr val="DCDCDC"/>
-                      </a:solidFill>
-                      <a:prstDash val="solid"/>
-                      <a:round/>
-                      <a:headEnd type="none" w="med" len="med"/>
-                      <a:tailEnd type="none" w="med" len="med"/>
-                    </a:lnL>
-                    <a:lnR w="6350" cap="flat" cmpd="sng" algn="ctr">
-                      <a:solidFill>
-                        <a:srgbClr val="DCDCDC"/>
-                      </a:solidFill>
-                      <a:prstDash val="solid"/>
-                      <a:round/>
-                      <a:headEnd type="none" w="med" len="med"/>
-                      <a:tailEnd type="none" w="med" len="med"/>
-                    </a:lnR>
-                    <a:lnT w="6350" cap="flat" cmpd="sng" algn="ctr">
-                      <a:solidFill>
-                        <a:srgbClr val="DCDCDC"/>
-                      </a:solidFill>
-                      <a:prstDash val="solid"/>
-                      <a:round/>
-                      <a:headEnd type="none" w="med" len="med"/>
-                      <a:tailEnd type="none" w="med" len="med"/>
-                    </a:lnT>
-                    <a:lnB w="6350" cap="flat" cmpd="sng" algn="ctr">
-                      <a:solidFill>
-                        <a:srgbClr val="DCDCDC"/>
-                      </a:solidFill>
-                      <a:prstDash val="solid"/>
-                      <a:round/>
-                      <a:headEnd type="none" w="med" len="med"/>
-                      <a:tailEnd type="none" w="med" len="med"/>
-                    </a:lnB>
-                    <a:solidFill>
-                      <a:srgbClr val="FFFFFF"/>
-                    </a:solidFill>
-                  </a:tcPr>
-                </a:tc>
-                <a:tc>
-                  <a:txBody>
-                    <a:bodyPr/>
-                    <a:lstStyle/>
-                    <a:p>
-                      <a:pPr marL="0" indent="0" algn="l">
-                        <a:buNone/>
-                      </a:pPr>
-                      <a:r>
-                        <a:rPr lang="en-US" sz="1200" dirty="0">
-                          <a:solidFill>
-                            <a:srgbClr val="444444"/>
-                          </a:solidFill>
-                          <a:latin typeface="Arial" pitchFamily="34" charset="0"/>
-                          <a:ea typeface="Arial" pitchFamily="34" charset="-122"/>
-                          <a:cs typeface="Arial" pitchFamily="34" charset="-120"/>
-                        </a:rPr>
-                        <a:t>not yet run</a:t>
-                      </a:r>
-                      <a:endParaRPr lang="en-US" sz="1200" dirty="0">
-                        <a:latin typeface="Arial" charset="0"/>
-                        <a:ea typeface="Arial" charset="0"/>
-                        <a:cs typeface="Arial" charset="0"/>
-                      </a:endParaRPr>
-                    </a:p>
-                  </a:txBody>
-                  <a:tcPr marL="109728" marR="109728" marT="36576" marB="36576" anchor="ctr">
-                    <a:lnL w="6350" cap="flat" cmpd="sng" algn="ctr">
-                      <a:solidFill>
-                        <a:srgbClr val="DCDCDC"/>
-                      </a:solidFill>
-                      <a:prstDash val="solid"/>
-                      <a:round/>
-                      <a:headEnd type="none" w="med" len="med"/>
-                      <a:tailEnd type="none" w="med" len="med"/>
-                    </a:lnL>
-                    <a:lnR w="6350" cap="flat" cmpd="sng" algn="ctr">
-                      <a:solidFill>
-                        <a:srgbClr val="DCDCDC"/>
-                      </a:solidFill>
-                      <a:prstDash val="solid"/>
-                      <a:round/>
-                      <a:headEnd type="none" w="med" len="med"/>
-                      <a:tailEnd type="none" w="med" len="med"/>
-                    </a:lnR>
-                    <a:lnT w="6350" cap="flat" cmpd="sng" algn="ctr">
-                      <a:solidFill>
-                        <a:srgbClr val="DCDCDC"/>
-                      </a:solidFill>
-                      <a:prstDash val="solid"/>
-                      <a:round/>
-                      <a:headEnd type="none" w="med" len="med"/>
-                      <a:tailEnd type="none" w="med" len="med"/>
-                    </a:lnT>
-                    <a:lnB w="6350" cap="flat" cmpd="sng" algn="ctr">
-                      <a:solidFill>
-                        <a:srgbClr val="DCDCDC"/>
-                      </a:solidFill>
-                      <a:prstDash val="solid"/>
-                      <a:round/>
-                      <a:headEnd type="none" w="med" len="med"/>
-                      <a:tailEnd type="none" w="med" len="med"/>
-                    </a:lnB>
-                    <a:solidFill>
-                      <a:srgbClr val="FFFFFF"/>
-                    </a:solidFill>
-                  </a:tcPr>
-                </a:tc>
-                <a:extLst>
-                  <a:ext uri="{0D108BD9-81ED-4DB2-BD59-A6C34878D82A}">
-                    <a16:rowId xmlns:a16="http://schemas.microsoft.com/office/drawing/2014/main" val="10005"/>
-                  </a:ext>
-                </a:extLst>
-              </a:tr>
-              <a:tr h="402336">
-                <a:tc>
-                  <a:txBody>
-                    <a:bodyPr/>
-                    <a:lstStyle/>
-                    <a:p>
-                      <a:pPr marL="0" indent="0" algn="l">
-                        <a:buNone/>
-                      </a:pPr>
-                      <a:r>
-                        <a:rPr lang="en-US" sz="1200" dirty="0">
-                          <a:solidFill>
-                            <a:srgbClr val="444444"/>
-                          </a:solidFill>
-                          <a:latin typeface="Arial" pitchFamily="34" charset="0"/>
-                          <a:ea typeface="Arial" pitchFamily="34" charset="-122"/>
-                          <a:cs typeface="Arial" pitchFamily="34" charset="-120"/>
-                        </a:rPr>
-                        <a:t>Recall is itself judge-dependent (0.41 vs 0.28)</a:t>
-                      </a:r>
-                      <a:endParaRPr lang="en-US" sz="1200" dirty="0">
-                        <a:latin typeface="Arial" charset="0"/>
-                        <a:ea typeface="Arial" charset="0"/>
-                        <a:cs typeface="Arial" charset="0"/>
-                      </a:endParaRPr>
-                    </a:p>
-                  </a:txBody>
-                  <a:tcPr marL="109728" marR="109728" marT="36576" marB="36576" anchor="ctr">
-                    <a:lnL w="6350" cap="flat" cmpd="sng" algn="ctr">
-                      <a:solidFill>
-                        <a:srgbClr val="DCDCDC"/>
-                      </a:solidFill>
-                      <a:prstDash val="solid"/>
-                      <a:round/>
-                      <a:headEnd type="none" w="med" len="med"/>
-                      <a:tailEnd type="none" w="med" len="med"/>
-                    </a:lnL>
-                    <a:lnR w="6350" cap="flat" cmpd="sng" algn="ctr">
-                      <a:solidFill>
-                        <a:srgbClr val="DCDCDC"/>
-                      </a:solidFill>
-                      <a:prstDash val="solid"/>
-                      <a:round/>
-                      <a:headEnd type="none" w="med" len="med"/>
-                      <a:tailEnd type="none" w="med" len="med"/>
-                    </a:lnR>
-                    <a:lnT w="6350" cap="flat" cmpd="sng" algn="ctr">
-                      <a:solidFill>
-                        <a:srgbClr val="DCDCDC"/>
-                      </a:solidFill>
-                      <a:prstDash val="solid"/>
-                      <a:round/>
-                      <a:headEnd type="none" w="med" len="med"/>
-                      <a:tailEnd type="none" w="med" len="med"/>
-                    </a:lnT>
-                    <a:lnB w="6350" cap="flat" cmpd="sng" algn="ctr">
-                      <a:solidFill>
-                        <a:srgbClr val="DCDCDC"/>
-                      </a:solidFill>
-                      <a:prstDash val="solid"/>
-                      <a:round/>
-                      <a:headEnd type="none" w="med" len="med"/>
-                      <a:tailEnd type="none" w="med" len="med"/>
-                    </a:lnB>
-                    <a:solidFill>
-                      <a:srgbClr val="FFFFFF"/>
-                    </a:solidFill>
-                  </a:tcPr>
-                </a:tc>
-                <a:tc>
-                  <a:txBody>
-                    <a:bodyPr/>
-                    <a:lstStyle/>
-                    <a:p>
-                      <a:pPr marL="0" indent="0" algn="l">
-                        <a:buNone/>
-                      </a:pPr>
-                      <a:r>
-                        <a:rPr lang="en-US" sz="1200" dirty="0">
-                          <a:solidFill>
-                            <a:srgbClr val="444444"/>
-                          </a:solidFill>
-                          <a:latin typeface="Arial" pitchFamily="34" charset="0"/>
-                          <a:ea typeface="Arial" pitchFamily="34" charset="-122"/>
-                          <a:cs typeface="Arial" pitchFamily="34" charset="-120"/>
-                        </a:rPr>
-                        <a:t>Fixed entailment model across all runs</a:t>
-                      </a:r>
-                      <a:endParaRPr lang="en-US" sz="1200" dirty="0">
-                        <a:latin typeface="Arial" charset="0"/>
-                        <a:ea typeface="Arial" charset="0"/>
-                        <a:cs typeface="Arial" charset="0"/>
-                      </a:endParaRPr>
-                    </a:p>
-                  </a:txBody>
-                  <a:tcPr marL="109728" marR="109728" marT="36576" marB="36576" anchor="ctr">
-                    <a:lnL w="6350" cap="flat" cmpd="sng" algn="ctr">
-                      <a:solidFill>
-                        <a:srgbClr val="DCDCDC"/>
-                      </a:solidFill>
-                      <a:prstDash val="solid"/>
-                      <a:round/>
-                      <a:headEnd type="none" w="med" len="med"/>
-                      <a:tailEnd type="none" w="med" len="med"/>
-                    </a:lnL>
-                    <a:lnR w="6350" cap="flat" cmpd="sng" algn="ctr">
-                      <a:solidFill>
-                        <a:srgbClr val="DCDCDC"/>
-                      </a:solidFill>
-                      <a:prstDash val="solid"/>
-                      <a:round/>
-                      <a:headEnd type="none" w="med" len="med"/>
-                      <a:tailEnd type="none" w="med" len="med"/>
-                    </a:lnR>
-                    <a:lnT w="6350" cap="flat" cmpd="sng" algn="ctr">
-                      <a:solidFill>
-                        <a:srgbClr val="DCDCDC"/>
-                      </a:solidFill>
-                      <a:prstDash val="solid"/>
-                      <a:round/>
-                      <a:headEnd type="none" w="med" len="med"/>
-                      <a:tailEnd type="none" w="med" len="med"/>
-                    </a:lnT>
-                    <a:lnB w="6350" cap="flat" cmpd="sng" algn="ctr">
-                      <a:solidFill>
-                        <a:srgbClr val="DCDCDC"/>
-                      </a:solidFill>
-                      <a:prstDash val="solid"/>
-                      <a:round/>
-                      <a:headEnd type="none" w="med" len="med"/>
-                      <a:tailEnd type="none" w="med" len="med"/>
-                    </a:lnB>
-                    <a:solidFill>
-                      <a:srgbClr val="FFFFFF"/>
-                    </a:solidFill>
-                  </a:tcPr>
-                </a:tc>
-                <a:tc>
-                  <a:txBody>
-                    <a:bodyPr/>
-                    <a:lstStyle/>
-                    <a:p>
-                      <a:pPr marL="0" indent="0" algn="l">
-                        <a:buNone/>
-                      </a:pPr>
-                      <a:r>
-                        <a:rPr lang="en-US" sz="1200" dirty="0">
-                          <a:solidFill>
-                            <a:srgbClr val="444444"/>
-                          </a:solidFill>
-                          <a:latin typeface="Arial" pitchFamily="34" charset="0"/>
-                          <a:ea typeface="Arial" pitchFamily="34" charset="-122"/>
-                          <a:cs typeface="Arial" pitchFamily="34" charset="-120"/>
-                        </a:rPr>
-                        <a:t>not yet run</a:t>
-                      </a:r>
-                      <a:endParaRPr lang="en-US" sz="1200" dirty="0">
-                        <a:latin typeface="Arial" charset="0"/>
-                        <a:ea typeface="Arial" charset="0"/>
-                        <a:cs typeface="Arial" charset="0"/>
-                      </a:endParaRPr>
-                    </a:p>
-                  </a:txBody>
-                  <a:tcPr marL="109728" marR="109728" marT="36576" marB="36576" anchor="ctr">
-                    <a:lnL w="6350" cap="flat" cmpd="sng" algn="ctr">
-                      <a:solidFill>
-                        <a:srgbClr val="DCDCDC"/>
-                      </a:solidFill>
-                      <a:prstDash val="solid"/>
-                      <a:round/>
-                      <a:headEnd type="none" w="med" len="med"/>
-                      <a:tailEnd type="none" w="med" len="med"/>
-                    </a:lnL>
-                    <a:lnR w="6350" cap="flat" cmpd="sng" algn="ctr">
-                      <a:solidFill>
-                        <a:srgbClr val="DCDCDC"/>
-                      </a:solidFill>
-                      <a:prstDash val="solid"/>
-                      <a:round/>
-                      <a:headEnd type="none" w="med" len="med"/>
-                      <a:tailEnd type="none" w="med" len="med"/>
-                    </a:lnR>
-                    <a:lnT w="6350" cap="flat" cmpd="sng" algn="ctr">
-                      <a:solidFill>
-                        <a:srgbClr val="DCDCDC"/>
-                      </a:solidFill>
-                      <a:prstDash val="solid"/>
-                      <a:round/>
-                      <a:headEnd type="none" w="med" len="med"/>
-                      <a:tailEnd type="none" w="med" len="med"/>
-                    </a:lnT>
-                    <a:lnB w="6350" cap="flat" cmpd="sng" algn="ctr">
-                      <a:solidFill>
-                        <a:srgbClr val="DCDCDC"/>
-                      </a:solidFill>
-                      <a:prstDash val="solid"/>
-                      <a:round/>
-                      <a:headEnd type="none" w="med" len="med"/>
-                      <a:tailEnd type="none" w="med" len="med"/>
-                    </a:lnB>
-                    <a:solidFill>
-                      <a:srgbClr val="FFFFFF"/>
-                    </a:solidFill>
-                  </a:tcPr>
-                </a:tc>
-                <a:extLst>
-                  <a:ext uri="{0D108BD9-81ED-4DB2-BD59-A6C34878D82A}">
-                    <a16:rowId xmlns:a16="http://schemas.microsoft.com/office/drawing/2014/main" val="10006"/>
-                  </a:ext>
-                </a:extLst>
-              </a:tr>
-            </a:tbl>
-          </a:graphicData>
-        </a:graphic>
-      </p:graphicFrame>
       <p:sp>
         <p:nvSpPr>
           <p:cNvPr id="25" name="Slide Number Placeholder 0"/>
@@ -16857,6 +15205,944 @@
               <a:t>14</a:t>
             </a:fld>
             <a:endParaRPr lang="en-US"/>
+          </a:p>
+        </p:txBody>
+      </p:sp>
+      <p:sp>
+        <p:nvSpPr>
+          <p:cNvPr id="26" name="p-card"/>
+          <p:cNvSpPr/>
+          <p:nvPr/>
+        </p:nvSpPr>
+        <p:spPr>
+          <a:xfrm>
+            <a:off x="548640" y="1600200"/>
+            <a:ext cx="3505200" cy="2103120"/>
+          </a:xfrm>
+          <a:prstGeom prst="rect">
+            <a:avLst/>
+          </a:prstGeom>
+          <a:solidFill>
+            <a:srgbClr val="FFFFFF"/>
+          </a:solidFill>
+          <a:ln w="9525">
+            <a:solidFill>
+              <a:srgbClr val="DCDCDC"/>
+            </a:solidFill>
+          </a:ln>
+          <a:effectLst/>
+        </p:spPr>
+        <p:style>
+          <a:lnRef idx="1">
+            <a:schemeClr val="accent1"/>
+          </a:lnRef>
+          <a:fillRef idx="3">
+            <a:schemeClr val="accent1"/>
+          </a:fillRef>
+          <a:effectRef idx="2">
+            <a:schemeClr val="accent1"/>
+          </a:effectRef>
+          <a:fontRef idx="minor">
+            <a:schemeClr val="lt1"/>
+          </a:fontRef>
+        </p:style>
+        <p:txBody>
+          <a:bodyPr rtlCol="0" anchor="ctr"/>
+          <a:lstStyle/>
+          <a:p/>
+        </p:txBody>
+      </p:sp>
+      <p:sp>
+        <p:nvSpPr>
+          <p:cNvPr id="27" name="p-edge"/>
+          <p:cNvSpPr/>
+          <p:nvPr/>
+        </p:nvSpPr>
+        <p:spPr>
+          <a:xfrm>
+            <a:off x="548640" y="1600200"/>
+            <a:ext cx="29260" cy="2103120"/>
+          </a:xfrm>
+          <a:prstGeom prst="rect">
+            <a:avLst/>
+          </a:prstGeom>
+          <a:solidFill>
+            <a:srgbClr val="E90802"/>
+          </a:solidFill>
+          <a:ln w="3175">
+            <a:solidFill>
+              <a:srgbClr val="E90802"/>
+            </a:solidFill>
+          </a:ln>
+          <a:effectLst/>
+        </p:spPr>
+        <p:style>
+          <a:lnRef idx="1">
+            <a:schemeClr val="accent1"/>
+          </a:lnRef>
+          <a:fillRef idx="3">
+            <a:schemeClr val="accent1"/>
+          </a:fillRef>
+          <a:effectRef idx="2">
+            <a:schemeClr val="accent1"/>
+          </a:effectRef>
+          <a:fontRef idx="minor">
+            <a:schemeClr val="lt1"/>
+          </a:fontRef>
+        </p:style>
+        <p:txBody>
+          <a:bodyPr rtlCol="0" anchor="ctr"/>
+          <a:lstStyle/>
+          <a:p>
+            <a:pPr algn="ctr"/>
+          </a:p>
+        </p:txBody>
+      </p:sp>
+      <p:sp>
+        <p:nvSpPr>
+          <p:cNvPr id="28" name="p-h"/>
+          <p:cNvSpPr txBox="1"/>
+          <p:nvPr/>
+        </p:nvSpPr>
+        <p:spPr>
+          <a:xfrm>
+            <a:off x="804672" y="1801368"/>
+            <a:ext cx="2993136" cy="457200"/>
+          </a:xfrm>
+          <a:prstGeom prst="rect">
+            <a:avLst/>
+          </a:prstGeom>
+          <a:noFill/>
+        </p:spPr>
+        <p:txBody>
+          <a:bodyPr wrap="square" lIns="0" rIns="0" tIns="0" bIns="0">
+            <a:spAutoFit/>
+          </a:bodyPr>
+          <a:lstStyle/>
+          <a:p>
+            <a:pPr>
+              <a:lnSpc>
+                <a:spcPct val="110000"/>
+              </a:lnSpc>
+            </a:pPr>
+            <a:r>
+              <a:rPr sz="1300" b="1">
+                <a:solidFill>
+                  <a:srgbClr val="E90802"/>
+                </a:solidFill>
+                <a:latin typeface="Arial"/>
+              </a:rPr>
+              <a:t>Faithfulness-guarded refinement</a:t>
+            </a:r>
+          </a:p>
+        </p:txBody>
+      </p:sp>
+      <p:sp>
+        <p:nvSpPr>
+          <p:cNvPr id="29" name="p-b"/>
+          <p:cNvSpPr txBox="1"/>
+          <p:nvPr/>
+        </p:nvSpPr>
+        <p:spPr>
+          <a:xfrm>
+            <a:off x="804672" y="2350008"/>
+            <a:ext cx="2993136" cy="1188719"/>
+          </a:xfrm>
+          <a:prstGeom prst="rect">
+            <a:avLst/>
+          </a:prstGeom>
+          <a:noFill/>
+        </p:spPr>
+        <p:txBody>
+          <a:bodyPr wrap="square" lIns="0" rIns="0" tIns="0" bIns="0" anchor="t">
+            <a:spAutoFit/>
+          </a:bodyPr>
+          <a:lstStyle/>
+          <a:p>
+            <a:pPr>
+              <a:lnSpc>
+                <a:spcPct val="125000"/>
+              </a:lnSpc>
+            </a:pPr>
+            <a:r>
+              <a:rPr sz="1100">
+                <a:solidFill>
+                  <a:srgbClr val="444444"/>
+                </a:solidFill>
+                <a:latin typeface="Arial"/>
+              </a:rPr>
+              <a:t>Accept a rewritten fact only when the original response entails it, checked by an NLI model.</a:t>
+            </a:r>
+          </a:p>
+          <a:p>
+            <a:pPr>
+              <a:lnSpc>
+                <a:spcPct val="125000"/>
+              </a:lnSpc>
+              <a:spcBef>
+                <a:spcPts val="600"/>
+              </a:spcBef>
+            </a:pPr>
+            <a:r>
+              <a:rPr sz="1050">
+                <a:solidFill>
+                  <a:srgbClr val="767676"/>
+                </a:solidFill>
+                <a:latin typeface="Arial"/>
+              </a:rPr>
+              <a:t>Targets the worst failure we saw: the refiner wrote “There was NO demand for gold as jewelry”, inverting the claim.</a:t>
+            </a:r>
+          </a:p>
+        </p:txBody>
+      </p:sp>
+      <p:sp>
+        <p:nvSpPr>
+          <p:cNvPr id="30" name="p-card"/>
+          <p:cNvSpPr/>
+          <p:nvPr/>
+        </p:nvSpPr>
+        <p:spPr>
+          <a:xfrm>
+            <a:off x="4328160" y="1600200"/>
+            <a:ext cx="3505200" cy="2103120"/>
+          </a:xfrm>
+          <a:prstGeom prst="rect">
+            <a:avLst/>
+          </a:prstGeom>
+          <a:solidFill>
+            <a:srgbClr val="FFFFFF"/>
+          </a:solidFill>
+          <a:ln w="9525">
+            <a:solidFill>
+              <a:srgbClr val="DCDCDC"/>
+            </a:solidFill>
+          </a:ln>
+          <a:effectLst/>
+        </p:spPr>
+        <p:style>
+          <a:lnRef idx="1">
+            <a:schemeClr val="accent1"/>
+          </a:lnRef>
+          <a:fillRef idx="3">
+            <a:schemeClr val="accent1"/>
+          </a:fillRef>
+          <a:effectRef idx="2">
+            <a:schemeClr val="accent1"/>
+          </a:effectRef>
+          <a:fontRef idx="minor">
+            <a:schemeClr val="lt1"/>
+          </a:fontRef>
+        </p:style>
+        <p:txBody>
+          <a:bodyPr rtlCol="0" anchor="ctr"/>
+          <a:lstStyle/>
+          <a:p/>
+        </p:txBody>
+      </p:sp>
+      <p:sp>
+        <p:nvSpPr>
+          <p:cNvPr id="31" name="p-h"/>
+          <p:cNvSpPr txBox="1"/>
+          <p:nvPr/>
+        </p:nvSpPr>
+        <p:spPr>
+          <a:xfrm>
+            <a:off x="4584192" y="1801368"/>
+            <a:ext cx="2993136" cy="457200"/>
+          </a:xfrm>
+          <a:prstGeom prst="rect">
+            <a:avLst/>
+          </a:prstGeom>
+          <a:noFill/>
+        </p:spPr>
+        <p:txBody>
+          <a:bodyPr wrap="square" lIns="0" rIns="0" tIns="0" bIns="0">
+            <a:spAutoFit/>
+          </a:bodyPr>
+          <a:lstStyle/>
+          <a:p>
+            <a:pPr>
+              <a:lnSpc>
+                <a:spcPct val="110000"/>
+              </a:lnSpc>
+            </a:pPr>
+            <a:r>
+              <a:rPr sz="1300" b="1">
+                <a:solidFill>
+                  <a:srgbClr val="1A1A1A"/>
+                </a:solidFill>
+                <a:latin typeface="Arial"/>
+              </a:rPr>
+              <a:t>Refine, then keep the better verdict</a:t>
+            </a:r>
+          </a:p>
+        </p:txBody>
+      </p:sp>
+      <p:sp>
+        <p:nvSpPr>
+          <p:cNvPr id="32" name="p-b"/>
+          <p:cNvSpPr txBox="1"/>
+          <p:nvPr/>
+        </p:nvSpPr>
+        <p:spPr>
+          <a:xfrm>
+            <a:off x="4584192" y="2350008"/>
+            <a:ext cx="2993136" cy="1188719"/>
+          </a:xfrm>
+          <a:prstGeom prst="rect">
+            <a:avLst/>
+          </a:prstGeom>
+          <a:noFill/>
+        </p:spPr>
+        <p:txBody>
+          <a:bodyPr wrap="square" lIns="0" rIns="0" tIns="0" bIns="0" anchor="t">
+            <a:spAutoFit/>
+          </a:bodyPr>
+          <a:lstStyle/>
+          <a:p>
+            <a:pPr>
+              <a:lnSpc>
+                <a:spcPct val="125000"/>
+              </a:lnSpc>
+            </a:pPr>
+            <a:r>
+              <a:rPr sz="1100">
+                <a:solidFill>
+                  <a:srgbClr val="444444"/>
+                </a:solidFill>
+                <a:latin typeface="Arial"/>
+              </a:rPr>
+              <a:t>Verify the original and the refined claim, and keep the refinement only when it does not turn a decided verdict into UNDECIDED.</a:t>
+            </a:r>
+          </a:p>
+          <a:p>
+            <a:pPr>
+              <a:lnSpc>
+                <a:spcPct val="125000"/>
+              </a:lnSpc>
+              <a:spcBef>
+                <a:spcPts val="600"/>
+              </a:spcBef>
+            </a:pPr>
+            <a:r>
+              <a:rPr sz="1050">
+                <a:solidFill>
+                  <a:srgbClr val="767676"/>
+                </a:solidFill>
+                <a:latin typeface="Arial"/>
+              </a:rPr>
+              <a:t>Targets the central cost we measured: undecided 146 → 185, precision −0.077.</a:t>
+            </a:r>
+          </a:p>
+        </p:txBody>
+      </p:sp>
+      <p:sp>
+        <p:nvSpPr>
+          <p:cNvPr id="33" name="p-card"/>
+          <p:cNvSpPr/>
+          <p:nvPr/>
+        </p:nvSpPr>
+        <p:spPr>
+          <a:xfrm>
+            <a:off x="8107680" y="1600200"/>
+            <a:ext cx="3505200" cy="2103120"/>
+          </a:xfrm>
+          <a:prstGeom prst="rect">
+            <a:avLst/>
+          </a:prstGeom>
+          <a:solidFill>
+            <a:srgbClr val="FFFFFF"/>
+          </a:solidFill>
+          <a:ln w="9525">
+            <a:solidFill>
+              <a:srgbClr val="DCDCDC"/>
+            </a:solidFill>
+          </a:ln>
+          <a:effectLst/>
+        </p:spPr>
+        <p:style>
+          <a:lnRef idx="1">
+            <a:schemeClr val="accent1"/>
+          </a:lnRef>
+          <a:fillRef idx="3">
+            <a:schemeClr val="accent1"/>
+          </a:fillRef>
+          <a:effectRef idx="2">
+            <a:schemeClr val="accent1"/>
+          </a:effectRef>
+          <a:fontRef idx="minor">
+            <a:schemeClr val="lt1"/>
+          </a:fontRef>
+        </p:style>
+        <p:txBody>
+          <a:bodyPr rtlCol="0" anchor="ctr"/>
+          <a:lstStyle/>
+          <a:p/>
+        </p:txBody>
+      </p:sp>
+      <p:sp>
+        <p:nvSpPr>
+          <p:cNvPr id="34" name="p-h"/>
+          <p:cNvSpPr txBox="1"/>
+          <p:nvPr/>
+        </p:nvSpPr>
+        <p:spPr>
+          <a:xfrm>
+            <a:off x="8363712" y="1801368"/>
+            <a:ext cx="2993136" cy="457200"/>
+          </a:xfrm>
+          <a:prstGeom prst="rect">
+            <a:avLst/>
+          </a:prstGeom>
+          <a:noFill/>
+        </p:spPr>
+        <p:txBody>
+          <a:bodyPr wrap="square" lIns="0" rIns="0" tIns="0" bIns="0">
+            <a:spAutoFit/>
+          </a:bodyPr>
+          <a:lstStyle/>
+          <a:p>
+            <a:pPr>
+              <a:lnSpc>
+                <a:spcPct val="110000"/>
+              </a:lnSpc>
+            </a:pPr>
+            <a:r>
+              <a:rPr sz="1300" b="1">
+                <a:solidFill>
+                  <a:srgbClr val="1A1A1A"/>
+                </a:solidFill>
+                <a:latin typeface="Arial"/>
+              </a:rPr>
+              <a:t>Evidence-conditioned refinement</a:t>
+            </a:r>
+          </a:p>
+        </p:txBody>
+      </p:sp>
+      <p:sp>
+        <p:nvSpPr>
+          <p:cNvPr id="35" name="p-b"/>
+          <p:cNvSpPr txBox="1"/>
+          <p:nvPr/>
+        </p:nvSpPr>
+        <p:spPr>
+          <a:xfrm>
+            <a:off x="8363712" y="2350008"/>
+            <a:ext cx="2993136" cy="1188719"/>
+          </a:xfrm>
+          <a:prstGeom prst="rect">
+            <a:avLst/>
+          </a:prstGeom>
+          <a:noFill/>
+        </p:spPr>
+        <p:txBody>
+          <a:bodyPr wrap="square" lIns="0" rIns="0" tIns="0" bIns="0" anchor="t">
+            <a:spAutoFit/>
+          </a:bodyPr>
+          <a:lstStyle/>
+          <a:p>
+            <a:pPr>
+              <a:lnSpc>
+                <a:spcPct val="125000"/>
+              </a:lnSpc>
+            </a:pPr>
+            <a:r>
+              <a:rPr sz="1100">
+                <a:solidFill>
+                  <a:srgbClr val="444444"/>
+                </a:solidFill>
+                <a:latin typeface="Arial"/>
+              </a:rPr>
+              <a:t>Retrieve first, then rewrite the claim against the evidence that exists, so refinement produces checkable claims.</a:t>
+            </a:r>
+          </a:p>
+          <a:p>
+            <a:pPr>
+              <a:lnSpc>
+                <a:spcPct val="125000"/>
+              </a:lnSpc>
+              <a:spcBef>
+                <a:spcPts val="600"/>
+              </a:spcBef>
+            </a:pPr>
+            <a:r>
+              <a:rPr sz="1050">
+                <a:solidFill>
+                  <a:srgbClr val="767676"/>
+                </a:solidFill>
+                <a:latin typeface="Arial"/>
+              </a:rPr>
+              <a:t>Reverses the paper's order. Targets refined claims that no single Wikipedia sentence can support.</a:t>
+            </a:r>
+          </a:p>
+        </p:txBody>
+      </p:sp>
+      <p:sp>
+        <p:nvSpPr>
+          <p:cNvPr id="36" name="p-card"/>
+          <p:cNvSpPr/>
+          <p:nvPr/>
+        </p:nvSpPr>
+        <p:spPr>
+          <a:xfrm>
+            <a:off x="548640" y="3886200"/>
+            <a:ext cx="3505200" cy="2103120"/>
+          </a:xfrm>
+          <a:prstGeom prst="rect">
+            <a:avLst/>
+          </a:prstGeom>
+          <a:solidFill>
+            <a:srgbClr val="F4F4F4"/>
+          </a:solidFill>
+          <a:ln w="9525">
+            <a:solidFill>
+              <a:srgbClr val="F4F4F4"/>
+            </a:solidFill>
+          </a:ln>
+          <a:effectLst/>
+        </p:spPr>
+        <p:style>
+          <a:lnRef idx="1">
+            <a:schemeClr val="accent1"/>
+          </a:lnRef>
+          <a:fillRef idx="3">
+            <a:schemeClr val="accent1"/>
+          </a:fillRef>
+          <a:effectRef idx="2">
+            <a:schemeClr val="accent1"/>
+          </a:effectRef>
+          <a:fontRef idx="minor">
+            <a:schemeClr val="lt1"/>
+          </a:fontRef>
+        </p:style>
+        <p:txBody>
+          <a:bodyPr rtlCol="0" anchor="ctr"/>
+          <a:lstStyle/>
+          <a:p/>
+        </p:txBody>
+      </p:sp>
+      <p:sp>
+        <p:nvSpPr>
+          <p:cNvPr id="37" name="p-h"/>
+          <p:cNvSpPr txBox="1"/>
+          <p:nvPr/>
+        </p:nvSpPr>
+        <p:spPr>
+          <a:xfrm>
+            <a:off x="804672" y="4087368"/>
+            <a:ext cx="2993136" cy="457200"/>
+          </a:xfrm>
+          <a:prstGeom prst="rect">
+            <a:avLst/>
+          </a:prstGeom>
+          <a:noFill/>
+        </p:spPr>
+        <p:txBody>
+          <a:bodyPr wrap="square" lIns="0" rIns="0" tIns="0" bIns="0">
+            <a:spAutoFit/>
+          </a:bodyPr>
+          <a:lstStyle/>
+          <a:p>
+            <a:pPr>
+              <a:lnSpc>
+                <a:spcPct val="110000"/>
+              </a:lnSpc>
+            </a:pPr>
+            <a:r>
+              <a:rPr sz="1300" b="1">
+                <a:solidFill>
+                  <a:srgbClr val="1A1A1A"/>
+                </a:solidFill>
+                <a:latin typeface="Arial"/>
+              </a:rPr>
+              <a:t>Disagreement-gated escalation</a:t>
+            </a:r>
+          </a:p>
+        </p:txBody>
+      </p:sp>
+      <p:sp>
+        <p:nvSpPr>
+          <p:cNvPr id="38" name="p-b"/>
+          <p:cNvSpPr txBox="1"/>
+          <p:nvPr/>
+        </p:nvSpPr>
+        <p:spPr>
+          <a:xfrm>
+            <a:off x="804672" y="4636008"/>
+            <a:ext cx="2993136" cy="1188719"/>
+          </a:xfrm>
+          <a:prstGeom prst="rect">
+            <a:avLst/>
+          </a:prstGeom>
+          <a:noFill/>
+        </p:spPr>
+        <p:txBody>
+          <a:bodyPr wrap="square" lIns="0" rIns="0" tIns="0" bIns="0" anchor="t">
+            <a:spAutoFit/>
+          </a:bodyPr>
+          <a:lstStyle/>
+          <a:p>
+            <a:pPr>
+              <a:lnSpc>
+                <a:spcPct val="125000"/>
+              </a:lnSpc>
+            </a:pPr>
+            <a:r>
+              <a:rPr sz="1100">
+                <a:solidFill>
+                  <a:srgbClr val="444444"/>
+                </a:solidFill>
+                <a:latin typeface="Arial"/>
+              </a:rPr>
+              <a:t>Run the small judges first and send only the facts they disagree on to a larger model.</a:t>
+            </a:r>
+          </a:p>
+          <a:p>
+            <a:pPr>
+              <a:lnSpc>
+                <a:spcPct val="125000"/>
+              </a:lnSpc>
+              <a:spcBef>
+                <a:spcPts val="600"/>
+              </a:spcBef>
+            </a:pPr>
+            <a:r>
+              <a:rPr sz="1050">
+                <a:solidFill>
+                  <a:srgbClr val="767676"/>
+                </a:solidFill>
+                <a:latin typeface="Arial"/>
+              </a:rPr>
+              <a:t>Our data says the ensemble equalled Llama on relations at every size, so most second opinions are free to skip.</a:t>
+            </a:r>
+          </a:p>
+        </p:txBody>
+      </p:sp>
+      <p:sp>
+        <p:nvSpPr>
+          <p:cNvPr id="39" name="p-card"/>
+          <p:cNvSpPr/>
+          <p:nvPr/>
+        </p:nvSpPr>
+        <p:spPr>
+          <a:xfrm>
+            <a:off x="4328160" y="3886200"/>
+            <a:ext cx="3505200" cy="2103120"/>
+          </a:xfrm>
+          <a:prstGeom prst="rect">
+            <a:avLst/>
+          </a:prstGeom>
+          <a:solidFill>
+            <a:srgbClr val="F4F4F4"/>
+          </a:solidFill>
+          <a:ln w="9525">
+            <a:solidFill>
+              <a:srgbClr val="F4F4F4"/>
+            </a:solidFill>
+          </a:ln>
+          <a:effectLst/>
+        </p:spPr>
+        <p:style>
+          <a:lnRef idx="1">
+            <a:schemeClr val="accent1"/>
+          </a:lnRef>
+          <a:fillRef idx="3">
+            <a:schemeClr val="accent1"/>
+          </a:fillRef>
+          <a:effectRef idx="2">
+            <a:schemeClr val="accent1"/>
+          </a:effectRef>
+          <a:fontRef idx="minor">
+            <a:schemeClr val="lt1"/>
+          </a:fontRef>
+        </p:style>
+        <p:txBody>
+          <a:bodyPr rtlCol="0" anchor="ctr"/>
+          <a:lstStyle/>
+          <a:p/>
+        </p:txBody>
+      </p:sp>
+      <p:sp>
+        <p:nvSpPr>
+          <p:cNvPr id="40" name="p-edge"/>
+          <p:cNvSpPr/>
+          <p:nvPr/>
+        </p:nvSpPr>
+        <p:spPr>
+          <a:xfrm>
+            <a:off x="4328160" y="3886200"/>
+            <a:ext cx="29260" cy="2103120"/>
+          </a:xfrm>
+          <a:prstGeom prst="rect">
+            <a:avLst/>
+          </a:prstGeom>
+          <a:solidFill>
+            <a:srgbClr val="E90802"/>
+          </a:solidFill>
+          <a:ln w="3175">
+            <a:solidFill>
+              <a:srgbClr val="E90802"/>
+            </a:solidFill>
+          </a:ln>
+          <a:effectLst/>
+        </p:spPr>
+        <p:style>
+          <a:lnRef idx="1">
+            <a:schemeClr val="accent1"/>
+          </a:lnRef>
+          <a:fillRef idx="3">
+            <a:schemeClr val="accent1"/>
+          </a:fillRef>
+          <a:effectRef idx="2">
+            <a:schemeClr val="accent1"/>
+          </a:effectRef>
+          <a:fontRef idx="minor">
+            <a:schemeClr val="lt1"/>
+          </a:fontRef>
+        </p:style>
+        <p:txBody>
+          <a:bodyPr rtlCol="0" anchor="ctr"/>
+          <a:lstStyle/>
+          <a:p>
+            <a:pPr algn="ctr"/>
+          </a:p>
+        </p:txBody>
+      </p:sp>
+      <p:sp>
+        <p:nvSpPr>
+          <p:cNvPr id="41" name="p-h"/>
+          <p:cNvSpPr txBox="1"/>
+          <p:nvPr/>
+        </p:nvSpPr>
+        <p:spPr>
+          <a:xfrm>
+            <a:off x="4584192" y="4087368"/>
+            <a:ext cx="2993136" cy="457200"/>
+          </a:xfrm>
+          <a:prstGeom prst="rect">
+            <a:avLst/>
+          </a:prstGeom>
+          <a:noFill/>
+        </p:spPr>
+        <p:txBody>
+          <a:bodyPr wrap="square" lIns="0" rIns="0" tIns="0" bIns="0">
+            <a:spAutoFit/>
+          </a:bodyPr>
+          <a:lstStyle/>
+          <a:p>
+            <a:pPr>
+              <a:lnSpc>
+                <a:spcPct val="110000"/>
+              </a:lnSpc>
+            </a:pPr>
+            <a:r>
+              <a:rPr sz="1300" b="1">
+                <a:solidFill>
+                  <a:srgbClr val="E90802"/>
+                </a:solidFill>
+                <a:latin typeface="Arial"/>
+              </a:rPr>
+              <a:t>Judge-normalized reporting</a:t>
+            </a:r>
+          </a:p>
+        </p:txBody>
+      </p:sp>
+      <p:sp>
+        <p:nvSpPr>
+          <p:cNvPr id="42" name="p-b"/>
+          <p:cNvSpPr txBox="1"/>
+          <p:nvPr/>
+        </p:nvSpPr>
+        <p:spPr>
+          <a:xfrm>
+            <a:off x="4584192" y="4636008"/>
+            <a:ext cx="2993136" cy="1188719"/>
+          </a:xfrm>
+          <a:prstGeom prst="rect">
+            <a:avLst/>
+          </a:prstGeom>
+          <a:noFill/>
+        </p:spPr>
+        <p:txBody>
+          <a:bodyPr wrap="square" lIns="0" rIns="0" tIns="0" bIns="0" anchor="t">
+            <a:spAutoFit/>
+          </a:bodyPr>
+          <a:lstStyle/>
+          <a:p>
+            <a:pPr>
+              <a:lnSpc>
+                <a:spcPct val="125000"/>
+              </a:lnSpc>
+            </a:pPr>
+            <a:r>
+              <a:rPr sz="1100">
+                <a:solidFill>
+                  <a:srgbClr val="444444"/>
+                </a:solidFill>
+                <a:latin typeface="Arial"/>
+              </a:rPr>
+              <a:t>Calibrate every judge on one fixed annotated probe set and report the incomplete rate relative to that anchor.</a:t>
+            </a:r>
+          </a:p>
+          <a:p>
+            <a:pPr>
+              <a:lnSpc>
+                <a:spcPct val="125000"/>
+              </a:lnSpc>
+              <a:spcBef>
+                <a:spcPts val="600"/>
+              </a:spcBef>
+            </a:pPr>
+            <a:r>
+              <a:rPr sz="1050">
+                <a:solidFill>
+                  <a:srgbClr val="767676"/>
+                </a:solidFill>
+                <a:latin typeface="Arial"/>
+              </a:rPr>
+              <a:t>Makes 0.105 and 0.438 comparable instead of incommensurable. The proposal that generalises past this paper.</a:t>
+            </a:r>
+          </a:p>
+        </p:txBody>
+      </p:sp>
+      <p:sp>
+        <p:nvSpPr>
+          <p:cNvPr id="43" name="p-card"/>
+          <p:cNvSpPr/>
+          <p:nvPr/>
+        </p:nvSpPr>
+        <p:spPr>
+          <a:xfrm>
+            <a:off x="8107680" y="3886200"/>
+            <a:ext cx="3505200" cy="2103120"/>
+          </a:xfrm>
+          <a:prstGeom prst="rect">
+            <a:avLst/>
+          </a:prstGeom>
+          <a:solidFill>
+            <a:srgbClr val="F4F4F4"/>
+          </a:solidFill>
+          <a:ln w="9525">
+            <a:solidFill>
+              <a:srgbClr val="F4F4F4"/>
+            </a:solidFill>
+          </a:ln>
+          <a:effectLst/>
+        </p:spPr>
+        <p:style>
+          <a:lnRef idx="1">
+            <a:schemeClr val="accent1"/>
+          </a:lnRef>
+          <a:fillRef idx="3">
+            <a:schemeClr val="accent1"/>
+          </a:fillRef>
+          <a:effectRef idx="2">
+            <a:schemeClr val="accent1"/>
+          </a:effectRef>
+          <a:fontRef idx="minor">
+            <a:schemeClr val="lt1"/>
+          </a:fontRef>
+        </p:style>
+        <p:txBody>
+          <a:bodyPr rtlCol="0" anchor="ctr"/>
+          <a:lstStyle/>
+          <a:p/>
+        </p:txBody>
+      </p:sp>
+      <p:sp>
+        <p:nvSpPr>
+          <p:cNvPr id="44" name="p-h"/>
+          <p:cNvSpPr txBox="1"/>
+          <p:nvPr/>
+        </p:nvSpPr>
+        <p:spPr>
+          <a:xfrm>
+            <a:off x="8363712" y="4087368"/>
+            <a:ext cx="2993136" cy="457200"/>
+          </a:xfrm>
+          <a:prstGeom prst="rect">
+            <a:avLst/>
+          </a:prstGeom>
+          <a:noFill/>
+        </p:spPr>
+        <p:txBody>
+          <a:bodyPr wrap="square" lIns="0" rIns="0" tIns="0" bIns="0">
+            <a:spAutoFit/>
+          </a:bodyPr>
+          <a:lstStyle/>
+          <a:p>
+            <a:pPr>
+              <a:lnSpc>
+                <a:spcPct val="110000"/>
+              </a:lnSpc>
+            </a:pPr>
+            <a:r>
+              <a:rPr sz="1300" b="1">
+                <a:solidFill>
+                  <a:srgbClr val="1A1A1A"/>
+                </a:solidFill>
+                <a:latin typeface="Arial"/>
+              </a:rPr>
+              <a:t>Semantic word mapping</a:t>
+            </a:r>
+          </a:p>
+        </p:txBody>
+      </p:sp>
+      <p:sp>
+        <p:nvSpPr>
+          <p:cNvPr id="45" name="p-b"/>
+          <p:cNvSpPr txBox="1"/>
+          <p:nvPr/>
+        </p:nvSpPr>
+        <p:spPr>
+          <a:xfrm>
+            <a:off x="8363712" y="4636008"/>
+            <a:ext cx="2993136" cy="1188719"/>
+          </a:xfrm>
+          <a:prstGeom prst="rect">
+            <a:avLst/>
+          </a:prstGeom>
+          <a:noFill/>
+        </p:spPr>
+        <p:txBody>
+          <a:bodyPr wrap="square" lIns="0" rIns="0" tIns="0" bIns="0" anchor="t">
+            <a:spAutoFit/>
+          </a:bodyPr>
+          <a:lstStyle/>
+          <a:p>
+            <a:pPr>
+              <a:lnSpc>
+                <a:spcPct val="125000"/>
+              </a:lnSpc>
+            </a:pPr>
+            <a:r>
+              <a:rPr sz="1100">
+                <a:solidFill>
+                  <a:srgbClr val="444444"/>
+                </a:solidFill>
+                <a:latin typeface="Arial"/>
+              </a:rPr>
+              <a:t>Replace the longest-common-substring coverage test with embedding coverage over the response.</a:t>
+            </a:r>
+          </a:p>
+          <a:p>
+            <a:pPr>
+              <a:lnSpc>
+                <a:spcPct val="125000"/>
+              </a:lnSpc>
+              <a:spcBef>
+                <a:spcPts val="600"/>
+              </a:spcBef>
+            </a:pPr>
+            <a:r>
+              <a:rPr sz="1050">
+                <a:solidFill>
+                  <a:srgbClr val="767676"/>
+                </a:solidFill>
+                <a:latin typeface="Arial"/>
+              </a:rPr>
+              <a:t>Targets a lexical blind spot: a paraphrased relation currently counts as uncovered and is re-added as a fact.</a:t>
+            </a:r>
           </a:p>
         </p:txBody>
       </p:sp>
@@ -21278,7 +20564,7 @@
           <p:nvPr>
             <p:extLst>
               <p:ext uri="{D42A27DB-BD31-4B8C-83A1-F6EECF244321}">
-                <p14:modId xmlns:p14="http://schemas.microsoft.com/office/powerpoint/2010/main" val="3244196388"/>
+                <p14:modId xmlns:p14="http://schemas.microsoft.com/office/powerpoint/2010/main" val="3753226532"/>
               </p:ext>
             </p:extLst>
           </p:nvPr>
@@ -21468,7 +20754,7 @@
                           <a:ea typeface="Arial" pitchFamily="34" charset="-122"/>
                           <a:cs typeface="Arial" pitchFamily="34" charset="-120"/>
                         </a:rPr>
-                        <a:t>VERIFACT-Lite</a:t>
+                        <a:t>Reimplementation </a:t>
                       </a:r>
                       <a:endParaRPr lang="en-US" sz="1250" dirty="0">
                         <a:latin typeface="Arial" charset="0"/>
@@ -24156,7 +23442,7 @@
                   <a:srgbClr val="E90802"/>
                 </a:solidFill>
               </a:rPr>
-              <a:t>VERIFACT-Lite — with refinement</a:t>
+              <a:t>Reimplemented Model — with refinement</a:t>
             </a:r>
             <a:endParaRPr lang="en-US" sz="1450" dirty="0"/>
           </a:p>
@@ -24751,7 +24037,29 @@
                 <a:ea typeface="Arial" pitchFamily="34" charset="-122"/>
                 <a:cs typeface="Arial" pitchFamily="34" charset="-120"/>
               </a:rPr>
-              <a:t>Baseline against VERIFACT-Lite, laptop run, Qwen2.5-3B judges</a:t>
+              <a:t>Baseline against </a:t>
+            </a:r>
+            <a:r>
+              <a:rPr lang="en-US" sz="1350" dirty="0" err="1">
+                <a:solidFill>
+                  <a:srgbClr val="767676"/>
+                </a:solidFill>
+                <a:latin typeface="Arial" pitchFamily="34" charset="0"/>
+                <a:ea typeface="Arial" pitchFamily="34" charset="-122"/>
+                <a:cs typeface="Arial" pitchFamily="34" charset="-120"/>
+              </a:rPr>
+              <a:t>Reimplemetation</a:t>
+            </a:r>
+            <a:r>
+              <a:rPr lang="en-US" sz="1350" dirty="0">
+                <a:solidFill>
+                  <a:srgbClr val="767676"/>
+                </a:solidFill>
+                <a:latin typeface="Arial" pitchFamily="34" charset="0"/>
+                <a:ea typeface="Arial" pitchFamily="34" charset="-122"/>
+                <a:cs typeface="Arial" pitchFamily="34" charset="-120"/>
+              </a:rPr>
+              <a:t>, laptop run, Qwen2.5-3B judges</a:t>
             </a:r>
             <a:endParaRPr lang="en-US" sz="1350" dirty="0"/>
           </a:p>
